--- a/交付件/模块二AI测试演示.pptx
+++ b/交付件/模块二AI测试演示.pptx
@@ -2,20 +2,25 @@
 <file path=ppt/presentation.xml><?xml version="1.0" encoding="utf-8"?>
 <p:presentation xmlns:p="http://schemas.openxmlformats.org/presentationml/2006/main">
   <p:sldMasterIdLst>
-    <p:sldMasterId xmlns:r="http://schemas.openxmlformats.org/officeDocument/2006/relationships" id="2147483648" r:id="Rde826eb79ff3467e"/>
+    <p:sldMasterId xmlns:r="http://schemas.openxmlformats.org/officeDocument/2006/relationships" id="2147483648" r:id="Re026282a86c74c01"/>
   </p:sldMasterIdLst>
   <p:notesMasterIdLst>
-    <p:notesMasterId xmlns:r="http://schemas.openxmlformats.org/officeDocument/2006/relationships" r:id="R07e87efd9c5048dc"/>
+    <p:notesMasterId xmlns:r="http://schemas.openxmlformats.org/officeDocument/2006/relationships" r:id="Rf133c7e2c18748e7"/>
   </p:notesMasterIdLst>
   <p:sldIdLst>
-    <p:sldId xmlns:r="http://schemas.openxmlformats.org/officeDocument/2006/relationships" id="256" r:id="R59109a6b94864747"/>
-    <p:sldId xmlns:r="http://schemas.openxmlformats.org/officeDocument/2006/relationships" id="257" r:id="R789953731bad4802"/>
-    <p:sldId xmlns:r="http://schemas.openxmlformats.org/officeDocument/2006/relationships" id="258" r:id="R3520547ebaf04bbe"/>
-    <p:sldId xmlns:r="http://schemas.openxmlformats.org/officeDocument/2006/relationships" id="259" r:id="Rab26c493d2504ce7"/>
-    <p:sldId xmlns:r="http://schemas.openxmlformats.org/officeDocument/2006/relationships" id="260" r:id="R8cf4c1fe833b4c54"/>
-    <p:sldId xmlns:r="http://schemas.openxmlformats.org/officeDocument/2006/relationships" id="261" r:id="R5a3387a3d64a48e8"/>
-    <p:sldId xmlns:r="http://schemas.openxmlformats.org/officeDocument/2006/relationships" id="262" r:id="Rf182a490050b4170"/>
-    <p:sldId xmlns:r="http://schemas.openxmlformats.org/officeDocument/2006/relationships" id="263" r:id="R6d1b6c2220554b6f"/>
+    <p:sldId xmlns:r="http://schemas.openxmlformats.org/officeDocument/2006/relationships" id="256" r:id="R305fc52c8d154b9c"/>
+    <p:sldId xmlns:r="http://schemas.openxmlformats.org/officeDocument/2006/relationships" id="257" r:id="R0526d78b2d1344fb"/>
+    <p:sldId xmlns:r="http://schemas.openxmlformats.org/officeDocument/2006/relationships" id="258" r:id="R9565fa3159df4801"/>
+    <p:sldId xmlns:r="http://schemas.openxmlformats.org/officeDocument/2006/relationships" id="259" r:id="R815df74e15424e96"/>
+    <p:sldId xmlns:r="http://schemas.openxmlformats.org/officeDocument/2006/relationships" id="260" r:id="Reff5ec4c39a84d12"/>
+    <p:sldId xmlns:r="http://schemas.openxmlformats.org/officeDocument/2006/relationships" id="261" r:id="Rf06f66e3f4334350"/>
+    <p:sldId xmlns:r="http://schemas.openxmlformats.org/officeDocument/2006/relationships" id="262" r:id="Rce44fe79d7d04bb6"/>
+    <p:sldId xmlns:r="http://schemas.openxmlformats.org/officeDocument/2006/relationships" id="263" r:id="R66f8472fde224550"/>
+    <p:sldId xmlns:r="http://schemas.openxmlformats.org/officeDocument/2006/relationships" id="264" r:id="R5aea925492bc4dc2"/>
+    <p:sldId xmlns:r="http://schemas.openxmlformats.org/officeDocument/2006/relationships" id="265" r:id="R49c876e2aa0d4220"/>
+    <p:sldId xmlns:r="http://schemas.openxmlformats.org/officeDocument/2006/relationships" id="266" r:id="R1e64dd06c0ae4580"/>
+    <p:sldId xmlns:r="http://schemas.openxmlformats.org/officeDocument/2006/relationships" id="267" r:id="R3ff4fff38ba14648"/>
+    <p:sldId xmlns:r="http://schemas.openxmlformats.org/officeDocument/2006/relationships" id="268" r:id="R38df3a26946649de"/>
   </p:sldIdLst>
   <p:sldSz cx="12192000" cy="6858000"/>
   <p:notesSz cx="6858000" cy="9144000"/>
@@ -479,6 +484,286 @@
 </p:notes>
 </file>
 
+<file path=ppt/notesSlides/notesSlide10.xml><?xml version="1.0" encoding="utf-8"?>
+<p:notes xmlns:p="http://schemas.openxmlformats.org/presentationml/2006/main">
+  <p:cSld>
+    <p:spTree>
+      <p:nvGrpSpPr>
+        <p:cNvPr id="1" name=""/>
+        <p:cNvGrpSpPr/>
+        <p:nvPr/>
+      </p:nvGrpSpPr>
+      <p:grpSpPr>
+        <a:xfrm xmlns:a="http://schemas.openxmlformats.org/drawingml/2006/main"/>
+      </p:grpSpPr>
+      <p:sp>
+        <p:nvSpPr>
+          <p:cNvPr id="2" name="Slide Image Placeholder 1"/>
+          <p:cNvSpPr>
+            <a:spLocks xmlns:a="http://schemas.openxmlformats.org/drawingml/2006/main" noGrp="1"/>
+          </p:cNvSpPr>
+          <p:nvPr>
+            <p:ph type="sldImg" idx="0"/>
+          </p:nvPr>
+        </p:nvSpPr>
+        <p:spPr/>
+      </p:sp>
+      <p:sp>
+        <p:nvSpPr>
+          <p:cNvPr id="3" name="Notes Placeholder 2"/>
+          <p:cNvSpPr>
+            <a:spLocks xmlns:a="http://schemas.openxmlformats.org/drawingml/2006/main" noGrp="1"/>
+          </p:cNvSpPr>
+          <p:nvPr>
+            <p:ph type="body" idx="1"/>
+          </p:nvPr>
+        </p:nvSpPr>
+        <p:spPr/>
+        <p:txBody>
+          <a:bodyPr xmlns:a="http://schemas.openxmlformats.org/drawingml/2006/main"/>
+          <a:lstStyle xmlns:a="http://schemas.openxmlformats.org/drawingml/2006/main"/>
+          <a:p xmlns:a="http://schemas.openxmlformats.org/drawingml/2006/main">
+            <a:r>
+              <a:t>只展示 lcx 负责的 8 条用例及完整门槛结果。</a:t>
+            </a:r>
+          </a:p>
+        </p:txBody>
+      </p:sp>
+      <p:sp>
+        <p:nvSpPr>
+          <p:cNvPr id="4" name="Slide Number Placeholder 3"/>
+          <p:cNvSpPr>
+            <a:spLocks xmlns:a="http://schemas.openxmlformats.org/drawingml/2006/main" noGrp="1"/>
+          </p:cNvSpPr>
+          <p:nvPr>
+            <p:ph type="sldNum" idx="5"/>
+          </p:nvPr>
+        </p:nvSpPr>
+        <p:spPr/>
+        <p:txBody>
+          <a:bodyPr xmlns:a="http://schemas.openxmlformats.org/drawingml/2006/main"/>
+          <a:lstStyle xmlns:a="http://schemas.openxmlformats.org/drawingml/2006/main"/>
+          <a:p xmlns:a="http://schemas.openxmlformats.org/drawingml/2006/main"/>
+        </p:txBody>
+      </p:sp>
+    </p:spTree>
+  </p:cSld>
+  <p:clrMapOvr>
+    <a:masterClrMapping xmlns:a="http://schemas.openxmlformats.org/drawingml/2006/main"/>
+  </p:clrMapOvr>
+</p:notes>
+</file>
+
+<file path=ppt/notesSlides/notesSlide11.xml><?xml version="1.0" encoding="utf-8"?>
+<p:notes xmlns:p="http://schemas.openxmlformats.org/presentationml/2006/main">
+  <p:cSld>
+    <p:spTree>
+      <p:nvGrpSpPr>
+        <p:cNvPr id="1" name=""/>
+        <p:cNvGrpSpPr/>
+        <p:nvPr/>
+      </p:nvGrpSpPr>
+      <p:grpSpPr>
+        <a:xfrm xmlns:a="http://schemas.openxmlformats.org/drawingml/2006/main"/>
+      </p:grpSpPr>
+      <p:sp>
+        <p:nvSpPr>
+          <p:cNvPr id="2" name="Slide Image Placeholder 1"/>
+          <p:cNvSpPr>
+            <a:spLocks xmlns:a="http://schemas.openxmlformats.org/drawingml/2006/main" noGrp="1"/>
+          </p:cNvSpPr>
+          <p:nvPr>
+            <p:ph type="sldImg" idx="0"/>
+          </p:nvPr>
+        </p:nvSpPr>
+        <p:spPr/>
+      </p:sp>
+      <p:sp>
+        <p:nvSpPr>
+          <p:cNvPr id="3" name="Notes Placeholder 2"/>
+          <p:cNvSpPr>
+            <a:spLocks xmlns:a="http://schemas.openxmlformats.org/drawingml/2006/main" noGrp="1"/>
+          </p:cNvSpPr>
+          <p:nvPr>
+            <p:ph type="body" idx="1"/>
+          </p:nvPr>
+        </p:nvSpPr>
+        <p:spPr/>
+        <p:txBody>
+          <a:bodyPr xmlns:a="http://schemas.openxmlformats.org/drawingml/2006/main"/>
+          <a:lstStyle xmlns:a="http://schemas.openxmlformats.org/drawingml/2006/main"/>
+          <a:p xmlns:a="http://schemas.openxmlformats.org/drawingml/2006/main">
+            <a:r>
+              <a:t>缺陷页仅报告 lcx 负责范围，并区分已修复框架缺陷与未修复模型问题。</a:t>
+            </a:r>
+          </a:p>
+        </p:txBody>
+      </p:sp>
+      <p:sp>
+        <p:nvSpPr>
+          <p:cNvPr id="4" name="Slide Number Placeholder 3"/>
+          <p:cNvSpPr>
+            <a:spLocks xmlns:a="http://schemas.openxmlformats.org/drawingml/2006/main" noGrp="1"/>
+          </p:cNvSpPr>
+          <p:nvPr>
+            <p:ph type="sldNum" idx="5"/>
+          </p:nvPr>
+        </p:nvSpPr>
+        <p:spPr/>
+        <p:txBody>
+          <a:bodyPr xmlns:a="http://schemas.openxmlformats.org/drawingml/2006/main"/>
+          <a:lstStyle xmlns:a="http://schemas.openxmlformats.org/drawingml/2006/main"/>
+          <a:p xmlns:a="http://schemas.openxmlformats.org/drawingml/2006/main"/>
+        </p:txBody>
+      </p:sp>
+    </p:spTree>
+  </p:cSld>
+  <p:clrMapOvr>
+    <a:masterClrMapping xmlns:a="http://schemas.openxmlformats.org/drawingml/2006/main"/>
+  </p:clrMapOvr>
+</p:notes>
+</file>
+
+<file path=ppt/notesSlides/notesSlide12.xml><?xml version="1.0" encoding="utf-8"?>
+<p:notes xmlns:p="http://schemas.openxmlformats.org/presentationml/2006/main">
+  <p:cSld>
+    <p:spTree>
+      <p:nvGrpSpPr>
+        <p:cNvPr id="1" name=""/>
+        <p:cNvGrpSpPr/>
+        <p:nvPr/>
+      </p:nvGrpSpPr>
+      <p:grpSpPr>
+        <a:xfrm xmlns:a="http://schemas.openxmlformats.org/drawingml/2006/main"/>
+      </p:grpSpPr>
+      <p:sp>
+        <p:nvSpPr>
+          <p:cNvPr id="2" name="Slide Image Placeholder 1"/>
+          <p:cNvSpPr>
+            <a:spLocks xmlns:a="http://schemas.openxmlformats.org/drawingml/2006/main" noGrp="1"/>
+          </p:cNvSpPr>
+          <p:nvPr>
+            <p:ph type="sldImg" idx="0"/>
+          </p:nvPr>
+        </p:nvSpPr>
+        <p:spPr/>
+      </p:sp>
+      <p:sp>
+        <p:nvSpPr>
+          <p:cNvPr id="3" name="Notes Placeholder 2"/>
+          <p:cNvSpPr>
+            <a:spLocks xmlns:a="http://schemas.openxmlformats.org/drawingml/2006/main" noGrp="1"/>
+          </p:cNvSpPr>
+          <p:nvPr>
+            <p:ph type="body" idx="1"/>
+          </p:nvPr>
+        </p:nvSpPr>
+        <p:spPr/>
+        <p:txBody>
+          <a:bodyPr xmlns:a="http://schemas.openxmlformats.org/drawingml/2006/main"/>
+          <a:lstStyle xmlns:a="http://schemas.openxmlformats.org/drawingml/2006/main"/>
+          <a:p xmlns:a="http://schemas.openxmlformats.org/drawingml/2006/main">
+            <a:r>
+              <a:t>演示时只需运行一条冒烟用例并打开已封存的正式摘要，避免现场长时间加载全部矩阵。</a:t>
+            </a:r>
+          </a:p>
+        </p:txBody>
+      </p:sp>
+      <p:sp>
+        <p:nvSpPr>
+          <p:cNvPr id="4" name="Slide Number Placeholder 3"/>
+          <p:cNvSpPr>
+            <a:spLocks xmlns:a="http://schemas.openxmlformats.org/drawingml/2006/main" noGrp="1"/>
+          </p:cNvSpPr>
+          <p:nvPr>
+            <p:ph type="sldNum" idx="5"/>
+          </p:nvPr>
+        </p:nvSpPr>
+        <p:spPr/>
+        <p:txBody>
+          <a:bodyPr xmlns:a="http://schemas.openxmlformats.org/drawingml/2006/main"/>
+          <a:lstStyle xmlns:a="http://schemas.openxmlformats.org/drawingml/2006/main"/>
+          <a:p xmlns:a="http://schemas.openxmlformats.org/drawingml/2006/main"/>
+        </p:txBody>
+      </p:sp>
+    </p:spTree>
+  </p:cSld>
+  <p:clrMapOvr>
+    <a:masterClrMapping xmlns:a="http://schemas.openxmlformats.org/drawingml/2006/main"/>
+  </p:clrMapOvr>
+</p:notes>
+</file>
+
+<file path=ppt/notesSlides/notesSlide13.xml><?xml version="1.0" encoding="utf-8"?>
+<p:notes xmlns:p="http://schemas.openxmlformats.org/presentationml/2006/main">
+  <p:cSld>
+    <p:spTree>
+      <p:nvGrpSpPr>
+        <p:cNvPr id="1" name=""/>
+        <p:cNvGrpSpPr/>
+        <p:nvPr/>
+      </p:nvGrpSpPr>
+      <p:grpSpPr>
+        <a:xfrm xmlns:a="http://schemas.openxmlformats.org/drawingml/2006/main"/>
+      </p:grpSpPr>
+      <p:sp>
+        <p:nvSpPr>
+          <p:cNvPr id="2" name="Slide Image Placeholder 1"/>
+          <p:cNvSpPr>
+            <a:spLocks xmlns:a="http://schemas.openxmlformats.org/drawingml/2006/main" noGrp="1"/>
+          </p:cNvSpPr>
+          <p:nvPr>
+            <p:ph type="sldImg" idx="0"/>
+          </p:nvPr>
+        </p:nvSpPr>
+        <p:spPr/>
+      </p:sp>
+      <p:sp>
+        <p:nvSpPr>
+          <p:cNvPr id="3" name="Notes Placeholder 2"/>
+          <p:cNvSpPr>
+            <a:spLocks xmlns:a="http://schemas.openxmlformats.org/drawingml/2006/main" noGrp="1"/>
+          </p:cNvSpPr>
+          <p:nvPr>
+            <p:ph type="body" idx="1"/>
+          </p:nvPr>
+        </p:nvSpPr>
+        <p:spPr/>
+        <p:txBody>
+          <a:bodyPr xmlns:a="http://schemas.openxmlformats.org/drawingml/2006/main"/>
+          <a:lstStyle xmlns:a="http://schemas.openxmlformats.org/drawingml/2006/main"/>
+          <a:p xmlns:a="http://schemas.openxmlformats.org/drawingml/2006/main">
+            <a:r>
+              <a:t>以事实结论结束：证据链完整，性能目标未达到，公开基准仍待补充。</a:t>
+            </a:r>
+          </a:p>
+        </p:txBody>
+      </p:sp>
+      <p:sp>
+        <p:nvSpPr>
+          <p:cNvPr id="4" name="Slide Number Placeholder 3"/>
+          <p:cNvSpPr>
+            <a:spLocks xmlns:a="http://schemas.openxmlformats.org/drawingml/2006/main" noGrp="1"/>
+          </p:cNvSpPr>
+          <p:nvPr>
+            <p:ph type="sldNum" idx="5"/>
+          </p:nvPr>
+        </p:nvSpPr>
+        <p:spPr/>
+        <p:txBody>
+          <a:bodyPr xmlns:a="http://schemas.openxmlformats.org/drawingml/2006/main"/>
+          <a:lstStyle xmlns:a="http://schemas.openxmlformats.org/drawingml/2006/main"/>
+          <a:p xmlns:a="http://schemas.openxmlformats.org/drawingml/2006/main"/>
+        </p:txBody>
+      </p:sp>
+    </p:spTree>
+  </p:cSld>
+  <p:clrMapOvr>
+    <a:masterClrMapping xmlns:a="http://schemas.openxmlformats.org/drawingml/2006/main"/>
+  </p:clrMapOvr>
+</p:notes>
+</file>
+
 <file path=ppt/notesSlides/notesSlide2.xml><?xml version="1.0" encoding="utf-8"?>
 <p:notes xmlns:p="http://schemas.openxmlformats.org/presentationml/2006/main">
   <p:cSld>
@@ -940,6 +1225,76 @@
           <a:p xmlns:a="http://schemas.openxmlformats.org/drawingml/2006/main">
             <a:r>
               <a:t>总结 AI 辅助的价值与边界。两位成员按真实产出各占 50%。当前版本作为可审计原型保留，不应宣称已达到论文加速目标。讲解约 45 秒。</a:t>
+            </a:r>
+          </a:p>
+        </p:txBody>
+      </p:sp>
+      <p:sp>
+        <p:nvSpPr>
+          <p:cNvPr id="4" name="Slide Number Placeholder 3"/>
+          <p:cNvSpPr>
+            <a:spLocks xmlns:a="http://schemas.openxmlformats.org/drawingml/2006/main" noGrp="1"/>
+          </p:cNvSpPr>
+          <p:nvPr>
+            <p:ph type="sldNum" idx="5"/>
+          </p:nvPr>
+        </p:nvSpPr>
+        <p:spPr/>
+        <p:txBody>
+          <a:bodyPr xmlns:a="http://schemas.openxmlformats.org/drawingml/2006/main"/>
+          <a:lstStyle xmlns:a="http://schemas.openxmlformats.org/drawingml/2006/main"/>
+          <a:p xmlns:a="http://schemas.openxmlformats.org/drawingml/2006/main"/>
+        </p:txBody>
+      </p:sp>
+    </p:spTree>
+  </p:cSld>
+  <p:clrMapOvr>
+    <a:masterClrMapping xmlns:a="http://schemas.openxmlformats.org/drawingml/2006/main"/>
+  </p:clrMapOvr>
+</p:notes>
+</file>
+
+<file path=ppt/notesSlides/notesSlide9.xml><?xml version="1.0" encoding="utf-8"?>
+<p:notes xmlns:p="http://schemas.openxmlformats.org/presentationml/2006/main">
+  <p:cSld>
+    <p:spTree>
+      <p:nvGrpSpPr>
+        <p:cNvPr id="1" name=""/>
+        <p:cNvGrpSpPr/>
+        <p:nvPr/>
+      </p:nvGrpSpPr>
+      <p:grpSpPr>
+        <a:xfrm xmlns:a="http://schemas.openxmlformats.org/drawingml/2006/main"/>
+      </p:grpSpPr>
+      <p:sp>
+        <p:nvSpPr>
+          <p:cNvPr id="2" name="Slide Image Placeholder 1"/>
+          <p:cNvSpPr>
+            <a:spLocks xmlns:a="http://schemas.openxmlformats.org/drawingml/2006/main" noGrp="1"/>
+          </p:cNvSpPr>
+          <p:nvPr>
+            <p:ph type="sldImg" idx="0"/>
+          </p:nvPr>
+        </p:nvSpPr>
+        <p:spPr/>
+      </p:sp>
+      <p:sp>
+        <p:nvSpPr>
+          <p:cNvPr id="3" name="Notes Placeholder 2"/>
+          <p:cNvSpPr>
+            <a:spLocks xmlns:a="http://schemas.openxmlformats.org/drawingml/2006/main" noGrp="1"/>
+          </p:cNvSpPr>
+          <p:nvPr>
+            <p:ph type="body" idx="1"/>
+          </p:nvPr>
+        </p:nvSpPr>
+        <p:spPr/>
+        <p:txBody>
+          <a:bodyPr xmlns:a="http://schemas.openxmlformats.org/drawingml/2006/main"/>
+          <a:lstStyle xmlns:a="http://schemas.openxmlformats.org/drawingml/2006/main"/>
+          <a:p xmlns:a="http://schemas.openxmlformats.org/drawingml/2006/main">
+            <a:r>
+              <a:t>说明交付件内新增的自动化测试入口和证据输出位置。</a:t>
             </a:r>
           </a:p>
         </p:txBody>
@@ -1007,7 +1362,7 @@
   </p:cSld>
   <p:clrMap bg1="lt1" tx1="dk1" bg2="lt2" tx2="dk2" accent1="accent1" accent2="accent2" accent3="accent3" accent4="accent4" accent5="accent5" accent6="accent6" hlink="hlink" folHlink="folHlink"/>
   <p:sldLayoutIdLst>
-    <p:sldLayoutId xmlns:r="http://schemas.openxmlformats.org/officeDocument/2006/relationships" id="2147483649" r:id="R4ea9fee1488a40be"/>
+    <p:sldLayoutId xmlns:r="http://schemas.openxmlformats.org/officeDocument/2006/relationships" id="2147483649" r:id="Rbdf2f994bf9d43ec"/>
   </p:sldLayoutIdLst>
   <p:txStyles>
     <p:titleStyle>
@@ -2075,6 +2430,7 @@
           <a:lstStyle xmlns:a="http://schemas.openxmlformats.org/drawingml/2006/main"/>
           <a:p xmlns:a="http://schemas.openxmlformats.org/drawingml/2006/main">
             <a:pPr algn="l">
+              <a:buNone/>
               <a:defRPr sz="1050" b="1">
                 <a:solidFill>
                   <a:srgbClr val="86E4DF"/>
@@ -2132,6 +2488,7 @@
           <a:lstStyle xmlns:a="http://schemas.openxmlformats.org/drawingml/2006/main"/>
           <a:p xmlns:a="http://schemas.openxmlformats.org/drawingml/2006/main">
             <a:pPr algn="l">
+              <a:buNone/>
               <a:defRPr sz="3600" b="1">
                 <a:solidFill>
                   <a:srgbClr val="FFFFFF"/>
@@ -2155,6 +2512,7 @@
           </a:p>
           <a:p xmlns:a="http://schemas.openxmlformats.org/drawingml/2006/main">
             <a:pPr algn="l">
+              <a:buNone/>
               <a:defRPr sz="3600" b="1">
                 <a:solidFill>
                   <a:srgbClr val="FFFFFF"/>
@@ -2212,6 +2570,7 @@
           <a:lstStyle xmlns:a="http://schemas.openxmlformats.org/drawingml/2006/main"/>
           <a:p xmlns:a="http://schemas.openxmlformats.org/drawingml/2006/main">
             <a:pPr algn="l">
+              <a:buNone/>
               <a:defRPr sz="1650" b="0">
                 <a:solidFill>
                   <a:srgbClr val="C9D8E2"/>
@@ -2300,6 +2659,7 @@
           <a:lstStyle xmlns:a="http://schemas.openxmlformats.org/drawingml/2006/main"/>
           <a:p xmlns:a="http://schemas.openxmlformats.org/drawingml/2006/main">
             <a:pPr algn="l">
+              <a:buNone/>
               <a:defRPr sz="2850" b="1">
                 <a:solidFill>
                   <a:srgbClr val="FFFFFF"/>
@@ -2357,6 +2717,7 @@
           <a:lstStyle xmlns:a="http://schemas.openxmlformats.org/drawingml/2006/main"/>
           <a:p xmlns:a="http://schemas.openxmlformats.org/drawingml/2006/main">
             <a:pPr algn="l">
+              <a:buNone/>
               <a:defRPr sz="1125" b="0">
                 <a:solidFill>
                   <a:srgbClr val="AFC0CD"/>
@@ -2414,6 +2775,7 @@
           <a:lstStyle xmlns:a="http://schemas.openxmlformats.org/drawingml/2006/main"/>
           <a:p xmlns:a="http://schemas.openxmlformats.org/drawingml/2006/main">
             <a:pPr algn="l">
+              <a:buNone/>
               <a:defRPr sz="2850" b="1">
                 <a:solidFill>
                   <a:srgbClr val="FFFFFF"/>
@@ -2471,6 +2833,7 @@
           <a:lstStyle xmlns:a="http://schemas.openxmlformats.org/drawingml/2006/main"/>
           <a:p xmlns:a="http://schemas.openxmlformats.org/drawingml/2006/main">
             <a:pPr algn="l">
+              <a:buNone/>
               <a:defRPr sz="1125" b="0">
                 <a:solidFill>
                   <a:srgbClr val="AFC0CD"/>
@@ -2528,6 +2891,7 @@
           <a:lstStyle xmlns:a="http://schemas.openxmlformats.org/drawingml/2006/main"/>
           <a:p xmlns:a="http://schemas.openxmlformats.org/drawingml/2006/main">
             <a:pPr algn="l">
+              <a:buNone/>
               <a:defRPr sz="2850" b="1">
                 <a:solidFill>
                   <a:srgbClr val="FFFFFF"/>
@@ -2585,6 +2949,7 @@
           <a:lstStyle xmlns:a="http://schemas.openxmlformats.org/drawingml/2006/main"/>
           <a:p xmlns:a="http://schemas.openxmlformats.org/drawingml/2006/main">
             <a:pPr algn="l">
+              <a:buNone/>
               <a:defRPr sz="1125" b="0">
                 <a:solidFill>
                   <a:srgbClr val="AFC0CD"/>
@@ -2642,6 +3007,7 @@
           <a:lstStyle xmlns:a="http://schemas.openxmlformats.org/drawingml/2006/main"/>
           <a:p xmlns:a="http://schemas.openxmlformats.org/drawingml/2006/main">
             <a:pPr algn="l">
+              <a:buNone/>
               <a:defRPr sz="2850" b="1">
                 <a:solidFill>
                   <a:srgbClr val="FF9B94"/>
@@ -2699,6 +3065,7 @@
           <a:lstStyle xmlns:a="http://schemas.openxmlformats.org/drawingml/2006/main"/>
           <a:p xmlns:a="http://schemas.openxmlformats.org/drawingml/2006/main">
             <a:pPr algn="l">
+              <a:buNone/>
               <a:defRPr sz="1125" b="0">
                 <a:solidFill>
                   <a:srgbClr val="AFC0CD"/>
@@ -2756,6 +3123,7 @@
           <a:lstStyle xmlns:a="http://schemas.openxmlformats.org/drawingml/2006/main"/>
           <a:p xmlns:a="http://schemas.openxmlformats.org/drawingml/2006/main">
             <a:pPr algn="l">
+              <a:buNone/>
               <a:defRPr sz="1350" b="0">
                 <a:solidFill>
                   <a:srgbClr val="86E4DF"/>
@@ -2813,6 +3181,7 @@
           <a:lstStyle xmlns:a="http://schemas.openxmlformats.org/drawingml/2006/main"/>
           <a:p xmlns:a="http://schemas.openxmlformats.org/drawingml/2006/main">
             <a:pPr algn="l">
+              <a:buNone/>
               <a:defRPr sz="750" b="0">
                 <a:solidFill>
                   <a:srgbClr val="AFC0CD"/>
@@ -2840,6 +3209,4802 @@
     <p:extLst>
       <p:ext uri="{BB962C8B-B14F-4D97-AF65-F5344CB8AC3E}">
         <p14:creationId xmlns:p14="http://schemas.microsoft.com/office/powerpoint/2010/main" val="1741082150"/>
+      </p:ext>
+    </p:extLst>
+  </p:cSld>
+</p:sld>
+</file>
+
+<file path=ppt/slides/slide10.xml><?xml version="1.0" encoding="utf-8"?>
+<p:sld xmlns:p="http://schemas.openxmlformats.org/presentationml/2006/main">
+  <p:cSld>
+    <p:bg>
+      <p:bgPr>
+        <a:solidFill xmlns:a="http://schemas.openxmlformats.org/drawingml/2006/main">
+          <a:srgbClr val="FFFFFF"/>
+        </a:solidFill>
+      </p:bgPr>
+    </p:bg>
+    <p:spTree>
+      <p:nvGrpSpPr>
+        <p:cNvPr id="1" name=""/>
+        <p:cNvGrpSpPr/>
+        <p:nvPr/>
+      </p:nvGrpSpPr>
+      <p:grpSpPr>
+        <a:xfrm xmlns:a="http://schemas.openxmlformats.org/drawingml/2006/main"/>
+      </p:grpSpPr>
+      <p:sp>
+        <p:nvSpPr>
+          <p:cNvPr id="32" name="">
+            <a:extLst xmlns:a="http://schemas.openxmlformats.org/drawingml/2006/main">
+              <a:ext uri="{FF2B5EF4-FFF2-40B4-BE49-F238E27FC236}">
+                <a16:creationId xmlns:a16="http://schemas.microsoft.com/office/drawing/2014/main" id="{CCB9DA6C-F370-4135-9318-F3F844499CBA}"/>
+              </a:ext>
+            </a:extLst>
+          </p:cNvPr>
+          <p:cNvSpPr>
+            <a:spLocks xmlns:a="http://schemas.openxmlformats.org/drawingml/2006/main" noGrp="1"/>
+          </p:cNvSpPr>
+          <p:nvPr/>
+        </p:nvSpPr>
+        <p:spPr>
+          <a:xfrm xmlns:a="http://schemas.openxmlformats.org/drawingml/2006/main">
+            <a:off x="685800" y="304800"/>
+            <a:ext cx="3429000" cy="285750"/>
+          </a:xfrm>
+          <a:prstGeom xmlns:a="http://schemas.openxmlformats.org/drawingml/2006/main" prst="rect">
+            <a:avLst/>
+          </a:prstGeom>
+          <a:noFill xmlns:a="http://schemas.openxmlformats.org/drawingml/2006/main"/>
+          <a:ln xmlns:a="http://schemas.openxmlformats.org/drawingml/2006/main" w="0">
+            <a:noFill/>
+          </a:ln>
+        </p:spPr>
+        <p:txBody>
+          <a:bodyPr xmlns:a="http://schemas.openxmlformats.org/drawingml/2006/main" anchor="ctr">
+            <a:normAutofit fontScale="100000"/>
+          </a:bodyPr>
+          <a:lstStyle xmlns:a="http://schemas.openxmlformats.org/drawingml/2006/main"/>
+          <a:p xmlns:a="http://schemas.openxmlformats.org/drawingml/2006/main">
+            <a:pPr>
+              <a:defRPr sz="1125" b="1">
+                <a:solidFill>
+                  <a:srgbClr val="2FA6A4"/>
+                </a:solidFill>
+                <a:latin typeface="Microsoft YaHei"/>
+                <a:ea typeface="Microsoft YaHei"/>
+                <a:cs typeface="Microsoft YaHei"/>
+              </a:defRPr>
+            </a:pPr>
+            <a:r>
+              <a:rPr sz="1125" b="1">
+                <a:solidFill>
+                  <a:srgbClr val="2FA6A4"/>
+                </a:solidFill>
+                <a:latin typeface="Microsoft YaHei"/>
+                <a:ea typeface="Microsoft YaHei"/>
+                <a:cs typeface="Microsoft YaHei"/>
+              </a:rPr>
+              <a:t>09  LCX RESULTS</a:t>
+            </a:r>
+          </a:p>
+        </p:txBody>
+      </p:sp>
+      <p:sp>
+        <p:nvSpPr>
+          <p:cNvPr id="2" name="">
+            <a:extLst xmlns:a="http://schemas.openxmlformats.org/drawingml/2006/main">
+              <a:ext uri="{FF2B5EF4-FFF2-40B4-BE49-F238E27FC236}">
+                <a16:creationId xmlns:a16="http://schemas.microsoft.com/office/drawing/2014/main" id="{5C4EA231-D390-4B16-992F-D4F34F0F068E}"/>
+              </a:ext>
+            </a:extLst>
+          </p:cNvPr>
+          <p:cNvSpPr>
+            <a:spLocks xmlns:a="http://schemas.openxmlformats.org/drawingml/2006/main" noGrp="1"/>
+          </p:cNvSpPr>
+          <p:nvPr/>
+        </p:nvSpPr>
+        <p:spPr>
+          <a:xfrm xmlns:a="http://schemas.openxmlformats.org/drawingml/2006/main">
+            <a:off x="685800" y="647700"/>
+            <a:ext cx="10001250" cy="552450"/>
+          </a:xfrm>
+          <a:prstGeom xmlns:a="http://schemas.openxmlformats.org/drawingml/2006/main" prst="rect">
+            <a:avLst/>
+          </a:prstGeom>
+          <a:noFill xmlns:a="http://schemas.openxmlformats.org/drawingml/2006/main"/>
+          <a:ln xmlns:a="http://schemas.openxmlformats.org/drawingml/2006/main" w="0">
+            <a:noFill/>
+          </a:ln>
+        </p:spPr>
+        <p:txBody>
+          <a:bodyPr xmlns:a="http://schemas.openxmlformats.org/drawingml/2006/main" anchor="ctr">
+            <a:normAutofit fontScale="100000"/>
+          </a:bodyPr>
+          <a:lstStyle xmlns:a="http://schemas.openxmlformats.org/drawingml/2006/main"/>
+          <a:p xmlns:a="http://schemas.openxmlformats.org/drawingml/2006/main">
+            <a:pPr>
+              <a:defRPr sz="2700" b="1">
+                <a:solidFill>
+                  <a:srgbClr val="193650"/>
+                </a:solidFill>
+                <a:latin typeface="Microsoft YaHei"/>
+                <a:ea typeface="Microsoft YaHei"/>
+                <a:cs typeface="Microsoft YaHei"/>
+              </a:defRPr>
+            </a:pPr>
+            <a:r>
+              <a:rPr sz="2700" b="1">
+                <a:solidFill>
+                  <a:srgbClr val="193650"/>
+                </a:solidFill>
+                <a:latin typeface="Microsoft YaHei"/>
+                <a:ea typeface="Microsoft YaHei"/>
+                <a:cs typeface="Microsoft YaHei"/>
+              </a:rPr>
+              <a:t>lcx 的 8 条用例中有 5 条达到全部门槛</a:t>
+            </a:r>
+          </a:p>
+        </p:txBody>
+      </p:sp>
+      <p:sp>
+        <p:nvSpPr>
+          <p:cNvPr id="3" name="">
+            <a:extLst xmlns:a="http://schemas.openxmlformats.org/drawingml/2006/main">
+              <a:ext uri="{FF2B5EF4-FFF2-40B4-BE49-F238E27FC236}">
+                <a16:creationId xmlns:a16="http://schemas.microsoft.com/office/drawing/2014/main" id="{C9A99014-A00A-4CBE-94EB-1096EF5A375E}"/>
+              </a:ext>
+            </a:extLst>
+          </p:cNvPr>
+          <p:cNvSpPr>
+            <a:spLocks xmlns:a="http://schemas.openxmlformats.org/drawingml/2006/main" noGrp="1"/>
+          </p:cNvSpPr>
+          <p:nvPr/>
+        </p:nvSpPr>
+        <p:spPr>
+          <a:xfrm xmlns:a="http://schemas.openxmlformats.org/drawingml/2006/main">
+            <a:off x="609600" y="1238250"/>
+            <a:ext cx="10953750" cy="9525"/>
+          </a:xfrm>
+          <a:prstGeom xmlns:a="http://schemas.openxmlformats.org/drawingml/2006/main" prst="rect">
+            <a:avLst/>
+          </a:prstGeom>
+          <a:solidFill xmlns:a="http://schemas.openxmlformats.org/drawingml/2006/main">
+            <a:srgbClr val="CFDDE3"/>
+          </a:solidFill>
+          <a:ln xmlns:a="http://schemas.openxmlformats.org/drawingml/2006/main" w="0">
+            <a:noFill/>
+          </a:ln>
+        </p:spPr>
+      </p:sp>
+      <p:sp>
+        <p:nvSpPr>
+          <p:cNvPr id="4" name="">
+            <a:extLst xmlns:a="http://schemas.openxmlformats.org/drawingml/2006/main">
+              <a:ext uri="{FF2B5EF4-FFF2-40B4-BE49-F238E27FC236}">
+                <a16:creationId xmlns:a16="http://schemas.microsoft.com/office/drawing/2014/main" id="{8C0C0943-9480-4FA0-85E7-911C80C8B8A5}"/>
+              </a:ext>
+            </a:extLst>
+          </p:cNvPr>
+          <p:cNvSpPr>
+            <a:spLocks xmlns:a="http://schemas.openxmlformats.org/drawingml/2006/main" noGrp="1"/>
+          </p:cNvSpPr>
+          <p:nvPr/>
+        </p:nvSpPr>
+        <p:spPr>
+          <a:xfrm xmlns:a="http://schemas.openxmlformats.org/drawingml/2006/main">
+            <a:off x="11144250" y="447675"/>
+            <a:ext cx="428625" cy="333375"/>
+          </a:xfrm>
+          <a:prstGeom xmlns:a="http://schemas.openxmlformats.org/drawingml/2006/main" prst="rect">
+            <a:avLst/>
+          </a:prstGeom>
+          <a:noFill xmlns:a="http://schemas.openxmlformats.org/drawingml/2006/main"/>
+          <a:ln xmlns:a="http://schemas.openxmlformats.org/drawingml/2006/main" w="0">
+            <a:noFill/>
+          </a:ln>
+        </p:spPr>
+        <p:txBody>
+          <a:bodyPr xmlns:a="http://schemas.openxmlformats.org/drawingml/2006/main" anchor="ctr">
+            <a:normAutofit fontScale="100000"/>
+          </a:bodyPr>
+          <a:lstStyle xmlns:a="http://schemas.openxmlformats.org/drawingml/2006/main"/>
+          <a:p xmlns:a="http://schemas.openxmlformats.org/drawingml/2006/main">
+            <a:pPr>
+              <a:defRPr sz="1350" b="1">
+                <a:solidFill>
+                  <a:srgbClr val="2FA6A4"/>
+                </a:solidFill>
+                <a:latin typeface="Microsoft YaHei"/>
+                <a:ea typeface="Microsoft YaHei"/>
+                <a:cs typeface="Microsoft YaHei"/>
+              </a:defRPr>
+            </a:pPr>
+            <a:r>
+              <a:rPr sz="1350" b="1">
+                <a:solidFill>
+                  <a:srgbClr val="2FA6A4"/>
+                </a:solidFill>
+                <a:latin typeface="Microsoft YaHei"/>
+                <a:ea typeface="Microsoft YaHei"/>
+                <a:cs typeface="Microsoft YaHei"/>
+              </a:rPr>
+              <a:t>10</a:t>
+            </a:r>
+          </a:p>
+        </p:txBody>
+      </p:sp>
+      <p:sp>
+        <p:nvSpPr>
+          <p:cNvPr id="5" name="">
+            <a:extLst xmlns:a="http://schemas.openxmlformats.org/drawingml/2006/main">
+              <a:ext uri="{FF2B5EF4-FFF2-40B4-BE49-F238E27FC236}">
+                <a16:creationId xmlns:a16="http://schemas.microsoft.com/office/drawing/2014/main" id="{F06DF066-A08A-4F6D-8F2E-4DFC5330659F}"/>
+              </a:ext>
+            </a:extLst>
+          </p:cNvPr>
+          <p:cNvSpPr>
+            <a:spLocks xmlns:a="http://schemas.openxmlformats.org/drawingml/2006/main" noGrp="1"/>
+          </p:cNvSpPr>
+          <p:nvPr/>
+        </p:nvSpPr>
+        <p:spPr>
+          <a:xfrm xmlns:a="http://schemas.openxmlformats.org/drawingml/2006/main">
+            <a:off x="742950" y="1695450"/>
+            <a:ext cx="2095500" cy="742950"/>
+          </a:xfrm>
+          <a:prstGeom xmlns:a="http://schemas.openxmlformats.org/drawingml/2006/main" prst="rect">
+            <a:avLst/>
+          </a:prstGeom>
+          <a:noFill xmlns:a="http://schemas.openxmlformats.org/drawingml/2006/main"/>
+          <a:ln xmlns:a="http://schemas.openxmlformats.org/drawingml/2006/main" w="0">
+            <a:noFill/>
+          </a:ln>
+        </p:spPr>
+        <p:txBody>
+          <a:bodyPr xmlns:a="http://schemas.openxmlformats.org/drawingml/2006/main" anchor="ctr">
+            <a:normAutofit fontScale="100000"/>
+          </a:bodyPr>
+          <a:lstStyle xmlns:a="http://schemas.openxmlformats.org/drawingml/2006/main"/>
+          <a:p xmlns:a="http://schemas.openxmlformats.org/drawingml/2006/main">
+            <a:pPr>
+              <a:defRPr sz="3600" b="1">
+                <a:solidFill>
+                  <a:srgbClr val="193650"/>
+                </a:solidFill>
+                <a:latin typeface="Microsoft YaHei"/>
+                <a:ea typeface="Microsoft YaHei"/>
+                <a:cs typeface="Microsoft YaHei"/>
+              </a:defRPr>
+            </a:pPr>
+            <a:r>
+              <a:rPr sz="3600" b="1">
+                <a:solidFill>
+                  <a:srgbClr val="193650"/>
+                </a:solidFill>
+                <a:latin typeface="Microsoft YaHei"/>
+                <a:ea typeface="Microsoft YaHei"/>
+                <a:cs typeface="Microsoft YaHei"/>
+              </a:rPr>
+              <a:t>5 / 8</a:t>
+            </a:r>
+          </a:p>
+        </p:txBody>
+      </p:sp>
+      <p:sp>
+        <p:nvSpPr>
+          <p:cNvPr id="6" name="">
+            <a:extLst xmlns:a="http://schemas.openxmlformats.org/drawingml/2006/main">
+              <a:ext uri="{FF2B5EF4-FFF2-40B4-BE49-F238E27FC236}">
+                <a16:creationId xmlns:a16="http://schemas.microsoft.com/office/drawing/2014/main" id="{4A6A1D48-FF0A-47DF-9C59-EA9AE0CCCBE7}"/>
+              </a:ext>
+            </a:extLst>
+          </p:cNvPr>
+          <p:cNvSpPr>
+            <a:spLocks xmlns:a="http://schemas.openxmlformats.org/drawingml/2006/main" noGrp="1"/>
+          </p:cNvSpPr>
+          <p:nvPr/>
+        </p:nvSpPr>
+        <p:spPr>
+          <a:xfrm xmlns:a="http://schemas.openxmlformats.org/drawingml/2006/main">
+            <a:off x="762000" y="2381250"/>
+            <a:ext cx="2000250" cy="304800"/>
+          </a:xfrm>
+          <a:prstGeom xmlns:a="http://schemas.openxmlformats.org/drawingml/2006/main" prst="rect">
+            <a:avLst/>
+          </a:prstGeom>
+          <a:noFill xmlns:a="http://schemas.openxmlformats.org/drawingml/2006/main"/>
+          <a:ln xmlns:a="http://schemas.openxmlformats.org/drawingml/2006/main" w="0">
+            <a:noFill/>
+          </a:ln>
+        </p:spPr>
+        <p:txBody>
+          <a:bodyPr xmlns:a="http://schemas.openxmlformats.org/drawingml/2006/main" anchor="ctr">
+            <a:normAutofit fontScale="100000"/>
+          </a:bodyPr>
+          <a:lstStyle xmlns:a="http://schemas.openxmlformats.org/drawingml/2006/main"/>
+          <a:p xmlns:a="http://schemas.openxmlformats.org/drawingml/2006/main">
+            <a:pPr>
+              <a:defRPr sz="1275" b="0">
+                <a:solidFill>
+                  <a:srgbClr val="667784"/>
+                </a:solidFill>
+                <a:latin typeface="Microsoft YaHei"/>
+                <a:ea typeface="Microsoft YaHei"/>
+                <a:cs typeface="Microsoft YaHei"/>
+              </a:defRPr>
+            </a:pPr>
+            <a:r>
+              <a:rPr sz="1275" b="0">
+                <a:solidFill>
+                  <a:srgbClr val="667784"/>
+                </a:solidFill>
+                <a:latin typeface="Microsoft YaHei"/>
+                <a:ea typeface="Microsoft YaHei"/>
+                <a:cs typeface="Microsoft YaHei"/>
+              </a:rPr>
+              <a:t>完整用例通过</a:t>
+            </a:r>
+          </a:p>
+        </p:txBody>
+      </p:sp>
+      <p:sp>
+        <p:nvSpPr>
+          <p:cNvPr id="7" name="">
+            <a:extLst xmlns:a="http://schemas.openxmlformats.org/drawingml/2006/main">
+              <a:ext uri="{FF2B5EF4-FFF2-40B4-BE49-F238E27FC236}">
+                <a16:creationId xmlns:a16="http://schemas.microsoft.com/office/drawing/2014/main" id="{1A85B4DB-8BA8-43B8-B3A3-2D718001D047}"/>
+              </a:ext>
+            </a:extLst>
+          </p:cNvPr>
+          <p:cNvSpPr>
+            <a:spLocks xmlns:a="http://schemas.openxmlformats.org/drawingml/2006/main" noGrp="1"/>
+          </p:cNvSpPr>
+          <p:nvPr/>
+        </p:nvSpPr>
+        <p:spPr>
+          <a:xfrm xmlns:a="http://schemas.openxmlformats.org/drawingml/2006/main">
+            <a:off x="742950" y="3048000"/>
+            <a:ext cx="2095500" cy="666750"/>
+          </a:xfrm>
+          <a:prstGeom xmlns:a="http://schemas.openxmlformats.org/drawingml/2006/main" prst="rect">
+            <a:avLst/>
+          </a:prstGeom>
+          <a:noFill xmlns:a="http://schemas.openxmlformats.org/drawingml/2006/main"/>
+          <a:ln xmlns:a="http://schemas.openxmlformats.org/drawingml/2006/main" w="0">
+            <a:noFill/>
+          </a:ln>
+        </p:spPr>
+        <p:txBody>
+          <a:bodyPr xmlns:a="http://schemas.openxmlformats.org/drawingml/2006/main" anchor="ctr">
+            <a:normAutofit fontScale="100000"/>
+          </a:bodyPr>
+          <a:lstStyle xmlns:a="http://schemas.openxmlformats.org/drawingml/2006/main"/>
+          <a:p xmlns:a="http://schemas.openxmlformats.org/drawingml/2006/main">
+            <a:pPr>
+              <a:defRPr sz="3150" b="1">
+                <a:solidFill>
+                  <a:srgbClr val="31835E"/>
+                </a:solidFill>
+                <a:latin typeface="Microsoft YaHei"/>
+                <a:ea typeface="Microsoft YaHei"/>
+                <a:cs typeface="Microsoft YaHei"/>
+              </a:defRPr>
+            </a:pPr>
+            <a:r>
+              <a:rPr sz="3150" b="1">
+                <a:solidFill>
+                  <a:srgbClr val="31835E"/>
+                </a:solidFill>
+                <a:latin typeface="Microsoft YaHei"/>
+                <a:ea typeface="Microsoft YaHei"/>
+                <a:cs typeface="Microsoft YaHei"/>
+              </a:rPr>
+              <a:t>8 / 8</a:t>
+            </a:r>
+          </a:p>
+        </p:txBody>
+      </p:sp>
+      <p:sp>
+        <p:nvSpPr>
+          <p:cNvPr id="8" name="">
+            <a:extLst xmlns:a="http://schemas.openxmlformats.org/drawingml/2006/main">
+              <a:ext uri="{FF2B5EF4-FFF2-40B4-BE49-F238E27FC236}">
+                <a16:creationId xmlns:a16="http://schemas.microsoft.com/office/drawing/2014/main" id="{8C8D45C2-CDEF-4FB7-9DCA-0DE6FB9B2A75}"/>
+              </a:ext>
+            </a:extLst>
+          </p:cNvPr>
+          <p:cNvSpPr>
+            <a:spLocks xmlns:a="http://schemas.openxmlformats.org/drawingml/2006/main" noGrp="1"/>
+          </p:cNvSpPr>
+          <p:nvPr/>
+        </p:nvSpPr>
+        <p:spPr>
+          <a:xfrm xmlns:a="http://schemas.openxmlformats.org/drawingml/2006/main">
+            <a:off x="762000" y="3667125"/>
+            <a:ext cx="2000250" cy="304800"/>
+          </a:xfrm>
+          <a:prstGeom xmlns:a="http://schemas.openxmlformats.org/drawingml/2006/main" prst="rect">
+            <a:avLst/>
+          </a:prstGeom>
+          <a:noFill xmlns:a="http://schemas.openxmlformats.org/drawingml/2006/main"/>
+          <a:ln xmlns:a="http://schemas.openxmlformats.org/drawingml/2006/main" w="0">
+            <a:noFill/>
+          </a:ln>
+        </p:spPr>
+        <p:txBody>
+          <a:bodyPr xmlns:a="http://schemas.openxmlformats.org/drawingml/2006/main" anchor="ctr">
+            <a:normAutofit fontScale="100000"/>
+          </a:bodyPr>
+          <a:lstStyle xmlns:a="http://schemas.openxmlformats.org/drawingml/2006/main"/>
+          <a:p xmlns:a="http://schemas.openxmlformats.org/drawingml/2006/main">
+            <a:pPr>
+              <a:defRPr sz="1275" b="0">
+                <a:solidFill>
+                  <a:srgbClr val="667784"/>
+                </a:solidFill>
+                <a:latin typeface="Microsoft YaHei"/>
+                <a:ea typeface="Microsoft YaHei"/>
+                <a:cs typeface="Microsoft YaHei"/>
+              </a:defRPr>
+            </a:pPr>
+            <a:r>
+              <a:rPr sz="1275" b="0">
+                <a:solidFill>
+                  <a:srgbClr val="667784"/>
+                </a:solidFill>
+                <a:latin typeface="Microsoft YaHei"/>
+                <a:ea typeface="Microsoft YaHei"/>
+                <a:cs typeface="Microsoft YaHei"/>
+              </a:rPr>
+              <a:t>均无执行错误</a:t>
+            </a:r>
+          </a:p>
+        </p:txBody>
+      </p:sp>
+      <p:sp>
+        <p:nvSpPr>
+          <p:cNvPr id="9" name="">
+            <a:extLst xmlns:a="http://schemas.openxmlformats.org/drawingml/2006/main">
+              <a:ext uri="{FF2B5EF4-FFF2-40B4-BE49-F238E27FC236}">
+                <a16:creationId xmlns:a16="http://schemas.microsoft.com/office/drawing/2014/main" id="{6031DAC7-5F3F-49C0-950E-4FE146FA9687}"/>
+              </a:ext>
+            </a:extLst>
+          </p:cNvPr>
+          <p:cNvSpPr>
+            <a:spLocks xmlns:a="http://schemas.openxmlformats.org/drawingml/2006/main" noGrp="1"/>
+          </p:cNvSpPr>
+          <p:nvPr/>
+        </p:nvSpPr>
+        <p:spPr>
+          <a:xfrm xmlns:a="http://schemas.openxmlformats.org/drawingml/2006/main">
+            <a:off x="685800" y="4476750"/>
+            <a:ext cx="2381250" cy="838200"/>
+          </a:xfrm>
+          <a:prstGeom xmlns:a="http://schemas.openxmlformats.org/drawingml/2006/main" prst="rect">
+            <a:avLst/>
+          </a:prstGeom>
+          <a:solidFill xmlns:a="http://schemas.openxmlformats.org/drawingml/2006/main">
+            <a:srgbClr val="FFF0EF"/>
+          </a:solidFill>
+          <a:ln xmlns:a="http://schemas.openxmlformats.org/drawingml/2006/main" w="9525">
+            <a:solidFill>
+              <a:srgbClr val="F1C5C2"/>
+            </a:solidFill>
+          </a:ln>
+        </p:spPr>
+        <p:txBody>
+          <a:bodyPr xmlns:a="http://schemas.openxmlformats.org/drawingml/2006/main" anchor="ctr">
+            <a:normAutofit fontScale="100000"/>
+          </a:bodyPr>
+          <a:lstStyle xmlns:a="http://schemas.openxmlformats.org/drawingml/2006/main"/>
+          <a:p xmlns:a="http://schemas.openxmlformats.org/drawingml/2006/main">
+            <a:pPr>
+              <a:defRPr sz="1350" b="0">
+                <a:solidFill>
+                  <a:srgbClr val="BF4B48"/>
+                </a:solidFill>
+                <a:latin typeface="Microsoft YaHei"/>
+                <a:ea typeface="Microsoft YaHei"/>
+                <a:cs typeface="Microsoft YaHei"/>
+              </a:defRPr>
+            </a:pPr>
+            <a:r>
+              <a:rPr sz="1350" b="0">
+                <a:solidFill>
+                  <a:srgbClr val="BF4B48"/>
+                </a:solidFill>
+                <a:latin typeface="Microsoft YaHei"/>
+                <a:ea typeface="Microsoft YaHei"/>
+                <a:cs typeface="Microsoft YaHei"/>
+              </a:rPr>
+              <a:t>失败来自预注册 Oracle 或性能阈值，不是服务器中断。</a:t>
+            </a:r>
+          </a:p>
+        </p:txBody>
+      </p:sp>
+      <p:sp>
+        <p:nvSpPr>
+          <p:cNvPr id="10" name="">
+            <a:extLst xmlns:a="http://schemas.openxmlformats.org/drawingml/2006/main">
+              <a:ext uri="{FF2B5EF4-FFF2-40B4-BE49-F238E27FC236}">
+                <a16:creationId xmlns:a16="http://schemas.microsoft.com/office/drawing/2014/main" id="{03B06798-F3C6-43F7-B039-ACB7165C9243}"/>
+              </a:ext>
+            </a:extLst>
+          </p:cNvPr>
+          <p:cNvSpPr>
+            <a:spLocks xmlns:a="http://schemas.openxmlformats.org/drawingml/2006/main" noGrp="1"/>
+          </p:cNvSpPr>
+          <p:nvPr/>
+        </p:nvSpPr>
+        <p:spPr>
+          <a:xfrm xmlns:a="http://schemas.openxmlformats.org/drawingml/2006/main">
+            <a:off x="3524250" y="1590675"/>
+            <a:ext cx="7429500" cy="9525"/>
+          </a:xfrm>
+          <a:prstGeom xmlns:a="http://schemas.openxmlformats.org/drawingml/2006/main" prst="rect">
+            <a:avLst/>
+          </a:prstGeom>
+          <a:solidFill xmlns:a="http://schemas.openxmlformats.org/drawingml/2006/main">
+            <a:srgbClr val="CFDDE3"/>
+          </a:solidFill>
+          <a:ln xmlns:a="http://schemas.openxmlformats.org/drawingml/2006/main" w="0">
+            <a:noFill/>
+          </a:ln>
+        </p:spPr>
+      </p:sp>
+      <p:sp>
+        <p:nvSpPr>
+          <p:cNvPr id="11" name="">
+            <a:extLst xmlns:a="http://schemas.openxmlformats.org/drawingml/2006/main">
+              <a:ext uri="{FF2B5EF4-FFF2-40B4-BE49-F238E27FC236}">
+                <a16:creationId xmlns:a16="http://schemas.microsoft.com/office/drawing/2014/main" id="{AA2503E3-ECC8-43FE-A809-94DFFC6C0F54}"/>
+              </a:ext>
+            </a:extLst>
+          </p:cNvPr>
+          <p:cNvSpPr>
+            <a:spLocks xmlns:a="http://schemas.openxmlformats.org/drawingml/2006/main" noGrp="1"/>
+          </p:cNvSpPr>
+          <p:nvPr/>
+        </p:nvSpPr>
+        <p:spPr>
+          <a:xfrm xmlns:a="http://schemas.openxmlformats.org/drawingml/2006/main">
+            <a:off x="3619500" y="1676400"/>
+            <a:ext cx="1428750" cy="400050"/>
+          </a:xfrm>
+          <a:prstGeom xmlns:a="http://schemas.openxmlformats.org/drawingml/2006/main" prst="rect">
+            <a:avLst/>
+          </a:prstGeom>
+          <a:noFill xmlns:a="http://schemas.openxmlformats.org/drawingml/2006/main"/>
+          <a:ln xmlns:a="http://schemas.openxmlformats.org/drawingml/2006/main" w="0">
+            <a:noFill/>
+          </a:ln>
+        </p:spPr>
+        <p:txBody>
+          <a:bodyPr xmlns:a="http://schemas.openxmlformats.org/drawingml/2006/main" anchor="ctr">
+            <a:normAutofit fontScale="100000"/>
+          </a:bodyPr>
+          <a:lstStyle xmlns:a="http://schemas.openxmlformats.org/drawingml/2006/main"/>
+          <a:p xmlns:a="http://schemas.openxmlformats.org/drawingml/2006/main">
+            <a:pPr>
+              <a:defRPr sz="1650" b="1">
+                <a:solidFill>
+                  <a:srgbClr val="287896"/>
+                </a:solidFill>
+                <a:latin typeface="Microsoft YaHei"/>
+                <a:ea typeface="Microsoft YaHei"/>
+                <a:cs typeface="Microsoft YaHei"/>
+              </a:defRPr>
+            </a:pPr>
+            <a:r>
+              <a:rPr sz="1650" b="1">
+                <a:solidFill>
+                  <a:srgbClr val="287896"/>
+                </a:solidFill>
+                <a:latin typeface="Microsoft YaHei"/>
+                <a:ea typeface="Microsoft YaHei"/>
+                <a:cs typeface="Microsoft YaHei"/>
+              </a:rPr>
+              <a:t>功能性</a:t>
+            </a:r>
+          </a:p>
+        </p:txBody>
+      </p:sp>
+      <p:sp>
+        <p:nvSpPr>
+          <p:cNvPr id="12" name="">
+            <a:extLst xmlns:a="http://schemas.openxmlformats.org/drawingml/2006/main">
+              <a:ext uri="{FF2B5EF4-FFF2-40B4-BE49-F238E27FC236}">
+                <a16:creationId xmlns:a16="http://schemas.microsoft.com/office/drawing/2014/main" id="{6C995741-4656-4932-9A87-01F7DF1ACAC0}"/>
+              </a:ext>
+            </a:extLst>
+          </p:cNvPr>
+          <p:cNvSpPr>
+            <a:spLocks xmlns:a="http://schemas.openxmlformats.org/drawingml/2006/main" noGrp="1"/>
+          </p:cNvSpPr>
+          <p:nvPr/>
+        </p:nvSpPr>
+        <p:spPr>
+          <a:xfrm xmlns:a="http://schemas.openxmlformats.org/drawingml/2006/main">
+            <a:off x="5238750" y="1676400"/>
+            <a:ext cx="4000500" cy="400050"/>
+          </a:xfrm>
+          <a:prstGeom xmlns:a="http://schemas.openxmlformats.org/drawingml/2006/main" prst="rect">
+            <a:avLst/>
+          </a:prstGeom>
+          <a:noFill xmlns:a="http://schemas.openxmlformats.org/drawingml/2006/main"/>
+          <a:ln xmlns:a="http://schemas.openxmlformats.org/drawingml/2006/main" w="0">
+            <a:noFill/>
+          </a:ln>
+        </p:spPr>
+        <p:txBody>
+          <a:bodyPr xmlns:a="http://schemas.openxmlformats.org/drawingml/2006/main" anchor="ctr">
+            <a:normAutofit fontScale="100000"/>
+          </a:bodyPr>
+          <a:lstStyle xmlns:a="http://schemas.openxmlformats.org/drawingml/2006/main"/>
+          <a:p xmlns:a="http://schemas.openxmlformats.org/drawingml/2006/main">
+            <a:pPr>
+              <a:defRPr sz="1350" b="0">
+                <a:solidFill>
+                  <a:srgbClr val="193650"/>
+                </a:solidFill>
+                <a:latin typeface="Microsoft YaHei"/>
+                <a:ea typeface="Microsoft YaHei"/>
+                <a:cs typeface="Microsoft YaHei"/>
+              </a:defRPr>
+            </a:pPr>
+            <a:r>
+              <a:rPr sz="1350" b="0">
+                <a:solidFill>
+                  <a:srgbClr val="193650"/>
+                </a:solidFill>
+                <a:latin typeface="Microsoft YaHei"/>
+                <a:ea typeface="Microsoft YaHei"/>
+                <a:cs typeface="Microsoft YaHei"/>
+              </a:rPr>
+              <a:t>M2-FUN-201、M2-FUN-202</a:t>
+            </a:r>
+          </a:p>
+        </p:txBody>
+      </p:sp>
+      <p:sp>
+        <p:nvSpPr>
+          <p:cNvPr id="13" name="">
+            <a:extLst xmlns:a="http://schemas.openxmlformats.org/drawingml/2006/main">
+              <a:ext uri="{FF2B5EF4-FFF2-40B4-BE49-F238E27FC236}">
+                <a16:creationId xmlns:a16="http://schemas.microsoft.com/office/drawing/2014/main" id="{949EAF63-B267-40DF-B0C3-BF13552FA6E8}"/>
+              </a:ext>
+            </a:extLst>
+          </p:cNvPr>
+          <p:cNvSpPr>
+            <a:spLocks xmlns:a="http://schemas.openxmlformats.org/drawingml/2006/main" noGrp="1"/>
+          </p:cNvSpPr>
+          <p:nvPr/>
+        </p:nvSpPr>
+        <p:spPr>
+          <a:xfrm xmlns:a="http://schemas.openxmlformats.org/drawingml/2006/main">
+            <a:off x="9810750" y="1638300"/>
+            <a:ext cx="1047750" cy="457200"/>
+          </a:xfrm>
+          <a:prstGeom xmlns:a="http://schemas.openxmlformats.org/drawingml/2006/main" prst="rect">
+            <a:avLst/>
+          </a:prstGeom>
+          <a:noFill xmlns:a="http://schemas.openxmlformats.org/drawingml/2006/main"/>
+          <a:ln xmlns:a="http://schemas.openxmlformats.org/drawingml/2006/main" w="0">
+            <a:noFill/>
+          </a:ln>
+        </p:spPr>
+        <p:txBody>
+          <a:bodyPr xmlns:a="http://schemas.openxmlformats.org/drawingml/2006/main" anchor="ctr">
+            <a:normAutofit fontScale="100000"/>
+          </a:bodyPr>
+          <a:lstStyle xmlns:a="http://schemas.openxmlformats.org/drawingml/2006/main"/>
+          <a:p xmlns:a="http://schemas.openxmlformats.org/drawingml/2006/main">
+            <a:pPr>
+              <a:defRPr sz="1800" b="1">
+                <a:solidFill>
+                  <a:srgbClr val="31835E"/>
+                </a:solidFill>
+                <a:latin typeface="Microsoft YaHei"/>
+                <a:ea typeface="Microsoft YaHei"/>
+                <a:cs typeface="Microsoft YaHei"/>
+              </a:defRPr>
+            </a:pPr>
+            <a:r>
+              <a:rPr sz="1800" b="1">
+                <a:solidFill>
+                  <a:srgbClr val="31835E"/>
+                </a:solidFill>
+                <a:latin typeface="Microsoft YaHei"/>
+                <a:ea typeface="Microsoft YaHei"/>
+                <a:cs typeface="Microsoft YaHei"/>
+              </a:rPr>
+              <a:t>2 / 2</a:t>
+            </a:r>
+          </a:p>
+        </p:txBody>
+      </p:sp>
+      <p:sp>
+        <p:nvSpPr>
+          <p:cNvPr id="14" name="">
+            <a:extLst xmlns:a="http://schemas.openxmlformats.org/drawingml/2006/main">
+              <a:ext uri="{FF2B5EF4-FFF2-40B4-BE49-F238E27FC236}">
+                <a16:creationId xmlns:a16="http://schemas.microsoft.com/office/drawing/2014/main" id="{48BA37B9-4AF9-4A38-AB1F-5CB9F6F11592}"/>
+              </a:ext>
+            </a:extLst>
+          </p:cNvPr>
+          <p:cNvSpPr>
+            <a:spLocks xmlns:a="http://schemas.openxmlformats.org/drawingml/2006/main" noGrp="1"/>
+          </p:cNvSpPr>
+          <p:nvPr/>
+        </p:nvSpPr>
+        <p:spPr>
+          <a:xfrm xmlns:a="http://schemas.openxmlformats.org/drawingml/2006/main">
+            <a:off x="3524250" y="2428875"/>
+            <a:ext cx="7429500" cy="9525"/>
+          </a:xfrm>
+          <a:prstGeom xmlns:a="http://schemas.openxmlformats.org/drawingml/2006/main" prst="rect">
+            <a:avLst/>
+          </a:prstGeom>
+          <a:solidFill xmlns:a="http://schemas.openxmlformats.org/drawingml/2006/main">
+            <a:srgbClr val="CFDDE3"/>
+          </a:solidFill>
+          <a:ln xmlns:a="http://schemas.openxmlformats.org/drawingml/2006/main" w="0">
+            <a:noFill/>
+          </a:ln>
+        </p:spPr>
+      </p:sp>
+      <p:sp>
+        <p:nvSpPr>
+          <p:cNvPr id="15" name="">
+            <a:extLst xmlns:a="http://schemas.openxmlformats.org/drawingml/2006/main">
+              <a:ext uri="{FF2B5EF4-FFF2-40B4-BE49-F238E27FC236}">
+                <a16:creationId xmlns:a16="http://schemas.microsoft.com/office/drawing/2014/main" id="{FB085797-2F81-4E27-A4E5-144DD354A173}"/>
+              </a:ext>
+            </a:extLst>
+          </p:cNvPr>
+          <p:cNvSpPr>
+            <a:spLocks xmlns:a="http://schemas.openxmlformats.org/drawingml/2006/main" noGrp="1"/>
+          </p:cNvSpPr>
+          <p:nvPr/>
+        </p:nvSpPr>
+        <p:spPr>
+          <a:xfrm xmlns:a="http://schemas.openxmlformats.org/drawingml/2006/main">
+            <a:off x="3619500" y="2514600"/>
+            <a:ext cx="1428750" cy="400050"/>
+          </a:xfrm>
+          <a:prstGeom xmlns:a="http://schemas.openxmlformats.org/drawingml/2006/main" prst="rect">
+            <a:avLst/>
+          </a:prstGeom>
+          <a:noFill xmlns:a="http://schemas.openxmlformats.org/drawingml/2006/main"/>
+          <a:ln xmlns:a="http://schemas.openxmlformats.org/drawingml/2006/main" w="0">
+            <a:noFill/>
+          </a:ln>
+        </p:spPr>
+        <p:txBody>
+          <a:bodyPr xmlns:a="http://schemas.openxmlformats.org/drawingml/2006/main" anchor="ctr">
+            <a:normAutofit fontScale="100000"/>
+          </a:bodyPr>
+          <a:lstStyle xmlns:a="http://schemas.openxmlformats.org/drawingml/2006/main"/>
+          <a:p xmlns:a="http://schemas.openxmlformats.org/drawingml/2006/main">
+            <a:pPr>
+              <a:defRPr sz="1650" b="1">
+                <a:solidFill>
+                  <a:srgbClr val="287896"/>
+                </a:solidFill>
+                <a:latin typeface="Microsoft YaHei"/>
+                <a:ea typeface="Microsoft YaHei"/>
+                <a:cs typeface="Microsoft YaHei"/>
+              </a:defRPr>
+            </a:pPr>
+            <a:r>
+              <a:rPr sz="1650" b="1">
+                <a:solidFill>
+                  <a:srgbClr val="287896"/>
+                </a:solidFill>
+                <a:latin typeface="Microsoft YaHei"/>
+                <a:ea typeface="Microsoft YaHei"/>
+                <a:cs typeface="Microsoft YaHei"/>
+              </a:rPr>
+              <a:t>鲁棒性</a:t>
+            </a:r>
+          </a:p>
+        </p:txBody>
+      </p:sp>
+      <p:sp>
+        <p:nvSpPr>
+          <p:cNvPr id="16" name="">
+            <a:extLst xmlns:a="http://schemas.openxmlformats.org/drawingml/2006/main">
+              <a:ext uri="{FF2B5EF4-FFF2-40B4-BE49-F238E27FC236}">
+                <a16:creationId xmlns:a16="http://schemas.microsoft.com/office/drawing/2014/main" id="{948BBC9A-BC1D-4C63-9F3D-53287B0EB59E}"/>
+              </a:ext>
+            </a:extLst>
+          </p:cNvPr>
+          <p:cNvSpPr>
+            <a:spLocks xmlns:a="http://schemas.openxmlformats.org/drawingml/2006/main" noGrp="1"/>
+          </p:cNvSpPr>
+          <p:nvPr/>
+        </p:nvSpPr>
+        <p:spPr>
+          <a:xfrm xmlns:a="http://schemas.openxmlformats.org/drawingml/2006/main">
+            <a:off x="5238750" y="2514600"/>
+            <a:ext cx="4000500" cy="400050"/>
+          </a:xfrm>
+          <a:prstGeom xmlns:a="http://schemas.openxmlformats.org/drawingml/2006/main" prst="rect">
+            <a:avLst/>
+          </a:prstGeom>
+          <a:noFill xmlns:a="http://schemas.openxmlformats.org/drawingml/2006/main"/>
+          <a:ln xmlns:a="http://schemas.openxmlformats.org/drawingml/2006/main" w="0">
+            <a:noFill/>
+          </a:ln>
+        </p:spPr>
+        <p:txBody>
+          <a:bodyPr xmlns:a="http://schemas.openxmlformats.org/drawingml/2006/main" anchor="ctr">
+            <a:normAutofit fontScale="100000"/>
+          </a:bodyPr>
+          <a:lstStyle xmlns:a="http://schemas.openxmlformats.org/drawingml/2006/main"/>
+          <a:p xmlns:a="http://schemas.openxmlformats.org/drawingml/2006/main">
+            <a:pPr>
+              <a:defRPr sz="1350" b="0">
+                <a:solidFill>
+                  <a:srgbClr val="193650"/>
+                </a:solidFill>
+                <a:latin typeface="Microsoft YaHei"/>
+                <a:ea typeface="Microsoft YaHei"/>
+                <a:cs typeface="Microsoft YaHei"/>
+              </a:defRPr>
+            </a:pPr>
+            <a:r>
+              <a:rPr sz="1350" b="0">
+                <a:solidFill>
+                  <a:srgbClr val="193650"/>
+                </a:solidFill>
+                <a:latin typeface="Microsoft YaHei"/>
+                <a:ea typeface="Microsoft YaHei"/>
+                <a:cs typeface="Microsoft YaHei"/>
+              </a:rPr>
+              <a:t>M2-ROB-201、M2-ROB-202</a:t>
+            </a:r>
+          </a:p>
+        </p:txBody>
+      </p:sp>
+      <p:sp>
+        <p:nvSpPr>
+          <p:cNvPr id="17" name="">
+            <a:extLst xmlns:a="http://schemas.openxmlformats.org/drawingml/2006/main">
+              <a:ext uri="{FF2B5EF4-FFF2-40B4-BE49-F238E27FC236}">
+                <a16:creationId xmlns:a16="http://schemas.microsoft.com/office/drawing/2014/main" id="{4BEEAE5A-7375-442E-9893-BEB9AACBD9C7}"/>
+              </a:ext>
+            </a:extLst>
+          </p:cNvPr>
+          <p:cNvSpPr>
+            <a:spLocks xmlns:a="http://schemas.openxmlformats.org/drawingml/2006/main" noGrp="1"/>
+          </p:cNvSpPr>
+          <p:nvPr/>
+        </p:nvSpPr>
+        <p:spPr>
+          <a:xfrm xmlns:a="http://schemas.openxmlformats.org/drawingml/2006/main">
+            <a:off x="9810750" y="2476500"/>
+            <a:ext cx="1047750" cy="457200"/>
+          </a:xfrm>
+          <a:prstGeom xmlns:a="http://schemas.openxmlformats.org/drawingml/2006/main" prst="rect">
+            <a:avLst/>
+          </a:prstGeom>
+          <a:noFill xmlns:a="http://schemas.openxmlformats.org/drawingml/2006/main"/>
+          <a:ln xmlns:a="http://schemas.openxmlformats.org/drawingml/2006/main" w="0">
+            <a:noFill/>
+          </a:ln>
+        </p:spPr>
+        <p:txBody>
+          <a:bodyPr xmlns:a="http://schemas.openxmlformats.org/drawingml/2006/main" anchor="ctr">
+            <a:normAutofit fontScale="100000"/>
+          </a:bodyPr>
+          <a:lstStyle xmlns:a="http://schemas.openxmlformats.org/drawingml/2006/main"/>
+          <a:p xmlns:a="http://schemas.openxmlformats.org/drawingml/2006/main">
+            <a:pPr>
+              <a:defRPr sz="1800" b="1">
+                <a:solidFill>
+                  <a:srgbClr val="BF4B48"/>
+                </a:solidFill>
+                <a:latin typeface="Microsoft YaHei"/>
+                <a:ea typeface="Microsoft YaHei"/>
+                <a:cs typeface="Microsoft YaHei"/>
+              </a:defRPr>
+            </a:pPr>
+            <a:r>
+              <a:rPr sz="1800" b="1">
+                <a:solidFill>
+                  <a:srgbClr val="BF4B48"/>
+                </a:solidFill>
+                <a:latin typeface="Microsoft YaHei"/>
+                <a:ea typeface="Microsoft YaHei"/>
+                <a:cs typeface="Microsoft YaHei"/>
+              </a:rPr>
+              <a:t>1 / 2</a:t>
+            </a:r>
+          </a:p>
+        </p:txBody>
+      </p:sp>
+      <p:sp>
+        <p:nvSpPr>
+          <p:cNvPr id="18" name="">
+            <a:extLst xmlns:a="http://schemas.openxmlformats.org/drawingml/2006/main">
+              <a:ext uri="{FF2B5EF4-FFF2-40B4-BE49-F238E27FC236}">
+                <a16:creationId xmlns:a16="http://schemas.microsoft.com/office/drawing/2014/main" id="{DDEEC4DB-5E7B-45FB-BCF4-09FA8AECA4CC}"/>
+              </a:ext>
+            </a:extLst>
+          </p:cNvPr>
+          <p:cNvSpPr>
+            <a:spLocks xmlns:a="http://schemas.openxmlformats.org/drawingml/2006/main" noGrp="1"/>
+          </p:cNvSpPr>
+          <p:nvPr/>
+        </p:nvSpPr>
+        <p:spPr>
+          <a:xfrm xmlns:a="http://schemas.openxmlformats.org/drawingml/2006/main">
+            <a:off x="3524250" y="3267075"/>
+            <a:ext cx="7429500" cy="9525"/>
+          </a:xfrm>
+          <a:prstGeom xmlns:a="http://schemas.openxmlformats.org/drawingml/2006/main" prst="rect">
+            <a:avLst/>
+          </a:prstGeom>
+          <a:solidFill xmlns:a="http://schemas.openxmlformats.org/drawingml/2006/main">
+            <a:srgbClr val="CFDDE3"/>
+          </a:solidFill>
+          <a:ln xmlns:a="http://schemas.openxmlformats.org/drawingml/2006/main" w="0">
+            <a:noFill/>
+          </a:ln>
+        </p:spPr>
+      </p:sp>
+      <p:sp>
+        <p:nvSpPr>
+          <p:cNvPr id="19" name="">
+            <a:extLst xmlns:a="http://schemas.openxmlformats.org/drawingml/2006/main">
+              <a:ext uri="{FF2B5EF4-FFF2-40B4-BE49-F238E27FC236}">
+                <a16:creationId xmlns:a16="http://schemas.microsoft.com/office/drawing/2014/main" id="{A01ABA06-34CE-4FC7-85E7-36FB4EF3C5D2}"/>
+              </a:ext>
+            </a:extLst>
+          </p:cNvPr>
+          <p:cNvSpPr>
+            <a:spLocks xmlns:a="http://schemas.openxmlformats.org/drawingml/2006/main" noGrp="1"/>
+          </p:cNvSpPr>
+          <p:nvPr/>
+        </p:nvSpPr>
+        <p:spPr>
+          <a:xfrm xmlns:a="http://schemas.openxmlformats.org/drawingml/2006/main">
+            <a:off x="3619500" y="3352800"/>
+            <a:ext cx="1428750" cy="400050"/>
+          </a:xfrm>
+          <a:prstGeom xmlns:a="http://schemas.openxmlformats.org/drawingml/2006/main" prst="rect">
+            <a:avLst/>
+          </a:prstGeom>
+          <a:noFill xmlns:a="http://schemas.openxmlformats.org/drawingml/2006/main"/>
+          <a:ln xmlns:a="http://schemas.openxmlformats.org/drawingml/2006/main" w="0">
+            <a:noFill/>
+          </a:ln>
+        </p:spPr>
+        <p:txBody>
+          <a:bodyPr xmlns:a="http://schemas.openxmlformats.org/drawingml/2006/main" anchor="ctr">
+            <a:normAutofit fontScale="100000"/>
+          </a:bodyPr>
+          <a:lstStyle xmlns:a="http://schemas.openxmlformats.org/drawingml/2006/main"/>
+          <a:p xmlns:a="http://schemas.openxmlformats.org/drawingml/2006/main">
+            <a:pPr>
+              <a:defRPr sz="1650" b="1">
+                <a:solidFill>
+                  <a:srgbClr val="287896"/>
+                </a:solidFill>
+                <a:latin typeface="Microsoft YaHei"/>
+                <a:ea typeface="Microsoft YaHei"/>
+                <a:cs typeface="Microsoft YaHei"/>
+              </a:defRPr>
+            </a:pPr>
+            <a:r>
+              <a:rPr sz="1650" b="1">
+                <a:solidFill>
+                  <a:srgbClr val="287896"/>
+                </a:solidFill>
+                <a:latin typeface="Microsoft YaHei"/>
+                <a:ea typeface="Microsoft YaHei"/>
+                <a:cs typeface="Microsoft YaHei"/>
+              </a:rPr>
+              <a:t>安全性</a:t>
+            </a:r>
+          </a:p>
+        </p:txBody>
+      </p:sp>
+      <p:sp>
+        <p:nvSpPr>
+          <p:cNvPr id="20" name="">
+            <a:extLst xmlns:a="http://schemas.openxmlformats.org/drawingml/2006/main">
+              <a:ext uri="{FF2B5EF4-FFF2-40B4-BE49-F238E27FC236}">
+                <a16:creationId xmlns:a16="http://schemas.microsoft.com/office/drawing/2014/main" id="{154F3FA2-B035-4ADE-A372-09F5F75D9B59}"/>
+              </a:ext>
+            </a:extLst>
+          </p:cNvPr>
+          <p:cNvSpPr>
+            <a:spLocks xmlns:a="http://schemas.openxmlformats.org/drawingml/2006/main" noGrp="1"/>
+          </p:cNvSpPr>
+          <p:nvPr/>
+        </p:nvSpPr>
+        <p:spPr>
+          <a:xfrm xmlns:a="http://schemas.openxmlformats.org/drawingml/2006/main">
+            <a:off x="5238750" y="3352800"/>
+            <a:ext cx="4000500" cy="400050"/>
+          </a:xfrm>
+          <a:prstGeom xmlns:a="http://schemas.openxmlformats.org/drawingml/2006/main" prst="rect">
+            <a:avLst/>
+          </a:prstGeom>
+          <a:noFill xmlns:a="http://schemas.openxmlformats.org/drawingml/2006/main"/>
+          <a:ln xmlns:a="http://schemas.openxmlformats.org/drawingml/2006/main" w="0">
+            <a:noFill/>
+          </a:ln>
+        </p:spPr>
+        <p:txBody>
+          <a:bodyPr xmlns:a="http://schemas.openxmlformats.org/drawingml/2006/main" anchor="ctr">
+            <a:normAutofit fontScale="100000"/>
+          </a:bodyPr>
+          <a:lstStyle xmlns:a="http://schemas.openxmlformats.org/drawingml/2006/main"/>
+          <a:p xmlns:a="http://schemas.openxmlformats.org/drawingml/2006/main">
+            <a:pPr>
+              <a:defRPr sz="1350" b="0">
+                <a:solidFill>
+                  <a:srgbClr val="193650"/>
+                </a:solidFill>
+                <a:latin typeface="Microsoft YaHei"/>
+                <a:ea typeface="Microsoft YaHei"/>
+                <a:cs typeface="Microsoft YaHei"/>
+              </a:defRPr>
+            </a:pPr>
+            <a:r>
+              <a:rPr sz="1350" b="0">
+                <a:solidFill>
+                  <a:srgbClr val="193650"/>
+                </a:solidFill>
+                <a:latin typeface="Microsoft YaHei"/>
+                <a:ea typeface="Microsoft YaHei"/>
+                <a:cs typeface="Microsoft YaHei"/>
+              </a:rPr>
+              <a:t>M2-SEC-201</a:t>
+            </a:r>
+          </a:p>
+        </p:txBody>
+      </p:sp>
+      <p:sp>
+        <p:nvSpPr>
+          <p:cNvPr id="21" name="">
+            <a:extLst xmlns:a="http://schemas.openxmlformats.org/drawingml/2006/main">
+              <a:ext uri="{FF2B5EF4-FFF2-40B4-BE49-F238E27FC236}">
+                <a16:creationId xmlns:a16="http://schemas.microsoft.com/office/drawing/2014/main" id="{1CF17A12-D7DB-4C27-8FD1-B46C03C95A58}"/>
+              </a:ext>
+            </a:extLst>
+          </p:cNvPr>
+          <p:cNvSpPr>
+            <a:spLocks xmlns:a="http://schemas.openxmlformats.org/drawingml/2006/main" noGrp="1"/>
+          </p:cNvSpPr>
+          <p:nvPr/>
+        </p:nvSpPr>
+        <p:spPr>
+          <a:xfrm xmlns:a="http://schemas.openxmlformats.org/drawingml/2006/main">
+            <a:off x="9810750" y="3314700"/>
+            <a:ext cx="1047750" cy="457200"/>
+          </a:xfrm>
+          <a:prstGeom xmlns:a="http://schemas.openxmlformats.org/drawingml/2006/main" prst="rect">
+            <a:avLst/>
+          </a:prstGeom>
+          <a:noFill xmlns:a="http://schemas.openxmlformats.org/drawingml/2006/main"/>
+          <a:ln xmlns:a="http://schemas.openxmlformats.org/drawingml/2006/main" w="0">
+            <a:noFill/>
+          </a:ln>
+        </p:spPr>
+        <p:txBody>
+          <a:bodyPr xmlns:a="http://schemas.openxmlformats.org/drawingml/2006/main" anchor="ctr">
+            <a:normAutofit fontScale="100000"/>
+          </a:bodyPr>
+          <a:lstStyle xmlns:a="http://schemas.openxmlformats.org/drawingml/2006/main"/>
+          <a:p xmlns:a="http://schemas.openxmlformats.org/drawingml/2006/main">
+            <a:pPr>
+              <a:defRPr sz="1800" b="1">
+                <a:solidFill>
+                  <a:srgbClr val="31835E"/>
+                </a:solidFill>
+                <a:latin typeface="Microsoft YaHei"/>
+                <a:ea typeface="Microsoft YaHei"/>
+                <a:cs typeface="Microsoft YaHei"/>
+              </a:defRPr>
+            </a:pPr>
+            <a:r>
+              <a:rPr sz="1800" b="1">
+                <a:solidFill>
+                  <a:srgbClr val="31835E"/>
+                </a:solidFill>
+                <a:latin typeface="Microsoft YaHei"/>
+                <a:ea typeface="Microsoft YaHei"/>
+                <a:cs typeface="Microsoft YaHei"/>
+              </a:rPr>
+              <a:t>1 / 1</a:t>
+            </a:r>
+          </a:p>
+        </p:txBody>
+      </p:sp>
+      <p:sp>
+        <p:nvSpPr>
+          <p:cNvPr id="22" name="">
+            <a:extLst xmlns:a="http://schemas.openxmlformats.org/drawingml/2006/main">
+              <a:ext uri="{FF2B5EF4-FFF2-40B4-BE49-F238E27FC236}">
+                <a16:creationId xmlns:a16="http://schemas.microsoft.com/office/drawing/2014/main" id="{9AAC0E2D-5DF3-4549-B5EE-1E19752B2A71}"/>
+              </a:ext>
+            </a:extLst>
+          </p:cNvPr>
+          <p:cNvSpPr>
+            <a:spLocks xmlns:a="http://schemas.openxmlformats.org/drawingml/2006/main" noGrp="1"/>
+          </p:cNvSpPr>
+          <p:nvPr/>
+        </p:nvSpPr>
+        <p:spPr>
+          <a:xfrm xmlns:a="http://schemas.openxmlformats.org/drawingml/2006/main">
+            <a:off x="3524250" y="4105275"/>
+            <a:ext cx="7429500" cy="9525"/>
+          </a:xfrm>
+          <a:prstGeom xmlns:a="http://schemas.openxmlformats.org/drawingml/2006/main" prst="rect">
+            <a:avLst/>
+          </a:prstGeom>
+          <a:solidFill xmlns:a="http://schemas.openxmlformats.org/drawingml/2006/main">
+            <a:srgbClr val="CFDDE3"/>
+          </a:solidFill>
+          <a:ln xmlns:a="http://schemas.openxmlformats.org/drawingml/2006/main" w="0">
+            <a:noFill/>
+          </a:ln>
+        </p:spPr>
+      </p:sp>
+      <p:sp>
+        <p:nvSpPr>
+          <p:cNvPr id="23" name="">
+            <a:extLst xmlns:a="http://schemas.openxmlformats.org/drawingml/2006/main">
+              <a:ext uri="{FF2B5EF4-FFF2-40B4-BE49-F238E27FC236}">
+                <a16:creationId xmlns:a16="http://schemas.microsoft.com/office/drawing/2014/main" id="{5056751D-45D1-442E-BACF-FD8CBD90BE01}"/>
+              </a:ext>
+            </a:extLst>
+          </p:cNvPr>
+          <p:cNvSpPr>
+            <a:spLocks xmlns:a="http://schemas.openxmlformats.org/drawingml/2006/main" noGrp="1"/>
+          </p:cNvSpPr>
+          <p:nvPr/>
+        </p:nvSpPr>
+        <p:spPr>
+          <a:xfrm xmlns:a="http://schemas.openxmlformats.org/drawingml/2006/main">
+            <a:off x="3619500" y="4191000"/>
+            <a:ext cx="1428750" cy="400050"/>
+          </a:xfrm>
+          <a:prstGeom xmlns:a="http://schemas.openxmlformats.org/drawingml/2006/main" prst="rect">
+            <a:avLst/>
+          </a:prstGeom>
+          <a:noFill xmlns:a="http://schemas.openxmlformats.org/drawingml/2006/main"/>
+          <a:ln xmlns:a="http://schemas.openxmlformats.org/drawingml/2006/main" w="0">
+            <a:noFill/>
+          </a:ln>
+        </p:spPr>
+        <p:txBody>
+          <a:bodyPr xmlns:a="http://schemas.openxmlformats.org/drawingml/2006/main" anchor="ctr">
+            <a:normAutofit fontScale="100000"/>
+          </a:bodyPr>
+          <a:lstStyle xmlns:a="http://schemas.openxmlformats.org/drawingml/2006/main"/>
+          <a:p xmlns:a="http://schemas.openxmlformats.org/drawingml/2006/main">
+            <a:pPr>
+              <a:defRPr sz="1650" b="1">
+                <a:solidFill>
+                  <a:srgbClr val="287896"/>
+                </a:solidFill>
+                <a:latin typeface="Microsoft YaHei"/>
+                <a:ea typeface="Microsoft YaHei"/>
+                <a:cs typeface="Microsoft YaHei"/>
+              </a:defRPr>
+            </a:pPr>
+            <a:r>
+              <a:rPr sz="1650" b="1">
+                <a:solidFill>
+                  <a:srgbClr val="287896"/>
+                </a:solidFill>
+                <a:latin typeface="Microsoft YaHei"/>
+                <a:ea typeface="Microsoft YaHei"/>
+                <a:cs typeface="Microsoft YaHei"/>
+              </a:rPr>
+              <a:t>公平性</a:t>
+            </a:r>
+          </a:p>
+        </p:txBody>
+      </p:sp>
+      <p:sp>
+        <p:nvSpPr>
+          <p:cNvPr id="24" name="">
+            <a:extLst xmlns:a="http://schemas.openxmlformats.org/drawingml/2006/main">
+              <a:ext uri="{FF2B5EF4-FFF2-40B4-BE49-F238E27FC236}">
+                <a16:creationId xmlns:a16="http://schemas.microsoft.com/office/drawing/2014/main" id="{22FBC72C-4E97-4E85-98E7-EAB104C332F7}"/>
+              </a:ext>
+            </a:extLst>
+          </p:cNvPr>
+          <p:cNvSpPr>
+            <a:spLocks xmlns:a="http://schemas.openxmlformats.org/drawingml/2006/main" noGrp="1"/>
+          </p:cNvSpPr>
+          <p:nvPr/>
+        </p:nvSpPr>
+        <p:spPr>
+          <a:xfrm xmlns:a="http://schemas.openxmlformats.org/drawingml/2006/main">
+            <a:off x="5238750" y="4191000"/>
+            <a:ext cx="4000500" cy="400050"/>
+          </a:xfrm>
+          <a:prstGeom xmlns:a="http://schemas.openxmlformats.org/drawingml/2006/main" prst="rect">
+            <a:avLst/>
+          </a:prstGeom>
+          <a:noFill xmlns:a="http://schemas.openxmlformats.org/drawingml/2006/main"/>
+          <a:ln xmlns:a="http://schemas.openxmlformats.org/drawingml/2006/main" w="0">
+            <a:noFill/>
+          </a:ln>
+        </p:spPr>
+        <p:txBody>
+          <a:bodyPr xmlns:a="http://schemas.openxmlformats.org/drawingml/2006/main" anchor="ctr">
+            <a:normAutofit fontScale="100000"/>
+          </a:bodyPr>
+          <a:lstStyle xmlns:a="http://schemas.openxmlformats.org/drawingml/2006/main"/>
+          <a:p xmlns:a="http://schemas.openxmlformats.org/drawingml/2006/main">
+            <a:pPr>
+              <a:defRPr sz="1350" b="0">
+                <a:solidFill>
+                  <a:srgbClr val="193650"/>
+                </a:solidFill>
+                <a:latin typeface="Microsoft YaHei"/>
+                <a:ea typeface="Microsoft YaHei"/>
+                <a:cs typeface="Microsoft YaHei"/>
+              </a:defRPr>
+            </a:pPr>
+            <a:r>
+              <a:rPr sz="1350" b="0">
+                <a:solidFill>
+                  <a:srgbClr val="193650"/>
+                </a:solidFill>
+                <a:latin typeface="Microsoft YaHei"/>
+                <a:ea typeface="Microsoft YaHei"/>
+                <a:cs typeface="Microsoft YaHei"/>
+              </a:rPr>
+              <a:t>M2-FAI-201</a:t>
+            </a:r>
+          </a:p>
+        </p:txBody>
+      </p:sp>
+      <p:sp>
+        <p:nvSpPr>
+          <p:cNvPr id="25" name="">
+            <a:extLst xmlns:a="http://schemas.openxmlformats.org/drawingml/2006/main">
+              <a:ext uri="{FF2B5EF4-FFF2-40B4-BE49-F238E27FC236}">
+                <a16:creationId xmlns:a16="http://schemas.microsoft.com/office/drawing/2014/main" id="{2404074F-3FDB-40C3-A413-5E55697FFFB0}"/>
+              </a:ext>
+            </a:extLst>
+          </p:cNvPr>
+          <p:cNvSpPr>
+            <a:spLocks xmlns:a="http://schemas.openxmlformats.org/drawingml/2006/main" noGrp="1"/>
+          </p:cNvSpPr>
+          <p:nvPr/>
+        </p:nvSpPr>
+        <p:spPr>
+          <a:xfrm xmlns:a="http://schemas.openxmlformats.org/drawingml/2006/main">
+            <a:off x="9810750" y="4152900"/>
+            <a:ext cx="1047750" cy="457200"/>
+          </a:xfrm>
+          <a:prstGeom xmlns:a="http://schemas.openxmlformats.org/drawingml/2006/main" prst="rect">
+            <a:avLst/>
+          </a:prstGeom>
+          <a:noFill xmlns:a="http://schemas.openxmlformats.org/drawingml/2006/main"/>
+          <a:ln xmlns:a="http://schemas.openxmlformats.org/drawingml/2006/main" w="0">
+            <a:noFill/>
+          </a:ln>
+        </p:spPr>
+        <p:txBody>
+          <a:bodyPr xmlns:a="http://schemas.openxmlformats.org/drawingml/2006/main" anchor="ctr">
+            <a:normAutofit fontScale="100000"/>
+          </a:bodyPr>
+          <a:lstStyle xmlns:a="http://schemas.openxmlformats.org/drawingml/2006/main"/>
+          <a:p xmlns:a="http://schemas.openxmlformats.org/drawingml/2006/main">
+            <a:pPr>
+              <a:defRPr sz="1800" b="1">
+                <a:solidFill>
+                  <a:srgbClr val="31835E"/>
+                </a:solidFill>
+                <a:latin typeface="Microsoft YaHei"/>
+                <a:ea typeface="Microsoft YaHei"/>
+                <a:cs typeface="Microsoft YaHei"/>
+              </a:defRPr>
+            </a:pPr>
+            <a:r>
+              <a:rPr sz="1800" b="1">
+                <a:solidFill>
+                  <a:srgbClr val="31835E"/>
+                </a:solidFill>
+                <a:latin typeface="Microsoft YaHei"/>
+                <a:ea typeface="Microsoft YaHei"/>
+                <a:cs typeface="Microsoft YaHei"/>
+              </a:rPr>
+              <a:t>1 / 1</a:t>
+            </a:r>
+          </a:p>
+        </p:txBody>
+      </p:sp>
+      <p:sp>
+        <p:nvSpPr>
+          <p:cNvPr id="26" name="">
+            <a:extLst xmlns:a="http://schemas.openxmlformats.org/drawingml/2006/main">
+              <a:ext uri="{FF2B5EF4-FFF2-40B4-BE49-F238E27FC236}">
+                <a16:creationId xmlns:a16="http://schemas.microsoft.com/office/drawing/2014/main" id="{06B5ED0C-B724-4D39-BC4E-15B211F16043}"/>
+              </a:ext>
+            </a:extLst>
+          </p:cNvPr>
+          <p:cNvSpPr>
+            <a:spLocks xmlns:a="http://schemas.openxmlformats.org/drawingml/2006/main" noGrp="1"/>
+          </p:cNvSpPr>
+          <p:nvPr/>
+        </p:nvSpPr>
+        <p:spPr>
+          <a:xfrm xmlns:a="http://schemas.openxmlformats.org/drawingml/2006/main">
+            <a:off x="3524250" y="4943475"/>
+            <a:ext cx="7429500" cy="9525"/>
+          </a:xfrm>
+          <a:prstGeom xmlns:a="http://schemas.openxmlformats.org/drawingml/2006/main" prst="rect">
+            <a:avLst/>
+          </a:prstGeom>
+          <a:solidFill xmlns:a="http://schemas.openxmlformats.org/drawingml/2006/main">
+            <a:srgbClr val="CFDDE3"/>
+          </a:solidFill>
+          <a:ln xmlns:a="http://schemas.openxmlformats.org/drawingml/2006/main" w="0">
+            <a:noFill/>
+          </a:ln>
+        </p:spPr>
+      </p:sp>
+      <p:sp>
+        <p:nvSpPr>
+          <p:cNvPr id="27" name="">
+            <a:extLst xmlns:a="http://schemas.openxmlformats.org/drawingml/2006/main">
+              <a:ext uri="{FF2B5EF4-FFF2-40B4-BE49-F238E27FC236}">
+                <a16:creationId xmlns:a16="http://schemas.microsoft.com/office/drawing/2014/main" id="{056C20B3-8050-48F3-A03B-72843DA427F2}"/>
+              </a:ext>
+            </a:extLst>
+          </p:cNvPr>
+          <p:cNvSpPr>
+            <a:spLocks xmlns:a="http://schemas.openxmlformats.org/drawingml/2006/main" noGrp="1"/>
+          </p:cNvSpPr>
+          <p:nvPr/>
+        </p:nvSpPr>
+        <p:spPr>
+          <a:xfrm xmlns:a="http://schemas.openxmlformats.org/drawingml/2006/main">
+            <a:off x="3619500" y="5029200"/>
+            <a:ext cx="1428750" cy="400050"/>
+          </a:xfrm>
+          <a:prstGeom xmlns:a="http://schemas.openxmlformats.org/drawingml/2006/main" prst="rect">
+            <a:avLst/>
+          </a:prstGeom>
+          <a:noFill xmlns:a="http://schemas.openxmlformats.org/drawingml/2006/main"/>
+          <a:ln xmlns:a="http://schemas.openxmlformats.org/drawingml/2006/main" w="0">
+            <a:noFill/>
+          </a:ln>
+        </p:spPr>
+        <p:txBody>
+          <a:bodyPr xmlns:a="http://schemas.openxmlformats.org/drawingml/2006/main" anchor="ctr">
+            <a:normAutofit fontScale="100000"/>
+          </a:bodyPr>
+          <a:lstStyle xmlns:a="http://schemas.openxmlformats.org/drawingml/2006/main"/>
+          <a:p xmlns:a="http://schemas.openxmlformats.org/drawingml/2006/main">
+            <a:pPr>
+              <a:defRPr sz="1650" b="1">
+                <a:solidFill>
+                  <a:srgbClr val="287896"/>
+                </a:solidFill>
+                <a:latin typeface="Microsoft YaHei"/>
+                <a:ea typeface="Microsoft YaHei"/>
+                <a:cs typeface="Microsoft YaHei"/>
+              </a:defRPr>
+            </a:pPr>
+            <a:r>
+              <a:rPr sz="1650" b="1">
+                <a:solidFill>
+                  <a:srgbClr val="287896"/>
+                </a:solidFill>
+                <a:latin typeface="Microsoft YaHei"/>
+                <a:ea typeface="Microsoft YaHei"/>
+                <a:cs typeface="Microsoft YaHei"/>
+              </a:rPr>
+              <a:t>性能</a:t>
+            </a:r>
+          </a:p>
+        </p:txBody>
+      </p:sp>
+      <p:sp>
+        <p:nvSpPr>
+          <p:cNvPr id="28" name="">
+            <a:extLst xmlns:a="http://schemas.openxmlformats.org/drawingml/2006/main">
+              <a:ext uri="{FF2B5EF4-FFF2-40B4-BE49-F238E27FC236}">
+                <a16:creationId xmlns:a16="http://schemas.microsoft.com/office/drawing/2014/main" id="{8F4118DE-CF32-445A-A1AD-785D95803E88}"/>
+              </a:ext>
+            </a:extLst>
+          </p:cNvPr>
+          <p:cNvSpPr>
+            <a:spLocks xmlns:a="http://schemas.openxmlformats.org/drawingml/2006/main" noGrp="1"/>
+          </p:cNvSpPr>
+          <p:nvPr/>
+        </p:nvSpPr>
+        <p:spPr>
+          <a:xfrm xmlns:a="http://schemas.openxmlformats.org/drawingml/2006/main">
+            <a:off x="5238750" y="5029200"/>
+            <a:ext cx="4000500" cy="400050"/>
+          </a:xfrm>
+          <a:prstGeom xmlns:a="http://schemas.openxmlformats.org/drawingml/2006/main" prst="rect">
+            <a:avLst/>
+          </a:prstGeom>
+          <a:noFill xmlns:a="http://schemas.openxmlformats.org/drawingml/2006/main"/>
+          <a:ln xmlns:a="http://schemas.openxmlformats.org/drawingml/2006/main" w="0">
+            <a:noFill/>
+          </a:ln>
+        </p:spPr>
+        <p:txBody>
+          <a:bodyPr xmlns:a="http://schemas.openxmlformats.org/drawingml/2006/main" anchor="ctr">
+            <a:normAutofit fontScale="100000"/>
+          </a:bodyPr>
+          <a:lstStyle xmlns:a="http://schemas.openxmlformats.org/drawingml/2006/main"/>
+          <a:p xmlns:a="http://schemas.openxmlformats.org/drawingml/2006/main">
+            <a:pPr>
+              <a:defRPr sz="1350" b="0">
+                <a:solidFill>
+                  <a:srgbClr val="193650"/>
+                </a:solidFill>
+                <a:latin typeface="Microsoft YaHei"/>
+                <a:ea typeface="Microsoft YaHei"/>
+                <a:cs typeface="Microsoft YaHei"/>
+              </a:defRPr>
+            </a:pPr>
+            <a:r>
+              <a:rPr sz="1350" b="0">
+                <a:solidFill>
+                  <a:srgbClr val="193650"/>
+                </a:solidFill>
+                <a:latin typeface="Microsoft YaHei"/>
+                <a:ea typeface="Microsoft YaHei"/>
+                <a:cs typeface="Microsoft YaHei"/>
+              </a:rPr>
+              <a:t>M2-PER-201、M2-PER-202</a:t>
+            </a:r>
+          </a:p>
+        </p:txBody>
+      </p:sp>
+      <p:sp>
+        <p:nvSpPr>
+          <p:cNvPr id="29" name="">
+            <a:extLst xmlns:a="http://schemas.openxmlformats.org/drawingml/2006/main">
+              <a:ext uri="{FF2B5EF4-FFF2-40B4-BE49-F238E27FC236}">
+                <a16:creationId xmlns:a16="http://schemas.microsoft.com/office/drawing/2014/main" id="{319FFE7F-00FE-4D47-AD7B-359935908AE7}"/>
+              </a:ext>
+            </a:extLst>
+          </p:cNvPr>
+          <p:cNvSpPr>
+            <a:spLocks xmlns:a="http://schemas.openxmlformats.org/drawingml/2006/main" noGrp="1"/>
+          </p:cNvSpPr>
+          <p:nvPr/>
+        </p:nvSpPr>
+        <p:spPr>
+          <a:xfrm xmlns:a="http://schemas.openxmlformats.org/drawingml/2006/main">
+            <a:off x="9810750" y="4991100"/>
+            <a:ext cx="1047750" cy="457200"/>
+          </a:xfrm>
+          <a:prstGeom xmlns:a="http://schemas.openxmlformats.org/drawingml/2006/main" prst="rect">
+            <a:avLst/>
+          </a:prstGeom>
+          <a:noFill xmlns:a="http://schemas.openxmlformats.org/drawingml/2006/main"/>
+          <a:ln xmlns:a="http://schemas.openxmlformats.org/drawingml/2006/main" w="0">
+            <a:noFill/>
+          </a:ln>
+        </p:spPr>
+        <p:txBody>
+          <a:bodyPr xmlns:a="http://schemas.openxmlformats.org/drawingml/2006/main" anchor="ctr">
+            <a:normAutofit fontScale="100000"/>
+          </a:bodyPr>
+          <a:lstStyle xmlns:a="http://schemas.openxmlformats.org/drawingml/2006/main"/>
+          <a:p xmlns:a="http://schemas.openxmlformats.org/drawingml/2006/main">
+            <a:pPr>
+              <a:defRPr sz="1800" b="1">
+                <a:solidFill>
+                  <a:srgbClr val="BF4B48"/>
+                </a:solidFill>
+                <a:latin typeface="Microsoft YaHei"/>
+                <a:ea typeface="Microsoft YaHei"/>
+                <a:cs typeface="Microsoft YaHei"/>
+              </a:defRPr>
+            </a:pPr>
+            <a:r>
+              <a:rPr sz="1800" b="1">
+                <a:solidFill>
+                  <a:srgbClr val="BF4B48"/>
+                </a:solidFill>
+                <a:latin typeface="Microsoft YaHei"/>
+                <a:ea typeface="Microsoft YaHei"/>
+                <a:cs typeface="Microsoft YaHei"/>
+              </a:rPr>
+              <a:t>0 / 2</a:t>
+            </a:r>
+          </a:p>
+        </p:txBody>
+      </p:sp>
+      <p:sp>
+        <p:nvSpPr>
+          <p:cNvPr id="30" name="">
+            <a:extLst xmlns:a="http://schemas.openxmlformats.org/drawingml/2006/main">
+              <a:ext uri="{FF2B5EF4-FFF2-40B4-BE49-F238E27FC236}">
+                <a16:creationId xmlns:a16="http://schemas.microsoft.com/office/drawing/2014/main" id="{7CDF2DCD-903F-4022-BEFC-36E8FFE04472}"/>
+              </a:ext>
+            </a:extLst>
+          </p:cNvPr>
+          <p:cNvSpPr>
+            <a:spLocks xmlns:a="http://schemas.openxmlformats.org/drawingml/2006/main" noGrp="1"/>
+          </p:cNvSpPr>
+          <p:nvPr/>
+        </p:nvSpPr>
+        <p:spPr>
+          <a:xfrm xmlns:a="http://schemas.openxmlformats.org/drawingml/2006/main">
+            <a:off x="3524250" y="5810250"/>
+            <a:ext cx="7429500" cy="428625"/>
+          </a:xfrm>
+          <a:prstGeom xmlns:a="http://schemas.openxmlformats.org/drawingml/2006/main" prst="rect">
+            <a:avLst/>
+          </a:prstGeom>
+          <a:noFill xmlns:a="http://schemas.openxmlformats.org/drawingml/2006/main"/>
+          <a:ln xmlns:a="http://schemas.openxmlformats.org/drawingml/2006/main" w="0">
+            <a:noFill/>
+          </a:ln>
+        </p:spPr>
+        <p:txBody>
+          <a:bodyPr xmlns:a="http://schemas.openxmlformats.org/drawingml/2006/main" anchor="ctr">
+            <a:normAutofit fontScale="100000"/>
+          </a:bodyPr>
+          <a:lstStyle xmlns:a="http://schemas.openxmlformats.org/drawingml/2006/main"/>
+          <a:p xmlns:a="http://schemas.openxmlformats.org/drawingml/2006/main">
+            <a:pPr>
+              <a:defRPr sz="1350" b="0">
+                <a:solidFill>
+                  <a:srgbClr val="D28A17"/>
+                </a:solidFill>
+                <a:latin typeface="Microsoft YaHei"/>
+                <a:ea typeface="Microsoft YaHei"/>
+                <a:cs typeface="Microsoft YaHei"/>
+              </a:defRPr>
+            </a:pPr>
+            <a:r>
+              <a:rPr sz="1350" b="0">
+                <a:solidFill>
+                  <a:srgbClr val="D28A17"/>
+                </a:solidFill>
+                <a:latin typeface="Microsoft YaHei"/>
+                <a:ea typeface="Microsoft YaHei"/>
+                <a:cs typeface="Microsoft YaHei"/>
+              </a:rPr>
+              <a:t>性能用例的回答质量均通过，但 0.928× 与 0.948× 未达到 1.20× 解码吞吐门槛。</a:t>
+            </a:r>
+          </a:p>
+        </p:txBody>
+      </p:sp>
+      <p:sp>
+        <p:nvSpPr>
+          <p:cNvPr id="31" name="">
+            <a:extLst xmlns:a="http://schemas.openxmlformats.org/drawingml/2006/main">
+              <a:ext uri="{FF2B5EF4-FFF2-40B4-BE49-F238E27FC236}">
+                <a16:creationId xmlns:a16="http://schemas.microsoft.com/office/drawing/2014/main" id="{C3F6D6C7-91FB-471C-A2A3-8E5C8C69B69F}"/>
+              </a:ext>
+            </a:extLst>
+          </p:cNvPr>
+          <p:cNvSpPr>
+            <a:spLocks xmlns:a="http://schemas.openxmlformats.org/drawingml/2006/main" noGrp="1"/>
+          </p:cNvSpPr>
+          <p:nvPr/>
+        </p:nvSpPr>
+        <p:spPr>
+          <a:xfrm xmlns:a="http://schemas.openxmlformats.org/drawingml/2006/main">
+            <a:off x="685800" y="6477000"/>
+            <a:ext cx="6096000" cy="190500"/>
+          </a:xfrm>
+          <a:prstGeom xmlns:a="http://schemas.openxmlformats.org/drawingml/2006/main" prst="rect">
+            <a:avLst/>
+          </a:prstGeom>
+          <a:noFill xmlns:a="http://schemas.openxmlformats.org/drawingml/2006/main"/>
+          <a:ln xmlns:a="http://schemas.openxmlformats.org/drawingml/2006/main" w="0">
+            <a:noFill/>
+          </a:ln>
+        </p:spPr>
+        <p:txBody>
+          <a:bodyPr xmlns:a="http://schemas.openxmlformats.org/drawingml/2006/main" anchor="ctr">
+            <a:normAutofit fontScale="78788"/>
+          </a:bodyPr>
+          <a:lstStyle xmlns:a="http://schemas.openxmlformats.org/drawingml/2006/main"/>
+          <a:p xmlns:a="http://schemas.openxmlformats.org/drawingml/2006/main">
+            <a:pPr>
+              <a:defRPr sz="825" b="0">
+                <a:solidFill>
+                  <a:srgbClr val="667784"/>
+                </a:solidFill>
+                <a:latin typeface="Microsoft YaHei"/>
+                <a:ea typeface="Microsoft YaHei"/>
+                <a:cs typeface="Microsoft YaHei"/>
+              </a:defRPr>
+            </a:pPr>
+            <a:r>
+              <a:rPr sz="825" b="0">
+                <a:solidFill>
+                  <a:srgbClr val="667784"/>
+                </a:solidFill>
+                <a:latin typeface="Microsoft YaHei"/>
+                <a:ea typeface="Microsoft YaHei"/>
+                <a:cs typeface="Microsoft YaHei"/>
+              </a:rPr>
+              <a:t>module2-formal-0bd7e93-001  ·  source 0bd7e93  ·  analysis 65d3ea6</a:t>
+            </a:r>
+          </a:p>
+        </p:txBody>
+      </p:sp>
+    </p:spTree>
+    <p:extLst>
+      <p:ext uri="{BB962C8B-B14F-4D97-AF65-F5344CB8AC3E}">
+        <p14:creationId xmlns:p14="http://schemas.microsoft.com/office/powerpoint/2010/main" val="901353026"/>
+      </p:ext>
+    </p:extLst>
+  </p:cSld>
+</p:sld>
+</file>
+
+<file path=ppt/slides/slide11.xml><?xml version="1.0" encoding="utf-8"?>
+<p:sld xmlns:p="http://schemas.openxmlformats.org/presentationml/2006/main">
+  <p:cSld>
+    <p:bg>
+      <p:bgPr>
+        <a:solidFill xmlns:a="http://schemas.openxmlformats.org/drawingml/2006/main">
+          <a:srgbClr val="FFFFFF"/>
+        </a:solidFill>
+      </p:bgPr>
+    </p:bg>
+    <p:spTree>
+      <p:nvGrpSpPr>
+        <p:cNvPr id="1" name=""/>
+        <p:cNvGrpSpPr/>
+        <p:nvPr/>
+      </p:nvGrpSpPr>
+      <p:grpSpPr>
+        <a:xfrm xmlns:a="http://schemas.openxmlformats.org/drawingml/2006/main"/>
+      </p:grpSpPr>
+      <p:sp>
+        <p:nvSpPr>
+          <p:cNvPr id="22" name="">
+            <a:extLst xmlns:a="http://schemas.openxmlformats.org/drawingml/2006/main">
+              <a:ext uri="{FF2B5EF4-FFF2-40B4-BE49-F238E27FC236}">
+                <a16:creationId xmlns:a16="http://schemas.microsoft.com/office/drawing/2014/main" id="{3395799B-B7FA-4829-A39C-D70181188D2F}"/>
+              </a:ext>
+            </a:extLst>
+          </p:cNvPr>
+          <p:cNvSpPr>
+            <a:spLocks xmlns:a="http://schemas.openxmlformats.org/drawingml/2006/main" noGrp="1"/>
+          </p:cNvSpPr>
+          <p:nvPr/>
+        </p:nvSpPr>
+        <p:spPr>
+          <a:xfrm xmlns:a="http://schemas.openxmlformats.org/drawingml/2006/main">
+            <a:off x="685800" y="304800"/>
+            <a:ext cx="3429000" cy="285750"/>
+          </a:xfrm>
+          <a:prstGeom xmlns:a="http://schemas.openxmlformats.org/drawingml/2006/main" prst="rect">
+            <a:avLst/>
+          </a:prstGeom>
+          <a:noFill xmlns:a="http://schemas.openxmlformats.org/drawingml/2006/main"/>
+          <a:ln xmlns:a="http://schemas.openxmlformats.org/drawingml/2006/main" w="0">
+            <a:noFill/>
+          </a:ln>
+        </p:spPr>
+        <p:txBody>
+          <a:bodyPr xmlns:a="http://schemas.openxmlformats.org/drawingml/2006/main" anchor="ctr">
+            <a:normAutofit fontScale="100000"/>
+          </a:bodyPr>
+          <a:lstStyle xmlns:a="http://schemas.openxmlformats.org/drawingml/2006/main"/>
+          <a:p xmlns:a="http://schemas.openxmlformats.org/drawingml/2006/main">
+            <a:pPr>
+              <a:defRPr sz="1125" b="1">
+                <a:solidFill>
+                  <a:srgbClr val="2FA6A4"/>
+                </a:solidFill>
+                <a:latin typeface="Microsoft YaHei"/>
+                <a:ea typeface="Microsoft YaHei"/>
+                <a:cs typeface="Microsoft YaHei"/>
+              </a:defRPr>
+            </a:pPr>
+            <a:r>
+              <a:rPr sz="1125" b="1">
+                <a:solidFill>
+                  <a:srgbClr val="2FA6A4"/>
+                </a:solidFill>
+                <a:latin typeface="Microsoft YaHei"/>
+                <a:ea typeface="Microsoft YaHei"/>
+                <a:cs typeface="Microsoft YaHei"/>
+              </a:rPr>
+              <a:t>10  LCX DEFECTS</a:t>
+            </a:r>
+          </a:p>
+        </p:txBody>
+      </p:sp>
+      <p:sp>
+        <p:nvSpPr>
+          <p:cNvPr id="2" name="">
+            <a:extLst xmlns:a="http://schemas.openxmlformats.org/drawingml/2006/main">
+              <a:ext uri="{FF2B5EF4-FFF2-40B4-BE49-F238E27FC236}">
+                <a16:creationId xmlns:a16="http://schemas.microsoft.com/office/drawing/2014/main" id="{38F476E8-961D-476E-A9C7-1FF06A8E54AE}"/>
+              </a:ext>
+            </a:extLst>
+          </p:cNvPr>
+          <p:cNvSpPr>
+            <a:spLocks xmlns:a="http://schemas.openxmlformats.org/drawingml/2006/main" noGrp="1"/>
+          </p:cNvSpPr>
+          <p:nvPr/>
+        </p:nvSpPr>
+        <p:spPr>
+          <a:xfrm xmlns:a="http://schemas.openxmlformats.org/drawingml/2006/main">
+            <a:off x="685800" y="647700"/>
+            <a:ext cx="10001250" cy="552450"/>
+          </a:xfrm>
+          <a:prstGeom xmlns:a="http://schemas.openxmlformats.org/drawingml/2006/main" prst="rect">
+            <a:avLst/>
+          </a:prstGeom>
+          <a:noFill xmlns:a="http://schemas.openxmlformats.org/drawingml/2006/main"/>
+          <a:ln xmlns:a="http://schemas.openxmlformats.org/drawingml/2006/main" w="0">
+            <a:noFill/>
+          </a:ln>
+        </p:spPr>
+        <p:txBody>
+          <a:bodyPr xmlns:a="http://schemas.openxmlformats.org/drawingml/2006/main" anchor="ctr">
+            <a:normAutofit fontScale="100000"/>
+          </a:bodyPr>
+          <a:lstStyle xmlns:a="http://schemas.openxmlformats.org/drawingml/2006/main"/>
+          <a:p xmlns:a="http://schemas.openxmlformats.org/drawingml/2006/main">
+            <a:pPr>
+              <a:defRPr sz="2700" b="1">
+                <a:solidFill>
+                  <a:srgbClr val="193650"/>
+                </a:solidFill>
+                <a:latin typeface="Microsoft YaHei"/>
+                <a:ea typeface="Microsoft YaHei"/>
+                <a:cs typeface="Microsoft YaHei"/>
+              </a:defRPr>
+            </a:pPr>
+            <a:r>
+              <a:rPr sz="2700" b="1">
+                <a:solidFill>
+                  <a:srgbClr val="193650"/>
+                </a:solidFill>
+                <a:latin typeface="Microsoft YaHei"/>
+                <a:ea typeface="Microsoft YaHei"/>
+                <a:cs typeface="Microsoft YaHei"/>
+              </a:rPr>
+              <a:t>lcx 缺陷闭环：1 项已修复，2 项待处理</a:t>
+            </a:r>
+          </a:p>
+        </p:txBody>
+      </p:sp>
+      <p:sp>
+        <p:nvSpPr>
+          <p:cNvPr id="3" name="">
+            <a:extLst xmlns:a="http://schemas.openxmlformats.org/drawingml/2006/main">
+              <a:ext uri="{FF2B5EF4-FFF2-40B4-BE49-F238E27FC236}">
+                <a16:creationId xmlns:a16="http://schemas.microsoft.com/office/drawing/2014/main" id="{356288DB-E36B-4261-93EA-E2005833BFAA}"/>
+              </a:ext>
+            </a:extLst>
+          </p:cNvPr>
+          <p:cNvSpPr>
+            <a:spLocks xmlns:a="http://schemas.openxmlformats.org/drawingml/2006/main" noGrp="1"/>
+          </p:cNvSpPr>
+          <p:nvPr/>
+        </p:nvSpPr>
+        <p:spPr>
+          <a:xfrm xmlns:a="http://schemas.openxmlformats.org/drawingml/2006/main">
+            <a:off x="609600" y="1238250"/>
+            <a:ext cx="10953750" cy="9525"/>
+          </a:xfrm>
+          <a:prstGeom xmlns:a="http://schemas.openxmlformats.org/drawingml/2006/main" prst="rect">
+            <a:avLst/>
+          </a:prstGeom>
+          <a:solidFill xmlns:a="http://schemas.openxmlformats.org/drawingml/2006/main">
+            <a:srgbClr val="CFDDE3"/>
+          </a:solidFill>
+          <a:ln xmlns:a="http://schemas.openxmlformats.org/drawingml/2006/main" w="0">
+            <a:noFill/>
+          </a:ln>
+        </p:spPr>
+      </p:sp>
+      <p:sp>
+        <p:nvSpPr>
+          <p:cNvPr id="4" name="">
+            <a:extLst xmlns:a="http://schemas.openxmlformats.org/drawingml/2006/main">
+              <a:ext uri="{FF2B5EF4-FFF2-40B4-BE49-F238E27FC236}">
+                <a16:creationId xmlns:a16="http://schemas.microsoft.com/office/drawing/2014/main" id="{ABA8B2D4-49E8-4FB3-8A4C-E3D24B1DE609}"/>
+              </a:ext>
+            </a:extLst>
+          </p:cNvPr>
+          <p:cNvSpPr>
+            <a:spLocks xmlns:a="http://schemas.openxmlformats.org/drawingml/2006/main" noGrp="1"/>
+          </p:cNvSpPr>
+          <p:nvPr/>
+        </p:nvSpPr>
+        <p:spPr>
+          <a:xfrm xmlns:a="http://schemas.openxmlformats.org/drawingml/2006/main">
+            <a:off x="11144250" y="447675"/>
+            <a:ext cx="428625" cy="333375"/>
+          </a:xfrm>
+          <a:prstGeom xmlns:a="http://schemas.openxmlformats.org/drawingml/2006/main" prst="rect">
+            <a:avLst/>
+          </a:prstGeom>
+          <a:noFill xmlns:a="http://schemas.openxmlformats.org/drawingml/2006/main"/>
+          <a:ln xmlns:a="http://schemas.openxmlformats.org/drawingml/2006/main" w="0">
+            <a:noFill/>
+          </a:ln>
+        </p:spPr>
+        <p:txBody>
+          <a:bodyPr xmlns:a="http://schemas.openxmlformats.org/drawingml/2006/main" anchor="ctr">
+            <a:normAutofit fontScale="100000"/>
+          </a:bodyPr>
+          <a:lstStyle xmlns:a="http://schemas.openxmlformats.org/drawingml/2006/main"/>
+          <a:p xmlns:a="http://schemas.openxmlformats.org/drawingml/2006/main">
+            <a:pPr>
+              <a:defRPr sz="1350" b="1">
+                <a:solidFill>
+                  <a:srgbClr val="2FA6A4"/>
+                </a:solidFill>
+                <a:latin typeface="Microsoft YaHei"/>
+                <a:ea typeface="Microsoft YaHei"/>
+                <a:cs typeface="Microsoft YaHei"/>
+              </a:defRPr>
+            </a:pPr>
+            <a:r>
+              <a:rPr sz="1350" b="1">
+                <a:solidFill>
+                  <a:srgbClr val="2FA6A4"/>
+                </a:solidFill>
+                <a:latin typeface="Microsoft YaHei"/>
+                <a:ea typeface="Microsoft YaHei"/>
+                <a:cs typeface="Microsoft YaHei"/>
+              </a:rPr>
+              <a:t>11</a:t>
+            </a:r>
+          </a:p>
+        </p:txBody>
+      </p:sp>
+      <p:sp>
+        <p:nvSpPr>
+          <p:cNvPr id="5" name="">
+            <a:extLst xmlns:a="http://schemas.openxmlformats.org/drawingml/2006/main">
+              <a:ext uri="{FF2B5EF4-FFF2-40B4-BE49-F238E27FC236}">
+                <a16:creationId xmlns:a16="http://schemas.microsoft.com/office/drawing/2014/main" id="{70B8F1A4-A9C9-4803-82F3-F7BFC7ABFC88}"/>
+              </a:ext>
+            </a:extLst>
+          </p:cNvPr>
+          <p:cNvSpPr>
+            <a:spLocks xmlns:a="http://schemas.openxmlformats.org/drawingml/2006/main" noGrp="1"/>
+          </p:cNvSpPr>
+          <p:nvPr/>
+        </p:nvSpPr>
+        <p:spPr>
+          <a:xfrm xmlns:a="http://schemas.openxmlformats.org/drawingml/2006/main">
+            <a:off x="742950" y="1619250"/>
+            <a:ext cx="2381250" cy="323850"/>
+          </a:xfrm>
+          <a:prstGeom xmlns:a="http://schemas.openxmlformats.org/drawingml/2006/main" prst="rect">
+            <a:avLst/>
+          </a:prstGeom>
+          <a:noFill xmlns:a="http://schemas.openxmlformats.org/drawingml/2006/main"/>
+          <a:ln xmlns:a="http://schemas.openxmlformats.org/drawingml/2006/main" w="0">
+            <a:noFill/>
+          </a:ln>
+        </p:spPr>
+        <p:txBody>
+          <a:bodyPr xmlns:a="http://schemas.openxmlformats.org/drawingml/2006/main" anchor="ctr">
+            <a:normAutofit fontScale="100000"/>
+          </a:bodyPr>
+          <a:lstStyle xmlns:a="http://schemas.openxmlformats.org/drawingml/2006/main"/>
+          <a:p xmlns:a="http://schemas.openxmlformats.org/drawingml/2006/main">
+            <a:pPr>
+              <a:defRPr sz="1275" b="1">
+                <a:solidFill>
+                  <a:srgbClr val="2FA6A4"/>
+                </a:solidFill>
+                <a:latin typeface="Microsoft YaHei"/>
+                <a:ea typeface="Microsoft YaHei"/>
+                <a:cs typeface="Microsoft YaHei"/>
+              </a:defRPr>
+            </a:pPr>
+            <a:r>
+              <a:rPr sz="1275" b="1">
+                <a:solidFill>
+                  <a:srgbClr val="2FA6A4"/>
+                </a:solidFill>
+                <a:latin typeface="Microsoft YaHei"/>
+                <a:ea typeface="Microsoft YaHei"/>
+                <a:cs typeface="Microsoft YaHei"/>
+              </a:rPr>
+              <a:t>DEF-LCX-FW-001</a:t>
+            </a:r>
+          </a:p>
+        </p:txBody>
+      </p:sp>
+      <p:sp>
+        <p:nvSpPr>
+          <p:cNvPr id="6" name="">
+            <a:extLst xmlns:a="http://schemas.openxmlformats.org/drawingml/2006/main">
+              <a:ext uri="{FF2B5EF4-FFF2-40B4-BE49-F238E27FC236}">
+                <a16:creationId xmlns:a16="http://schemas.microsoft.com/office/drawing/2014/main" id="{C89691DF-781E-4F76-9EB9-E60B0C7DC504}"/>
+              </a:ext>
+            </a:extLst>
+          </p:cNvPr>
+          <p:cNvSpPr>
+            <a:spLocks xmlns:a="http://schemas.openxmlformats.org/drawingml/2006/main" noGrp="1"/>
+          </p:cNvSpPr>
+          <p:nvPr/>
+        </p:nvSpPr>
+        <p:spPr>
+          <a:xfrm xmlns:a="http://schemas.openxmlformats.org/drawingml/2006/main">
+            <a:off x="742950" y="1981200"/>
+            <a:ext cx="4572000" cy="400050"/>
+          </a:xfrm>
+          <a:prstGeom xmlns:a="http://schemas.openxmlformats.org/drawingml/2006/main" prst="rect">
+            <a:avLst/>
+          </a:prstGeom>
+          <a:noFill xmlns:a="http://schemas.openxmlformats.org/drawingml/2006/main"/>
+          <a:ln xmlns:a="http://schemas.openxmlformats.org/drawingml/2006/main" w="0">
+            <a:noFill/>
+          </a:ln>
+        </p:spPr>
+        <p:txBody>
+          <a:bodyPr xmlns:a="http://schemas.openxmlformats.org/drawingml/2006/main" anchor="ctr">
+            <a:normAutofit fontScale="100000"/>
+          </a:bodyPr>
+          <a:lstStyle xmlns:a="http://schemas.openxmlformats.org/drawingml/2006/main"/>
+          <a:p xmlns:a="http://schemas.openxmlformats.org/drawingml/2006/main">
+            <a:pPr>
+              <a:defRPr sz="1800" b="1">
+                <a:solidFill>
+                  <a:srgbClr val="193650"/>
+                </a:solidFill>
+                <a:latin typeface="Microsoft YaHei"/>
+                <a:ea typeface="Microsoft YaHei"/>
+                <a:cs typeface="Microsoft YaHei"/>
+              </a:defRPr>
+            </a:pPr>
+            <a:r>
+              <a:rPr sz="1800" b="1">
+                <a:solidFill>
+                  <a:srgbClr val="193650"/>
+                </a:solidFill>
+                <a:latin typeface="Microsoft YaHei"/>
+                <a:ea typeface="Microsoft YaHei"/>
+                <a:cs typeface="Microsoft YaHei"/>
+              </a:rPr>
+              <a:t>吞吐量统计口径错误</a:t>
+            </a:r>
+          </a:p>
+        </p:txBody>
+      </p:sp>
+      <p:sp>
+        <p:nvSpPr>
+          <p:cNvPr id="7" name="">
+            <a:extLst xmlns:a="http://schemas.openxmlformats.org/drawingml/2006/main">
+              <a:ext uri="{FF2B5EF4-FFF2-40B4-BE49-F238E27FC236}">
+                <a16:creationId xmlns:a16="http://schemas.microsoft.com/office/drawing/2014/main" id="{E46624CF-3C20-4E24-8004-0A2BB70E0AC4}"/>
+              </a:ext>
+            </a:extLst>
+          </p:cNvPr>
+          <p:cNvSpPr>
+            <a:spLocks xmlns:a="http://schemas.openxmlformats.org/drawingml/2006/main" noGrp="1"/>
+          </p:cNvSpPr>
+          <p:nvPr/>
+        </p:nvSpPr>
+        <p:spPr>
+          <a:xfrm xmlns:a="http://schemas.openxmlformats.org/drawingml/2006/main">
+            <a:off x="742950" y="2400300"/>
+            <a:ext cx="8334375" cy="400050"/>
+          </a:xfrm>
+          <a:prstGeom xmlns:a="http://schemas.openxmlformats.org/drawingml/2006/main" prst="rect">
+            <a:avLst/>
+          </a:prstGeom>
+          <a:noFill xmlns:a="http://schemas.openxmlformats.org/drawingml/2006/main"/>
+          <a:ln xmlns:a="http://schemas.openxmlformats.org/drawingml/2006/main" w="0">
+            <a:noFill/>
+          </a:ln>
+        </p:spPr>
+        <p:txBody>
+          <a:bodyPr xmlns:a="http://schemas.openxmlformats.org/drawingml/2006/main" anchor="ctr">
+            <a:normAutofit fontScale="100000"/>
+          </a:bodyPr>
+          <a:lstStyle xmlns:a="http://schemas.openxmlformats.org/drawingml/2006/main"/>
+          <a:p xmlns:a="http://schemas.openxmlformats.org/drawingml/2006/main">
+            <a:pPr>
+              <a:defRPr sz="1350" b="0">
+                <a:solidFill>
+                  <a:srgbClr val="667784"/>
+                </a:solidFill>
+                <a:latin typeface="Microsoft YaHei"/>
+                <a:ea typeface="Microsoft YaHei"/>
+                <a:cs typeface="Microsoft YaHei"/>
+              </a:defRPr>
+            </a:pPr>
+            <a:r>
+              <a:rPr sz="1350" b="0">
+                <a:solidFill>
+                  <a:srgbClr val="667784"/>
+                </a:solidFill>
+                <a:latin typeface="Microsoft YaHei"/>
+                <a:ea typeface="Microsoft YaHei"/>
+                <a:cs typeface="Microsoft YaHei"/>
+              </a:rPr>
+              <a:t>65d3ea6 按生成 tokens/s 归一化；32 项测试通过</a:t>
+            </a:r>
+          </a:p>
+        </p:txBody>
+      </p:sp>
+      <p:sp>
+        <p:nvSpPr>
+          <p:cNvPr id="8" name="">
+            <a:extLst xmlns:a="http://schemas.openxmlformats.org/drawingml/2006/main">
+              <a:ext uri="{FF2B5EF4-FFF2-40B4-BE49-F238E27FC236}">
+                <a16:creationId xmlns:a16="http://schemas.microsoft.com/office/drawing/2014/main" id="{BECE741A-4BC5-440C-9A1B-6E01F419B8A0}"/>
+              </a:ext>
+            </a:extLst>
+          </p:cNvPr>
+          <p:cNvSpPr>
+            <a:spLocks xmlns:a="http://schemas.openxmlformats.org/drawingml/2006/main" noGrp="1"/>
+          </p:cNvSpPr>
+          <p:nvPr/>
+        </p:nvSpPr>
+        <p:spPr>
+          <a:xfrm xmlns:a="http://schemas.openxmlformats.org/drawingml/2006/main">
+            <a:off x="9525000" y="1924050"/>
+            <a:ext cx="1428750" cy="495300"/>
+          </a:xfrm>
+          <a:prstGeom xmlns:a="http://schemas.openxmlformats.org/drawingml/2006/main" prst="rect">
+            <a:avLst/>
+          </a:prstGeom>
+          <a:solidFill xmlns:a="http://schemas.openxmlformats.org/drawingml/2006/main">
+            <a:srgbClr val="EAF5EF"/>
+          </a:solidFill>
+          <a:ln xmlns:a="http://schemas.openxmlformats.org/drawingml/2006/main" w="0">
+            <a:noFill/>
+          </a:ln>
+        </p:spPr>
+        <p:txBody>
+          <a:bodyPr xmlns:a="http://schemas.openxmlformats.org/drawingml/2006/main" anchor="ctr">
+            <a:normAutofit fontScale="100000"/>
+          </a:bodyPr>
+          <a:lstStyle xmlns:a="http://schemas.openxmlformats.org/drawingml/2006/main"/>
+          <a:p xmlns:a="http://schemas.openxmlformats.org/drawingml/2006/main">
+            <a:pPr>
+              <a:defRPr sz="1575" b="1">
+                <a:solidFill>
+                  <a:srgbClr val="31835E"/>
+                </a:solidFill>
+                <a:latin typeface="Microsoft YaHei"/>
+                <a:ea typeface="Microsoft YaHei"/>
+                <a:cs typeface="Microsoft YaHei"/>
+              </a:defRPr>
+            </a:pPr>
+            <a:r>
+              <a:rPr sz="1575" b="1">
+                <a:solidFill>
+                  <a:srgbClr val="31835E"/>
+                </a:solidFill>
+                <a:latin typeface="Microsoft YaHei"/>
+                <a:ea typeface="Microsoft YaHei"/>
+                <a:cs typeface="Microsoft YaHei"/>
+              </a:rPr>
+              <a:t>已修复</a:t>
+            </a:r>
+          </a:p>
+        </p:txBody>
+      </p:sp>
+      <p:sp>
+        <p:nvSpPr>
+          <p:cNvPr id="9" name="">
+            <a:extLst xmlns:a="http://schemas.openxmlformats.org/drawingml/2006/main">
+              <a:ext uri="{FF2B5EF4-FFF2-40B4-BE49-F238E27FC236}">
+                <a16:creationId xmlns:a16="http://schemas.microsoft.com/office/drawing/2014/main" id="{F0F6D1B3-7500-47F7-83AF-B39EC7409AB1}"/>
+              </a:ext>
+            </a:extLst>
+          </p:cNvPr>
+          <p:cNvSpPr>
+            <a:spLocks xmlns:a="http://schemas.openxmlformats.org/drawingml/2006/main" noGrp="1"/>
+          </p:cNvSpPr>
+          <p:nvPr/>
+        </p:nvSpPr>
+        <p:spPr>
+          <a:xfrm xmlns:a="http://schemas.openxmlformats.org/drawingml/2006/main">
+            <a:off x="685800" y="2809875"/>
+            <a:ext cx="10287000" cy="9525"/>
+          </a:xfrm>
+          <a:prstGeom xmlns:a="http://schemas.openxmlformats.org/drawingml/2006/main" prst="rect">
+            <a:avLst/>
+          </a:prstGeom>
+          <a:solidFill xmlns:a="http://schemas.openxmlformats.org/drawingml/2006/main">
+            <a:srgbClr val="CFDDE3"/>
+          </a:solidFill>
+          <a:ln xmlns:a="http://schemas.openxmlformats.org/drawingml/2006/main" w="0">
+            <a:noFill/>
+          </a:ln>
+        </p:spPr>
+      </p:sp>
+      <p:sp>
+        <p:nvSpPr>
+          <p:cNvPr id="10" name="">
+            <a:extLst xmlns:a="http://schemas.openxmlformats.org/drawingml/2006/main">
+              <a:ext uri="{FF2B5EF4-FFF2-40B4-BE49-F238E27FC236}">
+                <a16:creationId xmlns:a16="http://schemas.microsoft.com/office/drawing/2014/main" id="{94C10EC9-DC64-4DBE-A28F-A0254A117687}"/>
+              </a:ext>
+            </a:extLst>
+          </p:cNvPr>
+          <p:cNvSpPr>
+            <a:spLocks xmlns:a="http://schemas.openxmlformats.org/drawingml/2006/main" noGrp="1"/>
+          </p:cNvSpPr>
+          <p:nvPr/>
+        </p:nvSpPr>
+        <p:spPr>
+          <a:xfrm xmlns:a="http://schemas.openxmlformats.org/drawingml/2006/main">
+            <a:off x="742950" y="2971800"/>
+            <a:ext cx="2381250" cy="323850"/>
+          </a:xfrm>
+          <a:prstGeom xmlns:a="http://schemas.openxmlformats.org/drawingml/2006/main" prst="rect">
+            <a:avLst/>
+          </a:prstGeom>
+          <a:noFill xmlns:a="http://schemas.openxmlformats.org/drawingml/2006/main"/>
+          <a:ln xmlns:a="http://schemas.openxmlformats.org/drawingml/2006/main" w="0">
+            <a:noFill/>
+          </a:ln>
+        </p:spPr>
+        <p:txBody>
+          <a:bodyPr xmlns:a="http://schemas.openxmlformats.org/drawingml/2006/main" anchor="ctr">
+            <a:normAutofit fontScale="100000"/>
+          </a:bodyPr>
+          <a:lstStyle xmlns:a="http://schemas.openxmlformats.org/drawingml/2006/main"/>
+          <a:p xmlns:a="http://schemas.openxmlformats.org/drawingml/2006/main">
+            <a:pPr>
+              <a:defRPr sz="1275" b="1">
+                <a:solidFill>
+                  <a:srgbClr val="2FA6A4"/>
+                </a:solidFill>
+                <a:latin typeface="Microsoft YaHei"/>
+                <a:ea typeface="Microsoft YaHei"/>
+                <a:cs typeface="Microsoft YaHei"/>
+              </a:defRPr>
+            </a:pPr>
+            <a:r>
+              <a:rPr sz="1275" b="1">
+                <a:solidFill>
+                  <a:srgbClr val="2FA6A4"/>
+                </a:solidFill>
+                <a:latin typeface="Microsoft YaHei"/>
+                <a:ea typeface="Microsoft YaHei"/>
+                <a:cs typeface="Microsoft YaHei"/>
+              </a:rPr>
+              <a:t>DEF-LCX-AI-001</a:t>
+            </a:r>
+          </a:p>
+        </p:txBody>
+      </p:sp>
+      <p:sp>
+        <p:nvSpPr>
+          <p:cNvPr id="11" name="">
+            <a:extLst xmlns:a="http://schemas.openxmlformats.org/drawingml/2006/main">
+              <a:ext uri="{FF2B5EF4-FFF2-40B4-BE49-F238E27FC236}">
+                <a16:creationId xmlns:a16="http://schemas.microsoft.com/office/drawing/2014/main" id="{2FB9EA8C-45F9-4BC1-ABF6-FDD128E0A0F3}"/>
+              </a:ext>
+            </a:extLst>
+          </p:cNvPr>
+          <p:cNvSpPr>
+            <a:spLocks xmlns:a="http://schemas.openxmlformats.org/drawingml/2006/main" noGrp="1"/>
+          </p:cNvSpPr>
+          <p:nvPr/>
+        </p:nvSpPr>
+        <p:spPr>
+          <a:xfrm xmlns:a="http://schemas.openxmlformats.org/drawingml/2006/main">
+            <a:off x="742950" y="3333750"/>
+            <a:ext cx="4572000" cy="400050"/>
+          </a:xfrm>
+          <a:prstGeom xmlns:a="http://schemas.openxmlformats.org/drawingml/2006/main" prst="rect">
+            <a:avLst/>
+          </a:prstGeom>
+          <a:noFill xmlns:a="http://schemas.openxmlformats.org/drawingml/2006/main"/>
+          <a:ln xmlns:a="http://schemas.openxmlformats.org/drawingml/2006/main" w="0">
+            <a:noFill/>
+          </a:ln>
+        </p:spPr>
+        <p:txBody>
+          <a:bodyPr xmlns:a="http://schemas.openxmlformats.org/drawingml/2006/main" anchor="ctr">
+            <a:normAutofit fontScale="100000"/>
+          </a:bodyPr>
+          <a:lstStyle xmlns:a="http://schemas.openxmlformats.org/drawingml/2006/main"/>
+          <a:p xmlns:a="http://schemas.openxmlformats.org/drawingml/2006/main">
+            <a:pPr>
+              <a:defRPr sz="1800" b="1">
+                <a:solidFill>
+                  <a:srgbClr val="193650"/>
+                </a:solidFill>
+                <a:latin typeface="Microsoft YaHei"/>
+                <a:ea typeface="Microsoft YaHei"/>
+                <a:cs typeface="Microsoft YaHei"/>
+              </a:defRPr>
+            </a:pPr>
+            <a:r>
+              <a:rPr sz="1800" b="1">
+                <a:solidFill>
+                  <a:srgbClr val="193650"/>
+                </a:solidFill>
+                <a:latin typeface="Microsoft YaHei"/>
+                <a:ea typeface="Microsoft YaHei"/>
+                <a:cs typeface="Microsoft YaHei"/>
+              </a:rPr>
+              <a:t>低对比度三角形计数错误</a:t>
+            </a:r>
+          </a:p>
+        </p:txBody>
+      </p:sp>
+      <p:sp>
+        <p:nvSpPr>
+          <p:cNvPr id="12" name="">
+            <a:extLst xmlns:a="http://schemas.openxmlformats.org/drawingml/2006/main">
+              <a:ext uri="{FF2B5EF4-FFF2-40B4-BE49-F238E27FC236}">
+                <a16:creationId xmlns:a16="http://schemas.microsoft.com/office/drawing/2014/main" id="{47AE950B-480B-41AC-B1E9-B16A000839F1}"/>
+              </a:ext>
+            </a:extLst>
+          </p:cNvPr>
+          <p:cNvSpPr>
+            <a:spLocks xmlns:a="http://schemas.openxmlformats.org/drawingml/2006/main" noGrp="1"/>
+          </p:cNvSpPr>
+          <p:nvPr/>
+        </p:nvSpPr>
+        <p:spPr>
+          <a:xfrm xmlns:a="http://schemas.openxmlformats.org/drawingml/2006/main">
+            <a:off x="742950" y="3752850"/>
+            <a:ext cx="8334375" cy="400050"/>
+          </a:xfrm>
+          <a:prstGeom xmlns:a="http://schemas.openxmlformats.org/drawingml/2006/main" prst="rect">
+            <a:avLst/>
+          </a:prstGeom>
+          <a:noFill xmlns:a="http://schemas.openxmlformats.org/drawingml/2006/main"/>
+          <a:ln xmlns:a="http://schemas.openxmlformats.org/drawingml/2006/main" w="0">
+            <a:noFill/>
+          </a:ln>
+        </p:spPr>
+        <p:txBody>
+          <a:bodyPr xmlns:a="http://schemas.openxmlformats.org/drawingml/2006/main" anchor="ctr">
+            <a:normAutofit fontScale="100000"/>
+          </a:bodyPr>
+          <a:lstStyle xmlns:a="http://schemas.openxmlformats.org/drawingml/2006/main"/>
+          <a:p xmlns:a="http://schemas.openxmlformats.org/drawingml/2006/main">
+            <a:pPr>
+              <a:defRPr sz="1350" b="0">
+                <a:solidFill>
+                  <a:srgbClr val="667784"/>
+                </a:solidFill>
+                <a:latin typeface="Microsoft YaHei"/>
+                <a:ea typeface="Microsoft YaHei"/>
+                <a:cs typeface="Microsoft YaHei"/>
+              </a:defRPr>
+            </a:pPr>
+            <a:r>
+              <a:rPr sz="1350" b="0">
+                <a:solidFill>
+                  <a:srgbClr val="667784"/>
+                </a:solidFill>
+                <a:latin typeface="Microsoft YaHei"/>
+                <a:ea typeface="Microsoft YaHei"/>
+                <a:cs typeface="Microsoft YaHei"/>
+              </a:rPr>
+              <a:t>Baseline 与 MMSep 均为 0/6，稳定输出 TWO</a:t>
+            </a:r>
+          </a:p>
+        </p:txBody>
+      </p:sp>
+      <p:sp>
+        <p:nvSpPr>
+          <p:cNvPr id="13" name="">
+            <a:extLst xmlns:a="http://schemas.openxmlformats.org/drawingml/2006/main">
+              <a:ext uri="{FF2B5EF4-FFF2-40B4-BE49-F238E27FC236}">
+                <a16:creationId xmlns:a16="http://schemas.microsoft.com/office/drawing/2014/main" id="{7F1EBC4F-2617-4CC1-9DA2-AA97D55633EB}"/>
+              </a:ext>
+            </a:extLst>
+          </p:cNvPr>
+          <p:cNvSpPr>
+            <a:spLocks xmlns:a="http://schemas.openxmlformats.org/drawingml/2006/main" noGrp="1"/>
+          </p:cNvSpPr>
+          <p:nvPr/>
+        </p:nvSpPr>
+        <p:spPr>
+          <a:xfrm xmlns:a="http://schemas.openxmlformats.org/drawingml/2006/main">
+            <a:off x="9525000" y="3276600"/>
+            <a:ext cx="1428750" cy="495300"/>
+          </a:xfrm>
+          <a:prstGeom xmlns:a="http://schemas.openxmlformats.org/drawingml/2006/main" prst="rect">
+            <a:avLst/>
+          </a:prstGeom>
+          <a:solidFill xmlns:a="http://schemas.openxmlformats.org/drawingml/2006/main">
+            <a:srgbClr val="FFF0EF"/>
+          </a:solidFill>
+          <a:ln xmlns:a="http://schemas.openxmlformats.org/drawingml/2006/main" w="0">
+            <a:noFill/>
+          </a:ln>
+        </p:spPr>
+        <p:txBody>
+          <a:bodyPr xmlns:a="http://schemas.openxmlformats.org/drawingml/2006/main" anchor="ctr">
+            <a:normAutofit fontScale="100000"/>
+          </a:bodyPr>
+          <a:lstStyle xmlns:a="http://schemas.openxmlformats.org/drawingml/2006/main"/>
+          <a:p xmlns:a="http://schemas.openxmlformats.org/drawingml/2006/main">
+            <a:pPr>
+              <a:defRPr sz="1575" b="1">
+                <a:solidFill>
+                  <a:srgbClr val="BF4B48"/>
+                </a:solidFill>
+                <a:latin typeface="Microsoft YaHei"/>
+                <a:ea typeface="Microsoft YaHei"/>
+                <a:cs typeface="Microsoft YaHei"/>
+              </a:defRPr>
+            </a:pPr>
+            <a:r>
+              <a:rPr sz="1575" b="1">
+                <a:solidFill>
+                  <a:srgbClr val="BF4B48"/>
+                </a:solidFill>
+                <a:latin typeface="Microsoft YaHei"/>
+                <a:ea typeface="Microsoft YaHei"/>
+                <a:cs typeface="Microsoft YaHei"/>
+              </a:rPr>
+              <a:t>未修复</a:t>
+            </a:r>
+          </a:p>
+        </p:txBody>
+      </p:sp>
+      <p:sp>
+        <p:nvSpPr>
+          <p:cNvPr id="14" name="">
+            <a:extLst xmlns:a="http://schemas.openxmlformats.org/drawingml/2006/main">
+              <a:ext uri="{FF2B5EF4-FFF2-40B4-BE49-F238E27FC236}">
+                <a16:creationId xmlns:a16="http://schemas.microsoft.com/office/drawing/2014/main" id="{5A87EF1F-F7F5-44DC-A447-CBC6B3419F66}"/>
+              </a:ext>
+            </a:extLst>
+          </p:cNvPr>
+          <p:cNvSpPr>
+            <a:spLocks xmlns:a="http://schemas.openxmlformats.org/drawingml/2006/main" noGrp="1"/>
+          </p:cNvSpPr>
+          <p:nvPr/>
+        </p:nvSpPr>
+        <p:spPr>
+          <a:xfrm xmlns:a="http://schemas.openxmlformats.org/drawingml/2006/main">
+            <a:off x="685800" y="4162425"/>
+            <a:ext cx="10287000" cy="9525"/>
+          </a:xfrm>
+          <a:prstGeom xmlns:a="http://schemas.openxmlformats.org/drawingml/2006/main" prst="rect">
+            <a:avLst/>
+          </a:prstGeom>
+          <a:solidFill xmlns:a="http://schemas.openxmlformats.org/drawingml/2006/main">
+            <a:srgbClr val="CFDDE3"/>
+          </a:solidFill>
+          <a:ln xmlns:a="http://schemas.openxmlformats.org/drawingml/2006/main" w="0">
+            <a:noFill/>
+          </a:ln>
+        </p:spPr>
+      </p:sp>
+      <p:sp>
+        <p:nvSpPr>
+          <p:cNvPr id="15" name="">
+            <a:extLst xmlns:a="http://schemas.openxmlformats.org/drawingml/2006/main">
+              <a:ext uri="{FF2B5EF4-FFF2-40B4-BE49-F238E27FC236}">
+                <a16:creationId xmlns:a16="http://schemas.microsoft.com/office/drawing/2014/main" id="{CC0CC85B-9D90-4FAC-97B8-2CAE9BEB505F}"/>
+              </a:ext>
+            </a:extLst>
+          </p:cNvPr>
+          <p:cNvSpPr>
+            <a:spLocks xmlns:a="http://schemas.openxmlformats.org/drawingml/2006/main" noGrp="1"/>
+          </p:cNvSpPr>
+          <p:nvPr/>
+        </p:nvSpPr>
+        <p:spPr>
+          <a:xfrm xmlns:a="http://schemas.openxmlformats.org/drawingml/2006/main">
+            <a:off x="742950" y="4324350"/>
+            <a:ext cx="2381250" cy="323850"/>
+          </a:xfrm>
+          <a:prstGeom xmlns:a="http://schemas.openxmlformats.org/drawingml/2006/main" prst="rect">
+            <a:avLst/>
+          </a:prstGeom>
+          <a:noFill xmlns:a="http://schemas.openxmlformats.org/drawingml/2006/main"/>
+          <a:ln xmlns:a="http://schemas.openxmlformats.org/drawingml/2006/main" w="0">
+            <a:noFill/>
+          </a:ln>
+        </p:spPr>
+        <p:txBody>
+          <a:bodyPr xmlns:a="http://schemas.openxmlformats.org/drawingml/2006/main" anchor="ctr">
+            <a:normAutofit fontScale="100000"/>
+          </a:bodyPr>
+          <a:lstStyle xmlns:a="http://schemas.openxmlformats.org/drawingml/2006/main"/>
+          <a:p xmlns:a="http://schemas.openxmlformats.org/drawingml/2006/main">
+            <a:pPr>
+              <a:defRPr sz="1275" b="1">
+                <a:solidFill>
+                  <a:srgbClr val="2FA6A4"/>
+                </a:solidFill>
+                <a:latin typeface="Microsoft YaHei"/>
+                <a:ea typeface="Microsoft YaHei"/>
+                <a:cs typeface="Microsoft YaHei"/>
+              </a:defRPr>
+            </a:pPr>
+            <a:r>
+              <a:rPr sz="1275" b="1">
+                <a:solidFill>
+                  <a:srgbClr val="2FA6A4"/>
+                </a:solidFill>
+                <a:latin typeface="Microsoft YaHei"/>
+                <a:ea typeface="Microsoft YaHei"/>
+                <a:cs typeface="Microsoft YaHei"/>
+              </a:rPr>
+              <a:t>DEF-LCX-PERF-001</a:t>
+            </a:r>
+          </a:p>
+        </p:txBody>
+      </p:sp>
+      <p:sp>
+        <p:nvSpPr>
+          <p:cNvPr id="16" name="">
+            <a:extLst xmlns:a="http://schemas.openxmlformats.org/drawingml/2006/main">
+              <a:ext uri="{FF2B5EF4-FFF2-40B4-BE49-F238E27FC236}">
+                <a16:creationId xmlns:a16="http://schemas.microsoft.com/office/drawing/2014/main" id="{99260846-CCDC-45C9-9990-22D38B6AB746}"/>
+              </a:ext>
+            </a:extLst>
+          </p:cNvPr>
+          <p:cNvSpPr>
+            <a:spLocks xmlns:a="http://schemas.openxmlformats.org/drawingml/2006/main" noGrp="1"/>
+          </p:cNvSpPr>
+          <p:nvPr/>
+        </p:nvSpPr>
+        <p:spPr>
+          <a:xfrm xmlns:a="http://schemas.openxmlformats.org/drawingml/2006/main">
+            <a:off x="742950" y="4686300"/>
+            <a:ext cx="4572000" cy="400050"/>
+          </a:xfrm>
+          <a:prstGeom xmlns:a="http://schemas.openxmlformats.org/drawingml/2006/main" prst="rect">
+            <a:avLst/>
+          </a:prstGeom>
+          <a:noFill xmlns:a="http://schemas.openxmlformats.org/drawingml/2006/main"/>
+          <a:ln xmlns:a="http://schemas.openxmlformats.org/drawingml/2006/main" w="0">
+            <a:noFill/>
+          </a:ln>
+        </p:spPr>
+        <p:txBody>
+          <a:bodyPr xmlns:a="http://schemas.openxmlformats.org/drawingml/2006/main" anchor="ctr">
+            <a:normAutofit fontScale="100000"/>
+          </a:bodyPr>
+          <a:lstStyle xmlns:a="http://schemas.openxmlformats.org/drawingml/2006/main"/>
+          <a:p xmlns:a="http://schemas.openxmlformats.org/drawingml/2006/main">
+            <a:pPr>
+              <a:defRPr sz="1800" b="1">
+                <a:solidFill>
+                  <a:srgbClr val="193650"/>
+                </a:solidFill>
+                <a:latin typeface="Microsoft YaHei"/>
+                <a:ea typeface="Microsoft YaHei"/>
+                <a:cs typeface="Microsoft YaHei"/>
+              </a:defRPr>
+            </a:pPr>
+            <a:r>
+              <a:rPr sz="1800" b="1">
+                <a:solidFill>
+                  <a:srgbClr val="193650"/>
+                </a:solidFill>
+                <a:latin typeface="Microsoft YaHei"/>
+                <a:ea typeface="Microsoft YaHei"/>
+                <a:cs typeface="Microsoft YaHei"/>
+              </a:rPr>
+              <a:t>MMSep 解码吞吐未达目标</a:t>
+            </a:r>
+          </a:p>
+        </p:txBody>
+      </p:sp>
+      <p:sp>
+        <p:nvSpPr>
+          <p:cNvPr id="17" name="">
+            <a:extLst xmlns:a="http://schemas.openxmlformats.org/drawingml/2006/main">
+              <a:ext uri="{FF2B5EF4-FFF2-40B4-BE49-F238E27FC236}">
+                <a16:creationId xmlns:a16="http://schemas.microsoft.com/office/drawing/2014/main" id="{A4EB3B3B-2138-402E-8F99-3CE5E7CD62B9}"/>
+              </a:ext>
+            </a:extLst>
+          </p:cNvPr>
+          <p:cNvSpPr>
+            <a:spLocks xmlns:a="http://schemas.openxmlformats.org/drawingml/2006/main" noGrp="1"/>
+          </p:cNvSpPr>
+          <p:nvPr/>
+        </p:nvSpPr>
+        <p:spPr>
+          <a:xfrm xmlns:a="http://schemas.openxmlformats.org/drawingml/2006/main">
+            <a:off x="742950" y="5105400"/>
+            <a:ext cx="8334375" cy="400050"/>
+          </a:xfrm>
+          <a:prstGeom xmlns:a="http://schemas.openxmlformats.org/drawingml/2006/main" prst="rect">
+            <a:avLst/>
+          </a:prstGeom>
+          <a:noFill xmlns:a="http://schemas.openxmlformats.org/drawingml/2006/main"/>
+          <a:ln xmlns:a="http://schemas.openxmlformats.org/drawingml/2006/main" w="0">
+            <a:noFill/>
+          </a:ln>
+        </p:spPr>
+        <p:txBody>
+          <a:bodyPr xmlns:a="http://schemas.openxmlformats.org/drawingml/2006/main" anchor="ctr">
+            <a:normAutofit fontScale="100000"/>
+          </a:bodyPr>
+          <a:lstStyle xmlns:a="http://schemas.openxmlformats.org/drawingml/2006/main"/>
+          <a:p xmlns:a="http://schemas.openxmlformats.org/drawingml/2006/main">
+            <a:pPr>
+              <a:defRPr sz="1350" b="0">
+                <a:solidFill>
+                  <a:srgbClr val="667784"/>
+                </a:solidFill>
+                <a:latin typeface="Microsoft YaHei"/>
+                <a:ea typeface="Microsoft YaHei"/>
+                <a:cs typeface="Microsoft YaHei"/>
+              </a:defRPr>
+            </a:pPr>
+            <a:r>
+              <a:rPr sz="1350" b="0">
+                <a:solidFill>
+                  <a:srgbClr val="667784"/>
+                </a:solidFill>
+                <a:latin typeface="Microsoft YaHei"/>
+                <a:ea typeface="Microsoft YaHei"/>
+                <a:cs typeface="Microsoft YaHei"/>
+              </a:rPr>
+              <a:t>KV 减少约 72%，但倍率为 0.928× 与 0.948×</a:t>
+            </a:r>
+          </a:p>
+        </p:txBody>
+      </p:sp>
+      <p:sp>
+        <p:nvSpPr>
+          <p:cNvPr id="18" name="">
+            <a:extLst xmlns:a="http://schemas.openxmlformats.org/drawingml/2006/main">
+              <a:ext uri="{FF2B5EF4-FFF2-40B4-BE49-F238E27FC236}">
+                <a16:creationId xmlns:a16="http://schemas.microsoft.com/office/drawing/2014/main" id="{E1063905-5518-43BD-9E01-32769FF8A946}"/>
+              </a:ext>
+            </a:extLst>
+          </p:cNvPr>
+          <p:cNvSpPr>
+            <a:spLocks xmlns:a="http://schemas.openxmlformats.org/drawingml/2006/main" noGrp="1"/>
+          </p:cNvSpPr>
+          <p:nvPr/>
+        </p:nvSpPr>
+        <p:spPr>
+          <a:xfrm xmlns:a="http://schemas.openxmlformats.org/drawingml/2006/main">
+            <a:off x="9525000" y="4629150"/>
+            <a:ext cx="1428750" cy="495300"/>
+          </a:xfrm>
+          <a:prstGeom xmlns:a="http://schemas.openxmlformats.org/drawingml/2006/main" prst="rect">
+            <a:avLst/>
+          </a:prstGeom>
+          <a:solidFill xmlns:a="http://schemas.openxmlformats.org/drawingml/2006/main">
+            <a:srgbClr val="FFF0EF"/>
+          </a:solidFill>
+          <a:ln xmlns:a="http://schemas.openxmlformats.org/drawingml/2006/main" w="0">
+            <a:noFill/>
+          </a:ln>
+        </p:spPr>
+        <p:txBody>
+          <a:bodyPr xmlns:a="http://schemas.openxmlformats.org/drawingml/2006/main" anchor="ctr">
+            <a:normAutofit fontScale="100000"/>
+          </a:bodyPr>
+          <a:lstStyle xmlns:a="http://schemas.openxmlformats.org/drawingml/2006/main"/>
+          <a:p xmlns:a="http://schemas.openxmlformats.org/drawingml/2006/main">
+            <a:pPr>
+              <a:defRPr sz="1575" b="1">
+                <a:solidFill>
+                  <a:srgbClr val="BF4B48"/>
+                </a:solidFill>
+                <a:latin typeface="Microsoft YaHei"/>
+                <a:ea typeface="Microsoft YaHei"/>
+                <a:cs typeface="Microsoft YaHei"/>
+              </a:defRPr>
+            </a:pPr>
+            <a:r>
+              <a:rPr sz="1575" b="1">
+                <a:solidFill>
+                  <a:srgbClr val="BF4B48"/>
+                </a:solidFill>
+                <a:latin typeface="Microsoft YaHei"/>
+                <a:ea typeface="Microsoft YaHei"/>
+                <a:cs typeface="Microsoft YaHei"/>
+              </a:rPr>
+              <a:t>未修复</a:t>
+            </a:r>
+          </a:p>
+        </p:txBody>
+      </p:sp>
+      <p:sp>
+        <p:nvSpPr>
+          <p:cNvPr id="19" name="">
+            <a:extLst xmlns:a="http://schemas.openxmlformats.org/drawingml/2006/main">
+              <a:ext uri="{FF2B5EF4-FFF2-40B4-BE49-F238E27FC236}">
+                <a16:creationId xmlns:a16="http://schemas.microsoft.com/office/drawing/2014/main" id="{8C3B301C-7710-4088-8201-B0AFDCA1BF38}"/>
+              </a:ext>
+            </a:extLst>
+          </p:cNvPr>
+          <p:cNvSpPr>
+            <a:spLocks xmlns:a="http://schemas.openxmlformats.org/drawingml/2006/main" noGrp="1"/>
+          </p:cNvSpPr>
+          <p:nvPr/>
+        </p:nvSpPr>
+        <p:spPr>
+          <a:xfrm xmlns:a="http://schemas.openxmlformats.org/drawingml/2006/main">
+            <a:off x="685800" y="5514975"/>
+            <a:ext cx="10287000" cy="9525"/>
+          </a:xfrm>
+          <a:prstGeom xmlns:a="http://schemas.openxmlformats.org/drawingml/2006/main" prst="rect">
+            <a:avLst/>
+          </a:prstGeom>
+          <a:solidFill xmlns:a="http://schemas.openxmlformats.org/drawingml/2006/main">
+            <a:srgbClr val="CFDDE3"/>
+          </a:solidFill>
+          <a:ln xmlns:a="http://schemas.openxmlformats.org/drawingml/2006/main" w="0">
+            <a:noFill/>
+          </a:ln>
+        </p:spPr>
+      </p:sp>
+      <p:sp>
+        <p:nvSpPr>
+          <p:cNvPr id="20" name="">
+            <a:extLst xmlns:a="http://schemas.openxmlformats.org/drawingml/2006/main">
+              <a:ext uri="{FF2B5EF4-FFF2-40B4-BE49-F238E27FC236}">
+                <a16:creationId xmlns:a16="http://schemas.microsoft.com/office/drawing/2014/main" id="{473B613C-FE2C-4482-886D-B2997ED9A8AB}"/>
+              </a:ext>
+            </a:extLst>
+          </p:cNvPr>
+          <p:cNvSpPr>
+            <a:spLocks xmlns:a="http://schemas.openxmlformats.org/drawingml/2006/main" noGrp="1"/>
+          </p:cNvSpPr>
+          <p:nvPr/>
+        </p:nvSpPr>
+        <p:spPr>
+          <a:xfrm xmlns:a="http://schemas.openxmlformats.org/drawingml/2006/main">
+            <a:off x="742950" y="5810250"/>
+            <a:ext cx="9525000" cy="400050"/>
+          </a:xfrm>
+          <a:prstGeom xmlns:a="http://schemas.openxmlformats.org/drawingml/2006/main" prst="rect">
+            <a:avLst/>
+          </a:prstGeom>
+          <a:noFill xmlns:a="http://schemas.openxmlformats.org/drawingml/2006/main"/>
+          <a:ln xmlns:a="http://schemas.openxmlformats.org/drawingml/2006/main" w="0">
+            <a:noFill/>
+          </a:ln>
+        </p:spPr>
+        <p:txBody>
+          <a:bodyPr xmlns:a="http://schemas.openxmlformats.org/drawingml/2006/main" anchor="ctr">
+            <a:normAutofit fontScale="100000"/>
+          </a:bodyPr>
+          <a:lstStyle xmlns:a="http://schemas.openxmlformats.org/drawingml/2006/main"/>
+          <a:p xmlns:a="http://schemas.openxmlformats.org/drawingml/2006/main">
+            <a:pPr>
+              <a:defRPr sz="1350" b="0">
+                <a:solidFill>
+                  <a:srgbClr val="287896"/>
+                </a:solidFill>
+                <a:latin typeface="Microsoft YaHei"/>
+                <a:ea typeface="Microsoft YaHei"/>
+                <a:cs typeface="Microsoft YaHei"/>
+              </a:defRPr>
+            </a:pPr>
+            <a:r>
+              <a:rPr sz="1350" b="0">
+                <a:solidFill>
+                  <a:srgbClr val="287896"/>
+                </a:solidFill>
+                <a:latin typeface="Microsoft YaHei"/>
+                <a:ea typeface="Microsoft YaHei"/>
+                <a:cs typeface="Microsoft YaHei"/>
+              </a:rPr>
+              <a:t>完整字段、复现步骤、原始证据与修复验证见《模块二AI测试缺陷清单.docx》。</a:t>
+            </a:r>
+          </a:p>
+        </p:txBody>
+      </p:sp>
+      <p:sp>
+        <p:nvSpPr>
+          <p:cNvPr id="21" name="">
+            <a:extLst xmlns:a="http://schemas.openxmlformats.org/drawingml/2006/main">
+              <a:ext uri="{FF2B5EF4-FFF2-40B4-BE49-F238E27FC236}">
+                <a16:creationId xmlns:a16="http://schemas.microsoft.com/office/drawing/2014/main" id="{03AA0EF7-ACCC-4DD0-A42F-99EF23EA3AC3}"/>
+              </a:ext>
+            </a:extLst>
+          </p:cNvPr>
+          <p:cNvSpPr>
+            <a:spLocks xmlns:a="http://schemas.openxmlformats.org/drawingml/2006/main" noGrp="1"/>
+          </p:cNvSpPr>
+          <p:nvPr/>
+        </p:nvSpPr>
+        <p:spPr>
+          <a:xfrm xmlns:a="http://schemas.openxmlformats.org/drawingml/2006/main">
+            <a:off x="685800" y="6477000"/>
+            <a:ext cx="6096000" cy="190500"/>
+          </a:xfrm>
+          <a:prstGeom xmlns:a="http://schemas.openxmlformats.org/drawingml/2006/main" prst="rect">
+            <a:avLst/>
+          </a:prstGeom>
+          <a:noFill xmlns:a="http://schemas.openxmlformats.org/drawingml/2006/main"/>
+          <a:ln xmlns:a="http://schemas.openxmlformats.org/drawingml/2006/main" w="0">
+            <a:noFill/>
+          </a:ln>
+        </p:spPr>
+        <p:txBody>
+          <a:bodyPr xmlns:a="http://schemas.openxmlformats.org/drawingml/2006/main" anchor="ctr">
+            <a:normAutofit fontScale="78788"/>
+          </a:bodyPr>
+          <a:lstStyle xmlns:a="http://schemas.openxmlformats.org/drawingml/2006/main"/>
+          <a:p xmlns:a="http://schemas.openxmlformats.org/drawingml/2006/main">
+            <a:pPr>
+              <a:defRPr sz="825" b="0">
+                <a:solidFill>
+                  <a:srgbClr val="667784"/>
+                </a:solidFill>
+                <a:latin typeface="Microsoft YaHei"/>
+                <a:ea typeface="Microsoft YaHei"/>
+                <a:cs typeface="Microsoft YaHei"/>
+              </a:defRPr>
+            </a:pPr>
+            <a:r>
+              <a:rPr sz="825" b="0">
+                <a:solidFill>
+                  <a:srgbClr val="667784"/>
+                </a:solidFill>
+                <a:latin typeface="Microsoft YaHei"/>
+                <a:ea typeface="Microsoft YaHei"/>
+                <a:cs typeface="Microsoft YaHei"/>
+              </a:rPr>
+              <a:t>module2-formal-0bd7e93-001  ·  source 0bd7e93  ·  analysis 65d3ea6</a:t>
+            </a:r>
+          </a:p>
+        </p:txBody>
+      </p:sp>
+    </p:spTree>
+    <p:extLst>
+      <p:ext uri="{BB962C8B-B14F-4D97-AF65-F5344CB8AC3E}">
+        <p14:creationId xmlns:p14="http://schemas.microsoft.com/office/powerpoint/2010/main" val="866324427"/>
+      </p:ext>
+    </p:extLst>
+  </p:cSld>
+</p:sld>
+</file>
+
+<file path=ppt/slides/slide12.xml><?xml version="1.0" encoding="utf-8"?>
+<p:sld xmlns:p="http://schemas.openxmlformats.org/presentationml/2006/main">
+  <p:cSld>
+    <p:bg>
+      <p:bgPr>
+        <a:solidFill xmlns:a="http://schemas.openxmlformats.org/drawingml/2006/main">
+          <a:srgbClr val="FFFFFF"/>
+        </a:solidFill>
+      </p:bgPr>
+    </p:bg>
+    <p:spTree>
+      <p:nvGrpSpPr>
+        <p:cNvPr id="1" name=""/>
+        <p:cNvGrpSpPr/>
+        <p:nvPr/>
+      </p:nvGrpSpPr>
+      <p:grpSpPr>
+        <a:xfrm xmlns:a="http://schemas.openxmlformats.org/drawingml/2006/main"/>
+      </p:grpSpPr>
+      <p:sp>
+        <p:nvSpPr>
+          <p:cNvPr id="19" name="">
+            <a:extLst xmlns:a="http://schemas.openxmlformats.org/drawingml/2006/main">
+              <a:ext uri="{FF2B5EF4-FFF2-40B4-BE49-F238E27FC236}">
+                <a16:creationId xmlns:a16="http://schemas.microsoft.com/office/drawing/2014/main" id="{224628A2-024F-4528-A5D1-EBA557187294}"/>
+              </a:ext>
+            </a:extLst>
+          </p:cNvPr>
+          <p:cNvSpPr>
+            <a:spLocks xmlns:a="http://schemas.openxmlformats.org/drawingml/2006/main" noGrp="1"/>
+          </p:cNvSpPr>
+          <p:nvPr/>
+        </p:nvSpPr>
+        <p:spPr>
+          <a:xfrm xmlns:a="http://schemas.openxmlformats.org/drawingml/2006/main">
+            <a:off x="685800" y="304800"/>
+            <a:ext cx="3429000" cy="285750"/>
+          </a:xfrm>
+          <a:prstGeom xmlns:a="http://schemas.openxmlformats.org/drawingml/2006/main" prst="rect">
+            <a:avLst/>
+          </a:prstGeom>
+          <a:noFill xmlns:a="http://schemas.openxmlformats.org/drawingml/2006/main"/>
+          <a:ln xmlns:a="http://schemas.openxmlformats.org/drawingml/2006/main" w="0">
+            <a:noFill/>
+          </a:ln>
+        </p:spPr>
+        <p:txBody>
+          <a:bodyPr xmlns:a="http://schemas.openxmlformats.org/drawingml/2006/main" anchor="ctr">
+            <a:normAutofit fontScale="100000"/>
+          </a:bodyPr>
+          <a:lstStyle xmlns:a="http://schemas.openxmlformats.org/drawingml/2006/main"/>
+          <a:p xmlns:a="http://schemas.openxmlformats.org/drawingml/2006/main">
+            <a:pPr>
+              <a:defRPr sz="1125" b="1">
+                <a:solidFill>
+                  <a:srgbClr val="2FA6A4"/>
+                </a:solidFill>
+                <a:latin typeface="Microsoft YaHei"/>
+                <a:ea typeface="Microsoft YaHei"/>
+                <a:cs typeface="Microsoft YaHei"/>
+              </a:defRPr>
+            </a:pPr>
+            <a:r>
+              <a:rPr sz="1125" b="1">
+                <a:solidFill>
+                  <a:srgbClr val="2FA6A4"/>
+                </a:solidFill>
+                <a:latin typeface="Microsoft YaHei"/>
+                <a:ea typeface="Microsoft YaHei"/>
+                <a:cs typeface="Microsoft YaHei"/>
+              </a:rPr>
+              <a:t>11  DEMO</a:t>
+            </a:r>
+          </a:p>
+        </p:txBody>
+      </p:sp>
+      <p:sp>
+        <p:nvSpPr>
+          <p:cNvPr id="2" name="">
+            <a:extLst xmlns:a="http://schemas.openxmlformats.org/drawingml/2006/main">
+              <a:ext uri="{FF2B5EF4-FFF2-40B4-BE49-F238E27FC236}">
+                <a16:creationId xmlns:a16="http://schemas.microsoft.com/office/drawing/2014/main" id="{A2C1C14D-4F83-4D57-8EB7-09EA2623F0E4}"/>
+              </a:ext>
+            </a:extLst>
+          </p:cNvPr>
+          <p:cNvSpPr>
+            <a:spLocks xmlns:a="http://schemas.openxmlformats.org/drawingml/2006/main" noGrp="1"/>
+          </p:cNvSpPr>
+          <p:nvPr/>
+        </p:nvSpPr>
+        <p:spPr>
+          <a:xfrm xmlns:a="http://schemas.openxmlformats.org/drawingml/2006/main">
+            <a:off x="685800" y="647700"/>
+            <a:ext cx="10001250" cy="552450"/>
+          </a:xfrm>
+          <a:prstGeom xmlns:a="http://schemas.openxmlformats.org/drawingml/2006/main" prst="rect">
+            <a:avLst/>
+          </a:prstGeom>
+          <a:noFill xmlns:a="http://schemas.openxmlformats.org/drawingml/2006/main"/>
+          <a:ln xmlns:a="http://schemas.openxmlformats.org/drawingml/2006/main" w="0">
+            <a:noFill/>
+          </a:ln>
+        </p:spPr>
+        <p:txBody>
+          <a:bodyPr xmlns:a="http://schemas.openxmlformats.org/drawingml/2006/main" anchor="ctr">
+            <a:normAutofit fontScale="100000"/>
+          </a:bodyPr>
+          <a:lstStyle xmlns:a="http://schemas.openxmlformats.org/drawingml/2006/main"/>
+          <a:p xmlns:a="http://schemas.openxmlformats.org/drawingml/2006/main">
+            <a:pPr>
+              <a:defRPr sz="2700" b="1">
+                <a:solidFill>
+                  <a:srgbClr val="193650"/>
+                </a:solidFill>
+                <a:latin typeface="Microsoft YaHei"/>
+                <a:ea typeface="Microsoft YaHei"/>
+                <a:cs typeface="Microsoft YaHei"/>
+              </a:defRPr>
+            </a:pPr>
+            <a:r>
+              <a:rPr sz="2700" b="1">
+                <a:solidFill>
+                  <a:srgbClr val="193650"/>
+                </a:solidFill>
+                <a:latin typeface="Microsoft YaHei"/>
+                <a:ea typeface="Microsoft YaHei"/>
+                <a:cs typeface="Microsoft YaHei"/>
+              </a:rPr>
+              <a:t>演示操作与证据定位</a:t>
+            </a:r>
+          </a:p>
+        </p:txBody>
+      </p:sp>
+      <p:sp>
+        <p:nvSpPr>
+          <p:cNvPr id="3" name="">
+            <a:extLst xmlns:a="http://schemas.openxmlformats.org/drawingml/2006/main">
+              <a:ext uri="{FF2B5EF4-FFF2-40B4-BE49-F238E27FC236}">
+                <a16:creationId xmlns:a16="http://schemas.microsoft.com/office/drawing/2014/main" id="{C7126757-2953-4463-ABF2-06D5218C13DE}"/>
+              </a:ext>
+            </a:extLst>
+          </p:cNvPr>
+          <p:cNvSpPr>
+            <a:spLocks xmlns:a="http://schemas.openxmlformats.org/drawingml/2006/main" noGrp="1"/>
+          </p:cNvSpPr>
+          <p:nvPr/>
+        </p:nvSpPr>
+        <p:spPr>
+          <a:xfrm xmlns:a="http://schemas.openxmlformats.org/drawingml/2006/main">
+            <a:off x="609600" y="1238250"/>
+            <a:ext cx="10953750" cy="9525"/>
+          </a:xfrm>
+          <a:prstGeom xmlns:a="http://schemas.openxmlformats.org/drawingml/2006/main" prst="rect">
+            <a:avLst/>
+          </a:prstGeom>
+          <a:solidFill xmlns:a="http://schemas.openxmlformats.org/drawingml/2006/main">
+            <a:srgbClr val="CFDDE3"/>
+          </a:solidFill>
+          <a:ln xmlns:a="http://schemas.openxmlformats.org/drawingml/2006/main" w="0">
+            <a:noFill/>
+          </a:ln>
+        </p:spPr>
+      </p:sp>
+      <p:sp>
+        <p:nvSpPr>
+          <p:cNvPr id="4" name="">
+            <a:extLst xmlns:a="http://schemas.openxmlformats.org/drawingml/2006/main">
+              <a:ext uri="{FF2B5EF4-FFF2-40B4-BE49-F238E27FC236}">
+                <a16:creationId xmlns:a16="http://schemas.microsoft.com/office/drawing/2014/main" id="{BDCA6C18-70A1-4AAE-9463-D2F0B4F74FE8}"/>
+              </a:ext>
+            </a:extLst>
+          </p:cNvPr>
+          <p:cNvSpPr>
+            <a:spLocks xmlns:a="http://schemas.openxmlformats.org/drawingml/2006/main" noGrp="1"/>
+          </p:cNvSpPr>
+          <p:nvPr/>
+        </p:nvSpPr>
+        <p:spPr>
+          <a:xfrm xmlns:a="http://schemas.openxmlformats.org/drawingml/2006/main">
+            <a:off x="11144250" y="447675"/>
+            <a:ext cx="428625" cy="333375"/>
+          </a:xfrm>
+          <a:prstGeom xmlns:a="http://schemas.openxmlformats.org/drawingml/2006/main" prst="rect">
+            <a:avLst/>
+          </a:prstGeom>
+          <a:noFill xmlns:a="http://schemas.openxmlformats.org/drawingml/2006/main"/>
+          <a:ln xmlns:a="http://schemas.openxmlformats.org/drawingml/2006/main" w="0">
+            <a:noFill/>
+          </a:ln>
+        </p:spPr>
+        <p:txBody>
+          <a:bodyPr xmlns:a="http://schemas.openxmlformats.org/drawingml/2006/main" anchor="ctr">
+            <a:normAutofit fontScale="100000"/>
+          </a:bodyPr>
+          <a:lstStyle xmlns:a="http://schemas.openxmlformats.org/drawingml/2006/main"/>
+          <a:p xmlns:a="http://schemas.openxmlformats.org/drawingml/2006/main">
+            <a:pPr>
+              <a:defRPr sz="1350" b="1">
+                <a:solidFill>
+                  <a:srgbClr val="2FA6A4"/>
+                </a:solidFill>
+                <a:latin typeface="Microsoft YaHei"/>
+                <a:ea typeface="Microsoft YaHei"/>
+                <a:cs typeface="Microsoft YaHei"/>
+              </a:defRPr>
+            </a:pPr>
+            <a:r>
+              <a:rPr sz="1350" b="1">
+                <a:solidFill>
+                  <a:srgbClr val="2FA6A4"/>
+                </a:solidFill>
+                <a:latin typeface="Microsoft YaHei"/>
+                <a:ea typeface="Microsoft YaHei"/>
+                <a:cs typeface="Microsoft YaHei"/>
+              </a:rPr>
+              <a:t>12</a:t>
+            </a:r>
+          </a:p>
+        </p:txBody>
+      </p:sp>
+      <p:sp>
+        <p:nvSpPr>
+          <p:cNvPr id="5" name="">
+            <a:extLst xmlns:a="http://schemas.openxmlformats.org/drawingml/2006/main">
+              <a:ext uri="{FF2B5EF4-FFF2-40B4-BE49-F238E27FC236}">
+                <a16:creationId xmlns:a16="http://schemas.microsoft.com/office/drawing/2014/main" id="{D3F5BD12-98D0-4734-87BC-8BE12CB217E8}"/>
+              </a:ext>
+            </a:extLst>
+          </p:cNvPr>
+          <p:cNvSpPr>
+            <a:spLocks xmlns:a="http://schemas.openxmlformats.org/drawingml/2006/main" noGrp="1"/>
+          </p:cNvSpPr>
+          <p:nvPr/>
+        </p:nvSpPr>
+        <p:spPr>
+          <a:xfrm xmlns:a="http://schemas.openxmlformats.org/drawingml/2006/main">
+            <a:off x="723900" y="1571625"/>
+            <a:ext cx="704850" cy="590550"/>
+          </a:xfrm>
+          <a:prstGeom xmlns:a="http://schemas.openxmlformats.org/drawingml/2006/main" prst="rect">
+            <a:avLst/>
+          </a:prstGeom>
+          <a:solidFill xmlns:a="http://schemas.openxmlformats.org/drawingml/2006/main">
+            <a:srgbClr val="193650"/>
+          </a:solidFill>
+          <a:ln xmlns:a="http://schemas.openxmlformats.org/drawingml/2006/main" w="0">
+            <a:noFill/>
+          </a:ln>
+        </p:spPr>
+        <p:txBody>
+          <a:bodyPr xmlns:a="http://schemas.openxmlformats.org/drawingml/2006/main" anchor="ctr">
+            <a:normAutofit fontScale="100000"/>
+          </a:bodyPr>
+          <a:lstStyle xmlns:a="http://schemas.openxmlformats.org/drawingml/2006/main"/>
+          <a:p xmlns:a="http://schemas.openxmlformats.org/drawingml/2006/main">
+            <a:pPr>
+              <a:defRPr sz="1650" b="1">
+                <a:solidFill>
+                  <a:srgbClr val="FFFFFF"/>
+                </a:solidFill>
+                <a:latin typeface="Microsoft YaHei"/>
+                <a:ea typeface="Microsoft YaHei"/>
+                <a:cs typeface="Microsoft YaHei"/>
+              </a:defRPr>
+            </a:pPr>
+            <a:r>
+              <a:rPr sz="1650" b="1">
+                <a:solidFill>
+                  <a:srgbClr val="FFFFFF"/>
+                </a:solidFill>
+                <a:latin typeface="Microsoft YaHei"/>
+                <a:ea typeface="Microsoft YaHei"/>
+                <a:cs typeface="Microsoft YaHei"/>
+              </a:rPr>
+              <a:t>01</a:t>
+            </a:r>
+          </a:p>
+        </p:txBody>
+      </p:sp>
+      <p:sp>
+        <p:nvSpPr>
+          <p:cNvPr id="6" name="">
+            <a:extLst xmlns:a="http://schemas.openxmlformats.org/drawingml/2006/main">
+              <a:ext uri="{FF2B5EF4-FFF2-40B4-BE49-F238E27FC236}">
+                <a16:creationId xmlns:a16="http://schemas.microsoft.com/office/drawing/2014/main" id="{71CDE384-DBFE-48DB-AB75-BC7FC9B7DD93}"/>
+              </a:ext>
+            </a:extLst>
+          </p:cNvPr>
+          <p:cNvSpPr>
+            <a:spLocks xmlns:a="http://schemas.openxmlformats.org/drawingml/2006/main" noGrp="1"/>
+          </p:cNvSpPr>
+          <p:nvPr/>
+        </p:nvSpPr>
+        <p:spPr>
+          <a:xfrm xmlns:a="http://schemas.openxmlformats.org/drawingml/2006/main">
+            <a:off x="1695450" y="1571625"/>
+            <a:ext cx="3238500" cy="323850"/>
+          </a:xfrm>
+          <a:prstGeom xmlns:a="http://schemas.openxmlformats.org/drawingml/2006/main" prst="rect">
+            <a:avLst/>
+          </a:prstGeom>
+          <a:noFill xmlns:a="http://schemas.openxmlformats.org/drawingml/2006/main"/>
+          <a:ln xmlns:a="http://schemas.openxmlformats.org/drawingml/2006/main" w="0">
+            <a:noFill/>
+          </a:ln>
+        </p:spPr>
+        <p:txBody>
+          <a:bodyPr xmlns:a="http://schemas.openxmlformats.org/drawingml/2006/main" anchor="ctr">
+            <a:normAutofit fontScale="88406"/>
+          </a:bodyPr>
+          <a:lstStyle xmlns:a="http://schemas.openxmlformats.org/drawingml/2006/main"/>
+          <a:p xmlns:a="http://schemas.openxmlformats.org/drawingml/2006/main">
+            <a:pPr>
+              <a:defRPr sz="1725" b="1">
+                <a:solidFill>
+                  <a:srgbClr val="193650"/>
+                </a:solidFill>
+                <a:latin typeface="Microsoft YaHei"/>
+                <a:ea typeface="Microsoft YaHei"/>
+                <a:cs typeface="Microsoft YaHei"/>
+              </a:defRPr>
+            </a:pPr>
+            <a:r>
+              <a:rPr sz="1725" b="1">
+                <a:solidFill>
+                  <a:srgbClr val="193650"/>
+                </a:solidFill>
+                <a:latin typeface="Microsoft YaHei"/>
+                <a:ea typeface="Microsoft YaHei"/>
+                <a:cs typeface="Microsoft YaHei"/>
+              </a:rPr>
+              <a:t>确认 GPU 与模型路径</a:t>
+            </a:r>
+          </a:p>
+        </p:txBody>
+      </p:sp>
+      <p:sp>
+        <p:nvSpPr>
+          <p:cNvPr id="7" name="">
+            <a:extLst xmlns:a="http://schemas.openxmlformats.org/drawingml/2006/main">
+              <a:ext uri="{FF2B5EF4-FFF2-40B4-BE49-F238E27FC236}">
+                <a16:creationId xmlns:a16="http://schemas.microsoft.com/office/drawing/2014/main" id="{6E6487F4-2147-421E-81A0-D806D070E9E1}"/>
+              </a:ext>
+            </a:extLst>
+          </p:cNvPr>
+          <p:cNvSpPr>
+            <a:spLocks xmlns:a="http://schemas.openxmlformats.org/drawingml/2006/main" noGrp="1"/>
+          </p:cNvSpPr>
+          <p:nvPr/>
+        </p:nvSpPr>
+        <p:spPr>
+          <a:xfrm xmlns:a="http://schemas.openxmlformats.org/drawingml/2006/main">
+            <a:off x="1695450" y="1924050"/>
+            <a:ext cx="8477250" cy="361950"/>
+          </a:xfrm>
+          <a:prstGeom xmlns:a="http://schemas.openxmlformats.org/drawingml/2006/main" prst="rect">
+            <a:avLst/>
+          </a:prstGeom>
+          <a:noFill xmlns:a="http://schemas.openxmlformats.org/drawingml/2006/main"/>
+          <a:ln xmlns:a="http://schemas.openxmlformats.org/drawingml/2006/main" w="0">
+            <a:noFill/>
+          </a:ln>
+        </p:spPr>
+        <p:txBody>
+          <a:bodyPr xmlns:a="http://schemas.openxmlformats.org/drawingml/2006/main" anchor="ctr">
+            <a:normAutofit fontScale="100000"/>
+          </a:bodyPr>
+          <a:lstStyle xmlns:a="http://schemas.openxmlformats.org/drawingml/2006/main"/>
+          <a:p xmlns:a="http://schemas.openxmlformats.org/drawingml/2006/main">
+            <a:pPr>
+              <a:defRPr sz="1350" b="0">
+                <a:solidFill>
+                  <a:srgbClr val="667784"/>
+                </a:solidFill>
+                <a:latin typeface="Microsoft YaHei"/>
+                <a:ea typeface="Microsoft YaHei"/>
+                <a:cs typeface="Microsoft YaHei"/>
+              </a:defRPr>
+            </a:pPr>
+            <a:r>
+              <a:rPr sz="1350" b="0">
+                <a:solidFill>
+                  <a:srgbClr val="667784"/>
+                </a:solidFill>
+                <a:latin typeface="Microsoft YaHei"/>
+                <a:ea typeface="Microsoft YaHei"/>
+                <a:cs typeface="Microsoft YaHei"/>
+              </a:rPr>
+              <a:t>检查 CUDA_VISIBLE_DEVICES、LLAVA_MODEL_PATH 和视觉编码器路径</a:t>
+            </a:r>
+          </a:p>
+        </p:txBody>
+      </p:sp>
+      <p:sp>
+        <p:nvSpPr>
+          <p:cNvPr id="8" name="">
+            <a:extLst xmlns:a="http://schemas.openxmlformats.org/drawingml/2006/main">
+              <a:ext uri="{FF2B5EF4-FFF2-40B4-BE49-F238E27FC236}">
+                <a16:creationId xmlns:a16="http://schemas.microsoft.com/office/drawing/2014/main" id="{DB4DF645-19AF-4BDA-90BF-97D664BA7924}"/>
+              </a:ext>
+            </a:extLst>
+          </p:cNvPr>
+          <p:cNvSpPr>
+            <a:spLocks xmlns:a="http://schemas.openxmlformats.org/drawingml/2006/main" noGrp="1"/>
+          </p:cNvSpPr>
+          <p:nvPr/>
+        </p:nvSpPr>
+        <p:spPr>
+          <a:xfrm xmlns:a="http://schemas.openxmlformats.org/drawingml/2006/main">
+            <a:off x="723900" y="2552700"/>
+            <a:ext cx="704850" cy="590550"/>
+          </a:xfrm>
+          <a:prstGeom xmlns:a="http://schemas.openxmlformats.org/drawingml/2006/main" prst="rect">
+            <a:avLst/>
+          </a:prstGeom>
+          <a:solidFill xmlns:a="http://schemas.openxmlformats.org/drawingml/2006/main">
+            <a:srgbClr val="193650"/>
+          </a:solidFill>
+          <a:ln xmlns:a="http://schemas.openxmlformats.org/drawingml/2006/main" w="0">
+            <a:noFill/>
+          </a:ln>
+        </p:spPr>
+        <p:txBody>
+          <a:bodyPr xmlns:a="http://schemas.openxmlformats.org/drawingml/2006/main" anchor="ctr">
+            <a:normAutofit fontScale="100000"/>
+          </a:bodyPr>
+          <a:lstStyle xmlns:a="http://schemas.openxmlformats.org/drawingml/2006/main"/>
+          <a:p xmlns:a="http://schemas.openxmlformats.org/drawingml/2006/main">
+            <a:pPr>
+              <a:defRPr sz="1650" b="1">
+                <a:solidFill>
+                  <a:srgbClr val="FFFFFF"/>
+                </a:solidFill>
+                <a:latin typeface="Microsoft YaHei"/>
+                <a:ea typeface="Microsoft YaHei"/>
+                <a:cs typeface="Microsoft YaHei"/>
+              </a:defRPr>
+            </a:pPr>
+            <a:r>
+              <a:rPr sz="1650" b="1">
+                <a:solidFill>
+                  <a:srgbClr val="FFFFFF"/>
+                </a:solidFill>
+                <a:latin typeface="Microsoft YaHei"/>
+                <a:ea typeface="Microsoft YaHei"/>
+                <a:cs typeface="Microsoft YaHei"/>
+              </a:rPr>
+              <a:t>02</a:t>
+            </a:r>
+          </a:p>
+        </p:txBody>
+      </p:sp>
+      <p:sp>
+        <p:nvSpPr>
+          <p:cNvPr id="9" name="">
+            <a:extLst xmlns:a="http://schemas.openxmlformats.org/drawingml/2006/main">
+              <a:ext uri="{FF2B5EF4-FFF2-40B4-BE49-F238E27FC236}">
+                <a16:creationId xmlns:a16="http://schemas.microsoft.com/office/drawing/2014/main" id="{281BE6BB-8247-471F-833F-45EC24B428AD}"/>
+              </a:ext>
+            </a:extLst>
+          </p:cNvPr>
+          <p:cNvSpPr>
+            <a:spLocks xmlns:a="http://schemas.openxmlformats.org/drawingml/2006/main" noGrp="1"/>
+          </p:cNvSpPr>
+          <p:nvPr/>
+        </p:nvSpPr>
+        <p:spPr>
+          <a:xfrm xmlns:a="http://schemas.openxmlformats.org/drawingml/2006/main">
+            <a:off x="1695450" y="2552700"/>
+            <a:ext cx="3238500" cy="323850"/>
+          </a:xfrm>
+          <a:prstGeom xmlns:a="http://schemas.openxmlformats.org/drawingml/2006/main" prst="rect">
+            <a:avLst/>
+          </a:prstGeom>
+          <a:noFill xmlns:a="http://schemas.openxmlformats.org/drawingml/2006/main"/>
+          <a:ln xmlns:a="http://schemas.openxmlformats.org/drawingml/2006/main" w="0">
+            <a:noFill/>
+          </a:ln>
+        </p:spPr>
+        <p:txBody>
+          <a:bodyPr xmlns:a="http://schemas.openxmlformats.org/drawingml/2006/main" anchor="ctr">
+            <a:normAutofit fontScale="88406"/>
+          </a:bodyPr>
+          <a:lstStyle xmlns:a="http://schemas.openxmlformats.org/drawingml/2006/main"/>
+          <a:p xmlns:a="http://schemas.openxmlformats.org/drawingml/2006/main">
+            <a:pPr>
+              <a:defRPr sz="1725" b="1">
+                <a:solidFill>
+                  <a:srgbClr val="193650"/>
+                </a:solidFill>
+                <a:latin typeface="Microsoft YaHei"/>
+                <a:ea typeface="Microsoft YaHei"/>
+                <a:cs typeface="Microsoft YaHei"/>
+              </a:defRPr>
+            </a:pPr>
+            <a:r>
+              <a:rPr sz="1725" b="1">
+                <a:solidFill>
+                  <a:srgbClr val="193650"/>
+                </a:solidFill>
+                <a:latin typeface="Microsoft YaHei"/>
+                <a:ea typeface="Microsoft YaHei"/>
+                <a:cs typeface="Microsoft YaHei"/>
+              </a:rPr>
+              <a:t>运行单条冒烟用例</a:t>
+            </a:r>
+          </a:p>
+        </p:txBody>
+      </p:sp>
+      <p:sp>
+        <p:nvSpPr>
+          <p:cNvPr id="10" name="">
+            <a:extLst xmlns:a="http://schemas.openxmlformats.org/drawingml/2006/main">
+              <a:ext uri="{FF2B5EF4-FFF2-40B4-BE49-F238E27FC236}">
+                <a16:creationId xmlns:a16="http://schemas.microsoft.com/office/drawing/2014/main" id="{D68026B2-F17A-4CC1-B820-49E5BE918DB1}"/>
+              </a:ext>
+            </a:extLst>
+          </p:cNvPr>
+          <p:cNvSpPr>
+            <a:spLocks xmlns:a="http://schemas.openxmlformats.org/drawingml/2006/main" noGrp="1"/>
+          </p:cNvSpPr>
+          <p:nvPr/>
+        </p:nvSpPr>
+        <p:spPr>
+          <a:xfrm xmlns:a="http://schemas.openxmlformats.org/drawingml/2006/main">
+            <a:off x="1695450" y="2905125"/>
+            <a:ext cx="8477250" cy="361950"/>
+          </a:xfrm>
+          <a:prstGeom xmlns:a="http://schemas.openxmlformats.org/drawingml/2006/main" prst="rect">
+            <a:avLst/>
+          </a:prstGeom>
+          <a:noFill xmlns:a="http://schemas.openxmlformats.org/drawingml/2006/main"/>
+          <a:ln xmlns:a="http://schemas.openxmlformats.org/drawingml/2006/main" w="0">
+            <a:noFill/>
+          </a:ln>
+        </p:spPr>
+        <p:txBody>
+          <a:bodyPr xmlns:a="http://schemas.openxmlformats.org/drawingml/2006/main" anchor="ctr">
+            <a:normAutofit fontScale="100000"/>
+          </a:bodyPr>
+          <a:lstStyle xmlns:a="http://schemas.openxmlformats.org/drawingml/2006/main"/>
+          <a:p xmlns:a="http://schemas.openxmlformats.org/drawingml/2006/main">
+            <a:pPr>
+              <a:defRPr sz="1350" b="0">
+                <a:solidFill>
+                  <a:srgbClr val="667784"/>
+                </a:solidFill>
+                <a:latin typeface="Microsoft YaHei"/>
+                <a:ea typeface="Microsoft YaHei"/>
+                <a:cs typeface="Microsoft YaHei"/>
+              </a:defRPr>
+            </a:pPr>
+            <a:r>
+              <a:rPr sz="1350" b="0">
+                <a:solidFill>
+                  <a:srgbClr val="667784"/>
+                </a:solidFill>
+                <a:latin typeface="Microsoft YaHei"/>
+                <a:ea typeface="Microsoft YaHei"/>
+                <a:cs typeface="Microsoft YaHei"/>
+              </a:rPr>
+              <a:t>--quick --case-id M2-FUN-201，只验证环境和调用链</a:t>
+            </a:r>
+          </a:p>
+        </p:txBody>
+      </p:sp>
+      <p:sp>
+        <p:nvSpPr>
+          <p:cNvPr id="11" name="">
+            <a:extLst xmlns:a="http://schemas.openxmlformats.org/drawingml/2006/main">
+              <a:ext uri="{FF2B5EF4-FFF2-40B4-BE49-F238E27FC236}">
+                <a16:creationId xmlns:a16="http://schemas.microsoft.com/office/drawing/2014/main" id="{BCD4CD12-5DD3-43DA-8537-5207EA655CC0}"/>
+              </a:ext>
+            </a:extLst>
+          </p:cNvPr>
+          <p:cNvSpPr>
+            <a:spLocks xmlns:a="http://schemas.openxmlformats.org/drawingml/2006/main" noGrp="1"/>
+          </p:cNvSpPr>
+          <p:nvPr/>
+        </p:nvSpPr>
+        <p:spPr>
+          <a:xfrm xmlns:a="http://schemas.openxmlformats.org/drawingml/2006/main">
+            <a:off x="723900" y="3533775"/>
+            <a:ext cx="704850" cy="590550"/>
+          </a:xfrm>
+          <a:prstGeom xmlns:a="http://schemas.openxmlformats.org/drawingml/2006/main" prst="rect">
+            <a:avLst/>
+          </a:prstGeom>
+          <a:solidFill xmlns:a="http://schemas.openxmlformats.org/drawingml/2006/main">
+            <a:srgbClr val="193650"/>
+          </a:solidFill>
+          <a:ln xmlns:a="http://schemas.openxmlformats.org/drawingml/2006/main" w="0">
+            <a:noFill/>
+          </a:ln>
+        </p:spPr>
+        <p:txBody>
+          <a:bodyPr xmlns:a="http://schemas.openxmlformats.org/drawingml/2006/main" anchor="ctr">
+            <a:normAutofit fontScale="100000"/>
+          </a:bodyPr>
+          <a:lstStyle xmlns:a="http://schemas.openxmlformats.org/drawingml/2006/main"/>
+          <a:p xmlns:a="http://schemas.openxmlformats.org/drawingml/2006/main">
+            <a:pPr>
+              <a:defRPr sz="1650" b="1">
+                <a:solidFill>
+                  <a:srgbClr val="FFFFFF"/>
+                </a:solidFill>
+                <a:latin typeface="Microsoft YaHei"/>
+                <a:ea typeface="Microsoft YaHei"/>
+                <a:cs typeface="Microsoft YaHei"/>
+              </a:defRPr>
+            </a:pPr>
+            <a:r>
+              <a:rPr sz="1650" b="1">
+                <a:solidFill>
+                  <a:srgbClr val="FFFFFF"/>
+                </a:solidFill>
+                <a:latin typeface="Microsoft YaHei"/>
+                <a:ea typeface="Microsoft YaHei"/>
+                <a:cs typeface="Microsoft YaHei"/>
+              </a:rPr>
+              <a:t>03</a:t>
+            </a:r>
+          </a:p>
+        </p:txBody>
+      </p:sp>
+      <p:sp>
+        <p:nvSpPr>
+          <p:cNvPr id="12" name="">
+            <a:extLst xmlns:a="http://schemas.openxmlformats.org/drawingml/2006/main">
+              <a:ext uri="{FF2B5EF4-FFF2-40B4-BE49-F238E27FC236}">
+                <a16:creationId xmlns:a16="http://schemas.microsoft.com/office/drawing/2014/main" id="{7C6796C5-EED3-4852-98C6-57271263FFF1}"/>
+              </a:ext>
+            </a:extLst>
+          </p:cNvPr>
+          <p:cNvSpPr>
+            <a:spLocks xmlns:a="http://schemas.openxmlformats.org/drawingml/2006/main" noGrp="1"/>
+          </p:cNvSpPr>
+          <p:nvPr/>
+        </p:nvSpPr>
+        <p:spPr>
+          <a:xfrm xmlns:a="http://schemas.openxmlformats.org/drawingml/2006/main">
+            <a:off x="1695450" y="3533775"/>
+            <a:ext cx="3238500" cy="323850"/>
+          </a:xfrm>
+          <a:prstGeom xmlns:a="http://schemas.openxmlformats.org/drawingml/2006/main" prst="rect">
+            <a:avLst/>
+          </a:prstGeom>
+          <a:noFill xmlns:a="http://schemas.openxmlformats.org/drawingml/2006/main"/>
+          <a:ln xmlns:a="http://schemas.openxmlformats.org/drawingml/2006/main" w="0">
+            <a:noFill/>
+          </a:ln>
+        </p:spPr>
+        <p:txBody>
+          <a:bodyPr xmlns:a="http://schemas.openxmlformats.org/drawingml/2006/main" anchor="ctr">
+            <a:normAutofit fontScale="88406"/>
+          </a:bodyPr>
+          <a:lstStyle xmlns:a="http://schemas.openxmlformats.org/drawingml/2006/main"/>
+          <a:p xmlns:a="http://schemas.openxmlformats.org/drawingml/2006/main">
+            <a:pPr>
+              <a:defRPr sz="1725" b="1">
+                <a:solidFill>
+                  <a:srgbClr val="193650"/>
+                </a:solidFill>
+                <a:latin typeface="Microsoft YaHei"/>
+                <a:ea typeface="Microsoft YaHei"/>
+                <a:cs typeface="Microsoft YaHei"/>
+              </a:defRPr>
+            </a:pPr>
+            <a:r>
+              <a:rPr sz="1725" b="1">
+                <a:solidFill>
+                  <a:srgbClr val="193650"/>
+                </a:solidFill>
+                <a:latin typeface="Microsoft YaHei"/>
+                <a:ea typeface="Microsoft YaHei"/>
+                <a:cs typeface="Microsoft YaHei"/>
+              </a:rPr>
+              <a:t>运行正式矩阵</a:t>
+            </a:r>
+          </a:p>
+        </p:txBody>
+      </p:sp>
+      <p:sp>
+        <p:nvSpPr>
+          <p:cNvPr id="13" name="">
+            <a:extLst xmlns:a="http://schemas.openxmlformats.org/drawingml/2006/main">
+              <a:ext uri="{FF2B5EF4-FFF2-40B4-BE49-F238E27FC236}">
+                <a16:creationId xmlns:a16="http://schemas.microsoft.com/office/drawing/2014/main" id="{78F64F36-2ECD-49F8-A29F-0EA7622D77D9}"/>
+              </a:ext>
+            </a:extLst>
+          </p:cNvPr>
+          <p:cNvSpPr>
+            <a:spLocks xmlns:a="http://schemas.openxmlformats.org/drawingml/2006/main" noGrp="1"/>
+          </p:cNvSpPr>
+          <p:nvPr/>
+        </p:nvSpPr>
+        <p:spPr>
+          <a:xfrm xmlns:a="http://schemas.openxmlformats.org/drawingml/2006/main">
+            <a:off x="1695450" y="3886200"/>
+            <a:ext cx="8477250" cy="361950"/>
+          </a:xfrm>
+          <a:prstGeom xmlns:a="http://schemas.openxmlformats.org/drawingml/2006/main" prst="rect">
+            <a:avLst/>
+          </a:prstGeom>
+          <a:noFill xmlns:a="http://schemas.openxmlformats.org/drawingml/2006/main"/>
+          <a:ln xmlns:a="http://schemas.openxmlformats.org/drawingml/2006/main" w="0">
+            <a:noFill/>
+          </a:ln>
+        </p:spPr>
+        <p:txBody>
+          <a:bodyPr xmlns:a="http://schemas.openxmlformats.org/drawingml/2006/main" anchor="ctr">
+            <a:normAutofit fontScale="100000"/>
+          </a:bodyPr>
+          <a:lstStyle xmlns:a="http://schemas.openxmlformats.org/drawingml/2006/main"/>
+          <a:p xmlns:a="http://schemas.openxmlformats.org/drawingml/2006/main">
+            <a:pPr>
+              <a:defRPr sz="1350" b="0">
+                <a:solidFill>
+                  <a:srgbClr val="667784"/>
+                </a:solidFill>
+                <a:latin typeface="Microsoft YaHei"/>
+                <a:ea typeface="Microsoft YaHei"/>
+                <a:cs typeface="Microsoft YaHei"/>
+              </a:defRPr>
+            </a:pPr>
+            <a:r>
+              <a:rPr sz="1350" b="0">
+                <a:solidFill>
+                  <a:srgbClr val="667784"/>
+                </a:solidFill>
+                <a:latin typeface="Microsoft YaHei"/>
+                <a:ea typeface="Microsoft YaHei"/>
+                <a:cs typeface="Microsoft YaHei"/>
+              </a:rPr>
+              <a:t>移除 --quick，保存同一 run_id 下的两种模式记录</a:t>
+            </a:r>
+          </a:p>
+        </p:txBody>
+      </p:sp>
+      <p:sp>
+        <p:nvSpPr>
+          <p:cNvPr id="14" name="">
+            <a:extLst xmlns:a="http://schemas.openxmlformats.org/drawingml/2006/main">
+              <a:ext uri="{FF2B5EF4-FFF2-40B4-BE49-F238E27FC236}">
+                <a16:creationId xmlns:a16="http://schemas.microsoft.com/office/drawing/2014/main" id="{0635578B-5F81-4CDA-9CD8-115839843960}"/>
+              </a:ext>
+            </a:extLst>
+          </p:cNvPr>
+          <p:cNvSpPr>
+            <a:spLocks xmlns:a="http://schemas.openxmlformats.org/drawingml/2006/main" noGrp="1"/>
+          </p:cNvSpPr>
+          <p:nvPr/>
+        </p:nvSpPr>
+        <p:spPr>
+          <a:xfrm xmlns:a="http://schemas.openxmlformats.org/drawingml/2006/main">
+            <a:off x="723900" y="4514850"/>
+            <a:ext cx="704850" cy="590550"/>
+          </a:xfrm>
+          <a:prstGeom xmlns:a="http://schemas.openxmlformats.org/drawingml/2006/main" prst="rect">
+            <a:avLst/>
+          </a:prstGeom>
+          <a:solidFill xmlns:a="http://schemas.openxmlformats.org/drawingml/2006/main">
+            <a:srgbClr val="2FA6A4"/>
+          </a:solidFill>
+          <a:ln xmlns:a="http://schemas.openxmlformats.org/drawingml/2006/main" w="0">
+            <a:noFill/>
+          </a:ln>
+        </p:spPr>
+        <p:txBody>
+          <a:bodyPr xmlns:a="http://schemas.openxmlformats.org/drawingml/2006/main" anchor="ctr">
+            <a:normAutofit fontScale="100000"/>
+          </a:bodyPr>
+          <a:lstStyle xmlns:a="http://schemas.openxmlformats.org/drawingml/2006/main"/>
+          <a:p xmlns:a="http://schemas.openxmlformats.org/drawingml/2006/main">
+            <a:pPr>
+              <a:defRPr sz="1650" b="1">
+                <a:solidFill>
+                  <a:srgbClr val="FFFFFF"/>
+                </a:solidFill>
+                <a:latin typeface="Microsoft YaHei"/>
+                <a:ea typeface="Microsoft YaHei"/>
+                <a:cs typeface="Microsoft YaHei"/>
+              </a:defRPr>
+            </a:pPr>
+            <a:r>
+              <a:rPr sz="1650" b="1">
+                <a:solidFill>
+                  <a:srgbClr val="FFFFFF"/>
+                </a:solidFill>
+                <a:latin typeface="Microsoft YaHei"/>
+                <a:ea typeface="Microsoft YaHei"/>
+                <a:cs typeface="Microsoft YaHei"/>
+              </a:rPr>
+              <a:t>04</a:t>
+            </a:r>
+          </a:p>
+        </p:txBody>
+      </p:sp>
+      <p:sp>
+        <p:nvSpPr>
+          <p:cNvPr id="15" name="">
+            <a:extLst xmlns:a="http://schemas.openxmlformats.org/drawingml/2006/main">
+              <a:ext uri="{FF2B5EF4-FFF2-40B4-BE49-F238E27FC236}">
+                <a16:creationId xmlns:a16="http://schemas.microsoft.com/office/drawing/2014/main" id="{F79EA3BB-5737-458B-9F6B-41B78DD09AEC}"/>
+              </a:ext>
+            </a:extLst>
+          </p:cNvPr>
+          <p:cNvSpPr>
+            <a:spLocks xmlns:a="http://schemas.openxmlformats.org/drawingml/2006/main" noGrp="1"/>
+          </p:cNvSpPr>
+          <p:nvPr/>
+        </p:nvSpPr>
+        <p:spPr>
+          <a:xfrm xmlns:a="http://schemas.openxmlformats.org/drawingml/2006/main">
+            <a:off x="1695450" y="4514850"/>
+            <a:ext cx="3238500" cy="323850"/>
+          </a:xfrm>
+          <a:prstGeom xmlns:a="http://schemas.openxmlformats.org/drawingml/2006/main" prst="rect">
+            <a:avLst/>
+          </a:prstGeom>
+          <a:noFill xmlns:a="http://schemas.openxmlformats.org/drawingml/2006/main"/>
+          <a:ln xmlns:a="http://schemas.openxmlformats.org/drawingml/2006/main" w="0">
+            <a:noFill/>
+          </a:ln>
+        </p:spPr>
+        <p:txBody>
+          <a:bodyPr xmlns:a="http://schemas.openxmlformats.org/drawingml/2006/main" anchor="ctr">
+            <a:normAutofit fontScale="88406"/>
+          </a:bodyPr>
+          <a:lstStyle xmlns:a="http://schemas.openxmlformats.org/drawingml/2006/main"/>
+          <a:p xmlns:a="http://schemas.openxmlformats.org/drawingml/2006/main">
+            <a:pPr>
+              <a:defRPr sz="1725" b="1">
+                <a:solidFill>
+                  <a:srgbClr val="193650"/>
+                </a:solidFill>
+                <a:latin typeface="Microsoft YaHei"/>
+                <a:ea typeface="Microsoft YaHei"/>
+                <a:cs typeface="Microsoft YaHei"/>
+              </a:defRPr>
+            </a:pPr>
+            <a:r>
+              <a:rPr sz="1725" b="1">
+                <a:solidFill>
+                  <a:srgbClr val="193650"/>
+                </a:solidFill>
+                <a:latin typeface="Microsoft YaHei"/>
+                <a:ea typeface="Microsoft YaHei"/>
+                <a:cs typeface="Microsoft YaHei"/>
+              </a:rPr>
+              <a:t>检查结果与证据</a:t>
+            </a:r>
+          </a:p>
+        </p:txBody>
+      </p:sp>
+      <p:sp>
+        <p:nvSpPr>
+          <p:cNvPr id="16" name="">
+            <a:extLst xmlns:a="http://schemas.openxmlformats.org/drawingml/2006/main">
+              <a:ext uri="{FF2B5EF4-FFF2-40B4-BE49-F238E27FC236}">
+                <a16:creationId xmlns:a16="http://schemas.microsoft.com/office/drawing/2014/main" id="{AEE8CCA3-6231-4EBB-8DBD-F8C28DC9A657}"/>
+              </a:ext>
+            </a:extLst>
+          </p:cNvPr>
+          <p:cNvSpPr>
+            <a:spLocks xmlns:a="http://schemas.openxmlformats.org/drawingml/2006/main" noGrp="1"/>
+          </p:cNvSpPr>
+          <p:nvPr/>
+        </p:nvSpPr>
+        <p:spPr>
+          <a:xfrm xmlns:a="http://schemas.openxmlformats.org/drawingml/2006/main">
+            <a:off x="1695450" y="4867275"/>
+            <a:ext cx="8477250" cy="361950"/>
+          </a:xfrm>
+          <a:prstGeom xmlns:a="http://schemas.openxmlformats.org/drawingml/2006/main" prst="rect">
+            <a:avLst/>
+          </a:prstGeom>
+          <a:noFill xmlns:a="http://schemas.openxmlformats.org/drawingml/2006/main"/>
+          <a:ln xmlns:a="http://schemas.openxmlformats.org/drawingml/2006/main" w="0">
+            <a:noFill/>
+          </a:ln>
+        </p:spPr>
+        <p:txBody>
+          <a:bodyPr xmlns:a="http://schemas.openxmlformats.org/drawingml/2006/main" anchor="ctr">
+            <a:normAutofit fontScale="100000"/>
+          </a:bodyPr>
+          <a:lstStyle xmlns:a="http://schemas.openxmlformats.org/drawingml/2006/main"/>
+          <a:p xmlns:a="http://schemas.openxmlformats.org/drawingml/2006/main">
+            <a:pPr>
+              <a:defRPr sz="1350" b="0">
+                <a:solidFill>
+                  <a:srgbClr val="667784"/>
+                </a:solidFill>
+                <a:latin typeface="Microsoft YaHei"/>
+                <a:ea typeface="Microsoft YaHei"/>
+                <a:cs typeface="Microsoft YaHei"/>
+              </a:defRPr>
+            </a:pPr>
+            <a:r>
+              <a:rPr sz="1350" b="0">
+                <a:solidFill>
+                  <a:srgbClr val="667784"/>
+                </a:solidFill>
+                <a:latin typeface="Microsoft YaHei"/>
+                <a:ea typeface="Microsoft YaHei"/>
+                <a:cs typeface="Microsoft YaHei"/>
+              </a:rPr>
+              <a:t>先看 summary.corrected.json，再回溯 raw/results.jsonl</a:t>
+            </a:r>
+          </a:p>
+        </p:txBody>
+      </p:sp>
+      <p:sp>
+        <p:nvSpPr>
+          <p:cNvPr id="17" name="">
+            <a:extLst xmlns:a="http://schemas.openxmlformats.org/drawingml/2006/main">
+              <a:ext uri="{FF2B5EF4-FFF2-40B4-BE49-F238E27FC236}">
+                <a16:creationId xmlns:a16="http://schemas.microsoft.com/office/drawing/2014/main" id="{6857711F-7D31-41B9-9C1C-98433531DB7D}"/>
+              </a:ext>
+            </a:extLst>
+          </p:cNvPr>
+          <p:cNvSpPr>
+            <a:spLocks xmlns:a="http://schemas.openxmlformats.org/drawingml/2006/main" noGrp="1"/>
+          </p:cNvSpPr>
+          <p:nvPr/>
+        </p:nvSpPr>
+        <p:spPr>
+          <a:xfrm xmlns:a="http://schemas.openxmlformats.org/drawingml/2006/main">
+            <a:off x="685800" y="5667375"/>
+            <a:ext cx="10287000" cy="495300"/>
+          </a:xfrm>
+          <a:prstGeom xmlns:a="http://schemas.openxmlformats.org/drawingml/2006/main" prst="rect">
+            <a:avLst/>
+          </a:prstGeom>
+          <a:solidFill xmlns:a="http://schemas.openxmlformats.org/drawingml/2006/main">
+            <a:srgbClr val="FFF5DF"/>
+          </a:solidFill>
+          <a:ln xmlns:a="http://schemas.openxmlformats.org/drawingml/2006/main" w="9525">
+            <a:solidFill>
+              <a:srgbClr val="EECF8B"/>
+            </a:solidFill>
+          </a:ln>
+        </p:spPr>
+        <p:txBody>
+          <a:bodyPr xmlns:a="http://schemas.openxmlformats.org/drawingml/2006/main" anchor="ctr">
+            <a:normAutofit fontScale="100000"/>
+          </a:bodyPr>
+          <a:lstStyle xmlns:a="http://schemas.openxmlformats.org/drawingml/2006/main"/>
+          <a:p xmlns:a="http://schemas.openxmlformats.org/drawingml/2006/main">
+            <a:pPr>
+              <a:defRPr sz="1500" b="1">
+                <a:solidFill>
+                  <a:srgbClr val="D28A17"/>
+                </a:solidFill>
+                <a:latin typeface="Microsoft YaHei"/>
+                <a:ea typeface="Microsoft YaHei"/>
+                <a:cs typeface="Microsoft YaHei"/>
+              </a:defRPr>
+            </a:pPr>
+            <a:r>
+              <a:rPr sz="1500" b="1">
+                <a:solidFill>
+                  <a:srgbClr val="D28A17"/>
+                </a:solidFill>
+                <a:latin typeface="Microsoft YaHei"/>
+                <a:ea typeface="Microsoft YaHei"/>
+                <a:cs typeface="Microsoft YaHei"/>
+              </a:rPr>
+              <a:t>正式证据已封存。本次课堂演示不覆盖原始结果，也不重新计算阈值。</a:t>
+            </a:r>
+          </a:p>
+        </p:txBody>
+      </p:sp>
+      <p:sp>
+        <p:nvSpPr>
+          <p:cNvPr id="18" name="">
+            <a:extLst xmlns:a="http://schemas.openxmlformats.org/drawingml/2006/main">
+              <a:ext uri="{FF2B5EF4-FFF2-40B4-BE49-F238E27FC236}">
+                <a16:creationId xmlns:a16="http://schemas.microsoft.com/office/drawing/2014/main" id="{D2AB197B-C5A3-46C2-BB55-94BCB57AD07C}"/>
+              </a:ext>
+            </a:extLst>
+          </p:cNvPr>
+          <p:cNvSpPr>
+            <a:spLocks xmlns:a="http://schemas.openxmlformats.org/drawingml/2006/main" noGrp="1"/>
+          </p:cNvSpPr>
+          <p:nvPr/>
+        </p:nvSpPr>
+        <p:spPr>
+          <a:xfrm xmlns:a="http://schemas.openxmlformats.org/drawingml/2006/main">
+            <a:off x="685800" y="6477000"/>
+            <a:ext cx="6096000" cy="190500"/>
+          </a:xfrm>
+          <a:prstGeom xmlns:a="http://schemas.openxmlformats.org/drawingml/2006/main" prst="rect">
+            <a:avLst/>
+          </a:prstGeom>
+          <a:noFill xmlns:a="http://schemas.openxmlformats.org/drawingml/2006/main"/>
+          <a:ln xmlns:a="http://schemas.openxmlformats.org/drawingml/2006/main" w="0">
+            <a:noFill/>
+          </a:ln>
+        </p:spPr>
+        <p:txBody>
+          <a:bodyPr xmlns:a="http://schemas.openxmlformats.org/drawingml/2006/main" anchor="ctr">
+            <a:normAutofit fontScale="78788"/>
+          </a:bodyPr>
+          <a:lstStyle xmlns:a="http://schemas.openxmlformats.org/drawingml/2006/main"/>
+          <a:p xmlns:a="http://schemas.openxmlformats.org/drawingml/2006/main">
+            <a:pPr>
+              <a:defRPr sz="825" b="0">
+                <a:solidFill>
+                  <a:srgbClr val="667784"/>
+                </a:solidFill>
+                <a:latin typeface="Microsoft YaHei"/>
+                <a:ea typeface="Microsoft YaHei"/>
+                <a:cs typeface="Microsoft YaHei"/>
+              </a:defRPr>
+            </a:pPr>
+            <a:r>
+              <a:rPr sz="825" b="0">
+                <a:solidFill>
+                  <a:srgbClr val="667784"/>
+                </a:solidFill>
+                <a:latin typeface="Microsoft YaHei"/>
+                <a:ea typeface="Microsoft YaHei"/>
+                <a:cs typeface="Microsoft YaHei"/>
+              </a:rPr>
+              <a:t>module2-formal-0bd7e93-001  ·  source 0bd7e93  ·  analysis 65d3ea6</a:t>
+            </a:r>
+          </a:p>
+        </p:txBody>
+      </p:sp>
+    </p:spTree>
+    <p:extLst>
+      <p:ext uri="{BB962C8B-B14F-4D97-AF65-F5344CB8AC3E}">
+        <p14:creationId xmlns:p14="http://schemas.microsoft.com/office/powerpoint/2010/main" val="1553785012"/>
+      </p:ext>
+    </p:extLst>
+  </p:cSld>
+</p:sld>
+</file>
+
+<file path=ppt/slides/slide13.xml><?xml version="1.0" encoding="utf-8"?>
+<p:sld xmlns:p="http://schemas.openxmlformats.org/presentationml/2006/main">
+  <p:cSld>
+    <p:bg>
+      <p:bgPr>
+        <a:solidFill xmlns:a="http://schemas.openxmlformats.org/drawingml/2006/main">
+          <a:srgbClr val="193650"/>
+        </a:solidFill>
+      </p:bgPr>
+    </p:bg>
+    <p:spTree>
+      <p:nvGrpSpPr>
+        <p:cNvPr id="1" name=""/>
+        <p:cNvGrpSpPr/>
+        <p:nvPr/>
+      </p:nvGrpSpPr>
+      <p:grpSpPr>
+        <a:xfrm xmlns:a="http://schemas.openxmlformats.org/drawingml/2006/main"/>
+      </p:grpSpPr>
+      <p:sp>
+        <p:nvSpPr>
+          <p:cNvPr id="18" name="">
+            <a:extLst xmlns:a="http://schemas.openxmlformats.org/drawingml/2006/main">
+              <a:ext uri="{FF2B5EF4-FFF2-40B4-BE49-F238E27FC236}">
+                <a16:creationId xmlns:a16="http://schemas.microsoft.com/office/drawing/2014/main" id="{C10475A4-7792-4101-89EF-477CF688A226}"/>
+              </a:ext>
+            </a:extLst>
+          </p:cNvPr>
+          <p:cNvSpPr>
+            <a:spLocks xmlns:a="http://schemas.openxmlformats.org/drawingml/2006/main" noGrp="1"/>
+          </p:cNvSpPr>
+          <p:nvPr/>
+        </p:nvSpPr>
+        <p:spPr>
+          <a:xfrm xmlns:a="http://schemas.openxmlformats.org/drawingml/2006/main">
+            <a:off x="742950" y="400050"/>
+            <a:ext cx="3048000" cy="285750"/>
+          </a:xfrm>
+          <a:prstGeom xmlns:a="http://schemas.openxmlformats.org/drawingml/2006/main" prst="rect">
+            <a:avLst/>
+          </a:prstGeom>
+          <a:noFill xmlns:a="http://schemas.openxmlformats.org/drawingml/2006/main"/>
+          <a:ln xmlns:a="http://schemas.openxmlformats.org/drawingml/2006/main" w="0">
+            <a:noFill/>
+          </a:ln>
+        </p:spPr>
+        <p:txBody>
+          <a:bodyPr xmlns:a="http://schemas.openxmlformats.org/drawingml/2006/main" anchor="ctr">
+            <a:normAutofit fontScale="100000"/>
+          </a:bodyPr>
+          <a:lstStyle xmlns:a="http://schemas.openxmlformats.org/drawingml/2006/main"/>
+          <a:p xmlns:a="http://schemas.openxmlformats.org/drawingml/2006/main">
+            <a:pPr>
+              <a:defRPr sz="1125" b="1">
+                <a:solidFill>
+                  <a:srgbClr val="83E0DB"/>
+                </a:solidFill>
+                <a:latin typeface="Microsoft YaHei"/>
+                <a:ea typeface="Microsoft YaHei"/>
+                <a:cs typeface="Microsoft YaHei"/>
+              </a:defRPr>
+            </a:pPr>
+            <a:r>
+              <a:rPr sz="1125" b="1">
+                <a:solidFill>
+                  <a:srgbClr val="83E0DB"/>
+                </a:solidFill>
+                <a:latin typeface="Microsoft YaHei"/>
+                <a:ea typeface="Microsoft YaHei"/>
+                <a:cs typeface="Microsoft YaHei"/>
+              </a:rPr>
+              <a:t>12  CONCLUSION</a:t>
+            </a:r>
+          </a:p>
+        </p:txBody>
+      </p:sp>
+      <p:sp>
+        <p:nvSpPr>
+          <p:cNvPr id="2" name="">
+            <a:extLst xmlns:a="http://schemas.openxmlformats.org/drawingml/2006/main">
+              <a:ext uri="{FF2B5EF4-FFF2-40B4-BE49-F238E27FC236}">
+                <a16:creationId xmlns:a16="http://schemas.microsoft.com/office/drawing/2014/main" id="{97E27CCB-3FAA-4D81-BB97-250F617806D5}"/>
+              </a:ext>
+            </a:extLst>
+          </p:cNvPr>
+          <p:cNvSpPr>
+            <a:spLocks xmlns:a="http://schemas.openxmlformats.org/drawingml/2006/main" noGrp="1"/>
+          </p:cNvSpPr>
+          <p:nvPr/>
+        </p:nvSpPr>
+        <p:spPr>
+          <a:xfrm xmlns:a="http://schemas.openxmlformats.org/drawingml/2006/main">
+            <a:off x="742950" y="895350"/>
+            <a:ext cx="7810500" cy="1123950"/>
+          </a:xfrm>
+          <a:prstGeom xmlns:a="http://schemas.openxmlformats.org/drawingml/2006/main" prst="rect">
+            <a:avLst/>
+          </a:prstGeom>
+          <a:noFill xmlns:a="http://schemas.openxmlformats.org/drawingml/2006/main"/>
+          <a:ln xmlns:a="http://schemas.openxmlformats.org/drawingml/2006/main" w="0">
+            <a:noFill/>
+          </a:ln>
+        </p:spPr>
+        <p:txBody>
+          <a:bodyPr xmlns:a="http://schemas.openxmlformats.org/drawingml/2006/main" anchor="ctr">
+            <a:normAutofit fontScale="100000"/>
+          </a:bodyPr>
+          <a:lstStyle xmlns:a="http://schemas.openxmlformats.org/drawingml/2006/main"/>
+          <a:p xmlns:a="http://schemas.openxmlformats.org/drawingml/2006/main">
+            <a:pPr>
+              <a:defRPr sz="3150" b="1">
+                <a:solidFill>
+                  <a:srgbClr val="FFFFFF"/>
+                </a:solidFill>
+                <a:latin typeface="Microsoft YaHei"/>
+                <a:ea typeface="Microsoft YaHei"/>
+                <a:cs typeface="Microsoft YaHei"/>
+              </a:defRPr>
+            </a:pPr>
+            <a:r>
+              <a:rPr sz="3150" b="1">
+                <a:solidFill>
+                  <a:srgbClr val="FFFFFF"/>
+                </a:solidFill>
+                <a:latin typeface="Microsoft YaHei"/>
+                <a:ea typeface="Microsoft YaHei"/>
+                <a:cs typeface="Microsoft YaHei"/>
+              </a:rPr>
+              <a:t>当前实现完成了可审计测试，</a:t>
+            </a:r>
+          </a:p>
+          <a:p xmlns:a="http://schemas.openxmlformats.org/drawingml/2006/main">
+            <a:pPr>
+              <a:defRPr sz="3150" b="1">
+                <a:solidFill>
+                  <a:srgbClr val="FFFFFF"/>
+                </a:solidFill>
+                <a:latin typeface="Microsoft YaHei"/>
+                <a:ea typeface="Microsoft YaHei"/>
+                <a:cs typeface="Microsoft YaHei"/>
+              </a:defRPr>
+            </a:pPr>
+            <a:r>
+              <a:rPr sz="3150" b="1">
+                <a:solidFill>
+                  <a:srgbClr val="FFFFFF"/>
+                </a:solidFill>
+                <a:latin typeface="Microsoft YaHei"/>
+                <a:ea typeface="Microsoft YaHei"/>
+                <a:cs typeface="Microsoft YaHei"/>
+              </a:rPr>
+              <a:t>但尚未达到全部验收门槛</a:t>
+            </a:r>
+          </a:p>
+        </p:txBody>
+      </p:sp>
+      <p:sp>
+        <p:nvSpPr>
+          <p:cNvPr id="3" name="">
+            <a:extLst xmlns:a="http://schemas.openxmlformats.org/drawingml/2006/main">
+              <a:ext uri="{FF2B5EF4-FFF2-40B4-BE49-F238E27FC236}">
+                <a16:creationId xmlns:a16="http://schemas.microsoft.com/office/drawing/2014/main" id="{99B29850-8BDF-400B-84DA-EAFA9C53DB98}"/>
+              </a:ext>
+            </a:extLst>
+          </p:cNvPr>
+          <p:cNvSpPr>
+            <a:spLocks xmlns:a="http://schemas.openxmlformats.org/drawingml/2006/main" noGrp="1"/>
+          </p:cNvSpPr>
+          <p:nvPr/>
+        </p:nvSpPr>
+        <p:spPr>
+          <a:xfrm xmlns:a="http://schemas.openxmlformats.org/drawingml/2006/main">
+            <a:off x="723900" y="2238375"/>
+            <a:ext cx="10572750" cy="9525"/>
+          </a:xfrm>
+          <a:prstGeom xmlns:a="http://schemas.openxmlformats.org/drawingml/2006/main" prst="rect">
+            <a:avLst/>
+          </a:prstGeom>
+          <a:solidFill xmlns:a="http://schemas.openxmlformats.org/drawingml/2006/main">
+            <a:srgbClr val="547087"/>
+          </a:solidFill>
+          <a:ln xmlns:a="http://schemas.openxmlformats.org/drawingml/2006/main" w="0">
+            <a:noFill/>
+          </a:ln>
+        </p:spPr>
+      </p:sp>
+      <p:sp>
+        <p:nvSpPr>
+          <p:cNvPr id="4" name="">
+            <a:extLst xmlns:a="http://schemas.openxmlformats.org/drawingml/2006/main">
+              <a:ext uri="{FF2B5EF4-FFF2-40B4-BE49-F238E27FC236}">
+                <a16:creationId xmlns:a16="http://schemas.microsoft.com/office/drawing/2014/main" id="{87AA0D10-DFF2-4D0D-8293-74300E3367FD}"/>
+              </a:ext>
+            </a:extLst>
+          </p:cNvPr>
+          <p:cNvSpPr>
+            <a:spLocks xmlns:a="http://schemas.openxmlformats.org/drawingml/2006/main" noGrp="1"/>
+          </p:cNvSpPr>
+          <p:nvPr/>
+        </p:nvSpPr>
+        <p:spPr>
+          <a:xfrm xmlns:a="http://schemas.openxmlformats.org/drawingml/2006/main">
+            <a:off x="762000" y="2571750"/>
+            <a:ext cx="2286000" cy="552450"/>
+          </a:xfrm>
+          <a:prstGeom xmlns:a="http://schemas.openxmlformats.org/drawingml/2006/main" prst="rect">
+            <a:avLst/>
+          </a:prstGeom>
+          <a:noFill xmlns:a="http://schemas.openxmlformats.org/drawingml/2006/main"/>
+          <a:ln xmlns:a="http://schemas.openxmlformats.org/drawingml/2006/main" w="0">
+            <a:noFill/>
+          </a:ln>
+        </p:spPr>
+        <p:txBody>
+          <a:bodyPr xmlns:a="http://schemas.openxmlformats.org/drawingml/2006/main" anchor="ctr">
+            <a:normAutofit fontScale="100000"/>
+          </a:bodyPr>
+          <a:lstStyle xmlns:a="http://schemas.openxmlformats.org/drawingml/2006/main"/>
+          <a:p xmlns:a="http://schemas.openxmlformats.org/drawingml/2006/main">
+            <a:pPr>
+              <a:defRPr sz="2700" b="1">
+                <a:solidFill>
+                  <a:srgbClr val="FFFFFF"/>
+                </a:solidFill>
+                <a:latin typeface="Microsoft YaHei"/>
+                <a:ea typeface="Microsoft YaHei"/>
+                <a:cs typeface="Microsoft YaHei"/>
+              </a:defRPr>
+            </a:pPr>
+            <a:r>
+              <a:rPr sz="2700" b="1">
+                <a:solidFill>
+                  <a:srgbClr val="FFFFFF"/>
+                </a:solidFill>
+                <a:latin typeface="Microsoft YaHei"/>
+                <a:ea typeface="Microsoft YaHei"/>
+                <a:cs typeface="Microsoft YaHei"/>
+              </a:rPr>
+              <a:t>26 / 30</a:t>
+            </a:r>
+          </a:p>
+        </p:txBody>
+      </p:sp>
+      <p:sp>
+        <p:nvSpPr>
+          <p:cNvPr id="5" name="">
+            <a:extLst xmlns:a="http://schemas.openxmlformats.org/drawingml/2006/main">
+              <a:ext uri="{FF2B5EF4-FFF2-40B4-BE49-F238E27FC236}">
+                <a16:creationId xmlns:a16="http://schemas.microsoft.com/office/drawing/2014/main" id="{1B342C96-E9C5-42CE-B400-204A63D52636}"/>
+              </a:ext>
+            </a:extLst>
+          </p:cNvPr>
+          <p:cNvSpPr>
+            <a:spLocks xmlns:a="http://schemas.openxmlformats.org/drawingml/2006/main" noGrp="1"/>
+          </p:cNvSpPr>
+          <p:nvPr/>
+        </p:nvSpPr>
+        <p:spPr>
+          <a:xfrm xmlns:a="http://schemas.openxmlformats.org/drawingml/2006/main">
+            <a:off x="762000" y="3143250"/>
+            <a:ext cx="2286000" cy="323850"/>
+          </a:xfrm>
+          <a:prstGeom xmlns:a="http://schemas.openxmlformats.org/drawingml/2006/main" prst="rect">
+            <a:avLst/>
+          </a:prstGeom>
+          <a:noFill xmlns:a="http://schemas.openxmlformats.org/drawingml/2006/main"/>
+          <a:ln xmlns:a="http://schemas.openxmlformats.org/drawingml/2006/main" w="0">
+            <a:noFill/>
+          </a:ln>
+        </p:spPr>
+        <p:txBody>
+          <a:bodyPr xmlns:a="http://schemas.openxmlformats.org/drawingml/2006/main" anchor="ctr">
+            <a:normAutofit fontScale="100000"/>
+          </a:bodyPr>
+          <a:lstStyle xmlns:a="http://schemas.openxmlformats.org/drawingml/2006/main"/>
+          <a:p xmlns:a="http://schemas.openxmlformats.org/drawingml/2006/main">
+            <a:pPr>
+              <a:defRPr sz="1200" b="0">
+                <a:solidFill>
+                  <a:srgbClr val="B8CAD7"/>
+                </a:solidFill>
+                <a:latin typeface="Microsoft YaHei"/>
+                <a:ea typeface="Microsoft YaHei"/>
+                <a:cs typeface="Microsoft YaHei"/>
+              </a:defRPr>
+            </a:pPr>
+            <a:r>
+              <a:rPr sz="1200" b="0">
+                <a:solidFill>
+                  <a:srgbClr val="B8CAD7"/>
+                </a:solidFill>
+                <a:latin typeface="Microsoft YaHei"/>
+                <a:ea typeface="Microsoft YaHei"/>
+                <a:cs typeface="Microsoft YaHei"/>
+              </a:rPr>
+              <a:t>输出 Oracle 通过</a:t>
+            </a:r>
+          </a:p>
+        </p:txBody>
+      </p:sp>
+      <p:sp>
+        <p:nvSpPr>
+          <p:cNvPr id="6" name="">
+            <a:extLst xmlns:a="http://schemas.openxmlformats.org/drawingml/2006/main">
+              <a:ext uri="{FF2B5EF4-FFF2-40B4-BE49-F238E27FC236}">
+                <a16:creationId xmlns:a16="http://schemas.microsoft.com/office/drawing/2014/main" id="{9E5C455B-045B-4162-8FDC-1D5E4EF6C311}"/>
+              </a:ext>
+            </a:extLst>
+          </p:cNvPr>
+          <p:cNvSpPr>
+            <a:spLocks xmlns:a="http://schemas.openxmlformats.org/drawingml/2006/main" noGrp="1"/>
+          </p:cNvSpPr>
+          <p:nvPr/>
+        </p:nvSpPr>
+        <p:spPr>
+          <a:xfrm xmlns:a="http://schemas.openxmlformats.org/drawingml/2006/main">
+            <a:off x="3429000" y="2571750"/>
+            <a:ext cx="2286000" cy="552450"/>
+          </a:xfrm>
+          <a:prstGeom xmlns:a="http://schemas.openxmlformats.org/drawingml/2006/main" prst="rect">
+            <a:avLst/>
+          </a:prstGeom>
+          <a:noFill xmlns:a="http://schemas.openxmlformats.org/drawingml/2006/main"/>
+          <a:ln xmlns:a="http://schemas.openxmlformats.org/drawingml/2006/main" w="0">
+            <a:noFill/>
+          </a:ln>
+        </p:spPr>
+        <p:txBody>
+          <a:bodyPr xmlns:a="http://schemas.openxmlformats.org/drawingml/2006/main" anchor="ctr">
+            <a:normAutofit fontScale="100000"/>
+          </a:bodyPr>
+          <a:lstStyle xmlns:a="http://schemas.openxmlformats.org/drawingml/2006/main"/>
+          <a:p xmlns:a="http://schemas.openxmlformats.org/drawingml/2006/main">
+            <a:pPr>
+              <a:defRPr sz="2700" b="1">
+                <a:solidFill>
+                  <a:srgbClr val="FFFFFF"/>
+                </a:solidFill>
+                <a:latin typeface="Microsoft YaHei"/>
+                <a:ea typeface="Microsoft YaHei"/>
+                <a:cs typeface="Microsoft YaHei"/>
+              </a:defRPr>
+            </a:pPr>
+            <a:r>
+              <a:rPr sz="2700" b="1">
+                <a:solidFill>
+                  <a:srgbClr val="FFFFFF"/>
+                </a:solidFill>
+                <a:latin typeface="Microsoft YaHei"/>
+                <a:ea typeface="Microsoft YaHei"/>
+                <a:cs typeface="Microsoft YaHei"/>
+              </a:rPr>
+              <a:t>11 / 15</a:t>
+            </a:r>
+          </a:p>
+        </p:txBody>
+      </p:sp>
+      <p:sp>
+        <p:nvSpPr>
+          <p:cNvPr id="7" name="">
+            <a:extLst xmlns:a="http://schemas.openxmlformats.org/drawingml/2006/main">
+              <a:ext uri="{FF2B5EF4-FFF2-40B4-BE49-F238E27FC236}">
+                <a16:creationId xmlns:a16="http://schemas.microsoft.com/office/drawing/2014/main" id="{F2BB8459-7806-42E5-BE10-EC4A313ED5F0}"/>
+              </a:ext>
+            </a:extLst>
+          </p:cNvPr>
+          <p:cNvSpPr>
+            <a:spLocks xmlns:a="http://schemas.openxmlformats.org/drawingml/2006/main" noGrp="1"/>
+          </p:cNvSpPr>
+          <p:nvPr/>
+        </p:nvSpPr>
+        <p:spPr>
+          <a:xfrm xmlns:a="http://schemas.openxmlformats.org/drawingml/2006/main">
+            <a:off x="3429000" y="3143250"/>
+            <a:ext cx="2286000" cy="323850"/>
+          </a:xfrm>
+          <a:prstGeom xmlns:a="http://schemas.openxmlformats.org/drawingml/2006/main" prst="rect">
+            <a:avLst/>
+          </a:prstGeom>
+          <a:noFill xmlns:a="http://schemas.openxmlformats.org/drawingml/2006/main"/>
+          <a:ln xmlns:a="http://schemas.openxmlformats.org/drawingml/2006/main" w="0">
+            <a:noFill/>
+          </a:ln>
+        </p:spPr>
+        <p:txBody>
+          <a:bodyPr xmlns:a="http://schemas.openxmlformats.org/drawingml/2006/main" anchor="ctr">
+            <a:normAutofit fontScale="100000"/>
+          </a:bodyPr>
+          <a:lstStyle xmlns:a="http://schemas.openxmlformats.org/drawingml/2006/main"/>
+          <a:p xmlns:a="http://schemas.openxmlformats.org/drawingml/2006/main">
+            <a:pPr>
+              <a:defRPr sz="1200" b="0">
+                <a:solidFill>
+                  <a:srgbClr val="B8CAD7"/>
+                </a:solidFill>
+                <a:latin typeface="Microsoft YaHei"/>
+                <a:ea typeface="Microsoft YaHei"/>
+                <a:cs typeface="Microsoft YaHei"/>
+              </a:defRPr>
+            </a:pPr>
+            <a:r>
+              <a:rPr sz="1200" b="0">
+                <a:solidFill>
+                  <a:srgbClr val="B8CAD7"/>
+                </a:solidFill>
+                <a:latin typeface="Microsoft YaHei"/>
+                <a:ea typeface="Microsoft YaHei"/>
+                <a:cs typeface="Microsoft YaHei"/>
+              </a:rPr>
+              <a:t>完整用例通过</a:t>
+            </a:r>
+          </a:p>
+        </p:txBody>
+      </p:sp>
+      <p:sp>
+        <p:nvSpPr>
+          <p:cNvPr id="8" name="">
+            <a:extLst xmlns:a="http://schemas.openxmlformats.org/drawingml/2006/main">
+              <a:ext uri="{FF2B5EF4-FFF2-40B4-BE49-F238E27FC236}">
+                <a16:creationId xmlns:a16="http://schemas.microsoft.com/office/drawing/2014/main" id="{26678184-8407-407D-898F-4CB9AD779CE9}"/>
+              </a:ext>
+            </a:extLst>
+          </p:cNvPr>
+          <p:cNvSpPr>
+            <a:spLocks xmlns:a="http://schemas.openxmlformats.org/drawingml/2006/main" noGrp="1"/>
+          </p:cNvSpPr>
+          <p:nvPr/>
+        </p:nvSpPr>
+        <p:spPr>
+          <a:xfrm xmlns:a="http://schemas.openxmlformats.org/drawingml/2006/main">
+            <a:off x="6096000" y="2571750"/>
+            <a:ext cx="2286000" cy="552450"/>
+          </a:xfrm>
+          <a:prstGeom xmlns:a="http://schemas.openxmlformats.org/drawingml/2006/main" prst="rect">
+            <a:avLst/>
+          </a:prstGeom>
+          <a:noFill xmlns:a="http://schemas.openxmlformats.org/drawingml/2006/main"/>
+          <a:ln xmlns:a="http://schemas.openxmlformats.org/drawingml/2006/main" w="0">
+            <a:noFill/>
+          </a:ln>
+        </p:spPr>
+        <p:txBody>
+          <a:bodyPr xmlns:a="http://schemas.openxmlformats.org/drawingml/2006/main" anchor="ctr">
+            <a:normAutofit fontScale="100000"/>
+          </a:bodyPr>
+          <a:lstStyle xmlns:a="http://schemas.openxmlformats.org/drawingml/2006/main"/>
+          <a:p xmlns:a="http://schemas.openxmlformats.org/drawingml/2006/main">
+            <a:pPr>
+              <a:defRPr sz="2700" b="1">
+                <a:solidFill>
+                  <a:srgbClr val="FFFFFF"/>
+                </a:solidFill>
+                <a:latin typeface="Microsoft YaHei"/>
+                <a:ea typeface="Microsoft YaHei"/>
+                <a:cs typeface="Microsoft YaHei"/>
+              </a:defRPr>
+            </a:pPr>
+            <a:r>
+              <a:rPr sz="2700" b="1">
+                <a:solidFill>
+                  <a:srgbClr val="FFFFFF"/>
+                </a:solidFill>
+                <a:latin typeface="Microsoft YaHei"/>
+                <a:ea typeface="Microsoft YaHei"/>
+                <a:cs typeface="Microsoft YaHei"/>
+              </a:rPr>
+              <a:t>约 72%</a:t>
+            </a:r>
+          </a:p>
+        </p:txBody>
+      </p:sp>
+      <p:sp>
+        <p:nvSpPr>
+          <p:cNvPr id="9" name="">
+            <a:extLst xmlns:a="http://schemas.openxmlformats.org/drawingml/2006/main">
+              <a:ext uri="{FF2B5EF4-FFF2-40B4-BE49-F238E27FC236}">
+                <a16:creationId xmlns:a16="http://schemas.microsoft.com/office/drawing/2014/main" id="{7BE15257-00CE-47A7-8605-026E57E791A5}"/>
+              </a:ext>
+            </a:extLst>
+          </p:cNvPr>
+          <p:cNvSpPr>
+            <a:spLocks xmlns:a="http://schemas.openxmlformats.org/drawingml/2006/main" noGrp="1"/>
+          </p:cNvSpPr>
+          <p:nvPr/>
+        </p:nvSpPr>
+        <p:spPr>
+          <a:xfrm xmlns:a="http://schemas.openxmlformats.org/drawingml/2006/main">
+            <a:off x="6096000" y="3143250"/>
+            <a:ext cx="2286000" cy="323850"/>
+          </a:xfrm>
+          <a:prstGeom xmlns:a="http://schemas.openxmlformats.org/drawingml/2006/main" prst="rect">
+            <a:avLst/>
+          </a:prstGeom>
+          <a:noFill xmlns:a="http://schemas.openxmlformats.org/drawingml/2006/main"/>
+          <a:ln xmlns:a="http://schemas.openxmlformats.org/drawingml/2006/main" w="0">
+            <a:noFill/>
+          </a:ln>
+        </p:spPr>
+        <p:txBody>
+          <a:bodyPr xmlns:a="http://schemas.openxmlformats.org/drawingml/2006/main" anchor="ctr">
+            <a:normAutofit fontScale="100000"/>
+          </a:bodyPr>
+          <a:lstStyle xmlns:a="http://schemas.openxmlformats.org/drawingml/2006/main"/>
+          <a:p xmlns:a="http://schemas.openxmlformats.org/drawingml/2006/main">
+            <a:pPr>
+              <a:defRPr sz="1200" b="0">
+                <a:solidFill>
+                  <a:srgbClr val="B8CAD7"/>
+                </a:solidFill>
+                <a:latin typeface="Microsoft YaHei"/>
+                <a:ea typeface="Microsoft YaHei"/>
+                <a:cs typeface="Microsoft YaHei"/>
+              </a:defRPr>
+            </a:pPr>
+            <a:r>
+              <a:rPr sz="1200" b="0">
+                <a:solidFill>
+                  <a:srgbClr val="B8CAD7"/>
+                </a:solidFill>
+                <a:latin typeface="Microsoft YaHei"/>
+                <a:ea typeface="Microsoft YaHei"/>
+                <a:cs typeface="Microsoft YaHei"/>
+              </a:rPr>
+              <a:t>有效 KV 减少</a:t>
+            </a:r>
+          </a:p>
+        </p:txBody>
+      </p:sp>
+      <p:sp>
+        <p:nvSpPr>
+          <p:cNvPr id="10" name="">
+            <a:extLst xmlns:a="http://schemas.openxmlformats.org/drawingml/2006/main">
+              <a:ext uri="{FF2B5EF4-FFF2-40B4-BE49-F238E27FC236}">
+                <a16:creationId xmlns:a16="http://schemas.microsoft.com/office/drawing/2014/main" id="{492374C2-AD23-40D9-B9A7-1BF0E2EE4AB8}"/>
+              </a:ext>
+            </a:extLst>
+          </p:cNvPr>
+          <p:cNvSpPr>
+            <a:spLocks xmlns:a="http://schemas.openxmlformats.org/drawingml/2006/main" noGrp="1"/>
+          </p:cNvSpPr>
+          <p:nvPr/>
+        </p:nvSpPr>
+        <p:spPr>
+          <a:xfrm xmlns:a="http://schemas.openxmlformats.org/drawingml/2006/main">
+            <a:off x="8763000" y="2571750"/>
+            <a:ext cx="2286000" cy="552450"/>
+          </a:xfrm>
+          <a:prstGeom xmlns:a="http://schemas.openxmlformats.org/drawingml/2006/main" prst="rect">
+            <a:avLst/>
+          </a:prstGeom>
+          <a:noFill xmlns:a="http://schemas.openxmlformats.org/drawingml/2006/main"/>
+          <a:ln xmlns:a="http://schemas.openxmlformats.org/drawingml/2006/main" w="0">
+            <a:noFill/>
+          </a:ln>
+        </p:spPr>
+        <p:txBody>
+          <a:bodyPr xmlns:a="http://schemas.openxmlformats.org/drawingml/2006/main" anchor="ctr">
+            <a:normAutofit fontScale="100000"/>
+          </a:bodyPr>
+          <a:lstStyle xmlns:a="http://schemas.openxmlformats.org/drawingml/2006/main"/>
+          <a:p xmlns:a="http://schemas.openxmlformats.org/drawingml/2006/main">
+            <a:pPr>
+              <a:defRPr sz="2700" b="1">
+                <a:solidFill>
+                  <a:srgbClr val="FF8A84"/>
+                </a:solidFill>
+                <a:latin typeface="Microsoft YaHei"/>
+                <a:ea typeface="Microsoft YaHei"/>
+                <a:cs typeface="Microsoft YaHei"/>
+              </a:defRPr>
+            </a:pPr>
+            <a:r>
+              <a:rPr sz="2700" b="1">
+                <a:solidFill>
+                  <a:srgbClr val="FF8A84"/>
+                </a:solidFill>
+                <a:latin typeface="Microsoft YaHei"/>
+                <a:ea typeface="Microsoft YaHei"/>
+                <a:cs typeface="Microsoft YaHei"/>
+              </a:rPr>
+              <a:t>&lt; 1.0×</a:t>
+            </a:r>
+          </a:p>
+        </p:txBody>
+      </p:sp>
+      <p:sp>
+        <p:nvSpPr>
+          <p:cNvPr id="11" name="">
+            <a:extLst xmlns:a="http://schemas.openxmlformats.org/drawingml/2006/main">
+              <a:ext uri="{FF2B5EF4-FFF2-40B4-BE49-F238E27FC236}">
+                <a16:creationId xmlns:a16="http://schemas.microsoft.com/office/drawing/2014/main" id="{EB823EC5-5436-4DEF-82B6-3374D2506DB5}"/>
+              </a:ext>
+            </a:extLst>
+          </p:cNvPr>
+          <p:cNvSpPr>
+            <a:spLocks xmlns:a="http://schemas.openxmlformats.org/drawingml/2006/main" noGrp="1"/>
+          </p:cNvSpPr>
+          <p:nvPr/>
+        </p:nvSpPr>
+        <p:spPr>
+          <a:xfrm xmlns:a="http://schemas.openxmlformats.org/drawingml/2006/main">
+            <a:off x="8763000" y="3143250"/>
+            <a:ext cx="2286000" cy="323850"/>
+          </a:xfrm>
+          <a:prstGeom xmlns:a="http://schemas.openxmlformats.org/drawingml/2006/main" prst="rect">
+            <a:avLst/>
+          </a:prstGeom>
+          <a:noFill xmlns:a="http://schemas.openxmlformats.org/drawingml/2006/main"/>
+          <a:ln xmlns:a="http://schemas.openxmlformats.org/drawingml/2006/main" w="0">
+            <a:noFill/>
+          </a:ln>
+        </p:spPr>
+        <p:txBody>
+          <a:bodyPr xmlns:a="http://schemas.openxmlformats.org/drawingml/2006/main" anchor="ctr">
+            <a:normAutofit fontScale="100000"/>
+          </a:bodyPr>
+          <a:lstStyle xmlns:a="http://schemas.openxmlformats.org/drawingml/2006/main"/>
+          <a:p xmlns:a="http://schemas.openxmlformats.org/drawingml/2006/main">
+            <a:pPr>
+              <a:defRPr sz="1200" b="0">
+                <a:solidFill>
+                  <a:srgbClr val="B8CAD7"/>
+                </a:solidFill>
+                <a:latin typeface="Microsoft YaHei"/>
+                <a:ea typeface="Microsoft YaHei"/>
+                <a:cs typeface="Microsoft YaHei"/>
+              </a:defRPr>
+            </a:pPr>
+            <a:r>
+              <a:rPr sz="1200" b="0">
+                <a:solidFill>
+                  <a:srgbClr val="B8CAD7"/>
+                </a:solidFill>
+                <a:latin typeface="Microsoft YaHei"/>
+                <a:ea typeface="Microsoft YaHei"/>
+                <a:cs typeface="Microsoft YaHei"/>
+              </a:rPr>
+              <a:t>两条解码倍率</a:t>
+            </a:r>
+          </a:p>
+        </p:txBody>
+      </p:sp>
+      <p:sp>
+        <p:nvSpPr>
+          <p:cNvPr id="12" name="">
+            <a:extLst xmlns:a="http://schemas.openxmlformats.org/drawingml/2006/main">
+              <a:ext uri="{FF2B5EF4-FFF2-40B4-BE49-F238E27FC236}">
+                <a16:creationId xmlns:a16="http://schemas.microsoft.com/office/drawing/2014/main" id="{0560FC5E-4AE7-45C8-9774-0C488A777672}"/>
+              </a:ext>
+            </a:extLst>
+          </p:cNvPr>
+          <p:cNvSpPr>
+            <a:spLocks xmlns:a="http://schemas.openxmlformats.org/drawingml/2006/main" noGrp="1"/>
+          </p:cNvSpPr>
+          <p:nvPr/>
+        </p:nvSpPr>
+        <p:spPr>
+          <a:xfrm xmlns:a="http://schemas.openxmlformats.org/drawingml/2006/main">
+            <a:off x="762000" y="4000500"/>
+            <a:ext cx="2095500" cy="381000"/>
+          </a:xfrm>
+          <a:prstGeom xmlns:a="http://schemas.openxmlformats.org/drawingml/2006/main" prst="rect">
+            <a:avLst/>
+          </a:prstGeom>
+          <a:noFill xmlns:a="http://schemas.openxmlformats.org/drawingml/2006/main"/>
+          <a:ln xmlns:a="http://schemas.openxmlformats.org/drawingml/2006/main" w="0">
+            <a:noFill/>
+          </a:ln>
+        </p:spPr>
+        <p:txBody>
+          <a:bodyPr xmlns:a="http://schemas.openxmlformats.org/drawingml/2006/main" anchor="ctr">
+            <a:normAutofit fontScale="100000"/>
+          </a:bodyPr>
+          <a:lstStyle xmlns:a="http://schemas.openxmlformats.org/drawingml/2006/main"/>
+          <a:p xmlns:a="http://schemas.openxmlformats.org/drawingml/2006/main">
+            <a:pPr>
+              <a:defRPr sz="1875" b="1">
+                <a:solidFill>
+                  <a:srgbClr val="83E0DB"/>
+                </a:solidFill>
+                <a:latin typeface="Microsoft YaHei"/>
+                <a:ea typeface="Microsoft YaHei"/>
+                <a:cs typeface="Microsoft YaHei"/>
+              </a:defRPr>
+            </a:pPr>
+            <a:r>
+              <a:rPr sz="1875" b="1">
+                <a:solidFill>
+                  <a:srgbClr val="83E0DB"/>
+                </a:solidFill>
+                <a:latin typeface="Microsoft YaHei"/>
+                <a:ea typeface="Microsoft YaHei"/>
+                <a:cs typeface="Microsoft YaHei"/>
+              </a:rPr>
+              <a:t>后续工作</a:t>
+            </a:r>
+          </a:p>
+        </p:txBody>
+      </p:sp>
+      <p:sp>
+        <p:nvSpPr>
+          <p:cNvPr id="13" name="">
+            <a:extLst xmlns:a="http://schemas.openxmlformats.org/drawingml/2006/main">
+              <a:ext uri="{FF2B5EF4-FFF2-40B4-BE49-F238E27FC236}">
+                <a16:creationId xmlns:a16="http://schemas.microsoft.com/office/drawing/2014/main" id="{05E5A47E-9005-4A80-B541-8B1F7B0A47E5}"/>
+              </a:ext>
+            </a:extLst>
+          </p:cNvPr>
+          <p:cNvSpPr>
+            <a:spLocks xmlns:a="http://schemas.openxmlformats.org/drawingml/2006/main" noGrp="1"/>
+          </p:cNvSpPr>
+          <p:nvPr/>
+        </p:nvSpPr>
+        <p:spPr>
+          <a:xfrm xmlns:a="http://schemas.openxmlformats.org/drawingml/2006/main">
+            <a:off x="762000" y="4438650"/>
+            <a:ext cx="9715500" cy="361950"/>
+          </a:xfrm>
+          <a:prstGeom xmlns:a="http://schemas.openxmlformats.org/drawingml/2006/main" prst="rect">
+            <a:avLst/>
+          </a:prstGeom>
+          <a:noFill xmlns:a="http://schemas.openxmlformats.org/drawingml/2006/main"/>
+          <a:ln xmlns:a="http://schemas.openxmlformats.org/drawingml/2006/main" w="0">
+            <a:noFill/>
+          </a:ln>
+        </p:spPr>
+        <p:txBody>
+          <a:bodyPr xmlns:a="http://schemas.openxmlformats.org/drawingml/2006/main" anchor="ctr">
+            <a:normAutofit fontScale="100000"/>
+          </a:bodyPr>
+          <a:lstStyle xmlns:a="http://schemas.openxmlformats.org/drawingml/2006/main"/>
+          <a:p xmlns:a="http://schemas.openxmlformats.org/drawingml/2006/main">
+            <a:pPr>
+              <a:defRPr sz="1500" b="0">
+                <a:solidFill>
+                  <a:srgbClr val="FFFFFF"/>
+                </a:solidFill>
+                <a:latin typeface="Microsoft YaHei"/>
+                <a:ea typeface="Microsoft YaHei"/>
+                <a:cs typeface="Microsoft YaHei"/>
+              </a:defRPr>
+            </a:pPr>
+            <a:r>
+              <a:rPr sz="1500" b="0">
+                <a:solidFill>
+                  <a:srgbClr val="FFFFFF"/>
+                </a:solidFill>
+                <a:latin typeface="Microsoft YaHei"/>
+                <a:ea typeface="Microsoft YaHei"/>
+                <a:cs typeface="Microsoft YaHei"/>
+              </a:rPr>
+              <a:t>• 定位视觉计数错误并保持原阈值回归</a:t>
+            </a:r>
+          </a:p>
+        </p:txBody>
+      </p:sp>
+      <p:sp>
+        <p:nvSpPr>
+          <p:cNvPr id="14" name="">
+            <a:extLst xmlns:a="http://schemas.openxmlformats.org/drawingml/2006/main">
+              <a:ext uri="{FF2B5EF4-FFF2-40B4-BE49-F238E27FC236}">
+                <a16:creationId xmlns:a16="http://schemas.microsoft.com/office/drawing/2014/main" id="{B38D2DC4-8F78-4DE6-80CC-9ACD07B99C04}"/>
+              </a:ext>
+            </a:extLst>
+          </p:cNvPr>
+          <p:cNvSpPr>
+            <a:spLocks xmlns:a="http://schemas.openxmlformats.org/drawingml/2006/main" noGrp="1"/>
+          </p:cNvSpPr>
+          <p:nvPr/>
+        </p:nvSpPr>
+        <p:spPr>
+          <a:xfrm xmlns:a="http://schemas.openxmlformats.org/drawingml/2006/main">
+            <a:off x="762000" y="4838700"/>
+            <a:ext cx="9715500" cy="361950"/>
+          </a:xfrm>
+          <a:prstGeom xmlns:a="http://schemas.openxmlformats.org/drawingml/2006/main" prst="rect">
+            <a:avLst/>
+          </a:prstGeom>
+          <a:noFill xmlns:a="http://schemas.openxmlformats.org/drawingml/2006/main"/>
+          <a:ln xmlns:a="http://schemas.openxmlformats.org/drawingml/2006/main" w="0">
+            <a:noFill/>
+          </a:ln>
+        </p:spPr>
+        <p:txBody>
+          <a:bodyPr xmlns:a="http://schemas.openxmlformats.org/drawingml/2006/main" anchor="ctr">
+            <a:normAutofit fontScale="100000"/>
+          </a:bodyPr>
+          <a:lstStyle xmlns:a="http://schemas.openxmlformats.org/drawingml/2006/main"/>
+          <a:p xmlns:a="http://schemas.openxmlformats.org/drawingml/2006/main">
+            <a:pPr>
+              <a:defRPr sz="1500" b="0">
+                <a:solidFill>
+                  <a:srgbClr val="FFFFFF"/>
+                </a:solidFill>
+                <a:latin typeface="Microsoft YaHei"/>
+                <a:ea typeface="Microsoft YaHei"/>
+                <a:cs typeface="Microsoft YaHei"/>
+              </a:defRPr>
+            </a:pPr>
+            <a:r>
+              <a:rPr sz="1500" b="0">
+                <a:solidFill>
+                  <a:srgbClr val="FFFFFF"/>
+                </a:solidFill>
+                <a:latin typeface="Microsoft YaHei"/>
+                <a:ea typeface="Microsoft YaHei"/>
+                <a:cs typeface="Microsoft YaHei"/>
+              </a:rPr>
+              <a:t>• 剖析 hook、索引和缓存整理开销</a:t>
+            </a:r>
+          </a:p>
+        </p:txBody>
+      </p:sp>
+      <p:sp>
+        <p:nvSpPr>
+          <p:cNvPr id="15" name="">
+            <a:extLst xmlns:a="http://schemas.openxmlformats.org/drawingml/2006/main">
+              <a:ext uri="{FF2B5EF4-FFF2-40B4-BE49-F238E27FC236}">
+                <a16:creationId xmlns:a16="http://schemas.microsoft.com/office/drawing/2014/main" id="{5BF72BC1-AF3F-40B6-B059-A710A2C48748}"/>
+              </a:ext>
+            </a:extLst>
+          </p:cNvPr>
+          <p:cNvSpPr>
+            <a:spLocks xmlns:a="http://schemas.openxmlformats.org/drawingml/2006/main" noGrp="1"/>
+          </p:cNvSpPr>
+          <p:nvPr/>
+        </p:nvSpPr>
+        <p:spPr>
+          <a:xfrm xmlns:a="http://schemas.openxmlformats.org/drawingml/2006/main">
+            <a:off x="762000" y="5238750"/>
+            <a:ext cx="9715500" cy="361950"/>
+          </a:xfrm>
+          <a:prstGeom xmlns:a="http://schemas.openxmlformats.org/drawingml/2006/main" prst="rect">
+            <a:avLst/>
+          </a:prstGeom>
+          <a:noFill xmlns:a="http://schemas.openxmlformats.org/drawingml/2006/main"/>
+          <a:ln xmlns:a="http://schemas.openxmlformats.org/drawingml/2006/main" w="0">
+            <a:noFill/>
+          </a:ln>
+        </p:spPr>
+        <p:txBody>
+          <a:bodyPr xmlns:a="http://schemas.openxmlformats.org/drawingml/2006/main" anchor="ctr">
+            <a:normAutofit fontScale="100000"/>
+          </a:bodyPr>
+          <a:lstStyle xmlns:a="http://schemas.openxmlformats.org/drawingml/2006/main"/>
+          <a:p xmlns:a="http://schemas.openxmlformats.org/drawingml/2006/main">
+            <a:pPr>
+              <a:defRPr sz="1500" b="0">
+                <a:solidFill>
+                  <a:srgbClr val="FFFFFF"/>
+                </a:solidFill>
+                <a:latin typeface="Microsoft YaHei"/>
+                <a:ea typeface="Microsoft YaHei"/>
+                <a:cs typeface="Microsoft YaHei"/>
+              </a:defRPr>
+            </a:pPr>
+            <a:r>
+              <a:rPr sz="1500" b="0">
+                <a:solidFill>
+                  <a:srgbClr val="FFFFFF"/>
+                </a:solidFill>
+                <a:latin typeface="Microsoft YaHei"/>
+                <a:ea typeface="Microsoft YaHei"/>
+                <a:cs typeface="Microsoft YaHei"/>
+              </a:rPr>
+              <a:t>• 由 wjn 独立复现 lcx 缺陷</a:t>
+            </a:r>
+          </a:p>
+        </p:txBody>
+      </p:sp>
+      <p:sp>
+        <p:nvSpPr>
+          <p:cNvPr id="16" name="">
+            <a:extLst xmlns:a="http://schemas.openxmlformats.org/drawingml/2006/main">
+              <a:ext uri="{FF2B5EF4-FFF2-40B4-BE49-F238E27FC236}">
+                <a16:creationId xmlns:a16="http://schemas.microsoft.com/office/drawing/2014/main" id="{CEB507DB-1160-40BE-AFC3-EB87737AFE2F}"/>
+              </a:ext>
+            </a:extLst>
+          </p:cNvPr>
+          <p:cNvSpPr>
+            <a:spLocks xmlns:a="http://schemas.openxmlformats.org/drawingml/2006/main" noGrp="1"/>
+          </p:cNvSpPr>
+          <p:nvPr/>
+        </p:nvSpPr>
+        <p:spPr>
+          <a:xfrm xmlns:a="http://schemas.openxmlformats.org/drawingml/2006/main">
+            <a:off x="762000" y="5638800"/>
+            <a:ext cx="9715500" cy="361950"/>
+          </a:xfrm>
+          <a:prstGeom xmlns:a="http://schemas.openxmlformats.org/drawingml/2006/main" prst="rect">
+            <a:avLst/>
+          </a:prstGeom>
+          <a:noFill xmlns:a="http://schemas.openxmlformats.org/drawingml/2006/main"/>
+          <a:ln xmlns:a="http://schemas.openxmlformats.org/drawingml/2006/main" w="0">
+            <a:noFill/>
+          </a:ln>
+        </p:spPr>
+        <p:txBody>
+          <a:bodyPr xmlns:a="http://schemas.openxmlformats.org/drawingml/2006/main" anchor="ctr">
+            <a:normAutofit fontScale="100000"/>
+          </a:bodyPr>
+          <a:lstStyle xmlns:a="http://schemas.openxmlformats.org/drawingml/2006/main"/>
+          <a:p xmlns:a="http://schemas.openxmlformats.org/drawingml/2006/main">
+            <a:pPr>
+              <a:defRPr sz="1500" b="0">
+                <a:solidFill>
+                  <a:srgbClr val="FFFFFF"/>
+                </a:solidFill>
+                <a:latin typeface="Microsoft YaHei"/>
+                <a:ea typeface="Microsoft YaHei"/>
+                <a:cs typeface="Microsoft YaHei"/>
+              </a:defRPr>
+            </a:pPr>
+            <a:r>
+              <a:rPr sz="1500" b="0">
+                <a:solidFill>
+                  <a:srgbClr val="FFFFFF"/>
+                </a:solidFill>
+                <a:latin typeface="Microsoft YaHei"/>
+                <a:ea typeface="Microsoft YaHei"/>
+                <a:cs typeface="Microsoft YaHei"/>
+              </a:rPr>
+              <a:t>• 冻结公开基准版本后再补充论文基准实验</a:t>
+            </a:r>
+          </a:p>
+        </p:txBody>
+      </p:sp>
+      <p:sp>
+        <p:nvSpPr>
+          <p:cNvPr id="17" name="">
+            <a:extLst xmlns:a="http://schemas.openxmlformats.org/drawingml/2006/main">
+              <a:ext uri="{FF2B5EF4-FFF2-40B4-BE49-F238E27FC236}">
+                <a16:creationId xmlns:a16="http://schemas.microsoft.com/office/drawing/2014/main" id="{980F8F18-26F0-4BF0-A577-A98A447F685B}"/>
+              </a:ext>
+            </a:extLst>
+          </p:cNvPr>
+          <p:cNvSpPr>
+            <a:spLocks xmlns:a="http://schemas.openxmlformats.org/drawingml/2006/main" noGrp="1"/>
+          </p:cNvSpPr>
+          <p:nvPr/>
+        </p:nvSpPr>
+        <p:spPr>
+          <a:xfrm xmlns:a="http://schemas.openxmlformats.org/drawingml/2006/main">
+            <a:off x="762000" y="6048375"/>
+            <a:ext cx="10477500" cy="400050"/>
+          </a:xfrm>
+          <a:prstGeom xmlns:a="http://schemas.openxmlformats.org/drawingml/2006/main" prst="rect">
+            <a:avLst/>
+          </a:prstGeom>
+          <a:noFill xmlns:a="http://schemas.openxmlformats.org/drawingml/2006/main"/>
+          <a:ln xmlns:a="http://schemas.openxmlformats.org/drawingml/2006/main" w="0">
+            <a:noFill/>
+          </a:ln>
+        </p:spPr>
+        <p:txBody>
+          <a:bodyPr xmlns:a="http://schemas.openxmlformats.org/drawingml/2006/main" anchor="ctr">
+            <a:normAutofit fontScale="100000"/>
+          </a:bodyPr>
+          <a:lstStyle xmlns:a="http://schemas.openxmlformats.org/drawingml/2006/main"/>
+          <a:p xmlns:a="http://schemas.openxmlformats.org/drawingml/2006/main">
+            <a:pPr>
+              <a:defRPr sz="1350" b="1">
+                <a:solidFill>
+                  <a:srgbClr val="FFB2AD"/>
+                </a:solidFill>
+                <a:latin typeface="Microsoft YaHei"/>
+                <a:ea typeface="Microsoft YaHei"/>
+                <a:cs typeface="Microsoft YaHei"/>
+              </a:defRPr>
+            </a:pPr>
+            <a:r>
+              <a:rPr sz="1350" b="1">
+                <a:solidFill>
+                  <a:srgbClr val="FFB2AD"/>
+                </a:solidFill>
+                <a:latin typeface="Microsoft YaHei"/>
+                <a:ea typeface="Microsoft YaHei"/>
+                <a:cs typeface="Microsoft YaHei"/>
+              </a:rPr>
+              <a:t>结论：本版本可作为课程测试实践的证据链，但不能宣称已经复现论文完整方案或实现推理加速。</a:t>
+            </a:r>
+          </a:p>
+        </p:txBody>
+      </p:sp>
+    </p:spTree>
+    <p:extLst>
+      <p:ext uri="{BB962C8B-B14F-4D97-AF65-F5344CB8AC3E}">
+        <p14:creationId xmlns:p14="http://schemas.microsoft.com/office/powerpoint/2010/main" val="1570594660"/>
       </p:ext>
     </p:extLst>
   </p:cSld>
@@ -2899,6 +8064,7 @@
           <a:lstStyle xmlns:a="http://schemas.openxmlformats.org/drawingml/2006/main"/>
           <a:p xmlns:a="http://schemas.openxmlformats.org/drawingml/2006/main">
             <a:pPr algn="l">
+              <a:buNone/>
               <a:defRPr sz="975" b="1">
                 <a:solidFill>
                   <a:srgbClr val="2FA7A5"/>
@@ -2956,6 +8122,7 @@
           <a:lstStyle xmlns:a="http://schemas.openxmlformats.org/drawingml/2006/main"/>
           <a:p xmlns:a="http://schemas.openxmlformats.org/drawingml/2006/main">
             <a:pPr algn="l">
+              <a:buNone/>
               <a:defRPr sz="2550" b="1">
                 <a:solidFill>
                   <a:srgbClr val="17324D"/>
@@ -3044,6 +8211,7 @@
           <a:lstStyle xmlns:a="http://schemas.openxmlformats.org/drawingml/2006/main"/>
           <a:p xmlns:a="http://schemas.openxmlformats.org/drawingml/2006/main">
             <a:pPr algn="r">
+              <a:buNone/>
               <a:defRPr sz="1350" b="1">
                 <a:solidFill>
                   <a:srgbClr val="2FA7A5"/>
@@ -3136,6 +8304,7 @@
           <a:lstStyle xmlns:a="http://schemas.openxmlformats.org/drawingml/2006/main"/>
           <a:p xmlns:a="http://schemas.openxmlformats.org/drawingml/2006/main">
             <a:pPr algn="ctr">
+              <a:buNone/>
               <a:defRPr sz="1500" b="1">
                 <a:solidFill>
                   <a:srgbClr val="17324D"/>
@@ -3193,6 +8362,7 @@
           <a:lstStyle xmlns:a="http://schemas.openxmlformats.org/drawingml/2006/main"/>
           <a:p xmlns:a="http://schemas.openxmlformats.org/drawingml/2006/main">
             <a:pPr algn="ctr">
+              <a:buNone/>
               <a:defRPr sz="1125" b="0">
                 <a:solidFill>
                   <a:srgbClr val="60707B"/>
@@ -3216,6 +8386,7 @@
           </a:p>
           <a:p xmlns:a="http://schemas.openxmlformats.org/drawingml/2006/main">
             <a:pPr algn="ctr">
+              <a:buNone/>
               <a:defRPr sz="1125" b="0">
                 <a:solidFill>
                   <a:srgbClr val="60707B"/>
@@ -3308,6 +8479,7 @@
           <a:lstStyle xmlns:a="http://schemas.openxmlformats.org/drawingml/2006/main"/>
           <a:p xmlns:a="http://schemas.openxmlformats.org/drawingml/2006/main">
             <a:pPr algn="ctr">
+              <a:buNone/>
               <a:defRPr sz="1500" b="1">
                 <a:solidFill>
                   <a:srgbClr val="17324D"/>
@@ -3365,6 +8537,7 @@
           <a:lstStyle xmlns:a="http://schemas.openxmlformats.org/drawingml/2006/main"/>
           <a:p xmlns:a="http://schemas.openxmlformats.org/drawingml/2006/main">
             <a:pPr algn="ctr">
+              <a:buNone/>
               <a:defRPr sz="1125" b="0">
                 <a:solidFill>
                   <a:srgbClr val="60707B"/>
@@ -3388,6 +8561,7 @@
           </a:p>
           <a:p xmlns:a="http://schemas.openxmlformats.org/drawingml/2006/main">
             <a:pPr algn="ctr">
+              <a:buNone/>
               <a:defRPr sz="1125" b="0">
                 <a:solidFill>
                   <a:srgbClr val="60707B"/>
@@ -3480,6 +8654,7 @@
           <a:lstStyle xmlns:a="http://schemas.openxmlformats.org/drawingml/2006/main"/>
           <a:p xmlns:a="http://schemas.openxmlformats.org/drawingml/2006/main">
             <a:pPr algn="ctr">
+              <a:buNone/>
               <a:defRPr sz="1500" b="1">
                 <a:solidFill>
                   <a:srgbClr val="17324D"/>
@@ -3537,6 +8712,7 @@
           <a:lstStyle xmlns:a="http://schemas.openxmlformats.org/drawingml/2006/main"/>
           <a:p xmlns:a="http://schemas.openxmlformats.org/drawingml/2006/main">
             <a:pPr algn="ctr">
+              <a:buNone/>
               <a:defRPr sz="1125" b="0">
                 <a:solidFill>
                   <a:srgbClr val="60707B"/>
@@ -3560,6 +8736,7 @@
           </a:p>
           <a:p xmlns:a="http://schemas.openxmlformats.org/drawingml/2006/main">
             <a:pPr algn="ctr">
+              <a:buNone/>
               <a:defRPr sz="1125" b="0">
                 <a:solidFill>
                   <a:srgbClr val="60707B"/>
@@ -3652,6 +8829,7 @@
           <a:lstStyle xmlns:a="http://schemas.openxmlformats.org/drawingml/2006/main"/>
           <a:p xmlns:a="http://schemas.openxmlformats.org/drawingml/2006/main">
             <a:pPr algn="ctr">
+              <a:buNone/>
               <a:defRPr sz="1500" b="1">
                 <a:solidFill>
                   <a:srgbClr val="17324D"/>
@@ -3709,6 +8887,7 @@
           <a:lstStyle xmlns:a="http://schemas.openxmlformats.org/drawingml/2006/main"/>
           <a:p xmlns:a="http://schemas.openxmlformats.org/drawingml/2006/main">
             <a:pPr algn="ctr">
+              <a:buNone/>
               <a:defRPr sz="1125" b="0">
                 <a:solidFill>
                   <a:srgbClr val="60707B"/>
@@ -3732,6 +8911,7 @@
           </a:p>
           <a:p xmlns:a="http://schemas.openxmlformats.org/drawingml/2006/main">
             <a:pPr algn="ctr">
+              <a:buNone/>
               <a:defRPr sz="1125" b="0">
                 <a:solidFill>
                   <a:srgbClr val="60707B"/>
@@ -3757,7 +8937,7 @@
       </p:sp>
       <p:cxnSp>
         <p:nvCxnSpPr>
-          <p:cNvPr id="49" name=""/>
+          <p:cNvPr id="77" name=""/>
           <p:cNvCxnSpPr>
             <a:stCxn xmlns:a="http://schemas.openxmlformats.org/drawingml/2006/main" id="5" idx="3"/>
             <a:endCxn xmlns:a="http://schemas.openxmlformats.org/drawingml/2006/main" id="8" idx="1"/>
@@ -3783,7 +8963,7 @@
       </p:cxnSp>
       <p:cxnSp>
         <p:nvCxnSpPr>
-          <p:cNvPr id="50" name=""/>
+          <p:cNvPr id="78" name=""/>
           <p:cNvCxnSpPr>
             <a:stCxn xmlns:a="http://schemas.openxmlformats.org/drawingml/2006/main" id="8" idx="3"/>
             <a:endCxn xmlns:a="http://schemas.openxmlformats.org/drawingml/2006/main" id="11" idx="1"/>
@@ -3876,6 +9056,7 @@
           <a:lstStyle xmlns:a="http://schemas.openxmlformats.org/drawingml/2006/main"/>
           <a:p xmlns:a="http://schemas.openxmlformats.org/drawingml/2006/main">
             <a:pPr algn="ctr">
+              <a:buNone/>
               <a:defRPr sz="1350" b="1">
                 <a:solidFill>
                   <a:srgbClr val="1F6E8C"/>
@@ -3933,6 +9114,7 @@
           <a:lstStyle xmlns:a="http://schemas.openxmlformats.org/drawingml/2006/main"/>
           <a:p xmlns:a="http://schemas.openxmlformats.org/drawingml/2006/main">
             <a:pPr algn="ctr">
+              <a:buNone/>
               <a:defRPr sz="975" b="0">
                 <a:solidFill>
                   <a:srgbClr val="60707B"/>
@@ -4025,6 +9207,7 @@
           <a:lstStyle xmlns:a="http://schemas.openxmlformats.org/drawingml/2006/main"/>
           <a:p xmlns:a="http://schemas.openxmlformats.org/drawingml/2006/main">
             <a:pPr algn="ctr">
+              <a:buNone/>
               <a:defRPr sz="1350" b="1">
                 <a:solidFill>
                   <a:srgbClr val="2E7D5B"/>
@@ -4082,6 +9265,7 @@
           <a:lstStyle xmlns:a="http://schemas.openxmlformats.org/drawingml/2006/main"/>
           <a:p xmlns:a="http://schemas.openxmlformats.org/drawingml/2006/main">
             <a:pPr algn="ctr">
+              <a:buNone/>
               <a:defRPr sz="975" b="0">
                 <a:solidFill>
                   <a:srgbClr val="60707B"/>
@@ -4107,7 +9291,7 @@
       </p:sp>
       <p:cxnSp>
         <p:nvCxnSpPr>
-          <p:cNvPr id="57" name=""/>
+          <p:cNvPr id="85" name=""/>
           <p:cNvCxnSpPr>
             <a:stCxn xmlns:a="http://schemas.openxmlformats.org/drawingml/2006/main" id="11" idx="3"/>
             <a:endCxn xmlns:a="http://schemas.openxmlformats.org/drawingml/2006/main" id="19" idx="1"/>
@@ -4135,7 +9319,7 @@
       </p:cxnSp>
       <p:cxnSp>
         <p:nvCxnSpPr>
-          <p:cNvPr id="58" name=""/>
+          <p:cNvPr id="86" name=""/>
           <p:cNvCxnSpPr>
             <a:stCxn xmlns:a="http://schemas.openxmlformats.org/drawingml/2006/main" id="11" idx="3"/>
             <a:endCxn xmlns:a="http://schemas.openxmlformats.org/drawingml/2006/main" id="22" idx="1"/>
@@ -4163,7 +9347,7 @@
       </p:cxnSp>
       <p:cxnSp>
         <p:nvCxnSpPr>
-          <p:cNvPr id="59" name=""/>
+          <p:cNvPr id="87" name=""/>
           <p:cNvCxnSpPr>
             <a:stCxn xmlns:a="http://schemas.openxmlformats.org/drawingml/2006/main" id="19" idx="3"/>
             <a:endCxn xmlns:a="http://schemas.openxmlformats.org/drawingml/2006/main" id="14" idx="1"/>
@@ -4191,7 +9375,7 @@
       </p:cxnSp>
       <p:cxnSp>
         <p:nvCxnSpPr>
-          <p:cNvPr id="60" name=""/>
+          <p:cNvPr id="88" name=""/>
           <p:cNvCxnSpPr>
             <a:stCxn xmlns:a="http://schemas.openxmlformats.org/drawingml/2006/main" id="22" idx="3"/>
             <a:endCxn xmlns:a="http://schemas.openxmlformats.org/drawingml/2006/main" id="14" idx="1"/>
@@ -4284,6 +9468,7 @@
           <a:lstStyle xmlns:a="http://schemas.openxmlformats.org/drawingml/2006/main"/>
           <a:p xmlns:a="http://schemas.openxmlformats.org/drawingml/2006/main">
             <a:pPr algn="l">
+              <a:buNone/>
               <a:defRPr sz="1275" b="1">
                 <a:solidFill>
                   <a:srgbClr val="C98724"/>
@@ -4341,6 +9526,7 @@
           <a:lstStyle xmlns:a="http://schemas.openxmlformats.org/drawingml/2006/main"/>
           <a:p xmlns:a="http://schemas.openxmlformats.org/drawingml/2006/main">
             <a:pPr algn="l">
+              <a:buNone/>
               <a:defRPr sz="1425" b="0">
                 <a:solidFill>
                   <a:srgbClr val="19324A"/>
@@ -4398,6 +9584,7 @@
           <a:lstStyle xmlns:a="http://schemas.openxmlformats.org/drawingml/2006/main"/>
           <a:p xmlns:a="http://schemas.openxmlformats.org/drawingml/2006/main">
             <a:pPr algn="l">
+              <a:buNone/>
               <a:defRPr sz="750" b="0">
                 <a:solidFill>
                   <a:srgbClr val="60707B"/>
@@ -4484,6 +9671,7 @@
           <a:lstStyle xmlns:a="http://schemas.openxmlformats.org/drawingml/2006/main"/>
           <a:p xmlns:a="http://schemas.openxmlformats.org/drawingml/2006/main">
             <a:pPr algn="l">
+              <a:buNone/>
               <a:defRPr sz="975" b="1">
                 <a:solidFill>
                   <a:srgbClr val="2FA7A5"/>
@@ -4541,6 +9729,7 @@
           <a:lstStyle xmlns:a="http://schemas.openxmlformats.org/drawingml/2006/main"/>
           <a:p xmlns:a="http://schemas.openxmlformats.org/drawingml/2006/main">
             <a:pPr algn="l">
+              <a:buNone/>
               <a:defRPr sz="2550" b="1">
                 <a:solidFill>
                   <a:srgbClr val="17324D"/>
@@ -4629,6 +9818,7 @@
           <a:lstStyle xmlns:a="http://schemas.openxmlformats.org/drawingml/2006/main"/>
           <a:p xmlns:a="http://schemas.openxmlformats.org/drawingml/2006/main">
             <a:pPr algn="r">
+              <a:buNone/>
               <a:defRPr sz="1350" b="1">
                 <a:solidFill>
                   <a:srgbClr val="2FA7A5"/>
@@ -4654,7 +9844,7 @@
       </p:sp>
       <p:graphicFrame>
         <p:nvGraphicFramePr>
-          <p:cNvPr id="33" name=""/>
+          <p:cNvPr id="35" name=""/>
           <p:cNvGraphicFramePr/>
           <p:nvPr/>
         </p:nvGraphicFramePr>
@@ -5010,6 +10200,7 @@
           <a:lstStyle xmlns:a="http://schemas.openxmlformats.org/drawingml/2006/main"/>
           <a:p xmlns:a="http://schemas.openxmlformats.org/drawingml/2006/main">
             <a:pPr algn="l">
+              <a:buNone/>
               <a:defRPr sz="1800" b="1">
                 <a:solidFill>
                   <a:srgbClr val="1F6E8C"/>
@@ -5097,6 +10288,7 @@
           <a:lstStyle xmlns:a="http://schemas.openxmlformats.org/drawingml/2006/main"/>
           <a:p xmlns:a="http://schemas.openxmlformats.org/drawingml/2006/main">
             <a:pPr algn="ctr">
+              <a:buNone/>
               <a:defRPr sz="1125" b="1">
                 <a:solidFill>
                   <a:srgbClr val="FFFFFF"/>
@@ -5154,6 +10346,7 @@
           <a:lstStyle xmlns:a="http://schemas.openxmlformats.org/drawingml/2006/main"/>
           <a:p xmlns:a="http://schemas.openxmlformats.org/drawingml/2006/main">
             <a:pPr algn="l">
+              <a:buNone/>
               <a:defRPr sz="1275" b="0">
                 <a:solidFill>
                   <a:srgbClr val="19324A"/>
@@ -5272,6 +10465,7 @@
           <a:lstStyle xmlns:a="http://schemas.openxmlformats.org/drawingml/2006/main"/>
           <a:p xmlns:a="http://schemas.openxmlformats.org/drawingml/2006/main">
             <a:pPr algn="ctr">
+              <a:buNone/>
               <a:defRPr sz="1125" b="1">
                 <a:solidFill>
                   <a:srgbClr val="FFFFFF"/>
@@ -5329,6 +10523,7 @@
           <a:lstStyle xmlns:a="http://schemas.openxmlformats.org/drawingml/2006/main"/>
           <a:p xmlns:a="http://schemas.openxmlformats.org/drawingml/2006/main">
             <a:pPr algn="l">
+              <a:buNone/>
               <a:defRPr sz="1275" b="0">
                 <a:solidFill>
                   <a:srgbClr val="19324A"/>
@@ -5447,6 +10642,7 @@
           <a:lstStyle xmlns:a="http://schemas.openxmlformats.org/drawingml/2006/main"/>
           <a:p xmlns:a="http://schemas.openxmlformats.org/drawingml/2006/main">
             <a:pPr algn="ctr">
+              <a:buNone/>
               <a:defRPr sz="1125" b="1">
                 <a:solidFill>
                   <a:srgbClr val="FFFFFF"/>
@@ -5504,6 +10700,7 @@
           <a:lstStyle xmlns:a="http://schemas.openxmlformats.org/drawingml/2006/main"/>
           <a:p xmlns:a="http://schemas.openxmlformats.org/drawingml/2006/main">
             <a:pPr algn="l">
+              <a:buNone/>
               <a:defRPr sz="1275" b="0">
                 <a:solidFill>
                   <a:srgbClr val="19324A"/>
@@ -5622,6 +10819,7 @@
           <a:lstStyle xmlns:a="http://schemas.openxmlformats.org/drawingml/2006/main"/>
           <a:p xmlns:a="http://schemas.openxmlformats.org/drawingml/2006/main">
             <a:pPr algn="ctr">
+              <a:buNone/>
               <a:defRPr sz="1125" b="1">
                 <a:solidFill>
                   <a:srgbClr val="FFFFFF"/>
@@ -5679,6 +10877,7 @@
           <a:lstStyle xmlns:a="http://schemas.openxmlformats.org/drawingml/2006/main"/>
           <a:p xmlns:a="http://schemas.openxmlformats.org/drawingml/2006/main">
             <a:pPr algn="l">
+              <a:buNone/>
               <a:defRPr sz="1275" b="0">
                 <a:solidFill>
                   <a:srgbClr val="19324A"/>
@@ -5797,6 +10996,7 @@
           <a:lstStyle xmlns:a="http://schemas.openxmlformats.org/drawingml/2006/main"/>
           <a:p xmlns:a="http://schemas.openxmlformats.org/drawingml/2006/main">
             <a:pPr algn="ctr">
+              <a:buNone/>
               <a:defRPr sz="1125" b="1">
                 <a:solidFill>
                   <a:srgbClr val="FFFFFF"/>
@@ -5854,6 +11054,7 @@
           <a:lstStyle xmlns:a="http://schemas.openxmlformats.org/drawingml/2006/main"/>
           <a:p xmlns:a="http://schemas.openxmlformats.org/drawingml/2006/main">
             <a:pPr algn="l">
+              <a:buNone/>
               <a:defRPr sz="1275" b="0">
                 <a:solidFill>
                   <a:srgbClr val="19324A"/>
@@ -5911,6 +11112,7 @@
           <a:lstStyle xmlns:a="http://schemas.openxmlformats.org/drawingml/2006/main"/>
           <a:p xmlns:a="http://schemas.openxmlformats.org/drawingml/2006/main">
             <a:pPr algn="l">
+              <a:buNone/>
               <a:defRPr sz="1350" b="1">
                 <a:solidFill>
                   <a:srgbClr val="B94A48"/>
@@ -5968,6 +11170,7 @@
           <a:lstStyle xmlns:a="http://schemas.openxmlformats.org/drawingml/2006/main"/>
           <a:p xmlns:a="http://schemas.openxmlformats.org/drawingml/2006/main">
             <a:pPr algn="l">
+              <a:buNone/>
               <a:defRPr sz="1125" b="0">
                 <a:solidFill>
                   <a:srgbClr val="60707B"/>
@@ -6025,6 +11228,7 @@
           <a:lstStyle xmlns:a="http://schemas.openxmlformats.org/drawingml/2006/main"/>
           <a:p xmlns:a="http://schemas.openxmlformats.org/drawingml/2006/main">
             <a:pPr algn="l">
+              <a:buNone/>
               <a:defRPr sz="750" b="0">
                 <a:solidFill>
                   <a:srgbClr val="60707B"/>
@@ -6111,6 +11315,7 @@
           <a:lstStyle xmlns:a="http://schemas.openxmlformats.org/drawingml/2006/main"/>
           <a:p xmlns:a="http://schemas.openxmlformats.org/drawingml/2006/main">
             <a:pPr algn="l">
+              <a:buNone/>
               <a:defRPr sz="975" b="1">
                 <a:solidFill>
                   <a:srgbClr val="2FA7A5"/>
@@ -6168,6 +11373,7 @@
           <a:lstStyle xmlns:a="http://schemas.openxmlformats.org/drawingml/2006/main"/>
           <a:p xmlns:a="http://schemas.openxmlformats.org/drawingml/2006/main">
             <a:pPr algn="l">
+              <a:buNone/>
               <a:defRPr sz="2550" b="1">
                 <a:solidFill>
                   <a:srgbClr val="17324D"/>
@@ -6256,6 +11462,7 @@
           <a:lstStyle xmlns:a="http://schemas.openxmlformats.org/drawingml/2006/main"/>
           <a:p xmlns:a="http://schemas.openxmlformats.org/drawingml/2006/main">
             <a:pPr algn="r">
+              <a:buNone/>
               <a:defRPr sz="1350" b="1">
                 <a:solidFill>
                   <a:srgbClr val="2FA7A5"/>
@@ -6281,7 +11488,7 @@
       </p:sp>
       <p:graphicFrame>
         <p:nvGraphicFramePr>
-          <p:cNvPr id="26" name=""/>
+          <p:cNvPr id="28" name=""/>
           <p:cNvGraphicFramePr/>
           <p:nvPr/>
         </p:nvGraphicFramePr>
@@ -6543,6 +11750,7 @@
           <a:lstStyle xmlns:a="http://schemas.openxmlformats.org/drawingml/2006/main"/>
           <a:p xmlns:a="http://schemas.openxmlformats.org/drawingml/2006/main">
             <a:pPr algn="l">
+              <a:buNone/>
               <a:defRPr sz="1875" b="1">
                 <a:solidFill>
                   <a:srgbClr val="1F6E8C"/>
@@ -6600,6 +11808,7 @@
           <a:lstStyle xmlns:a="http://schemas.openxmlformats.org/drawingml/2006/main"/>
           <a:p xmlns:a="http://schemas.openxmlformats.org/drawingml/2006/main">
             <a:pPr algn="ctr">
+              <a:buNone/>
               <a:defRPr sz="1500" b="1">
                 <a:solidFill>
                   <a:srgbClr val="2FA7A5"/>
@@ -6657,6 +11866,7 @@
           <a:lstStyle xmlns:a="http://schemas.openxmlformats.org/drawingml/2006/main"/>
           <a:p xmlns:a="http://schemas.openxmlformats.org/drawingml/2006/main">
             <a:pPr algn="l">
+              <a:buNone/>
               <a:defRPr sz="1350" b="1">
                 <a:solidFill>
                   <a:srgbClr val="17324D"/>
@@ -6714,6 +11924,7 @@
           <a:lstStyle xmlns:a="http://schemas.openxmlformats.org/drawingml/2006/main"/>
           <a:p xmlns:a="http://schemas.openxmlformats.org/drawingml/2006/main">
             <a:pPr algn="l">
+              <a:buNone/>
               <a:defRPr sz="1050" b="0">
                 <a:solidFill>
                   <a:srgbClr val="60707B"/>
@@ -6771,6 +11982,7 @@
           <a:lstStyle xmlns:a="http://schemas.openxmlformats.org/drawingml/2006/main"/>
           <a:p xmlns:a="http://schemas.openxmlformats.org/drawingml/2006/main">
             <a:pPr algn="ctr">
+              <a:buNone/>
               <a:defRPr sz="1500" b="1">
                 <a:solidFill>
                   <a:srgbClr val="2FA7A5"/>
@@ -6828,6 +12040,7 @@
           <a:lstStyle xmlns:a="http://schemas.openxmlformats.org/drawingml/2006/main"/>
           <a:p xmlns:a="http://schemas.openxmlformats.org/drawingml/2006/main">
             <a:pPr algn="l">
+              <a:buNone/>
               <a:defRPr sz="1350" b="1">
                 <a:solidFill>
                   <a:srgbClr val="17324D"/>
@@ -6885,6 +12098,7 @@
           <a:lstStyle xmlns:a="http://schemas.openxmlformats.org/drawingml/2006/main"/>
           <a:p xmlns:a="http://schemas.openxmlformats.org/drawingml/2006/main">
             <a:pPr algn="l">
+              <a:buNone/>
               <a:defRPr sz="1050" b="0">
                 <a:solidFill>
                   <a:srgbClr val="60707B"/>
@@ -6942,6 +12156,7 @@
           <a:lstStyle xmlns:a="http://schemas.openxmlformats.org/drawingml/2006/main"/>
           <a:p xmlns:a="http://schemas.openxmlformats.org/drawingml/2006/main">
             <a:pPr algn="ctr">
+              <a:buNone/>
               <a:defRPr sz="1500" b="1">
                 <a:solidFill>
                   <a:srgbClr val="2FA7A5"/>
@@ -6999,6 +12214,7 @@
           <a:lstStyle xmlns:a="http://schemas.openxmlformats.org/drawingml/2006/main"/>
           <a:p xmlns:a="http://schemas.openxmlformats.org/drawingml/2006/main">
             <a:pPr algn="l">
+              <a:buNone/>
               <a:defRPr sz="1350" b="1">
                 <a:solidFill>
                   <a:srgbClr val="17324D"/>
@@ -7056,6 +12272,7 @@
           <a:lstStyle xmlns:a="http://schemas.openxmlformats.org/drawingml/2006/main"/>
           <a:p xmlns:a="http://schemas.openxmlformats.org/drawingml/2006/main">
             <a:pPr algn="l">
+              <a:buNone/>
               <a:defRPr sz="1050" b="0">
                 <a:solidFill>
                   <a:srgbClr val="60707B"/>
@@ -7113,6 +12330,7 @@
           <a:lstStyle xmlns:a="http://schemas.openxmlformats.org/drawingml/2006/main"/>
           <a:p xmlns:a="http://schemas.openxmlformats.org/drawingml/2006/main">
             <a:pPr algn="ctr">
+              <a:buNone/>
               <a:defRPr sz="1500" b="1">
                 <a:solidFill>
                   <a:srgbClr val="2FA7A5"/>
@@ -7170,6 +12388,7 @@
           <a:lstStyle xmlns:a="http://schemas.openxmlformats.org/drawingml/2006/main"/>
           <a:p xmlns:a="http://schemas.openxmlformats.org/drawingml/2006/main">
             <a:pPr algn="l">
+              <a:buNone/>
               <a:defRPr sz="1350" b="1">
                 <a:solidFill>
                   <a:srgbClr val="17324D"/>
@@ -7227,6 +12446,7 @@
           <a:lstStyle xmlns:a="http://schemas.openxmlformats.org/drawingml/2006/main"/>
           <a:p xmlns:a="http://schemas.openxmlformats.org/drawingml/2006/main">
             <a:pPr algn="l">
+              <a:buNone/>
               <a:defRPr sz="1050" b="0">
                 <a:solidFill>
                   <a:srgbClr val="60707B"/>
@@ -7317,6 +12537,7 @@
           <a:lstStyle xmlns:a="http://schemas.openxmlformats.org/drawingml/2006/main"/>
           <a:p xmlns:a="http://schemas.openxmlformats.org/drawingml/2006/main">
             <a:pPr algn="l">
+              <a:buNone/>
               <a:defRPr sz="1200" b="1">
                 <a:solidFill>
                   <a:srgbClr val="2E7D5B"/>
@@ -7374,6 +12595,7 @@
           <a:lstStyle xmlns:a="http://schemas.openxmlformats.org/drawingml/2006/main"/>
           <a:p xmlns:a="http://schemas.openxmlformats.org/drawingml/2006/main">
             <a:pPr algn="l">
+              <a:buNone/>
               <a:defRPr sz="750" b="0">
                 <a:solidFill>
                   <a:srgbClr val="60707B"/>
@@ -7460,6 +12682,7 @@
           <a:lstStyle xmlns:a="http://schemas.openxmlformats.org/drawingml/2006/main"/>
           <a:p xmlns:a="http://schemas.openxmlformats.org/drawingml/2006/main">
             <a:pPr algn="l">
+              <a:buNone/>
               <a:defRPr sz="975" b="1">
                 <a:solidFill>
                   <a:srgbClr val="2FA7A5"/>
@@ -7517,6 +12740,7 @@
           <a:lstStyle xmlns:a="http://schemas.openxmlformats.org/drawingml/2006/main"/>
           <a:p xmlns:a="http://schemas.openxmlformats.org/drawingml/2006/main">
             <a:pPr algn="l">
+              <a:buNone/>
               <a:defRPr sz="2550" b="1">
                 <a:solidFill>
                   <a:srgbClr val="17324D"/>
@@ -7605,6 +12829,7 @@
           <a:lstStyle xmlns:a="http://schemas.openxmlformats.org/drawingml/2006/main"/>
           <a:p xmlns:a="http://schemas.openxmlformats.org/drawingml/2006/main">
             <a:pPr algn="r">
+              <a:buNone/>
               <a:defRPr sz="1350" b="1">
                 <a:solidFill>
                   <a:srgbClr val="2FA7A5"/>
@@ -7662,6 +12887,7 @@
           <a:lstStyle xmlns:a="http://schemas.openxmlformats.org/drawingml/2006/main"/>
           <a:p xmlns:a="http://schemas.openxmlformats.org/drawingml/2006/main">
             <a:pPr algn="l">
+              <a:buNone/>
               <a:defRPr sz="3600" b="1">
                 <a:solidFill>
                   <a:srgbClr val="17324D"/>
@@ -7719,6 +12945,7 @@
           <a:lstStyle xmlns:a="http://schemas.openxmlformats.org/drawingml/2006/main"/>
           <a:p xmlns:a="http://schemas.openxmlformats.org/drawingml/2006/main">
             <a:pPr algn="l">
+              <a:buNone/>
               <a:defRPr sz="1200" b="0">
                 <a:solidFill>
                   <a:srgbClr val="60707B"/>
@@ -7776,6 +13003,7 @@
           <a:lstStyle xmlns:a="http://schemas.openxmlformats.org/drawingml/2006/main"/>
           <a:p xmlns:a="http://schemas.openxmlformats.org/drawingml/2006/main">
             <a:pPr algn="l">
+              <a:buNone/>
               <a:defRPr sz="3000" b="1">
                 <a:solidFill>
                   <a:srgbClr val="B94A48"/>
@@ -7833,6 +13061,7 @@
           <a:lstStyle xmlns:a="http://schemas.openxmlformats.org/drawingml/2006/main"/>
           <a:p xmlns:a="http://schemas.openxmlformats.org/drawingml/2006/main">
             <a:pPr algn="l">
+              <a:buNone/>
               <a:defRPr sz="1200" b="0">
                 <a:solidFill>
                   <a:srgbClr val="B94A48"/>
@@ -7858,7 +13087,7 @@
       </p:sp>
       <p:graphicFrame>
         <p:nvGraphicFramePr>
-          <p:cNvPr id="23" name="Chart"/>
+          <p:cNvPr id="25" name="Chart"/>
           <p:cNvGraphicFramePr/>
           <p:nvPr/>
         </p:nvGraphicFramePr>
@@ -7868,7 +13097,7 @@
         </p:xfrm>
         <a:graphic xmlns:a="http://schemas.openxmlformats.org/drawingml/2006/main">
           <a:graphicData uri="http://schemas.openxmlformats.org/drawingml/2006/chart">
-            <c:chart xmlns:r="http://schemas.openxmlformats.org/officeDocument/2006/relationships" xmlns:c="http://schemas.openxmlformats.org/drawingml/2006/chart" r:id="R636e30a3d9e54c94"/>
+            <c:chart xmlns:r="http://schemas.openxmlformats.org/officeDocument/2006/relationships" xmlns:c="http://schemas.openxmlformats.org/drawingml/2006/chart" r:id="R2cbf2435e81a47e8"/>
           </a:graphicData>
         </a:graphic>
       </p:graphicFrame>
@@ -7939,6 +13168,7 @@
           <a:lstStyle xmlns:a="http://schemas.openxmlformats.org/drawingml/2006/main"/>
           <a:p xmlns:a="http://schemas.openxmlformats.org/drawingml/2006/main">
             <a:pPr algn="l">
+              <a:buNone/>
               <a:defRPr sz="1350" b="1">
                 <a:solidFill>
                   <a:srgbClr val="B94A48"/>
@@ -7996,6 +13226,7 @@
           <a:lstStyle xmlns:a="http://schemas.openxmlformats.org/drawingml/2006/main"/>
           <a:p xmlns:a="http://schemas.openxmlformats.org/drawingml/2006/main">
             <a:pPr algn="l">
+              <a:buNone/>
               <a:defRPr sz="1200" b="0">
                 <a:solidFill>
                   <a:srgbClr val="19324A"/>
@@ -8019,6 +13250,7 @@
           </a:p>
           <a:p xmlns:a="http://schemas.openxmlformats.org/drawingml/2006/main">
             <a:pPr algn="l">
+              <a:buNone/>
               <a:defRPr sz="1200" b="0">
                 <a:solidFill>
                   <a:srgbClr val="19324A"/>
@@ -8076,6 +13308,7 @@
           <a:lstStyle xmlns:a="http://schemas.openxmlformats.org/drawingml/2006/main"/>
           <a:p xmlns:a="http://schemas.openxmlformats.org/drawingml/2006/main">
             <a:pPr algn="l">
+              <a:buNone/>
               <a:defRPr sz="1050" b="0">
                 <a:solidFill>
                   <a:srgbClr val="60707B"/>
@@ -8133,6 +13366,7 @@
           <a:lstStyle xmlns:a="http://schemas.openxmlformats.org/drawingml/2006/main"/>
           <a:p xmlns:a="http://schemas.openxmlformats.org/drawingml/2006/main">
             <a:pPr algn="l">
+              <a:buNone/>
               <a:defRPr sz="750" b="0">
                 <a:solidFill>
                   <a:srgbClr val="60707B"/>
@@ -8219,6 +13453,7 @@
           <a:lstStyle xmlns:a="http://schemas.openxmlformats.org/drawingml/2006/main"/>
           <a:p xmlns:a="http://schemas.openxmlformats.org/drawingml/2006/main">
             <a:pPr algn="l">
+              <a:buNone/>
               <a:defRPr sz="975" b="1">
                 <a:solidFill>
                   <a:srgbClr val="2FA7A5"/>
@@ -8276,6 +13511,7 @@
           <a:lstStyle xmlns:a="http://schemas.openxmlformats.org/drawingml/2006/main"/>
           <a:p xmlns:a="http://schemas.openxmlformats.org/drawingml/2006/main">
             <a:pPr algn="l">
+              <a:buNone/>
               <a:defRPr sz="2550" b="1">
                 <a:solidFill>
                   <a:srgbClr val="17324D"/>
@@ -8364,6 +13600,7 @@
           <a:lstStyle xmlns:a="http://schemas.openxmlformats.org/drawingml/2006/main"/>
           <a:p xmlns:a="http://schemas.openxmlformats.org/drawingml/2006/main">
             <a:pPr algn="r">
+              <a:buNone/>
               <a:defRPr sz="1350" b="1">
                 <a:solidFill>
                   <a:srgbClr val="2FA7A5"/>
@@ -8389,7 +13626,7 @@
       </p:sp>
       <p:graphicFrame>
         <p:nvGraphicFramePr>
-          <p:cNvPr id="20" name="Chart"/>
+          <p:cNvPr id="22" name="Chart"/>
           <p:cNvGraphicFramePr/>
           <p:nvPr/>
         </p:nvGraphicFramePr>
@@ -8399,7 +13636,7 @@
         </p:xfrm>
         <a:graphic xmlns:a="http://schemas.openxmlformats.org/drawingml/2006/main">
           <a:graphicData uri="http://schemas.openxmlformats.org/drawingml/2006/chart">
-            <c:chart xmlns:r="http://schemas.openxmlformats.org/officeDocument/2006/relationships" xmlns:c="http://schemas.openxmlformats.org/drawingml/2006/chart" r:id="R3e865d05ef3a4645"/>
+            <c:chart xmlns:r="http://schemas.openxmlformats.org/officeDocument/2006/relationships" xmlns:c="http://schemas.openxmlformats.org/drawingml/2006/chart" r:id="Rb68741c477624411"/>
           </a:graphicData>
         </a:graphic>
       </p:graphicFrame>
@@ -8437,6 +13674,7 @@
           <a:lstStyle xmlns:a="http://schemas.openxmlformats.org/drawingml/2006/main"/>
           <a:p xmlns:a="http://schemas.openxmlformats.org/drawingml/2006/main">
             <a:pPr algn="ctr">
+              <a:buNone/>
               <a:defRPr sz="3375" b="1">
                 <a:solidFill>
                   <a:srgbClr val="2E7D5B"/>
@@ -8494,6 +13732,7 @@
           <a:lstStyle xmlns:a="http://schemas.openxmlformats.org/drawingml/2006/main"/>
           <a:p xmlns:a="http://schemas.openxmlformats.org/drawingml/2006/main">
             <a:pPr algn="ctr">
+              <a:buNone/>
               <a:defRPr sz="1200" b="0">
                 <a:solidFill>
                   <a:srgbClr val="60707B"/>
@@ -8582,6 +13821,7 @@
           <a:lstStyle xmlns:a="http://schemas.openxmlformats.org/drawingml/2006/main"/>
           <a:p xmlns:a="http://schemas.openxmlformats.org/drawingml/2006/main">
             <a:pPr algn="ctr">
+              <a:buNone/>
               <a:defRPr sz="2700" b="1">
                 <a:solidFill>
                   <a:srgbClr val="B94A48"/>
@@ -8639,6 +13879,7 @@
           <a:lstStyle xmlns:a="http://schemas.openxmlformats.org/drawingml/2006/main"/>
           <a:p xmlns:a="http://schemas.openxmlformats.org/drawingml/2006/main">
             <a:pPr algn="ctr">
+              <a:buNone/>
               <a:defRPr sz="1050" b="0">
                 <a:solidFill>
                   <a:srgbClr val="60707B"/>
@@ -8696,6 +13937,7 @@
           <a:lstStyle xmlns:a="http://schemas.openxmlformats.org/drawingml/2006/main"/>
           <a:p xmlns:a="http://schemas.openxmlformats.org/drawingml/2006/main">
             <a:pPr algn="ctr">
+              <a:buNone/>
               <a:defRPr sz="2700" b="1">
                 <a:solidFill>
                   <a:srgbClr val="B94A48"/>
@@ -8753,6 +13995,7 @@
           <a:lstStyle xmlns:a="http://schemas.openxmlformats.org/drawingml/2006/main"/>
           <a:p xmlns:a="http://schemas.openxmlformats.org/drawingml/2006/main">
             <a:pPr algn="ctr">
+              <a:buNone/>
               <a:defRPr sz="1050" b="0">
                 <a:solidFill>
                   <a:srgbClr val="60707B"/>
@@ -8843,6 +14086,7 @@
           <a:lstStyle xmlns:a="http://schemas.openxmlformats.org/drawingml/2006/main"/>
           <a:p xmlns:a="http://schemas.openxmlformats.org/drawingml/2006/main">
             <a:pPr algn="l">
+              <a:buNone/>
               <a:defRPr sz="1350" b="1">
                 <a:solidFill>
                   <a:srgbClr val="C98724"/>
@@ -8900,6 +14144,7 @@
           <a:lstStyle xmlns:a="http://schemas.openxmlformats.org/drawingml/2006/main"/>
           <a:p xmlns:a="http://schemas.openxmlformats.org/drawingml/2006/main">
             <a:pPr algn="l">
+              <a:buNone/>
               <a:defRPr sz="750" b="0">
                 <a:solidFill>
                   <a:srgbClr val="60707B"/>
@@ -8986,6 +14231,7 @@
           <a:lstStyle xmlns:a="http://schemas.openxmlformats.org/drawingml/2006/main"/>
           <a:p xmlns:a="http://schemas.openxmlformats.org/drawingml/2006/main">
             <a:pPr algn="l">
+              <a:buNone/>
               <a:defRPr sz="975" b="1">
                 <a:solidFill>
                   <a:srgbClr val="2FA7A5"/>
@@ -9043,6 +14289,7 @@
           <a:lstStyle xmlns:a="http://schemas.openxmlformats.org/drawingml/2006/main"/>
           <a:p xmlns:a="http://schemas.openxmlformats.org/drawingml/2006/main">
             <a:pPr algn="l">
+              <a:buNone/>
               <a:defRPr sz="2550" b="1">
                 <a:solidFill>
                   <a:srgbClr val="17324D"/>
@@ -9131,6 +14378,7 @@
           <a:lstStyle xmlns:a="http://schemas.openxmlformats.org/drawingml/2006/main"/>
           <a:p xmlns:a="http://schemas.openxmlformats.org/drawingml/2006/main">
             <a:pPr algn="r">
+              <a:buNone/>
               <a:defRPr sz="1350" b="1">
                 <a:solidFill>
                   <a:srgbClr val="2FA7A5"/>
@@ -9156,7 +14404,7 @@
       </p:sp>
       <p:graphicFrame>
         <p:nvGraphicFramePr>
-          <p:cNvPr id="29" name=""/>
+          <p:cNvPr id="33" name=""/>
           <p:cNvGraphicFramePr/>
           <p:nvPr/>
         </p:nvGraphicFramePr>
@@ -9430,14 +14678,14 @@
       </p:graphicFrame>
       <p:pic>
         <p:nvPicPr>
-          <p:cNvPr id="30" name=""/>
+          <p:cNvPr id="34" name=""/>
           <p:cNvPicPr>
             <a:picLocks xmlns:a="http://schemas.openxmlformats.org/drawingml/2006/main" noChangeAspect="1"/>
           </p:cNvPicPr>
           <p:nvPr/>
         </p:nvPicPr>
         <p:blipFill>
-          <a:blip xmlns:r="http://schemas.openxmlformats.org/officeDocument/2006/relationships" xmlns:a="http://schemas.openxmlformats.org/drawingml/2006/main" r:embed="Re45681cdc9f34432"/>
+          <a:blip xmlns:r="http://schemas.openxmlformats.org/officeDocument/2006/relationships" xmlns:a="http://schemas.openxmlformats.org/drawingml/2006/main" r:embed="Rdcb4f52218984020"/>
           <a:stretch xmlns:a="http://schemas.openxmlformats.org/drawingml/2006/main"/>
         </p:blipFill>
         <p:spPr>
@@ -9452,14 +14700,14 @@
       </p:pic>
       <p:pic>
         <p:nvPicPr>
-          <p:cNvPr id="31" name=""/>
+          <p:cNvPr id="35" name=""/>
           <p:cNvPicPr>
             <a:picLocks xmlns:a="http://schemas.openxmlformats.org/drawingml/2006/main" noChangeAspect="1"/>
           </p:cNvPicPr>
           <p:nvPr/>
         </p:nvPicPr>
         <p:blipFill>
-          <a:blip xmlns:r="http://schemas.openxmlformats.org/officeDocument/2006/relationships" xmlns:a="http://schemas.openxmlformats.org/drawingml/2006/main" r:embed="Rb225b2c055ac48b0"/>
+          <a:blip xmlns:r="http://schemas.openxmlformats.org/officeDocument/2006/relationships" xmlns:a="http://schemas.openxmlformats.org/drawingml/2006/main" r:embed="Rc6cf28c9ff6e4132"/>
           <a:stretch xmlns:a="http://schemas.openxmlformats.org/drawingml/2006/main"/>
         </p:blipFill>
         <p:spPr>
@@ -9506,6 +14754,7 @@
           <a:lstStyle xmlns:a="http://schemas.openxmlformats.org/drawingml/2006/main"/>
           <a:p xmlns:a="http://schemas.openxmlformats.org/drawingml/2006/main">
             <a:pPr algn="ctr">
+              <a:buNone/>
               <a:defRPr sz="900" b="0">
                 <a:solidFill>
                   <a:srgbClr val="B94A48"/>
@@ -9563,6 +14812,7 @@
           <a:lstStyle xmlns:a="http://schemas.openxmlformats.org/drawingml/2006/main"/>
           <a:p xmlns:a="http://schemas.openxmlformats.org/drawingml/2006/main">
             <a:pPr algn="ctr">
+              <a:buNone/>
               <a:defRPr sz="900" b="0">
                 <a:solidFill>
                   <a:srgbClr val="B94A48"/>
@@ -9620,6 +14870,7 @@
           <a:lstStyle xmlns:a="http://schemas.openxmlformats.org/drawingml/2006/main"/>
           <a:p xmlns:a="http://schemas.openxmlformats.org/drawingml/2006/main">
             <a:pPr algn="l">
+              <a:buNone/>
               <a:defRPr sz="1650" b="1">
                 <a:solidFill>
                   <a:srgbClr val="1F6E8C"/>
@@ -9677,6 +14928,7 @@
           <a:lstStyle xmlns:a="http://schemas.openxmlformats.org/drawingml/2006/main"/>
           <a:p xmlns:a="http://schemas.openxmlformats.org/drawingml/2006/main">
             <a:pPr algn="l">
+              <a:buNone/>
               <a:defRPr sz="1125" b="0">
                 <a:solidFill>
                   <a:srgbClr val="19324A"/>
@@ -9734,6 +14986,7 @@
           <a:lstStyle xmlns:a="http://schemas.openxmlformats.org/drawingml/2006/main"/>
           <a:p xmlns:a="http://schemas.openxmlformats.org/drawingml/2006/main">
             <a:pPr algn="r">
+              <a:buNone/>
               <a:defRPr sz="1125" b="1">
                 <a:solidFill>
                   <a:srgbClr val="B94A48"/>
@@ -9791,6 +15044,7 @@
           <a:lstStyle xmlns:a="http://schemas.openxmlformats.org/drawingml/2006/main"/>
           <a:p xmlns:a="http://schemas.openxmlformats.org/drawingml/2006/main">
             <a:pPr algn="l">
+              <a:buNone/>
               <a:defRPr sz="1125" b="0">
                 <a:solidFill>
                   <a:srgbClr val="19324A"/>
@@ -9848,6 +15102,7 @@
           <a:lstStyle xmlns:a="http://schemas.openxmlformats.org/drawingml/2006/main"/>
           <a:p xmlns:a="http://schemas.openxmlformats.org/drawingml/2006/main">
             <a:pPr algn="r">
+              <a:buNone/>
               <a:defRPr sz="1125" b="1">
                 <a:solidFill>
                   <a:srgbClr val="B94A48"/>
@@ -9905,6 +15160,7 @@
           <a:lstStyle xmlns:a="http://schemas.openxmlformats.org/drawingml/2006/main"/>
           <a:p xmlns:a="http://schemas.openxmlformats.org/drawingml/2006/main">
             <a:pPr algn="l">
+              <a:buNone/>
               <a:defRPr sz="1125" b="0">
                 <a:solidFill>
                   <a:srgbClr val="19324A"/>
@@ -9962,6 +15218,7 @@
           <a:lstStyle xmlns:a="http://schemas.openxmlformats.org/drawingml/2006/main"/>
           <a:p xmlns:a="http://schemas.openxmlformats.org/drawingml/2006/main">
             <a:pPr algn="r">
+              <a:buNone/>
               <a:defRPr sz="1125" b="1">
                 <a:solidFill>
                   <a:srgbClr val="2E7D5B"/>
@@ -10019,6 +15276,7 @@
           <a:lstStyle xmlns:a="http://schemas.openxmlformats.org/drawingml/2006/main"/>
           <a:p xmlns:a="http://schemas.openxmlformats.org/drawingml/2006/main">
             <a:pPr algn="l">
+              <a:buNone/>
               <a:defRPr sz="1125" b="0">
                 <a:solidFill>
                   <a:srgbClr val="19324A"/>
@@ -10076,6 +15334,7 @@
           <a:lstStyle xmlns:a="http://schemas.openxmlformats.org/drawingml/2006/main"/>
           <a:p xmlns:a="http://schemas.openxmlformats.org/drawingml/2006/main">
             <a:pPr algn="r">
+              <a:buNone/>
               <a:defRPr sz="1125" b="1">
                 <a:solidFill>
                   <a:srgbClr val="2E7D5B"/>
@@ -10133,6 +15392,7 @@
           <a:lstStyle xmlns:a="http://schemas.openxmlformats.org/drawingml/2006/main"/>
           <a:p xmlns:a="http://schemas.openxmlformats.org/drawingml/2006/main">
             <a:pPr algn="l">
+              <a:buNone/>
               <a:defRPr sz="1125" b="0">
                 <a:solidFill>
                   <a:srgbClr val="19324A"/>
@@ -10190,6 +15450,7 @@
           <a:lstStyle xmlns:a="http://schemas.openxmlformats.org/drawingml/2006/main"/>
           <a:p xmlns:a="http://schemas.openxmlformats.org/drawingml/2006/main">
             <a:pPr algn="r">
+              <a:buNone/>
               <a:defRPr sz="1125" b="1">
                 <a:solidFill>
                   <a:srgbClr val="B94A48"/>
@@ -10280,6 +15541,7 @@
           <a:lstStyle xmlns:a="http://schemas.openxmlformats.org/drawingml/2006/main"/>
           <a:p xmlns:a="http://schemas.openxmlformats.org/drawingml/2006/main">
             <a:pPr algn="l">
+              <a:buNone/>
               <a:defRPr sz="1275" b="1">
                 <a:solidFill>
                   <a:srgbClr val="2E7D5B"/>
@@ -10337,6 +15599,7 @@
           <a:lstStyle xmlns:a="http://schemas.openxmlformats.org/drawingml/2006/main"/>
           <a:p xmlns:a="http://schemas.openxmlformats.org/drawingml/2006/main">
             <a:pPr algn="l">
+              <a:buNone/>
               <a:defRPr sz="1200" b="0">
                 <a:solidFill>
                   <a:srgbClr val="19324A"/>
@@ -10394,6 +15657,7 @@
           <a:lstStyle xmlns:a="http://schemas.openxmlformats.org/drawingml/2006/main"/>
           <a:p xmlns:a="http://schemas.openxmlformats.org/drawingml/2006/main">
             <a:pPr algn="l">
+              <a:buNone/>
               <a:defRPr sz="750" b="0">
                 <a:solidFill>
                   <a:srgbClr val="60707B"/>
@@ -10480,6 +15744,7 @@
           <a:lstStyle xmlns:a="http://schemas.openxmlformats.org/drawingml/2006/main"/>
           <a:p xmlns:a="http://schemas.openxmlformats.org/drawingml/2006/main">
             <a:pPr algn="l">
+              <a:buNone/>
               <a:defRPr sz="975" b="1">
                 <a:solidFill>
                   <a:srgbClr val="86E4DF"/>
@@ -10537,6 +15802,7 @@
           <a:lstStyle xmlns:a="http://schemas.openxmlformats.org/drawingml/2006/main"/>
           <a:p xmlns:a="http://schemas.openxmlformats.org/drawingml/2006/main">
             <a:pPr algn="l">
+              <a:buNone/>
               <a:defRPr sz="2550" b="1">
                 <a:solidFill>
                   <a:srgbClr val="FFFFFF"/>
@@ -10625,6 +15891,7 @@
           <a:lstStyle xmlns:a="http://schemas.openxmlformats.org/drawingml/2006/main"/>
           <a:p xmlns:a="http://schemas.openxmlformats.org/drawingml/2006/main">
             <a:pPr algn="r">
+              <a:buNone/>
               <a:defRPr sz="1350" b="1">
                 <a:solidFill>
                   <a:srgbClr val="86E4DF"/>
@@ -10682,6 +15949,7 @@
           <a:lstStyle xmlns:a="http://schemas.openxmlformats.org/drawingml/2006/main"/>
           <a:p xmlns:a="http://schemas.openxmlformats.org/drawingml/2006/main">
             <a:pPr algn="l">
+              <a:buNone/>
               <a:defRPr sz="1800" b="1">
                 <a:solidFill>
                   <a:srgbClr val="86E4DF"/>
@@ -10881,6 +16149,7 @@
           <a:lstStyle xmlns:a="http://schemas.openxmlformats.org/drawingml/2006/main"/>
           <a:p xmlns:a="http://schemas.openxmlformats.org/drawingml/2006/main">
             <a:pPr algn="ctr">
+              <a:buNone/>
               <a:defRPr sz="3600" b="1">
                 <a:solidFill>
                   <a:srgbClr val="FFFFFF"/>
@@ -10938,6 +16207,7 @@
           <a:lstStyle xmlns:a="http://schemas.openxmlformats.org/drawingml/2006/main"/>
           <a:p xmlns:a="http://schemas.openxmlformats.org/drawingml/2006/main">
             <a:pPr algn="ctr">
+              <a:buNone/>
               <a:defRPr sz="1200" b="0">
                 <a:solidFill>
                   <a:srgbClr val="C9D8E2"/>
@@ -11055,6 +16325,7 @@
           <a:lstStyle xmlns:a="http://schemas.openxmlformats.org/drawingml/2006/main"/>
           <a:p xmlns:a="http://schemas.openxmlformats.org/drawingml/2006/main">
             <a:pPr algn="l">
+              <a:buNone/>
               <a:defRPr sz="1800" b="1">
                 <a:solidFill>
                   <a:srgbClr val="86E4DF"/>
@@ -11285,6 +16556,7 @@
           <a:lstStyle xmlns:a="http://schemas.openxmlformats.org/drawingml/2006/main"/>
           <a:p xmlns:a="http://schemas.openxmlformats.org/drawingml/2006/main">
             <a:pPr algn="l">
+              <a:buNone/>
               <a:defRPr sz="1425" b="1">
                 <a:solidFill>
                   <a:srgbClr val="FF9B94"/>
@@ -11303,7 +16575,7 @@
                 <a:ea typeface="Microsoft YaHei"/>
                 <a:cs typeface="Microsoft YaHei"/>
               </a:rPr>
-              <a:t>FINAL  /  当前版本不满足验收，不应宣称达到论文加速目标。</a:t>
+              <a:t>阶段结论  /  当前证据支持继续优化与复测，不能宣称达到论文加速目标。</a:t>
             </a:r>
           </a:p>
         </p:txBody>
@@ -11342,6 +16614,7 @@
           <a:lstStyle xmlns:a="http://schemas.openxmlformats.org/drawingml/2006/main"/>
           <a:p xmlns:a="http://schemas.openxmlformats.org/drawingml/2006/main">
             <a:pPr algn="l">
+              <a:buNone/>
               <a:defRPr sz="750" b="0">
                 <a:solidFill>
                   <a:srgbClr val="AFC0CD"/>
@@ -11369,6 +16642,1381 @@
     <p:extLst>
       <p:ext uri="{BB962C8B-B14F-4D97-AF65-F5344CB8AC3E}">
         <p14:creationId xmlns:p14="http://schemas.microsoft.com/office/powerpoint/2010/main" val="1052949109"/>
+      </p:ext>
+    </p:extLst>
+  </p:cSld>
+</p:sld>
+</file>
+
+<file path=ppt/slides/slide9.xml><?xml version="1.0" encoding="utf-8"?>
+<p:sld xmlns:p="http://schemas.openxmlformats.org/presentationml/2006/main">
+  <p:cSld>
+    <p:bg>
+      <p:bgPr>
+        <a:solidFill xmlns:a="http://schemas.openxmlformats.org/drawingml/2006/main">
+          <a:srgbClr val="FFFFFF"/>
+        </a:solidFill>
+      </p:bgPr>
+    </p:bg>
+    <p:spTree>
+      <p:nvGrpSpPr>
+        <p:cNvPr id="1" name=""/>
+        <p:cNvGrpSpPr/>
+        <p:nvPr/>
+      </p:nvGrpSpPr>
+      <p:grpSpPr>
+        <a:xfrm xmlns:a="http://schemas.openxmlformats.org/drawingml/2006/main"/>
+      </p:grpSpPr>
+      <p:sp>
+        <p:nvSpPr>
+          <p:cNvPr id="24" name="">
+            <a:extLst xmlns:a="http://schemas.openxmlformats.org/drawingml/2006/main">
+              <a:ext uri="{FF2B5EF4-FFF2-40B4-BE49-F238E27FC236}">
+                <a16:creationId xmlns:a16="http://schemas.microsoft.com/office/drawing/2014/main" id="{43489452-E10F-4144-827E-11FA8B9F431F}"/>
+              </a:ext>
+            </a:extLst>
+          </p:cNvPr>
+          <p:cNvSpPr>
+            <a:spLocks xmlns:a="http://schemas.openxmlformats.org/drawingml/2006/main" noGrp="1"/>
+          </p:cNvSpPr>
+          <p:nvPr/>
+        </p:nvSpPr>
+        <p:spPr>
+          <a:xfrm xmlns:a="http://schemas.openxmlformats.org/drawingml/2006/main">
+            <a:off x="685800" y="304800"/>
+            <a:ext cx="3429000" cy="285750"/>
+          </a:xfrm>
+          <a:prstGeom xmlns:a="http://schemas.openxmlformats.org/drawingml/2006/main" prst="rect">
+            <a:avLst/>
+          </a:prstGeom>
+          <a:noFill xmlns:a="http://schemas.openxmlformats.org/drawingml/2006/main"/>
+          <a:ln xmlns:a="http://schemas.openxmlformats.org/drawingml/2006/main" w="0">
+            <a:noFill/>
+          </a:ln>
+        </p:spPr>
+        <p:txBody>
+          <a:bodyPr xmlns:a="http://schemas.openxmlformats.org/drawingml/2006/main" anchor="ctr">
+            <a:normAutofit fontScale="100000"/>
+          </a:bodyPr>
+          <a:lstStyle xmlns:a="http://schemas.openxmlformats.org/drawingml/2006/main"/>
+          <a:p xmlns:a="http://schemas.openxmlformats.org/drawingml/2006/main">
+            <a:pPr>
+              <a:defRPr sz="1125" b="1">
+                <a:solidFill>
+                  <a:srgbClr val="2FA6A4"/>
+                </a:solidFill>
+                <a:latin typeface="Microsoft YaHei"/>
+                <a:ea typeface="Microsoft YaHei"/>
+                <a:cs typeface="Microsoft YaHei"/>
+              </a:defRPr>
+            </a:pPr>
+            <a:r>
+              <a:rPr sz="1125" b="1">
+                <a:solidFill>
+                  <a:srgbClr val="2FA6A4"/>
+                </a:solidFill>
+                <a:latin typeface="Microsoft YaHei"/>
+                <a:ea typeface="Microsoft YaHei"/>
+                <a:cs typeface="Microsoft YaHei"/>
+              </a:rPr>
+              <a:t>08  AUTOMATION</a:t>
+            </a:r>
+          </a:p>
+        </p:txBody>
+      </p:sp>
+      <p:sp>
+        <p:nvSpPr>
+          <p:cNvPr id="2" name="">
+            <a:extLst xmlns:a="http://schemas.openxmlformats.org/drawingml/2006/main">
+              <a:ext uri="{FF2B5EF4-FFF2-40B4-BE49-F238E27FC236}">
+                <a16:creationId xmlns:a16="http://schemas.microsoft.com/office/drawing/2014/main" id="{3BCC416D-C9B8-4A6B-86DE-7C22B6B72172}"/>
+              </a:ext>
+            </a:extLst>
+          </p:cNvPr>
+          <p:cNvSpPr>
+            <a:spLocks xmlns:a="http://schemas.openxmlformats.org/drawingml/2006/main" noGrp="1"/>
+          </p:cNvSpPr>
+          <p:nvPr/>
+        </p:nvSpPr>
+        <p:spPr>
+          <a:xfrm xmlns:a="http://schemas.openxmlformats.org/drawingml/2006/main">
+            <a:off x="685800" y="647700"/>
+            <a:ext cx="10001250" cy="552450"/>
+          </a:xfrm>
+          <a:prstGeom xmlns:a="http://schemas.openxmlformats.org/drawingml/2006/main" prst="rect">
+            <a:avLst/>
+          </a:prstGeom>
+          <a:noFill xmlns:a="http://schemas.openxmlformats.org/drawingml/2006/main"/>
+          <a:ln xmlns:a="http://schemas.openxmlformats.org/drawingml/2006/main" w="0">
+            <a:noFill/>
+          </a:ln>
+        </p:spPr>
+        <p:txBody>
+          <a:bodyPr xmlns:a="http://schemas.openxmlformats.org/drawingml/2006/main" anchor="ctr">
+            <a:normAutofit fontScale="100000"/>
+          </a:bodyPr>
+          <a:lstStyle xmlns:a="http://schemas.openxmlformats.org/drawingml/2006/main"/>
+          <a:p xmlns:a="http://schemas.openxmlformats.org/drawingml/2006/main">
+            <a:pPr>
+              <a:defRPr sz="2700" b="1">
+                <a:solidFill>
+                  <a:srgbClr val="193650"/>
+                </a:solidFill>
+                <a:latin typeface="Microsoft YaHei"/>
+                <a:ea typeface="Microsoft YaHei"/>
+                <a:cs typeface="Microsoft YaHei"/>
+              </a:defRPr>
+            </a:pPr>
+            <a:r>
+              <a:rPr sz="2700" b="1">
+                <a:solidFill>
+                  <a:srgbClr val="193650"/>
+                </a:solidFill>
+                <a:latin typeface="Microsoft YaHei"/>
+                <a:ea typeface="Microsoft YaHei"/>
+                <a:cs typeface="Microsoft YaHei"/>
+              </a:rPr>
+              <a:t>自动化测试入口与运行方式</a:t>
+            </a:r>
+          </a:p>
+        </p:txBody>
+      </p:sp>
+      <p:sp>
+        <p:nvSpPr>
+          <p:cNvPr id="3" name="">
+            <a:extLst xmlns:a="http://schemas.openxmlformats.org/drawingml/2006/main">
+              <a:ext uri="{FF2B5EF4-FFF2-40B4-BE49-F238E27FC236}">
+                <a16:creationId xmlns:a16="http://schemas.microsoft.com/office/drawing/2014/main" id="{CD96E6D1-763E-40F4-8FE1-72B390DD9543}"/>
+              </a:ext>
+            </a:extLst>
+          </p:cNvPr>
+          <p:cNvSpPr>
+            <a:spLocks xmlns:a="http://schemas.openxmlformats.org/drawingml/2006/main" noGrp="1"/>
+          </p:cNvSpPr>
+          <p:nvPr/>
+        </p:nvSpPr>
+        <p:spPr>
+          <a:xfrm xmlns:a="http://schemas.openxmlformats.org/drawingml/2006/main">
+            <a:off x="609600" y="1238250"/>
+            <a:ext cx="10953750" cy="9525"/>
+          </a:xfrm>
+          <a:prstGeom xmlns:a="http://schemas.openxmlformats.org/drawingml/2006/main" prst="rect">
+            <a:avLst/>
+          </a:prstGeom>
+          <a:solidFill xmlns:a="http://schemas.openxmlformats.org/drawingml/2006/main">
+            <a:srgbClr val="CFDDE3"/>
+          </a:solidFill>
+          <a:ln xmlns:a="http://schemas.openxmlformats.org/drawingml/2006/main" w="0">
+            <a:noFill/>
+          </a:ln>
+        </p:spPr>
+      </p:sp>
+      <p:sp>
+        <p:nvSpPr>
+          <p:cNvPr id="4" name="">
+            <a:extLst xmlns:a="http://schemas.openxmlformats.org/drawingml/2006/main">
+              <a:ext uri="{FF2B5EF4-FFF2-40B4-BE49-F238E27FC236}">
+                <a16:creationId xmlns:a16="http://schemas.microsoft.com/office/drawing/2014/main" id="{9BE75272-BEF3-48FC-90EF-B17AA9EA08CE}"/>
+              </a:ext>
+            </a:extLst>
+          </p:cNvPr>
+          <p:cNvSpPr>
+            <a:spLocks xmlns:a="http://schemas.openxmlformats.org/drawingml/2006/main" noGrp="1"/>
+          </p:cNvSpPr>
+          <p:nvPr/>
+        </p:nvSpPr>
+        <p:spPr>
+          <a:xfrm xmlns:a="http://schemas.openxmlformats.org/drawingml/2006/main">
+            <a:off x="11144250" y="447675"/>
+            <a:ext cx="428625" cy="333375"/>
+          </a:xfrm>
+          <a:prstGeom xmlns:a="http://schemas.openxmlformats.org/drawingml/2006/main" prst="rect">
+            <a:avLst/>
+          </a:prstGeom>
+          <a:noFill xmlns:a="http://schemas.openxmlformats.org/drawingml/2006/main"/>
+          <a:ln xmlns:a="http://schemas.openxmlformats.org/drawingml/2006/main" w="0">
+            <a:noFill/>
+          </a:ln>
+        </p:spPr>
+        <p:txBody>
+          <a:bodyPr xmlns:a="http://schemas.openxmlformats.org/drawingml/2006/main" anchor="ctr">
+            <a:normAutofit fontScale="100000"/>
+          </a:bodyPr>
+          <a:lstStyle xmlns:a="http://schemas.openxmlformats.org/drawingml/2006/main"/>
+          <a:p xmlns:a="http://schemas.openxmlformats.org/drawingml/2006/main">
+            <a:pPr>
+              <a:defRPr sz="1350" b="1">
+                <a:solidFill>
+                  <a:srgbClr val="2FA6A4"/>
+                </a:solidFill>
+                <a:latin typeface="Microsoft YaHei"/>
+                <a:ea typeface="Microsoft YaHei"/>
+                <a:cs typeface="Microsoft YaHei"/>
+              </a:defRPr>
+            </a:pPr>
+            <a:r>
+              <a:rPr sz="1350" b="1">
+                <a:solidFill>
+                  <a:srgbClr val="2FA6A4"/>
+                </a:solidFill>
+                <a:latin typeface="Microsoft YaHei"/>
+                <a:ea typeface="Microsoft YaHei"/>
+                <a:cs typeface="Microsoft YaHei"/>
+              </a:rPr>
+              <a:t>09</a:t>
+            </a:r>
+          </a:p>
+        </p:txBody>
+      </p:sp>
+      <p:sp>
+        <p:nvSpPr>
+          <p:cNvPr id="5" name="">
+            <a:extLst xmlns:a="http://schemas.openxmlformats.org/drawingml/2006/main">
+              <a:ext uri="{FF2B5EF4-FFF2-40B4-BE49-F238E27FC236}">
+                <a16:creationId xmlns:a16="http://schemas.microsoft.com/office/drawing/2014/main" id="{D5DD63DA-AC75-4FC2-AEF8-1ADA84954B4C}"/>
+              </a:ext>
+            </a:extLst>
+          </p:cNvPr>
+          <p:cNvSpPr>
+            <a:spLocks xmlns:a="http://schemas.openxmlformats.org/drawingml/2006/main" noGrp="1"/>
+          </p:cNvSpPr>
+          <p:nvPr/>
+        </p:nvSpPr>
+        <p:spPr>
+          <a:xfrm xmlns:a="http://schemas.openxmlformats.org/drawingml/2006/main">
+            <a:off x="685800" y="1581150"/>
+            <a:ext cx="4953000" cy="361950"/>
+          </a:xfrm>
+          <a:prstGeom xmlns:a="http://schemas.openxmlformats.org/drawingml/2006/main" prst="rect">
+            <a:avLst/>
+          </a:prstGeom>
+          <a:noFill xmlns:a="http://schemas.openxmlformats.org/drawingml/2006/main"/>
+          <a:ln xmlns:a="http://schemas.openxmlformats.org/drawingml/2006/main" w="0">
+            <a:noFill/>
+          </a:ln>
+        </p:spPr>
+        <p:txBody>
+          <a:bodyPr xmlns:a="http://schemas.openxmlformats.org/drawingml/2006/main" anchor="ctr">
+            <a:normAutofit fontScale="100000"/>
+          </a:bodyPr>
+          <a:lstStyle xmlns:a="http://schemas.openxmlformats.org/drawingml/2006/main"/>
+          <a:p xmlns:a="http://schemas.openxmlformats.org/drawingml/2006/main">
+            <a:pPr>
+              <a:defRPr sz="1725" b="1">
+                <a:solidFill>
+                  <a:srgbClr val="287896"/>
+                </a:solidFill>
+                <a:latin typeface="Microsoft YaHei"/>
+                <a:ea typeface="Microsoft YaHei"/>
+                <a:cs typeface="Microsoft YaHei"/>
+              </a:defRPr>
+            </a:pPr>
+            <a:r>
+              <a:rPr sz="1725" b="1">
+                <a:solidFill>
+                  <a:srgbClr val="287896"/>
+                </a:solidFill>
+                <a:latin typeface="Microsoft YaHei"/>
+                <a:ea typeface="Microsoft YaHei"/>
+                <a:cs typeface="Microsoft YaHei"/>
+              </a:rPr>
+              <a:t>一条命令运行全部 15 条用例</a:t>
+            </a:r>
+          </a:p>
+        </p:txBody>
+      </p:sp>
+      <p:sp>
+        <p:nvSpPr>
+          <p:cNvPr id="6" name="">
+            <a:extLst xmlns:a="http://schemas.openxmlformats.org/drawingml/2006/main">
+              <a:ext uri="{FF2B5EF4-FFF2-40B4-BE49-F238E27FC236}">
+                <a16:creationId xmlns:a16="http://schemas.microsoft.com/office/drawing/2014/main" id="{CAE93135-4BE9-400E-87A3-FC87C245C730}"/>
+              </a:ext>
+            </a:extLst>
+          </p:cNvPr>
+          <p:cNvSpPr>
+            <a:spLocks xmlns:a="http://schemas.openxmlformats.org/drawingml/2006/main" noGrp="1"/>
+          </p:cNvSpPr>
+          <p:nvPr/>
+        </p:nvSpPr>
+        <p:spPr>
+          <a:xfrm xmlns:a="http://schemas.openxmlformats.org/drawingml/2006/main">
+            <a:off x="685800" y="2038350"/>
+            <a:ext cx="4953000" cy="1352550"/>
+          </a:xfrm>
+          <a:prstGeom xmlns:a="http://schemas.openxmlformats.org/drawingml/2006/main" prst="rect">
+            <a:avLst/>
+          </a:prstGeom>
+          <a:solidFill xmlns:a="http://schemas.openxmlformats.org/drawingml/2006/main">
+            <a:srgbClr val="193650"/>
+          </a:solidFill>
+          <a:ln xmlns:a="http://schemas.openxmlformats.org/drawingml/2006/main" w="0">
+            <a:noFill/>
+          </a:ln>
+        </p:spPr>
+        <p:txBody>
+          <a:bodyPr xmlns:a="http://schemas.openxmlformats.org/drawingml/2006/main" anchor="ctr">
+            <a:normAutofit fontScale="100000"/>
+          </a:bodyPr>
+          <a:lstStyle xmlns:a="http://schemas.openxmlformats.org/drawingml/2006/main"/>
+          <a:p xmlns:a="http://schemas.openxmlformats.org/drawingml/2006/main">
+            <a:pPr>
+              <a:defRPr sz="1575" b="0">
+                <a:solidFill>
+                  <a:srgbClr val="FFFFFF"/>
+                </a:solidFill>
+                <a:latin typeface="Consolas"/>
+                <a:ea typeface="Consolas"/>
+                <a:cs typeface="Consolas"/>
+              </a:defRPr>
+            </a:pPr>
+            <a:r>
+              <a:rPr sz="1575" b="0">
+                <a:solidFill>
+                  <a:srgbClr val="FFFFFF"/>
+                </a:solidFill>
+                <a:latin typeface="Consolas"/>
+                <a:ea typeface="Consolas"/>
+                <a:cs typeface="Consolas"/>
+              </a:rPr>
+              <a:t>python 交付件/自动化测试脚本/</a:t>
+            </a:r>
+          </a:p>
+          <a:p xmlns:a="http://schemas.openxmlformats.org/drawingml/2006/main">
+            <a:pPr>
+              <a:defRPr sz="1575" b="0">
+                <a:solidFill>
+                  <a:srgbClr val="FFFFFF"/>
+                </a:solidFill>
+                <a:latin typeface="Consolas"/>
+                <a:ea typeface="Consolas"/>
+                <a:cs typeface="Consolas"/>
+              </a:defRPr>
+            </a:pPr>
+            <a:r>
+              <a:rPr sz="1575" b="0">
+                <a:solidFill>
+                  <a:srgbClr val="FFFFFF"/>
+                </a:solidFill>
+                <a:latin typeface="Consolas"/>
+                <a:ea typeface="Consolas"/>
+                <a:cs typeface="Consolas"/>
+              </a:rPr>
+              <a:t>run_module2_tests.py \</a:t>
+            </a:r>
+          </a:p>
+          <a:p xmlns:a="http://schemas.openxmlformats.org/drawingml/2006/main">
+            <a:pPr>
+              <a:defRPr sz="1575" b="0">
+                <a:solidFill>
+                  <a:srgbClr val="FFFFFF"/>
+                </a:solidFill>
+                <a:latin typeface="Consolas"/>
+                <a:ea typeface="Consolas"/>
+                <a:cs typeface="Consolas"/>
+              </a:defRPr>
+            </a:pPr>
+            <a:r>
+              <a:rPr sz="1575" b="0">
+                <a:solidFill>
+                  <a:srgbClr val="FFFFFF"/>
+                </a:solidFill>
+                <a:latin typeface="Consolas"/>
+                <a:ea typeface="Consolas"/>
+                <a:cs typeface="Consolas"/>
+              </a:rPr>
+              <a:t>  --run-id module2-formal-001</a:t>
+            </a:r>
+          </a:p>
+        </p:txBody>
+      </p:sp>
+      <p:sp>
+        <p:nvSpPr>
+          <p:cNvPr id="7" name="">
+            <a:extLst xmlns:a="http://schemas.openxmlformats.org/drawingml/2006/main">
+              <a:ext uri="{FF2B5EF4-FFF2-40B4-BE49-F238E27FC236}">
+                <a16:creationId xmlns:a16="http://schemas.microsoft.com/office/drawing/2014/main" id="{1A999410-2BCB-45C2-840D-AEEBF5ED0101}"/>
+              </a:ext>
+            </a:extLst>
+          </p:cNvPr>
+          <p:cNvSpPr>
+            <a:spLocks xmlns:a="http://schemas.openxmlformats.org/drawingml/2006/main" noGrp="1"/>
+          </p:cNvSpPr>
+          <p:nvPr/>
+        </p:nvSpPr>
+        <p:spPr>
+          <a:xfrm xmlns:a="http://schemas.openxmlformats.org/drawingml/2006/main">
+            <a:off x="685800" y="3562350"/>
+            <a:ext cx="4953000" cy="666750"/>
+          </a:xfrm>
+          <a:prstGeom xmlns:a="http://schemas.openxmlformats.org/drawingml/2006/main" prst="rect">
+            <a:avLst/>
+          </a:prstGeom>
+          <a:solidFill xmlns:a="http://schemas.openxmlformats.org/drawingml/2006/main">
+            <a:srgbClr val="F5F8FA"/>
+          </a:solidFill>
+          <a:ln xmlns:a="http://schemas.openxmlformats.org/drawingml/2006/main" w="9525">
+            <a:solidFill>
+              <a:srgbClr val="CFDDE3"/>
+            </a:solidFill>
+          </a:ln>
+        </p:spPr>
+        <p:txBody>
+          <a:bodyPr xmlns:a="http://schemas.openxmlformats.org/drawingml/2006/main" anchor="ctr">
+            <a:normAutofit fontScale="100000"/>
+          </a:bodyPr>
+          <a:lstStyle xmlns:a="http://schemas.openxmlformats.org/drawingml/2006/main"/>
+          <a:p xmlns:a="http://schemas.openxmlformats.org/drawingml/2006/main">
+            <a:pPr>
+              <a:defRPr sz="1350" b="0">
+                <a:solidFill>
+                  <a:srgbClr val="667784"/>
+                </a:solidFill>
+                <a:latin typeface="Microsoft YaHei"/>
+                <a:ea typeface="Microsoft YaHei"/>
+                <a:cs typeface="Microsoft YaHei"/>
+              </a:defRPr>
+            </a:pPr>
+            <a:r>
+              <a:rPr sz="1350" b="0">
+                <a:solidFill>
+                  <a:srgbClr val="667784"/>
+                </a:solidFill>
+                <a:latin typeface="Microsoft YaHei"/>
+                <a:ea typeface="Microsoft YaHei"/>
+                <a:cs typeface="Microsoft YaHei"/>
+              </a:rPr>
+              <a:t>默认执行 Baseline 与 MMSep；--quick 只用于环境冒烟，不计入正式结果。</a:t>
+            </a:r>
+          </a:p>
+        </p:txBody>
+      </p:sp>
+      <p:sp>
+        <p:nvSpPr>
+          <p:cNvPr id="8" name="">
+            <a:extLst xmlns:a="http://schemas.openxmlformats.org/drawingml/2006/main">
+              <a:ext uri="{FF2B5EF4-FFF2-40B4-BE49-F238E27FC236}">
+                <a16:creationId xmlns:a16="http://schemas.microsoft.com/office/drawing/2014/main" id="{F69E7F83-B03D-47B6-91C9-C34184FF3E48}"/>
+              </a:ext>
+            </a:extLst>
+          </p:cNvPr>
+          <p:cNvSpPr>
+            <a:spLocks xmlns:a="http://schemas.openxmlformats.org/drawingml/2006/main" noGrp="1"/>
+          </p:cNvSpPr>
+          <p:nvPr/>
+        </p:nvSpPr>
+        <p:spPr>
+          <a:xfrm xmlns:a="http://schemas.openxmlformats.org/drawingml/2006/main">
+            <a:off x="6238875" y="1657350"/>
+            <a:ext cx="457200" cy="457200"/>
+          </a:xfrm>
+          <a:prstGeom xmlns:a="http://schemas.openxmlformats.org/drawingml/2006/main" prst="rect">
+            <a:avLst/>
+          </a:prstGeom>
+          <a:solidFill xmlns:a="http://schemas.openxmlformats.org/drawingml/2006/main">
+            <a:srgbClr val="193650"/>
+          </a:solidFill>
+          <a:ln xmlns:a="http://schemas.openxmlformats.org/drawingml/2006/main" w="0">
+            <a:noFill/>
+          </a:ln>
+        </p:spPr>
+        <p:txBody>
+          <a:bodyPr xmlns:a="http://schemas.openxmlformats.org/drawingml/2006/main" anchor="ctr">
+            <a:normAutofit fontScale="100000"/>
+          </a:bodyPr>
+          <a:lstStyle xmlns:a="http://schemas.openxmlformats.org/drawingml/2006/main"/>
+          <a:p xmlns:a="http://schemas.openxmlformats.org/drawingml/2006/main">
+            <a:pPr>
+              <a:defRPr sz="1500" b="1">
+                <a:solidFill>
+                  <a:srgbClr val="FFFFFF"/>
+                </a:solidFill>
+                <a:latin typeface="Microsoft YaHei"/>
+                <a:ea typeface="Microsoft YaHei"/>
+                <a:cs typeface="Microsoft YaHei"/>
+              </a:defRPr>
+            </a:pPr>
+            <a:r>
+              <a:rPr sz="1500" b="1">
+                <a:solidFill>
+                  <a:srgbClr val="FFFFFF"/>
+                </a:solidFill>
+                <a:latin typeface="Microsoft YaHei"/>
+                <a:ea typeface="Microsoft YaHei"/>
+                <a:cs typeface="Microsoft YaHei"/>
+              </a:rPr>
+              <a:t>1</a:t>
+            </a:r>
+          </a:p>
+        </p:txBody>
+      </p:sp>
+      <p:sp>
+        <p:nvSpPr>
+          <p:cNvPr id="9" name="">
+            <a:extLst xmlns:a="http://schemas.openxmlformats.org/drawingml/2006/main">
+              <a:ext uri="{FF2B5EF4-FFF2-40B4-BE49-F238E27FC236}">
+                <a16:creationId xmlns:a16="http://schemas.microsoft.com/office/drawing/2014/main" id="{6E924732-63A9-4616-A52E-1369E80E9B0E}"/>
+              </a:ext>
+            </a:extLst>
+          </p:cNvPr>
+          <p:cNvSpPr>
+            <a:spLocks xmlns:a="http://schemas.openxmlformats.org/drawingml/2006/main" noGrp="1"/>
+          </p:cNvSpPr>
+          <p:nvPr/>
+        </p:nvSpPr>
+        <p:spPr>
+          <a:xfrm xmlns:a="http://schemas.openxmlformats.org/drawingml/2006/main">
+            <a:off x="6953250" y="1581150"/>
+            <a:ext cx="2238375" cy="333375"/>
+          </a:xfrm>
+          <a:prstGeom xmlns:a="http://schemas.openxmlformats.org/drawingml/2006/main" prst="rect">
+            <a:avLst/>
+          </a:prstGeom>
+          <a:noFill xmlns:a="http://schemas.openxmlformats.org/drawingml/2006/main"/>
+          <a:ln xmlns:a="http://schemas.openxmlformats.org/drawingml/2006/main" w="0">
+            <a:noFill/>
+          </a:ln>
+        </p:spPr>
+        <p:txBody>
+          <a:bodyPr xmlns:a="http://schemas.openxmlformats.org/drawingml/2006/main" anchor="ctr">
+            <a:normAutofit fontScale="100000"/>
+          </a:bodyPr>
+          <a:lstStyle xmlns:a="http://schemas.openxmlformats.org/drawingml/2006/main"/>
+          <a:p xmlns:a="http://schemas.openxmlformats.org/drawingml/2006/main">
+            <a:pPr>
+              <a:defRPr sz="1575" b="1">
+                <a:solidFill>
+                  <a:srgbClr val="193650"/>
+                </a:solidFill>
+                <a:latin typeface="Microsoft YaHei"/>
+                <a:ea typeface="Microsoft YaHei"/>
+                <a:cs typeface="Microsoft YaHei"/>
+              </a:defRPr>
+            </a:pPr>
+            <a:r>
+              <a:rPr sz="1575" b="1">
+                <a:solidFill>
+                  <a:srgbClr val="193650"/>
+                </a:solidFill>
+                <a:latin typeface="Microsoft YaHei"/>
+                <a:ea typeface="Microsoft YaHei"/>
+                <a:cs typeface="Microsoft YaHei"/>
+              </a:rPr>
+              <a:t>加载统一用例源</a:t>
+            </a:r>
+          </a:p>
+        </p:txBody>
+      </p:sp>
+      <p:sp>
+        <p:nvSpPr>
+          <p:cNvPr id="10" name="">
+            <a:extLst xmlns:a="http://schemas.openxmlformats.org/drawingml/2006/main">
+              <a:ext uri="{FF2B5EF4-FFF2-40B4-BE49-F238E27FC236}">
+                <a16:creationId xmlns:a16="http://schemas.microsoft.com/office/drawing/2014/main" id="{5C386BCB-299D-4CE3-B0FA-EA21D19E1FA4}"/>
+              </a:ext>
+            </a:extLst>
+          </p:cNvPr>
+          <p:cNvSpPr>
+            <a:spLocks xmlns:a="http://schemas.openxmlformats.org/drawingml/2006/main" noGrp="1"/>
+          </p:cNvSpPr>
+          <p:nvPr/>
+        </p:nvSpPr>
+        <p:spPr>
+          <a:xfrm xmlns:a="http://schemas.openxmlformats.org/drawingml/2006/main">
+            <a:off x="6953250" y="1914525"/>
+            <a:ext cx="4095750" cy="304800"/>
+          </a:xfrm>
+          <a:prstGeom xmlns:a="http://schemas.openxmlformats.org/drawingml/2006/main" prst="rect">
+            <a:avLst/>
+          </a:prstGeom>
+          <a:noFill xmlns:a="http://schemas.openxmlformats.org/drawingml/2006/main"/>
+          <a:ln xmlns:a="http://schemas.openxmlformats.org/drawingml/2006/main" w="0">
+            <a:noFill/>
+          </a:ln>
+        </p:spPr>
+        <p:txBody>
+          <a:bodyPr xmlns:a="http://schemas.openxmlformats.org/drawingml/2006/main" anchor="ctr">
+            <a:normAutofit fontScale="100000"/>
+          </a:bodyPr>
+          <a:lstStyle xmlns:a="http://schemas.openxmlformats.org/drawingml/2006/main"/>
+          <a:p xmlns:a="http://schemas.openxmlformats.org/drawingml/2006/main">
+            <a:pPr>
+              <a:defRPr sz="1200" b="0">
+                <a:solidFill>
+                  <a:srgbClr val="667784"/>
+                </a:solidFill>
+                <a:latin typeface="Microsoft YaHei"/>
+                <a:ea typeface="Microsoft YaHei"/>
+                <a:cs typeface="Microsoft YaHei"/>
+              </a:defRPr>
+            </a:pPr>
+            <a:r>
+              <a:rPr sz="1200" b="0">
+                <a:solidFill>
+                  <a:srgbClr val="667784"/>
+                </a:solidFill>
+                <a:latin typeface="Microsoft YaHei"/>
+                <a:ea typeface="Microsoft YaHei"/>
+                <a:cs typeface="Microsoft YaHei"/>
+              </a:rPr>
+              <a:t>lcx 8 条 + wjn 7 条</a:t>
+            </a:r>
+          </a:p>
+        </p:txBody>
+      </p:sp>
+      <p:sp>
+        <p:nvSpPr>
+          <p:cNvPr id="11" name="">
+            <a:extLst xmlns:a="http://schemas.openxmlformats.org/drawingml/2006/main">
+              <a:ext uri="{FF2B5EF4-FFF2-40B4-BE49-F238E27FC236}">
+                <a16:creationId xmlns:a16="http://schemas.microsoft.com/office/drawing/2014/main" id="{08267E9A-7F30-4200-9D4E-9B5EC6B4F7BC}"/>
+              </a:ext>
+            </a:extLst>
+          </p:cNvPr>
+          <p:cNvSpPr>
+            <a:spLocks xmlns:a="http://schemas.openxmlformats.org/drawingml/2006/main" noGrp="1"/>
+          </p:cNvSpPr>
+          <p:nvPr/>
+        </p:nvSpPr>
+        <p:spPr>
+          <a:xfrm xmlns:a="http://schemas.openxmlformats.org/drawingml/2006/main">
+            <a:off x="6238875" y="2514600"/>
+            <a:ext cx="457200" cy="457200"/>
+          </a:xfrm>
+          <a:prstGeom xmlns:a="http://schemas.openxmlformats.org/drawingml/2006/main" prst="rect">
+            <a:avLst/>
+          </a:prstGeom>
+          <a:solidFill xmlns:a="http://schemas.openxmlformats.org/drawingml/2006/main">
+            <a:srgbClr val="193650"/>
+          </a:solidFill>
+          <a:ln xmlns:a="http://schemas.openxmlformats.org/drawingml/2006/main" w="0">
+            <a:noFill/>
+          </a:ln>
+        </p:spPr>
+        <p:txBody>
+          <a:bodyPr xmlns:a="http://schemas.openxmlformats.org/drawingml/2006/main" anchor="ctr">
+            <a:normAutofit fontScale="100000"/>
+          </a:bodyPr>
+          <a:lstStyle xmlns:a="http://schemas.openxmlformats.org/drawingml/2006/main"/>
+          <a:p xmlns:a="http://schemas.openxmlformats.org/drawingml/2006/main">
+            <a:pPr>
+              <a:defRPr sz="1500" b="1">
+                <a:solidFill>
+                  <a:srgbClr val="FFFFFF"/>
+                </a:solidFill>
+                <a:latin typeface="Microsoft YaHei"/>
+                <a:ea typeface="Microsoft YaHei"/>
+                <a:cs typeface="Microsoft YaHei"/>
+              </a:defRPr>
+            </a:pPr>
+            <a:r>
+              <a:rPr sz="1500" b="1">
+                <a:solidFill>
+                  <a:srgbClr val="FFFFFF"/>
+                </a:solidFill>
+                <a:latin typeface="Microsoft YaHei"/>
+                <a:ea typeface="Microsoft YaHei"/>
+                <a:cs typeface="Microsoft YaHei"/>
+              </a:rPr>
+              <a:t>2</a:t>
+            </a:r>
+          </a:p>
+        </p:txBody>
+      </p:sp>
+      <p:sp>
+        <p:nvSpPr>
+          <p:cNvPr id="12" name="">
+            <a:extLst xmlns:a="http://schemas.openxmlformats.org/drawingml/2006/main">
+              <a:ext uri="{FF2B5EF4-FFF2-40B4-BE49-F238E27FC236}">
+                <a16:creationId xmlns:a16="http://schemas.microsoft.com/office/drawing/2014/main" id="{86019B3E-DA3E-4E1F-8930-06E070DBFB3D}"/>
+              </a:ext>
+            </a:extLst>
+          </p:cNvPr>
+          <p:cNvSpPr>
+            <a:spLocks xmlns:a="http://schemas.openxmlformats.org/drawingml/2006/main" noGrp="1"/>
+          </p:cNvSpPr>
+          <p:nvPr/>
+        </p:nvSpPr>
+        <p:spPr>
+          <a:xfrm xmlns:a="http://schemas.openxmlformats.org/drawingml/2006/main">
+            <a:off x="6953250" y="2438400"/>
+            <a:ext cx="2238375" cy="333375"/>
+          </a:xfrm>
+          <a:prstGeom xmlns:a="http://schemas.openxmlformats.org/drawingml/2006/main" prst="rect">
+            <a:avLst/>
+          </a:prstGeom>
+          <a:noFill xmlns:a="http://schemas.openxmlformats.org/drawingml/2006/main"/>
+          <a:ln xmlns:a="http://schemas.openxmlformats.org/drawingml/2006/main" w="0">
+            <a:noFill/>
+          </a:ln>
+        </p:spPr>
+        <p:txBody>
+          <a:bodyPr xmlns:a="http://schemas.openxmlformats.org/drawingml/2006/main" anchor="ctr">
+            <a:normAutofit fontScale="100000"/>
+          </a:bodyPr>
+          <a:lstStyle xmlns:a="http://schemas.openxmlformats.org/drawingml/2006/main"/>
+          <a:p xmlns:a="http://schemas.openxmlformats.org/drawingml/2006/main">
+            <a:pPr>
+              <a:defRPr sz="1575" b="1">
+                <a:solidFill>
+                  <a:srgbClr val="193650"/>
+                </a:solidFill>
+                <a:latin typeface="Microsoft YaHei"/>
+                <a:ea typeface="Microsoft YaHei"/>
+                <a:cs typeface="Microsoft YaHei"/>
+              </a:defRPr>
+            </a:pPr>
+            <a:r>
+              <a:rPr sz="1575" b="1">
+                <a:solidFill>
+                  <a:srgbClr val="193650"/>
+                </a:solidFill>
+                <a:latin typeface="Microsoft YaHei"/>
+                <a:ea typeface="Microsoft YaHei"/>
+                <a:cs typeface="Microsoft YaHei"/>
+              </a:rPr>
+              <a:t>生成固定输入</a:t>
+            </a:r>
+          </a:p>
+        </p:txBody>
+      </p:sp>
+      <p:sp>
+        <p:nvSpPr>
+          <p:cNvPr id="13" name="">
+            <a:extLst xmlns:a="http://schemas.openxmlformats.org/drawingml/2006/main">
+              <a:ext uri="{FF2B5EF4-FFF2-40B4-BE49-F238E27FC236}">
+                <a16:creationId xmlns:a16="http://schemas.microsoft.com/office/drawing/2014/main" id="{2458D7E8-B096-4DE0-95AF-B1FCF9A7E515}"/>
+              </a:ext>
+            </a:extLst>
+          </p:cNvPr>
+          <p:cNvSpPr>
+            <a:spLocks xmlns:a="http://schemas.openxmlformats.org/drawingml/2006/main" noGrp="1"/>
+          </p:cNvSpPr>
+          <p:nvPr/>
+        </p:nvSpPr>
+        <p:spPr>
+          <a:xfrm xmlns:a="http://schemas.openxmlformats.org/drawingml/2006/main">
+            <a:off x="6953250" y="2771775"/>
+            <a:ext cx="4095750" cy="304800"/>
+          </a:xfrm>
+          <a:prstGeom xmlns:a="http://schemas.openxmlformats.org/drawingml/2006/main" prst="rect">
+            <a:avLst/>
+          </a:prstGeom>
+          <a:noFill xmlns:a="http://schemas.openxmlformats.org/drawingml/2006/main"/>
+          <a:ln xmlns:a="http://schemas.openxmlformats.org/drawingml/2006/main" w="0">
+            <a:noFill/>
+          </a:ln>
+        </p:spPr>
+        <p:txBody>
+          <a:bodyPr xmlns:a="http://schemas.openxmlformats.org/drawingml/2006/main" anchor="ctr">
+            <a:normAutofit fontScale="100000"/>
+          </a:bodyPr>
+          <a:lstStyle xmlns:a="http://schemas.openxmlformats.org/drawingml/2006/main"/>
+          <a:p xmlns:a="http://schemas.openxmlformats.org/drawingml/2006/main">
+            <a:pPr>
+              <a:defRPr sz="1200" b="0">
+                <a:solidFill>
+                  <a:srgbClr val="667784"/>
+                </a:solidFill>
+                <a:latin typeface="Microsoft YaHei"/>
+                <a:ea typeface="Microsoft YaHei"/>
+                <a:cs typeface="Microsoft YaHei"/>
+              </a:defRPr>
+            </a:pPr>
+            <a:r>
+              <a:rPr sz="1200" b="0">
+                <a:solidFill>
+                  <a:srgbClr val="667784"/>
+                </a:solidFill>
+                <a:latin typeface="Microsoft YaHei"/>
+                <a:ea typeface="Microsoft YaHei"/>
+                <a:cs typeface="Microsoft YaHei"/>
+              </a:rPr>
+              <a:t>图片、提示词和种子保持一致</a:t>
+            </a:r>
+          </a:p>
+        </p:txBody>
+      </p:sp>
+      <p:sp>
+        <p:nvSpPr>
+          <p:cNvPr id="14" name="">
+            <a:extLst xmlns:a="http://schemas.openxmlformats.org/drawingml/2006/main">
+              <a:ext uri="{FF2B5EF4-FFF2-40B4-BE49-F238E27FC236}">
+                <a16:creationId xmlns:a16="http://schemas.microsoft.com/office/drawing/2014/main" id="{ADE73AB5-C670-4367-BCFA-7CFCB4E8EDF3}"/>
+              </a:ext>
+            </a:extLst>
+          </p:cNvPr>
+          <p:cNvSpPr>
+            <a:spLocks xmlns:a="http://schemas.openxmlformats.org/drawingml/2006/main" noGrp="1"/>
+          </p:cNvSpPr>
+          <p:nvPr/>
+        </p:nvSpPr>
+        <p:spPr>
+          <a:xfrm xmlns:a="http://schemas.openxmlformats.org/drawingml/2006/main">
+            <a:off x="6238875" y="3371850"/>
+            <a:ext cx="457200" cy="457200"/>
+          </a:xfrm>
+          <a:prstGeom xmlns:a="http://schemas.openxmlformats.org/drawingml/2006/main" prst="rect">
+            <a:avLst/>
+          </a:prstGeom>
+          <a:solidFill xmlns:a="http://schemas.openxmlformats.org/drawingml/2006/main">
+            <a:srgbClr val="193650"/>
+          </a:solidFill>
+          <a:ln xmlns:a="http://schemas.openxmlformats.org/drawingml/2006/main" w="0">
+            <a:noFill/>
+          </a:ln>
+        </p:spPr>
+        <p:txBody>
+          <a:bodyPr xmlns:a="http://schemas.openxmlformats.org/drawingml/2006/main" anchor="ctr">
+            <a:normAutofit fontScale="100000"/>
+          </a:bodyPr>
+          <a:lstStyle xmlns:a="http://schemas.openxmlformats.org/drawingml/2006/main"/>
+          <a:p xmlns:a="http://schemas.openxmlformats.org/drawingml/2006/main">
+            <a:pPr>
+              <a:defRPr sz="1500" b="1">
+                <a:solidFill>
+                  <a:srgbClr val="FFFFFF"/>
+                </a:solidFill>
+                <a:latin typeface="Microsoft YaHei"/>
+                <a:ea typeface="Microsoft YaHei"/>
+                <a:cs typeface="Microsoft YaHei"/>
+              </a:defRPr>
+            </a:pPr>
+            <a:r>
+              <a:rPr sz="1500" b="1">
+                <a:solidFill>
+                  <a:srgbClr val="FFFFFF"/>
+                </a:solidFill>
+                <a:latin typeface="Microsoft YaHei"/>
+                <a:ea typeface="Microsoft YaHei"/>
+                <a:cs typeface="Microsoft YaHei"/>
+              </a:rPr>
+              <a:t>3</a:t>
+            </a:r>
+          </a:p>
+        </p:txBody>
+      </p:sp>
+      <p:sp>
+        <p:nvSpPr>
+          <p:cNvPr id="15" name="">
+            <a:extLst xmlns:a="http://schemas.openxmlformats.org/drawingml/2006/main">
+              <a:ext uri="{FF2B5EF4-FFF2-40B4-BE49-F238E27FC236}">
+                <a16:creationId xmlns:a16="http://schemas.microsoft.com/office/drawing/2014/main" id="{0F8562AE-5076-467E-96EB-0E5A713070B2}"/>
+              </a:ext>
+            </a:extLst>
+          </p:cNvPr>
+          <p:cNvSpPr>
+            <a:spLocks xmlns:a="http://schemas.openxmlformats.org/drawingml/2006/main" noGrp="1"/>
+          </p:cNvSpPr>
+          <p:nvPr/>
+        </p:nvSpPr>
+        <p:spPr>
+          <a:xfrm xmlns:a="http://schemas.openxmlformats.org/drawingml/2006/main">
+            <a:off x="6953250" y="3295650"/>
+            <a:ext cx="2238375" cy="333375"/>
+          </a:xfrm>
+          <a:prstGeom xmlns:a="http://schemas.openxmlformats.org/drawingml/2006/main" prst="rect">
+            <a:avLst/>
+          </a:prstGeom>
+          <a:noFill xmlns:a="http://schemas.openxmlformats.org/drawingml/2006/main"/>
+          <a:ln xmlns:a="http://schemas.openxmlformats.org/drawingml/2006/main" w="0">
+            <a:noFill/>
+          </a:ln>
+        </p:spPr>
+        <p:txBody>
+          <a:bodyPr xmlns:a="http://schemas.openxmlformats.org/drawingml/2006/main" anchor="ctr">
+            <a:normAutofit fontScale="100000"/>
+          </a:bodyPr>
+          <a:lstStyle xmlns:a="http://schemas.openxmlformats.org/drawingml/2006/main"/>
+          <a:p xmlns:a="http://schemas.openxmlformats.org/drawingml/2006/main">
+            <a:pPr>
+              <a:defRPr sz="1575" b="1">
+                <a:solidFill>
+                  <a:srgbClr val="193650"/>
+                </a:solidFill>
+                <a:latin typeface="Microsoft YaHei"/>
+                <a:ea typeface="Microsoft YaHei"/>
+                <a:cs typeface="Microsoft YaHei"/>
+              </a:defRPr>
+            </a:pPr>
+            <a:r>
+              <a:rPr sz="1575" b="1">
+                <a:solidFill>
+                  <a:srgbClr val="193650"/>
+                </a:solidFill>
+                <a:latin typeface="Microsoft YaHei"/>
+                <a:ea typeface="Microsoft YaHei"/>
+                <a:cs typeface="Microsoft YaHei"/>
+              </a:rPr>
+              <a:t>成对运行</a:t>
+            </a:r>
+          </a:p>
+        </p:txBody>
+      </p:sp>
+      <p:sp>
+        <p:nvSpPr>
+          <p:cNvPr id="16" name="">
+            <a:extLst xmlns:a="http://schemas.openxmlformats.org/drawingml/2006/main">
+              <a:ext uri="{FF2B5EF4-FFF2-40B4-BE49-F238E27FC236}">
+                <a16:creationId xmlns:a16="http://schemas.microsoft.com/office/drawing/2014/main" id="{A5B4EB59-010F-4B28-8A88-CE358C0885D1}"/>
+              </a:ext>
+            </a:extLst>
+          </p:cNvPr>
+          <p:cNvSpPr>
+            <a:spLocks xmlns:a="http://schemas.openxmlformats.org/drawingml/2006/main" noGrp="1"/>
+          </p:cNvSpPr>
+          <p:nvPr/>
+        </p:nvSpPr>
+        <p:spPr>
+          <a:xfrm xmlns:a="http://schemas.openxmlformats.org/drawingml/2006/main">
+            <a:off x="6953250" y="3629025"/>
+            <a:ext cx="4095750" cy="304800"/>
+          </a:xfrm>
+          <a:prstGeom xmlns:a="http://schemas.openxmlformats.org/drawingml/2006/main" prst="rect">
+            <a:avLst/>
+          </a:prstGeom>
+          <a:noFill xmlns:a="http://schemas.openxmlformats.org/drawingml/2006/main"/>
+          <a:ln xmlns:a="http://schemas.openxmlformats.org/drawingml/2006/main" w="0">
+            <a:noFill/>
+          </a:ln>
+        </p:spPr>
+        <p:txBody>
+          <a:bodyPr xmlns:a="http://schemas.openxmlformats.org/drawingml/2006/main" anchor="ctr">
+            <a:normAutofit fontScale="100000"/>
+          </a:bodyPr>
+          <a:lstStyle xmlns:a="http://schemas.openxmlformats.org/drawingml/2006/main"/>
+          <a:p xmlns:a="http://schemas.openxmlformats.org/drawingml/2006/main">
+            <a:pPr>
+              <a:defRPr sz="1200" b="0">
+                <a:solidFill>
+                  <a:srgbClr val="667784"/>
+                </a:solidFill>
+                <a:latin typeface="Microsoft YaHei"/>
+                <a:ea typeface="Microsoft YaHei"/>
+                <a:cs typeface="Microsoft YaHei"/>
+              </a:defRPr>
+            </a:pPr>
+            <a:r>
+              <a:rPr sz="1200" b="0">
+                <a:solidFill>
+                  <a:srgbClr val="667784"/>
+                </a:solidFill>
+                <a:latin typeface="Microsoft YaHei"/>
+                <a:ea typeface="Microsoft YaHei"/>
+                <a:cs typeface="Microsoft YaHei"/>
+              </a:rPr>
+              <a:t>仅切换 mmsep.enabled</a:t>
+            </a:r>
+          </a:p>
+        </p:txBody>
+      </p:sp>
+      <p:sp>
+        <p:nvSpPr>
+          <p:cNvPr id="17" name="">
+            <a:extLst xmlns:a="http://schemas.openxmlformats.org/drawingml/2006/main">
+              <a:ext uri="{FF2B5EF4-FFF2-40B4-BE49-F238E27FC236}">
+                <a16:creationId xmlns:a16="http://schemas.microsoft.com/office/drawing/2014/main" id="{86105414-670C-4B23-8346-3B186E9A6519}"/>
+              </a:ext>
+            </a:extLst>
+          </p:cNvPr>
+          <p:cNvSpPr>
+            <a:spLocks xmlns:a="http://schemas.openxmlformats.org/drawingml/2006/main" noGrp="1"/>
+          </p:cNvSpPr>
+          <p:nvPr/>
+        </p:nvSpPr>
+        <p:spPr>
+          <a:xfrm xmlns:a="http://schemas.openxmlformats.org/drawingml/2006/main">
+            <a:off x="6238875" y="4229100"/>
+            <a:ext cx="457200" cy="457200"/>
+          </a:xfrm>
+          <a:prstGeom xmlns:a="http://schemas.openxmlformats.org/drawingml/2006/main" prst="rect">
+            <a:avLst/>
+          </a:prstGeom>
+          <a:solidFill xmlns:a="http://schemas.openxmlformats.org/drawingml/2006/main">
+            <a:srgbClr val="193650"/>
+          </a:solidFill>
+          <a:ln xmlns:a="http://schemas.openxmlformats.org/drawingml/2006/main" w="0">
+            <a:noFill/>
+          </a:ln>
+        </p:spPr>
+        <p:txBody>
+          <a:bodyPr xmlns:a="http://schemas.openxmlformats.org/drawingml/2006/main" anchor="ctr">
+            <a:normAutofit fontScale="100000"/>
+          </a:bodyPr>
+          <a:lstStyle xmlns:a="http://schemas.openxmlformats.org/drawingml/2006/main"/>
+          <a:p xmlns:a="http://schemas.openxmlformats.org/drawingml/2006/main">
+            <a:pPr>
+              <a:defRPr sz="1500" b="1">
+                <a:solidFill>
+                  <a:srgbClr val="FFFFFF"/>
+                </a:solidFill>
+                <a:latin typeface="Microsoft YaHei"/>
+                <a:ea typeface="Microsoft YaHei"/>
+                <a:cs typeface="Microsoft YaHei"/>
+              </a:defRPr>
+            </a:pPr>
+            <a:r>
+              <a:rPr sz="1500" b="1">
+                <a:solidFill>
+                  <a:srgbClr val="FFFFFF"/>
+                </a:solidFill>
+                <a:latin typeface="Microsoft YaHei"/>
+                <a:ea typeface="Microsoft YaHei"/>
+                <a:cs typeface="Microsoft YaHei"/>
+              </a:rPr>
+              <a:t>4</a:t>
+            </a:r>
+          </a:p>
+        </p:txBody>
+      </p:sp>
+      <p:sp>
+        <p:nvSpPr>
+          <p:cNvPr id="18" name="">
+            <a:extLst xmlns:a="http://schemas.openxmlformats.org/drawingml/2006/main">
+              <a:ext uri="{FF2B5EF4-FFF2-40B4-BE49-F238E27FC236}">
+                <a16:creationId xmlns:a16="http://schemas.microsoft.com/office/drawing/2014/main" id="{CACC51F7-B3B4-4D52-897B-50A26792DFF6}"/>
+              </a:ext>
+            </a:extLst>
+          </p:cNvPr>
+          <p:cNvSpPr>
+            <a:spLocks xmlns:a="http://schemas.openxmlformats.org/drawingml/2006/main" noGrp="1"/>
+          </p:cNvSpPr>
+          <p:nvPr/>
+        </p:nvSpPr>
+        <p:spPr>
+          <a:xfrm xmlns:a="http://schemas.openxmlformats.org/drawingml/2006/main">
+            <a:off x="6953250" y="4152900"/>
+            <a:ext cx="2238375" cy="333375"/>
+          </a:xfrm>
+          <a:prstGeom xmlns:a="http://schemas.openxmlformats.org/drawingml/2006/main" prst="rect">
+            <a:avLst/>
+          </a:prstGeom>
+          <a:noFill xmlns:a="http://schemas.openxmlformats.org/drawingml/2006/main"/>
+          <a:ln xmlns:a="http://schemas.openxmlformats.org/drawingml/2006/main" w="0">
+            <a:noFill/>
+          </a:ln>
+        </p:spPr>
+        <p:txBody>
+          <a:bodyPr xmlns:a="http://schemas.openxmlformats.org/drawingml/2006/main" anchor="ctr">
+            <a:normAutofit fontScale="100000"/>
+          </a:bodyPr>
+          <a:lstStyle xmlns:a="http://schemas.openxmlformats.org/drawingml/2006/main"/>
+          <a:p xmlns:a="http://schemas.openxmlformats.org/drawingml/2006/main">
+            <a:pPr>
+              <a:defRPr sz="1575" b="1">
+                <a:solidFill>
+                  <a:srgbClr val="193650"/>
+                </a:solidFill>
+                <a:latin typeface="Microsoft YaHei"/>
+                <a:ea typeface="Microsoft YaHei"/>
+                <a:cs typeface="Microsoft YaHei"/>
+              </a:defRPr>
+            </a:pPr>
+            <a:r>
+              <a:rPr sz="1575" b="1">
+                <a:solidFill>
+                  <a:srgbClr val="193650"/>
+                </a:solidFill>
+                <a:latin typeface="Microsoft YaHei"/>
+                <a:ea typeface="Microsoft YaHei"/>
+                <a:cs typeface="Microsoft YaHei"/>
+              </a:rPr>
+              <a:t>代码 Oracle</a:t>
+            </a:r>
+          </a:p>
+        </p:txBody>
+      </p:sp>
+      <p:sp>
+        <p:nvSpPr>
+          <p:cNvPr id="19" name="">
+            <a:extLst xmlns:a="http://schemas.openxmlformats.org/drawingml/2006/main">
+              <a:ext uri="{FF2B5EF4-FFF2-40B4-BE49-F238E27FC236}">
+                <a16:creationId xmlns:a16="http://schemas.microsoft.com/office/drawing/2014/main" id="{F32DE715-F3BD-41D9-A000-7693F3A534AC}"/>
+              </a:ext>
+            </a:extLst>
+          </p:cNvPr>
+          <p:cNvSpPr>
+            <a:spLocks xmlns:a="http://schemas.openxmlformats.org/drawingml/2006/main" noGrp="1"/>
+          </p:cNvSpPr>
+          <p:nvPr/>
+        </p:nvSpPr>
+        <p:spPr>
+          <a:xfrm xmlns:a="http://schemas.openxmlformats.org/drawingml/2006/main">
+            <a:off x="6953250" y="4486275"/>
+            <a:ext cx="4095750" cy="304800"/>
+          </a:xfrm>
+          <a:prstGeom xmlns:a="http://schemas.openxmlformats.org/drawingml/2006/main" prst="rect">
+            <a:avLst/>
+          </a:prstGeom>
+          <a:noFill xmlns:a="http://schemas.openxmlformats.org/drawingml/2006/main"/>
+          <a:ln xmlns:a="http://schemas.openxmlformats.org/drawingml/2006/main" w="0">
+            <a:noFill/>
+          </a:ln>
+        </p:spPr>
+        <p:txBody>
+          <a:bodyPr xmlns:a="http://schemas.openxmlformats.org/drawingml/2006/main" anchor="ctr">
+            <a:normAutofit fontScale="100000"/>
+          </a:bodyPr>
+          <a:lstStyle xmlns:a="http://schemas.openxmlformats.org/drawingml/2006/main"/>
+          <a:p xmlns:a="http://schemas.openxmlformats.org/drawingml/2006/main">
+            <a:pPr>
+              <a:defRPr sz="1200" b="0">
+                <a:solidFill>
+                  <a:srgbClr val="667784"/>
+                </a:solidFill>
+                <a:latin typeface="Microsoft YaHei"/>
+                <a:ea typeface="Microsoft YaHei"/>
+                <a:cs typeface="Microsoft YaHei"/>
+              </a:defRPr>
+            </a:pPr>
+            <a:r>
+              <a:rPr sz="1200" b="0">
+                <a:solidFill>
+                  <a:srgbClr val="667784"/>
+                </a:solidFill>
+                <a:latin typeface="Microsoft YaHei"/>
+                <a:ea typeface="Microsoft YaHei"/>
+                <a:cs typeface="Microsoft YaHei"/>
+              </a:rPr>
+              <a:t>标签、禁词、长度和性能阈值</a:t>
+            </a:r>
+          </a:p>
+        </p:txBody>
+      </p:sp>
+      <p:sp>
+        <p:nvSpPr>
+          <p:cNvPr id="20" name="">
+            <a:extLst xmlns:a="http://schemas.openxmlformats.org/drawingml/2006/main">
+              <a:ext uri="{FF2B5EF4-FFF2-40B4-BE49-F238E27FC236}">
+                <a16:creationId xmlns:a16="http://schemas.microsoft.com/office/drawing/2014/main" id="{BBAFFEFB-AC6C-42E6-B409-521F9DEC9252}"/>
+              </a:ext>
+            </a:extLst>
+          </p:cNvPr>
+          <p:cNvSpPr>
+            <a:spLocks xmlns:a="http://schemas.openxmlformats.org/drawingml/2006/main" noGrp="1"/>
+          </p:cNvSpPr>
+          <p:nvPr/>
+        </p:nvSpPr>
+        <p:spPr>
+          <a:xfrm xmlns:a="http://schemas.openxmlformats.org/drawingml/2006/main">
+            <a:off x="6238875" y="5086350"/>
+            <a:ext cx="457200" cy="457200"/>
+          </a:xfrm>
+          <a:prstGeom xmlns:a="http://schemas.openxmlformats.org/drawingml/2006/main" prst="rect">
+            <a:avLst/>
+          </a:prstGeom>
+          <a:solidFill xmlns:a="http://schemas.openxmlformats.org/drawingml/2006/main">
+            <a:srgbClr val="2FA6A4"/>
+          </a:solidFill>
+          <a:ln xmlns:a="http://schemas.openxmlformats.org/drawingml/2006/main" w="0">
+            <a:noFill/>
+          </a:ln>
+        </p:spPr>
+        <p:txBody>
+          <a:bodyPr xmlns:a="http://schemas.openxmlformats.org/drawingml/2006/main" anchor="ctr">
+            <a:normAutofit fontScale="100000"/>
+          </a:bodyPr>
+          <a:lstStyle xmlns:a="http://schemas.openxmlformats.org/drawingml/2006/main"/>
+          <a:p xmlns:a="http://schemas.openxmlformats.org/drawingml/2006/main">
+            <a:pPr>
+              <a:defRPr sz="1500" b="1">
+                <a:solidFill>
+                  <a:srgbClr val="FFFFFF"/>
+                </a:solidFill>
+                <a:latin typeface="Microsoft YaHei"/>
+                <a:ea typeface="Microsoft YaHei"/>
+                <a:cs typeface="Microsoft YaHei"/>
+              </a:defRPr>
+            </a:pPr>
+            <a:r>
+              <a:rPr sz="1500" b="1">
+                <a:solidFill>
+                  <a:srgbClr val="FFFFFF"/>
+                </a:solidFill>
+                <a:latin typeface="Microsoft YaHei"/>
+                <a:ea typeface="Microsoft YaHei"/>
+                <a:cs typeface="Microsoft YaHei"/>
+              </a:rPr>
+              <a:t>5</a:t>
+            </a:r>
+          </a:p>
+        </p:txBody>
+      </p:sp>
+      <p:sp>
+        <p:nvSpPr>
+          <p:cNvPr id="21" name="">
+            <a:extLst xmlns:a="http://schemas.openxmlformats.org/drawingml/2006/main">
+              <a:ext uri="{FF2B5EF4-FFF2-40B4-BE49-F238E27FC236}">
+                <a16:creationId xmlns:a16="http://schemas.microsoft.com/office/drawing/2014/main" id="{B722CE74-1F13-4211-8B40-D305E8E2A230}"/>
+              </a:ext>
+            </a:extLst>
+          </p:cNvPr>
+          <p:cNvSpPr>
+            <a:spLocks xmlns:a="http://schemas.openxmlformats.org/drawingml/2006/main" noGrp="1"/>
+          </p:cNvSpPr>
+          <p:nvPr/>
+        </p:nvSpPr>
+        <p:spPr>
+          <a:xfrm xmlns:a="http://schemas.openxmlformats.org/drawingml/2006/main">
+            <a:off x="6953250" y="5010150"/>
+            <a:ext cx="2238375" cy="333375"/>
+          </a:xfrm>
+          <a:prstGeom xmlns:a="http://schemas.openxmlformats.org/drawingml/2006/main" prst="rect">
+            <a:avLst/>
+          </a:prstGeom>
+          <a:noFill xmlns:a="http://schemas.openxmlformats.org/drawingml/2006/main"/>
+          <a:ln xmlns:a="http://schemas.openxmlformats.org/drawingml/2006/main" w="0">
+            <a:noFill/>
+          </a:ln>
+        </p:spPr>
+        <p:txBody>
+          <a:bodyPr xmlns:a="http://schemas.openxmlformats.org/drawingml/2006/main" anchor="ctr">
+            <a:normAutofit fontScale="100000"/>
+          </a:bodyPr>
+          <a:lstStyle xmlns:a="http://schemas.openxmlformats.org/drawingml/2006/main"/>
+          <a:p xmlns:a="http://schemas.openxmlformats.org/drawingml/2006/main">
+            <a:pPr>
+              <a:defRPr sz="1575" b="1">
+                <a:solidFill>
+                  <a:srgbClr val="193650"/>
+                </a:solidFill>
+                <a:latin typeface="Microsoft YaHei"/>
+                <a:ea typeface="Microsoft YaHei"/>
+                <a:cs typeface="Microsoft YaHei"/>
+              </a:defRPr>
+            </a:pPr>
+            <a:r>
+              <a:rPr sz="1575" b="1">
+                <a:solidFill>
+                  <a:srgbClr val="193650"/>
+                </a:solidFill>
+                <a:latin typeface="Microsoft YaHei"/>
+                <a:ea typeface="Microsoft YaHei"/>
+                <a:cs typeface="Microsoft YaHei"/>
+              </a:rPr>
+              <a:t>保存证据</a:t>
+            </a:r>
+          </a:p>
+        </p:txBody>
+      </p:sp>
+      <p:sp>
+        <p:nvSpPr>
+          <p:cNvPr id="22" name="">
+            <a:extLst xmlns:a="http://schemas.openxmlformats.org/drawingml/2006/main">
+              <a:ext uri="{FF2B5EF4-FFF2-40B4-BE49-F238E27FC236}">
+                <a16:creationId xmlns:a16="http://schemas.microsoft.com/office/drawing/2014/main" id="{E2A7A4B0-EB17-4B81-8F01-5268D0064E6C}"/>
+              </a:ext>
+            </a:extLst>
+          </p:cNvPr>
+          <p:cNvSpPr>
+            <a:spLocks xmlns:a="http://schemas.openxmlformats.org/drawingml/2006/main" noGrp="1"/>
+          </p:cNvSpPr>
+          <p:nvPr/>
+        </p:nvSpPr>
+        <p:spPr>
+          <a:xfrm xmlns:a="http://schemas.openxmlformats.org/drawingml/2006/main">
+            <a:off x="6953250" y="5343525"/>
+            <a:ext cx="4095750" cy="304800"/>
+          </a:xfrm>
+          <a:prstGeom xmlns:a="http://schemas.openxmlformats.org/drawingml/2006/main" prst="rect">
+            <a:avLst/>
+          </a:prstGeom>
+          <a:noFill xmlns:a="http://schemas.openxmlformats.org/drawingml/2006/main"/>
+          <a:ln xmlns:a="http://schemas.openxmlformats.org/drawingml/2006/main" w="0">
+            <a:noFill/>
+          </a:ln>
+        </p:spPr>
+        <p:txBody>
+          <a:bodyPr xmlns:a="http://schemas.openxmlformats.org/drawingml/2006/main" anchor="ctr">
+            <a:normAutofit fontScale="100000"/>
+          </a:bodyPr>
+          <a:lstStyle xmlns:a="http://schemas.openxmlformats.org/drawingml/2006/main"/>
+          <a:p xmlns:a="http://schemas.openxmlformats.org/drawingml/2006/main">
+            <a:pPr>
+              <a:defRPr sz="1200" b="0">
+                <a:solidFill>
+                  <a:srgbClr val="667784"/>
+                </a:solidFill>
+                <a:latin typeface="Microsoft YaHei"/>
+                <a:ea typeface="Microsoft YaHei"/>
+                <a:cs typeface="Microsoft YaHei"/>
+              </a:defRPr>
+            </a:pPr>
+            <a:r>
+              <a:rPr sz="1200" b="0">
+                <a:solidFill>
+                  <a:srgbClr val="667784"/>
+                </a:solidFill>
+                <a:latin typeface="Microsoft YaHei"/>
+                <a:ea typeface="Microsoft YaHei"/>
+                <a:cs typeface="Microsoft YaHei"/>
+              </a:rPr>
+              <a:t>JSONL、环境、摘要和 SHA-256</a:t>
+            </a:r>
+          </a:p>
+        </p:txBody>
+      </p:sp>
+      <p:sp>
+        <p:nvSpPr>
+          <p:cNvPr id="23" name="">
+            <a:extLst xmlns:a="http://schemas.openxmlformats.org/drawingml/2006/main">
+              <a:ext uri="{FF2B5EF4-FFF2-40B4-BE49-F238E27FC236}">
+                <a16:creationId xmlns:a16="http://schemas.microsoft.com/office/drawing/2014/main" id="{238DD1C2-15ED-49D0-A36F-DC18E5C07939}"/>
+              </a:ext>
+            </a:extLst>
+          </p:cNvPr>
+          <p:cNvSpPr>
+            <a:spLocks xmlns:a="http://schemas.openxmlformats.org/drawingml/2006/main" noGrp="1"/>
+          </p:cNvSpPr>
+          <p:nvPr/>
+        </p:nvSpPr>
+        <p:spPr>
+          <a:xfrm xmlns:a="http://schemas.openxmlformats.org/drawingml/2006/main">
+            <a:off x="685800" y="6477000"/>
+            <a:ext cx="6096000" cy="190500"/>
+          </a:xfrm>
+          <a:prstGeom xmlns:a="http://schemas.openxmlformats.org/drawingml/2006/main" prst="rect">
+            <a:avLst/>
+          </a:prstGeom>
+          <a:noFill xmlns:a="http://schemas.openxmlformats.org/drawingml/2006/main"/>
+          <a:ln xmlns:a="http://schemas.openxmlformats.org/drawingml/2006/main" w="0">
+            <a:noFill/>
+          </a:ln>
+        </p:spPr>
+        <p:txBody>
+          <a:bodyPr xmlns:a="http://schemas.openxmlformats.org/drawingml/2006/main" anchor="ctr">
+            <a:normAutofit fontScale="78788"/>
+          </a:bodyPr>
+          <a:lstStyle xmlns:a="http://schemas.openxmlformats.org/drawingml/2006/main"/>
+          <a:p xmlns:a="http://schemas.openxmlformats.org/drawingml/2006/main">
+            <a:pPr>
+              <a:defRPr sz="825" b="0">
+                <a:solidFill>
+                  <a:srgbClr val="667784"/>
+                </a:solidFill>
+                <a:latin typeface="Microsoft YaHei"/>
+                <a:ea typeface="Microsoft YaHei"/>
+                <a:cs typeface="Microsoft YaHei"/>
+              </a:defRPr>
+            </a:pPr>
+            <a:r>
+              <a:rPr sz="825" b="0">
+                <a:solidFill>
+                  <a:srgbClr val="667784"/>
+                </a:solidFill>
+                <a:latin typeface="Microsoft YaHei"/>
+                <a:ea typeface="Microsoft YaHei"/>
+                <a:cs typeface="Microsoft YaHei"/>
+              </a:rPr>
+              <a:t>module2-formal-0bd7e93-001  ·  source 0bd7e93  ·  analysis 65d3ea6</a:t>
+            </a:r>
+          </a:p>
+        </p:txBody>
+      </p:sp>
+    </p:spTree>
+    <p:extLst>
+      <p:ext uri="{BB962C8B-B14F-4D97-AF65-F5344CB8AC3E}">
+        <p14:creationId xmlns:p14="http://schemas.microsoft.com/office/powerpoint/2010/main" val="1674579611"/>
       </p:ext>
     </p:extLst>
   </p:cSld>

--- a/交付件/模块二AI测试演示.pptx
+++ b/交付件/模块二AI测试演示.pptx
@@ -2,25 +2,25 @@
 <file path=ppt/presentation.xml><?xml version="1.0" encoding="utf-8"?>
 <p:presentation xmlns:p="http://schemas.openxmlformats.org/presentationml/2006/main">
   <p:sldMasterIdLst>
-    <p:sldMasterId xmlns:r="http://schemas.openxmlformats.org/officeDocument/2006/relationships" id="2147483648" r:id="Re026282a86c74c01"/>
+    <p:sldMasterId xmlns:r="http://schemas.openxmlformats.org/officeDocument/2006/relationships" id="2147483648" r:id="R6da218f106d94c24"/>
   </p:sldMasterIdLst>
   <p:notesMasterIdLst>
-    <p:notesMasterId xmlns:r="http://schemas.openxmlformats.org/officeDocument/2006/relationships" r:id="Rf133c7e2c18748e7"/>
+    <p:notesMasterId xmlns:r="http://schemas.openxmlformats.org/officeDocument/2006/relationships" r:id="Reb1f62ad6b2f4d48"/>
   </p:notesMasterIdLst>
   <p:sldIdLst>
-    <p:sldId xmlns:r="http://schemas.openxmlformats.org/officeDocument/2006/relationships" id="256" r:id="R305fc52c8d154b9c"/>
-    <p:sldId xmlns:r="http://schemas.openxmlformats.org/officeDocument/2006/relationships" id="257" r:id="R0526d78b2d1344fb"/>
-    <p:sldId xmlns:r="http://schemas.openxmlformats.org/officeDocument/2006/relationships" id="258" r:id="R9565fa3159df4801"/>
-    <p:sldId xmlns:r="http://schemas.openxmlformats.org/officeDocument/2006/relationships" id="259" r:id="R815df74e15424e96"/>
-    <p:sldId xmlns:r="http://schemas.openxmlformats.org/officeDocument/2006/relationships" id="260" r:id="Reff5ec4c39a84d12"/>
-    <p:sldId xmlns:r="http://schemas.openxmlformats.org/officeDocument/2006/relationships" id="261" r:id="Rf06f66e3f4334350"/>
-    <p:sldId xmlns:r="http://schemas.openxmlformats.org/officeDocument/2006/relationships" id="262" r:id="Rce44fe79d7d04bb6"/>
-    <p:sldId xmlns:r="http://schemas.openxmlformats.org/officeDocument/2006/relationships" id="263" r:id="R66f8472fde224550"/>
-    <p:sldId xmlns:r="http://schemas.openxmlformats.org/officeDocument/2006/relationships" id="264" r:id="R5aea925492bc4dc2"/>
-    <p:sldId xmlns:r="http://schemas.openxmlformats.org/officeDocument/2006/relationships" id="265" r:id="R49c876e2aa0d4220"/>
-    <p:sldId xmlns:r="http://schemas.openxmlformats.org/officeDocument/2006/relationships" id="266" r:id="R1e64dd06c0ae4580"/>
-    <p:sldId xmlns:r="http://schemas.openxmlformats.org/officeDocument/2006/relationships" id="267" r:id="R3ff4fff38ba14648"/>
-    <p:sldId xmlns:r="http://schemas.openxmlformats.org/officeDocument/2006/relationships" id="268" r:id="R38df3a26946649de"/>
+    <p:sldId xmlns:r="http://schemas.openxmlformats.org/officeDocument/2006/relationships" id="256" r:id="Rca0200eeb4f84857"/>
+    <p:sldId xmlns:r="http://schemas.openxmlformats.org/officeDocument/2006/relationships" id="257" r:id="R1222e092734a4294"/>
+    <p:sldId xmlns:r="http://schemas.openxmlformats.org/officeDocument/2006/relationships" id="258" r:id="R0739cfd5d8d7432b"/>
+    <p:sldId xmlns:r="http://schemas.openxmlformats.org/officeDocument/2006/relationships" id="259" r:id="R72ea2d94b75b4b0f"/>
+    <p:sldId xmlns:r="http://schemas.openxmlformats.org/officeDocument/2006/relationships" id="260" r:id="R9f13fe00e542451d"/>
+    <p:sldId xmlns:r="http://schemas.openxmlformats.org/officeDocument/2006/relationships" id="261" r:id="R5db3ee4017774854"/>
+    <p:sldId xmlns:r="http://schemas.openxmlformats.org/officeDocument/2006/relationships" id="262" r:id="Rfe25f0204adc4fc4"/>
+    <p:sldId xmlns:r="http://schemas.openxmlformats.org/officeDocument/2006/relationships" id="263" r:id="R5b7c574a2f5f4516"/>
+    <p:sldId xmlns:r="http://schemas.openxmlformats.org/officeDocument/2006/relationships" id="264" r:id="Rd040dea5e8dc40c9"/>
+    <p:sldId xmlns:r="http://schemas.openxmlformats.org/officeDocument/2006/relationships" id="265" r:id="R7bb538d5bd044650"/>
+    <p:sldId xmlns:r="http://schemas.openxmlformats.org/officeDocument/2006/relationships" id="266" r:id="R459dae33de104c8b"/>
+    <p:sldId xmlns:r="http://schemas.openxmlformats.org/officeDocument/2006/relationships" id="267" r:id="R2c6af270ea6648f8"/>
+    <p:sldId xmlns:r="http://schemas.openxmlformats.org/officeDocument/2006/relationships" id="268" r:id="R4f7001d4a6634580"/>
   </p:sldIdLst>
   <p:sldSz cx="12192000" cy="6858000"/>
   <p:notesSz cx="6858000" cy="9144000"/>
@@ -1362,7 +1362,7 @@
   </p:cSld>
   <p:clrMap bg1="lt1" tx1="dk1" bg2="lt2" tx2="dk2" accent1="accent1" accent2="accent2" accent3="accent3" accent4="accent4" accent5="accent5" accent6="accent6" hlink="hlink" folHlink="folHlink"/>
   <p:sldLayoutIdLst>
-    <p:sldLayoutId xmlns:r="http://schemas.openxmlformats.org/officeDocument/2006/relationships" id="2147483649" r:id="Rbdf2f994bf9d43ec"/>
+    <p:sldLayoutId xmlns:r="http://schemas.openxmlformats.org/officeDocument/2006/relationships" id="2147483649" r:id="R20a37059d46a4292"/>
   </p:sldLayoutIdLst>
   <p:txStyles>
     <p:titleStyle>
@@ -3268,6 +3268,7 @@
           <a:lstStyle xmlns:a="http://schemas.openxmlformats.org/drawingml/2006/main"/>
           <a:p xmlns:a="http://schemas.openxmlformats.org/drawingml/2006/main">
             <a:pPr>
+              <a:buNone/>
               <a:defRPr sz="1125" b="1">
                 <a:solidFill>
                   <a:srgbClr val="2FA6A4"/>
@@ -3325,6 +3326,7 @@
           <a:lstStyle xmlns:a="http://schemas.openxmlformats.org/drawingml/2006/main"/>
           <a:p xmlns:a="http://schemas.openxmlformats.org/drawingml/2006/main">
             <a:pPr>
+              <a:buNone/>
               <a:defRPr sz="2700" b="1">
                 <a:solidFill>
                   <a:srgbClr val="193650"/>
@@ -3412,6 +3414,7 @@
           <a:lstStyle xmlns:a="http://schemas.openxmlformats.org/drawingml/2006/main"/>
           <a:p xmlns:a="http://schemas.openxmlformats.org/drawingml/2006/main">
             <a:pPr>
+              <a:buNone/>
               <a:defRPr sz="1350" b="1">
                 <a:solidFill>
                   <a:srgbClr val="2FA6A4"/>
@@ -3469,6 +3472,7 @@
           <a:lstStyle xmlns:a="http://schemas.openxmlformats.org/drawingml/2006/main"/>
           <a:p xmlns:a="http://schemas.openxmlformats.org/drawingml/2006/main">
             <a:pPr>
+              <a:buNone/>
               <a:defRPr sz="3600" b="1">
                 <a:solidFill>
                   <a:srgbClr val="193650"/>
@@ -3526,6 +3530,7 @@
           <a:lstStyle xmlns:a="http://schemas.openxmlformats.org/drawingml/2006/main"/>
           <a:p xmlns:a="http://schemas.openxmlformats.org/drawingml/2006/main">
             <a:pPr>
+              <a:buNone/>
               <a:defRPr sz="1275" b="0">
                 <a:solidFill>
                   <a:srgbClr val="667784"/>
@@ -3583,6 +3588,7 @@
           <a:lstStyle xmlns:a="http://schemas.openxmlformats.org/drawingml/2006/main"/>
           <a:p xmlns:a="http://schemas.openxmlformats.org/drawingml/2006/main">
             <a:pPr>
+              <a:buNone/>
               <a:defRPr sz="3150" b="1">
                 <a:solidFill>
                   <a:srgbClr val="31835E"/>
@@ -3640,6 +3646,7 @@
           <a:lstStyle xmlns:a="http://schemas.openxmlformats.org/drawingml/2006/main"/>
           <a:p xmlns:a="http://schemas.openxmlformats.org/drawingml/2006/main">
             <a:pPr>
+              <a:buNone/>
               <a:defRPr sz="1275" b="0">
                 <a:solidFill>
                   <a:srgbClr val="667784"/>
@@ -3701,6 +3708,7 @@
           <a:lstStyle xmlns:a="http://schemas.openxmlformats.org/drawingml/2006/main"/>
           <a:p xmlns:a="http://schemas.openxmlformats.org/drawingml/2006/main">
             <a:pPr>
+              <a:buNone/>
               <a:defRPr sz="1350" b="0">
                 <a:solidFill>
                   <a:srgbClr val="BF4B48"/>
@@ -3788,6 +3796,7 @@
           <a:lstStyle xmlns:a="http://schemas.openxmlformats.org/drawingml/2006/main"/>
           <a:p xmlns:a="http://schemas.openxmlformats.org/drawingml/2006/main">
             <a:pPr>
+              <a:buNone/>
               <a:defRPr sz="1650" b="1">
                 <a:solidFill>
                   <a:srgbClr val="287896"/>
@@ -3845,6 +3854,7 @@
           <a:lstStyle xmlns:a="http://schemas.openxmlformats.org/drawingml/2006/main"/>
           <a:p xmlns:a="http://schemas.openxmlformats.org/drawingml/2006/main">
             <a:pPr>
+              <a:buNone/>
               <a:defRPr sz="1350" b="0">
                 <a:solidFill>
                   <a:srgbClr val="193650"/>
@@ -3902,6 +3912,7 @@
           <a:lstStyle xmlns:a="http://schemas.openxmlformats.org/drawingml/2006/main"/>
           <a:p xmlns:a="http://schemas.openxmlformats.org/drawingml/2006/main">
             <a:pPr>
+              <a:buNone/>
               <a:defRPr sz="1800" b="1">
                 <a:solidFill>
                   <a:srgbClr val="31835E"/>
@@ -3989,6 +4000,7 @@
           <a:lstStyle xmlns:a="http://schemas.openxmlformats.org/drawingml/2006/main"/>
           <a:p xmlns:a="http://schemas.openxmlformats.org/drawingml/2006/main">
             <a:pPr>
+              <a:buNone/>
               <a:defRPr sz="1650" b="1">
                 <a:solidFill>
                   <a:srgbClr val="287896"/>
@@ -4046,6 +4058,7 @@
           <a:lstStyle xmlns:a="http://schemas.openxmlformats.org/drawingml/2006/main"/>
           <a:p xmlns:a="http://schemas.openxmlformats.org/drawingml/2006/main">
             <a:pPr>
+              <a:buNone/>
               <a:defRPr sz="1350" b="0">
                 <a:solidFill>
                   <a:srgbClr val="193650"/>
@@ -4103,6 +4116,7 @@
           <a:lstStyle xmlns:a="http://schemas.openxmlformats.org/drawingml/2006/main"/>
           <a:p xmlns:a="http://schemas.openxmlformats.org/drawingml/2006/main">
             <a:pPr>
+              <a:buNone/>
               <a:defRPr sz="1800" b="1">
                 <a:solidFill>
                   <a:srgbClr val="BF4B48"/>
@@ -4190,6 +4204,7 @@
           <a:lstStyle xmlns:a="http://schemas.openxmlformats.org/drawingml/2006/main"/>
           <a:p xmlns:a="http://schemas.openxmlformats.org/drawingml/2006/main">
             <a:pPr>
+              <a:buNone/>
               <a:defRPr sz="1650" b="1">
                 <a:solidFill>
                   <a:srgbClr val="287896"/>
@@ -4247,6 +4262,7 @@
           <a:lstStyle xmlns:a="http://schemas.openxmlformats.org/drawingml/2006/main"/>
           <a:p xmlns:a="http://schemas.openxmlformats.org/drawingml/2006/main">
             <a:pPr>
+              <a:buNone/>
               <a:defRPr sz="1350" b="0">
                 <a:solidFill>
                   <a:srgbClr val="193650"/>
@@ -4304,6 +4320,7 @@
           <a:lstStyle xmlns:a="http://schemas.openxmlformats.org/drawingml/2006/main"/>
           <a:p xmlns:a="http://schemas.openxmlformats.org/drawingml/2006/main">
             <a:pPr>
+              <a:buNone/>
               <a:defRPr sz="1800" b="1">
                 <a:solidFill>
                   <a:srgbClr val="31835E"/>
@@ -4391,6 +4408,7 @@
           <a:lstStyle xmlns:a="http://schemas.openxmlformats.org/drawingml/2006/main"/>
           <a:p xmlns:a="http://schemas.openxmlformats.org/drawingml/2006/main">
             <a:pPr>
+              <a:buNone/>
               <a:defRPr sz="1650" b="1">
                 <a:solidFill>
                   <a:srgbClr val="287896"/>
@@ -4448,6 +4466,7 @@
           <a:lstStyle xmlns:a="http://schemas.openxmlformats.org/drawingml/2006/main"/>
           <a:p xmlns:a="http://schemas.openxmlformats.org/drawingml/2006/main">
             <a:pPr>
+              <a:buNone/>
               <a:defRPr sz="1350" b="0">
                 <a:solidFill>
                   <a:srgbClr val="193650"/>
@@ -4505,6 +4524,7 @@
           <a:lstStyle xmlns:a="http://schemas.openxmlformats.org/drawingml/2006/main"/>
           <a:p xmlns:a="http://schemas.openxmlformats.org/drawingml/2006/main">
             <a:pPr>
+              <a:buNone/>
               <a:defRPr sz="1800" b="1">
                 <a:solidFill>
                   <a:srgbClr val="31835E"/>
@@ -4592,6 +4612,7 @@
           <a:lstStyle xmlns:a="http://schemas.openxmlformats.org/drawingml/2006/main"/>
           <a:p xmlns:a="http://schemas.openxmlformats.org/drawingml/2006/main">
             <a:pPr>
+              <a:buNone/>
               <a:defRPr sz="1650" b="1">
                 <a:solidFill>
                   <a:srgbClr val="287896"/>
@@ -4649,6 +4670,7 @@
           <a:lstStyle xmlns:a="http://schemas.openxmlformats.org/drawingml/2006/main"/>
           <a:p xmlns:a="http://schemas.openxmlformats.org/drawingml/2006/main">
             <a:pPr>
+              <a:buNone/>
               <a:defRPr sz="1350" b="0">
                 <a:solidFill>
                   <a:srgbClr val="193650"/>
@@ -4706,6 +4728,7 @@
           <a:lstStyle xmlns:a="http://schemas.openxmlformats.org/drawingml/2006/main"/>
           <a:p xmlns:a="http://schemas.openxmlformats.org/drawingml/2006/main">
             <a:pPr>
+              <a:buNone/>
               <a:defRPr sz="1800" b="1">
                 <a:solidFill>
                   <a:srgbClr val="BF4B48"/>
@@ -4763,6 +4786,7 @@
           <a:lstStyle xmlns:a="http://schemas.openxmlformats.org/drawingml/2006/main"/>
           <a:p xmlns:a="http://schemas.openxmlformats.org/drawingml/2006/main">
             <a:pPr>
+              <a:buNone/>
               <a:defRPr sz="1350" b="0">
                 <a:solidFill>
                   <a:srgbClr val="D28A17"/>
@@ -4820,6 +4844,7 @@
           <a:lstStyle xmlns:a="http://schemas.openxmlformats.org/drawingml/2006/main"/>
           <a:p xmlns:a="http://schemas.openxmlformats.org/drawingml/2006/main">
             <a:pPr>
+              <a:buNone/>
               <a:defRPr sz="825" b="0">
                 <a:solidFill>
                   <a:srgbClr val="667784"/>
@@ -4906,6 +4931,7 @@
           <a:lstStyle xmlns:a="http://schemas.openxmlformats.org/drawingml/2006/main"/>
           <a:p xmlns:a="http://schemas.openxmlformats.org/drawingml/2006/main">
             <a:pPr>
+              <a:buNone/>
               <a:defRPr sz="1125" b="1">
                 <a:solidFill>
                   <a:srgbClr val="2FA6A4"/>
@@ -4963,6 +4989,7 @@
           <a:lstStyle xmlns:a="http://schemas.openxmlformats.org/drawingml/2006/main"/>
           <a:p xmlns:a="http://schemas.openxmlformats.org/drawingml/2006/main">
             <a:pPr>
+              <a:buNone/>
               <a:defRPr sz="2700" b="1">
                 <a:solidFill>
                   <a:srgbClr val="193650"/>
@@ -4981,7 +5008,7 @@
                 <a:ea typeface="Microsoft YaHei"/>
                 <a:cs typeface="Microsoft YaHei"/>
               </a:rPr>
-              <a:t>lcx 缺陷闭环：1 项已修复，2 项待处理</a:t>
+              <a:t>lcx 缺陷闭环：1 项已修复</a:t>
             </a:r>
           </a:p>
         </p:txBody>
@@ -5050,6 +5077,7 @@
           <a:lstStyle xmlns:a="http://schemas.openxmlformats.org/drawingml/2006/main"/>
           <a:p xmlns:a="http://schemas.openxmlformats.org/drawingml/2006/main">
             <a:pPr>
+              <a:buNone/>
               <a:defRPr sz="1350" b="1">
                 <a:solidFill>
                   <a:srgbClr val="2FA6A4"/>
@@ -5107,6 +5135,7 @@
           <a:lstStyle xmlns:a="http://schemas.openxmlformats.org/drawingml/2006/main"/>
           <a:p xmlns:a="http://schemas.openxmlformats.org/drawingml/2006/main">
             <a:pPr>
+              <a:buNone/>
               <a:defRPr sz="1275" b="1">
                 <a:solidFill>
                   <a:srgbClr val="2FA6A4"/>
@@ -5164,6 +5193,7 @@
           <a:lstStyle xmlns:a="http://schemas.openxmlformats.org/drawingml/2006/main"/>
           <a:p xmlns:a="http://schemas.openxmlformats.org/drawingml/2006/main">
             <a:pPr>
+              <a:buNone/>
               <a:defRPr sz="1800" b="1">
                 <a:solidFill>
                   <a:srgbClr val="193650"/>
@@ -5221,6 +5251,7 @@
           <a:lstStyle xmlns:a="http://schemas.openxmlformats.org/drawingml/2006/main"/>
           <a:p xmlns:a="http://schemas.openxmlformats.org/drawingml/2006/main">
             <a:pPr>
+              <a:buNone/>
               <a:defRPr sz="1350" b="0">
                 <a:solidFill>
                   <a:srgbClr val="667784"/>
@@ -5280,6 +5311,7 @@
           <a:lstStyle xmlns:a="http://schemas.openxmlformats.org/drawingml/2006/main"/>
           <a:p xmlns:a="http://schemas.openxmlformats.org/drawingml/2006/main">
             <a:pPr>
+              <a:buNone/>
               <a:defRPr sz="1575" b="1">
                 <a:solidFill>
                   <a:srgbClr val="31835E"/>
@@ -5367,6 +5399,7 @@
           <a:lstStyle xmlns:a="http://schemas.openxmlformats.org/drawingml/2006/main"/>
           <a:p xmlns:a="http://schemas.openxmlformats.org/drawingml/2006/main">
             <a:pPr>
+              <a:buNone/>
               <a:defRPr sz="1275" b="1">
                 <a:solidFill>
                   <a:srgbClr val="2FA6A4"/>
@@ -5385,7 +5418,7 @@
                 <a:ea typeface="Microsoft YaHei"/>
                 <a:cs typeface="Microsoft YaHei"/>
               </a:rPr>
-              <a:t>DEF-LCX-AI-001</a:t>
+              <a:t>测试发现一</a:t>
             </a:r>
           </a:p>
         </p:txBody>
@@ -5424,6 +5457,7 @@
           <a:lstStyle xmlns:a="http://schemas.openxmlformats.org/drawingml/2006/main"/>
           <a:p xmlns:a="http://schemas.openxmlformats.org/drawingml/2006/main">
             <a:pPr>
+              <a:buNone/>
               <a:defRPr sz="1800" b="1">
                 <a:solidFill>
                   <a:srgbClr val="193650"/>
@@ -5442,7 +5476,7 @@
                 <a:ea typeface="Microsoft YaHei"/>
                 <a:cs typeface="Microsoft YaHei"/>
               </a:rPr>
-              <a:t>低对比度三角形计数错误</a:t>
+              <a:t>低对比度计数仍失败</a:t>
             </a:r>
           </a:p>
         </p:txBody>
@@ -5481,6 +5515,7 @@
           <a:lstStyle xmlns:a="http://schemas.openxmlformats.org/drawingml/2006/main"/>
           <a:p xmlns:a="http://schemas.openxmlformats.org/drawingml/2006/main">
             <a:pPr>
+              <a:buNone/>
               <a:defRPr sz="1350" b="0">
                 <a:solidFill>
                   <a:srgbClr val="667784"/>
@@ -5499,7 +5534,7 @@
                 <a:ea typeface="Microsoft YaHei"/>
                 <a:cs typeface="Microsoft YaHei"/>
               </a:rPr>
-              <a:t>Baseline 与 MMSep 均为 0/6，稳定输出 TWO</a:t>
+              <a:t>复验仍失败，完成修复后再登记为已关闭缺陷</a:t>
             </a:r>
           </a:p>
         </p:txBody>
@@ -5540,6 +5575,7 @@
           <a:lstStyle xmlns:a="http://schemas.openxmlformats.org/drawingml/2006/main"/>
           <a:p xmlns:a="http://schemas.openxmlformats.org/drawingml/2006/main">
             <a:pPr>
+              <a:buNone/>
               <a:defRPr sz="1575" b="1">
                 <a:solidFill>
                   <a:srgbClr val="BF4B48"/>
@@ -5558,7 +5594,7 @@
                 <a:ea typeface="Microsoft YaHei"/>
                 <a:cs typeface="Microsoft YaHei"/>
               </a:rPr>
-              <a:t>未修复</a:t>
+              <a:t>测试发现</a:t>
             </a:r>
           </a:p>
         </p:txBody>
@@ -5627,6 +5663,7 @@
           <a:lstStyle xmlns:a="http://schemas.openxmlformats.org/drawingml/2006/main"/>
           <a:p xmlns:a="http://schemas.openxmlformats.org/drawingml/2006/main">
             <a:pPr>
+              <a:buNone/>
               <a:defRPr sz="1275" b="1">
                 <a:solidFill>
                   <a:srgbClr val="2FA6A4"/>
@@ -5645,7 +5682,7 @@
                 <a:ea typeface="Microsoft YaHei"/>
                 <a:cs typeface="Microsoft YaHei"/>
               </a:rPr>
-              <a:t>DEF-LCX-PERF-001</a:t>
+              <a:t>测试发现二</a:t>
             </a:r>
           </a:p>
         </p:txBody>
@@ -5684,6 +5721,7 @@
           <a:lstStyle xmlns:a="http://schemas.openxmlformats.org/drawingml/2006/main"/>
           <a:p xmlns:a="http://schemas.openxmlformats.org/drawingml/2006/main">
             <a:pPr>
+              <a:buNone/>
               <a:defRPr sz="1800" b="1">
                 <a:solidFill>
                   <a:srgbClr val="193650"/>
@@ -5702,7 +5740,7 @@
                 <a:ea typeface="Microsoft YaHei"/>
                 <a:cs typeface="Microsoft YaHei"/>
               </a:rPr>
-              <a:t>MMSep 解码吞吐未达目标</a:t>
+              <a:t>解码吞吐未达目标</a:t>
             </a:r>
           </a:p>
         </p:txBody>
@@ -5741,6 +5779,7 @@
           <a:lstStyle xmlns:a="http://schemas.openxmlformats.org/drawingml/2006/main"/>
           <a:p xmlns:a="http://schemas.openxmlformats.org/drawingml/2006/main">
             <a:pPr>
+              <a:buNone/>
               <a:defRPr sz="1350" b="0">
                 <a:solidFill>
                   <a:srgbClr val="667784"/>
@@ -5759,7 +5798,7 @@
                 <a:ea typeface="Microsoft YaHei"/>
                 <a:cs typeface="Microsoft YaHei"/>
               </a:rPr>
-              <a:t>KV 减少约 72%，但倍率为 0.928× 与 0.948×</a:t>
+              <a:t>KV 减少约 72%，但当前原型未达到加速目标</a:t>
             </a:r>
           </a:p>
         </p:txBody>
@@ -5800,6 +5839,7 @@
           <a:lstStyle xmlns:a="http://schemas.openxmlformats.org/drawingml/2006/main"/>
           <a:p xmlns:a="http://schemas.openxmlformats.org/drawingml/2006/main">
             <a:pPr>
+              <a:buNone/>
               <a:defRPr sz="1575" b="1">
                 <a:solidFill>
                   <a:srgbClr val="BF4B48"/>
@@ -5818,7 +5858,7 @@
                 <a:ea typeface="Microsoft YaHei"/>
                 <a:cs typeface="Microsoft YaHei"/>
               </a:rPr>
-              <a:t>未修复</a:t>
+              <a:t>测试发现</a:t>
             </a:r>
           </a:p>
         </p:txBody>
@@ -5887,6 +5927,7 @@
           <a:lstStyle xmlns:a="http://schemas.openxmlformats.org/drawingml/2006/main"/>
           <a:p xmlns:a="http://schemas.openxmlformats.org/drawingml/2006/main">
             <a:pPr>
+              <a:buNone/>
               <a:defRPr sz="1350" b="0">
                 <a:solidFill>
                   <a:srgbClr val="287896"/>
@@ -5905,7 +5946,7 @@
                 <a:ea typeface="Microsoft YaHei"/>
                 <a:cs typeface="Microsoft YaHei"/>
               </a:rPr>
-              <a:t>完整字段、复现步骤、原始证据与修复验证见《模块二AI测试缺陷清单.docx》。</a:t>
+              <a:t>已修复缺陷见《lcx_模块二缺陷报告.docx》，其余问题保留为测试发现。</a:t>
             </a:r>
           </a:p>
         </p:txBody>
@@ -5944,6 +5985,7 @@
           <a:lstStyle xmlns:a="http://schemas.openxmlformats.org/drawingml/2006/main"/>
           <a:p xmlns:a="http://schemas.openxmlformats.org/drawingml/2006/main">
             <a:pPr>
+              <a:buNone/>
               <a:defRPr sz="825" b="0">
                 <a:solidFill>
                   <a:srgbClr val="667784"/>
@@ -6030,6 +6072,7 @@
           <a:lstStyle xmlns:a="http://schemas.openxmlformats.org/drawingml/2006/main"/>
           <a:p xmlns:a="http://schemas.openxmlformats.org/drawingml/2006/main">
             <a:pPr>
+              <a:buNone/>
               <a:defRPr sz="1125" b="1">
                 <a:solidFill>
                   <a:srgbClr val="2FA6A4"/>
@@ -6087,6 +6130,7 @@
           <a:lstStyle xmlns:a="http://schemas.openxmlformats.org/drawingml/2006/main"/>
           <a:p xmlns:a="http://schemas.openxmlformats.org/drawingml/2006/main">
             <a:pPr>
+              <a:buNone/>
               <a:defRPr sz="2700" b="1">
                 <a:solidFill>
                   <a:srgbClr val="193650"/>
@@ -6174,6 +6218,7 @@
           <a:lstStyle xmlns:a="http://schemas.openxmlformats.org/drawingml/2006/main"/>
           <a:p xmlns:a="http://schemas.openxmlformats.org/drawingml/2006/main">
             <a:pPr>
+              <a:buNone/>
               <a:defRPr sz="1350" b="1">
                 <a:solidFill>
                   <a:srgbClr val="2FA6A4"/>
@@ -6233,6 +6278,7 @@
           <a:lstStyle xmlns:a="http://schemas.openxmlformats.org/drawingml/2006/main"/>
           <a:p xmlns:a="http://schemas.openxmlformats.org/drawingml/2006/main">
             <a:pPr>
+              <a:buNone/>
               <a:defRPr sz="1650" b="1">
                 <a:solidFill>
                   <a:srgbClr val="FFFFFF"/>
@@ -6290,6 +6336,7 @@
           <a:lstStyle xmlns:a="http://schemas.openxmlformats.org/drawingml/2006/main"/>
           <a:p xmlns:a="http://schemas.openxmlformats.org/drawingml/2006/main">
             <a:pPr>
+              <a:buNone/>
               <a:defRPr sz="1725" b="1">
                 <a:solidFill>
                   <a:srgbClr val="193650"/>
@@ -6347,6 +6394,7 @@
           <a:lstStyle xmlns:a="http://schemas.openxmlformats.org/drawingml/2006/main"/>
           <a:p xmlns:a="http://schemas.openxmlformats.org/drawingml/2006/main">
             <a:pPr>
+              <a:buNone/>
               <a:defRPr sz="1350" b="0">
                 <a:solidFill>
                   <a:srgbClr val="667784"/>
@@ -6406,6 +6454,7 @@
           <a:lstStyle xmlns:a="http://schemas.openxmlformats.org/drawingml/2006/main"/>
           <a:p xmlns:a="http://schemas.openxmlformats.org/drawingml/2006/main">
             <a:pPr>
+              <a:buNone/>
               <a:defRPr sz="1650" b="1">
                 <a:solidFill>
                   <a:srgbClr val="FFFFFF"/>
@@ -6463,6 +6512,7 @@
           <a:lstStyle xmlns:a="http://schemas.openxmlformats.org/drawingml/2006/main"/>
           <a:p xmlns:a="http://schemas.openxmlformats.org/drawingml/2006/main">
             <a:pPr>
+              <a:buNone/>
               <a:defRPr sz="1725" b="1">
                 <a:solidFill>
                   <a:srgbClr val="193650"/>
@@ -6520,6 +6570,7 @@
           <a:lstStyle xmlns:a="http://schemas.openxmlformats.org/drawingml/2006/main"/>
           <a:p xmlns:a="http://schemas.openxmlformats.org/drawingml/2006/main">
             <a:pPr>
+              <a:buNone/>
               <a:defRPr sz="1350" b="0">
                 <a:solidFill>
                   <a:srgbClr val="667784"/>
@@ -6579,6 +6630,7 @@
           <a:lstStyle xmlns:a="http://schemas.openxmlformats.org/drawingml/2006/main"/>
           <a:p xmlns:a="http://schemas.openxmlformats.org/drawingml/2006/main">
             <a:pPr>
+              <a:buNone/>
               <a:defRPr sz="1650" b="1">
                 <a:solidFill>
                   <a:srgbClr val="FFFFFF"/>
@@ -6636,6 +6688,7 @@
           <a:lstStyle xmlns:a="http://schemas.openxmlformats.org/drawingml/2006/main"/>
           <a:p xmlns:a="http://schemas.openxmlformats.org/drawingml/2006/main">
             <a:pPr>
+              <a:buNone/>
               <a:defRPr sz="1725" b="1">
                 <a:solidFill>
                   <a:srgbClr val="193650"/>
@@ -6693,6 +6746,7 @@
           <a:lstStyle xmlns:a="http://schemas.openxmlformats.org/drawingml/2006/main"/>
           <a:p xmlns:a="http://schemas.openxmlformats.org/drawingml/2006/main">
             <a:pPr>
+              <a:buNone/>
               <a:defRPr sz="1350" b="0">
                 <a:solidFill>
                   <a:srgbClr val="667784"/>
@@ -6752,6 +6806,7 @@
           <a:lstStyle xmlns:a="http://schemas.openxmlformats.org/drawingml/2006/main"/>
           <a:p xmlns:a="http://schemas.openxmlformats.org/drawingml/2006/main">
             <a:pPr>
+              <a:buNone/>
               <a:defRPr sz="1650" b="1">
                 <a:solidFill>
                   <a:srgbClr val="FFFFFF"/>
@@ -6809,6 +6864,7 @@
           <a:lstStyle xmlns:a="http://schemas.openxmlformats.org/drawingml/2006/main"/>
           <a:p xmlns:a="http://schemas.openxmlformats.org/drawingml/2006/main">
             <a:pPr>
+              <a:buNone/>
               <a:defRPr sz="1725" b="1">
                 <a:solidFill>
                   <a:srgbClr val="193650"/>
@@ -6866,6 +6922,7 @@
           <a:lstStyle xmlns:a="http://schemas.openxmlformats.org/drawingml/2006/main"/>
           <a:p xmlns:a="http://schemas.openxmlformats.org/drawingml/2006/main">
             <a:pPr>
+              <a:buNone/>
               <a:defRPr sz="1350" b="0">
                 <a:solidFill>
                   <a:srgbClr val="667784"/>
@@ -6927,6 +6984,7 @@
           <a:lstStyle xmlns:a="http://schemas.openxmlformats.org/drawingml/2006/main"/>
           <a:p xmlns:a="http://schemas.openxmlformats.org/drawingml/2006/main">
             <a:pPr>
+              <a:buNone/>
               <a:defRPr sz="1500" b="1">
                 <a:solidFill>
                   <a:srgbClr val="D28A17"/>
@@ -6984,6 +7042,7 @@
           <a:lstStyle xmlns:a="http://schemas.openxmlformats.org/drawingml/2006/main"/>
           <a:p xmlns:a="http://schemas.openxmlformats.org/drawingml/2006/main">
             <a:pPr>
+              <a:buNone/>
               <a:defRPr sz="825" b="0">
                 <a:solidFill>
                   <a:srgbClr val="667784"/>
@@ -7070,6 +7129,7 @@
           <a:lstStyle xmlns:a="http://schemas.openxmlformats.org/drawingml/2006/main"/>
           <a:p xmlns:a="http://schemas.openxmlformats.org/drawingml/2006/main">
             <a:pPr>
+              <a:buNone/>
               <a:defRPr sz="1125" b="1">
                 <a:solidFill>
                   <a:srgbClr val="83E0DB"/>
@@ -7127,6 +7187,7 @@
           <a:lstStyle xmlns:a="http://schemas.openxmlformats.org/drawingml/2006/main"/>
           <a:p xmlns:a="http://schemas.openxmlformats.org/drawingml/2006/main">
             <a:pPr>
+              <a:buNone/>
               <a:defRPr sz="3150" b="1">
                 <a:solidFill>
                   <a:srgbClr val="FFFFFF"/>
@@ -7150,6 +7211,7 @@
           </a:p>
           <a:p xmlns:a="http://schemas.openxmlformats.org/drawingml/2006/main">
             <a:pPr>
+              <a:buNone/>
               <a:defRPr sz="3150" b="1">
                 <a:solidFill>
                   <a:srgbClr val="FFFFFF"/>
@@ -7237,6 +7299,7 @@
           <a:lstStyle xmlns:a="http://schemas.openxmlformats.org/drawingml/2006/main"/>
           <a:p xmlns:a="http://schemas.openxmlformats.org/drawingml/2006/main">
             <a:pPr>
+              <a:buNone/>
               <a:defRPr sz="2700" b="1">
                 <a:solidFill>
                   <a:srgbClr val="FFFFFF"/>
@@ -7294,6 +7357,7 @@
           <a:lstStyle xmlns:a="http://schemas.openxmlformats.org/drawingml/2006/main"/>
           <a:p xmlns:a="http://schemas.openxmlformats.org/drawingml/2006/main">
             <a:pPr>
+              <a:buNone/>
               <a:defRPr sz="1200" b="0">
                 <a:solidFill>
                   <a:srgbClr val="B8CAD7"/>
@@ -7351,6 +7415,7 @@
           <a:lstStyle xmlns:a="http://schemas.openxmlformats.org/drawingml/2006/main"/>
           <a:p xmlns:a="http://schemas.openxmlformats.org/drawingml/2006/main">
             <a:pPr>
+              <a:buNone/>
               <a:defRPr sz="2700" b="1">
                 <a:solidFill>
                   <a:srgbClr val="FFFFFF"/>
@@ -7408,6 +7473,7 @@
           <a:lstStyle xmlns:a="http://schemas.openxmlformats.org/drawingml/2006/main"/>
           <a:p xmlns:a="http://schemas.openxmlformats.org/drawingml/2006/main">
             <a:pPr>
+              <a:buNone/>
               <a:defRPr sz="1200" b="0">
                 <a:solidFill>
                   <a:srgbClr val="B8CAD7"/>
@@ -7465,6 +7531,7 @@
           <a:lstStyle xmlns:a="http://schemas.openxmlformats.org/drawingml/2006/main"/>
           <a:p xmlns:a="http://schemas.openxmlformats.org/drawingml/2006/main">
             <a:pPr>
+              <a:buNone/>
               <a:defRPr sz="2700" b="1">
                 <a:solidFill>
                   <a:srgbClr val="FFFFFF"/>
@@ -7522,6 +7589,7 @@
           <a:lstStyle xmlns:a="http://schemas.openxmlformats.org/drawingml/2006/main"/>
           <a:p xmlns:a="http://schemas.openxmlformats.org/drawingml/2006/main">
             <a:pPr>
+              <a:buNone/>
               <a:defRPr sz="1200" b="0">
                 <a:solidFill>
                   <a:srgbClr val="B8CAD7"/>
@@ -7579,6 +7647,7 @@
           <a:lstStyle xmlns:a="http://schemas.openxmlformats.org/drawingml/2006/main"/>
           <a:p xmlns:a="http://schemas.openxmlformats.org/drawingml/2006/main">
             <a:pPr>
+              <a:buNone/>
               <a:defRPr sz="2700" b="1">
                 <a:solidFill>
                   <a:srgbClr val="FF8A84"/>
@@ -7636,6 +7705,7 @@
           <a:lstStyle xmlns:a="http://schemas.openxmlformats.org/drawingml/2006/main"/>
           <a:p xmlns:a="http://schemas.openxmlformats.org/drawingml/2006/main">
             <a:pPr>
+              <a:buNone/>
               <a:defRPr sz="1200" b="0">
                 <a:solidFill>
                   <a:srgbClr val="B8CAD7"/>
@@ -7693,6 +7763,7 @@
           <a:lstStyle xmlns:a="http://schemas.openxmlformats.org/drawingml/2006/main"/>
           <a:p xmlns:a="http://schemas.openxmlformats.org/drawingml/2006/main">
             <a:pPr>
+              <a:buNone/>
               <a:defRPr sz="1875" b="1">
                 <a:solidFill>
                   <a:srgbClr val="83E0DB"/>
@@ -7750,6 +7821,7 @@
           <a:lstStyle xmlns:a="http://schemas.openxmlformats.org/drawingml/2006/main"/>
           <a:p xmlns:a="http://schemas.openxmlformats.org/drawingml/2006/main">
             <a:pPr>
+              <a:buNone/>
               <a:defRPr sz="1500" b="0">
                 <a:solidFill>
                   <a:srgbClr val="FFFFFF"/>
@@ -7807,6 +7879,7 @@
           <a:lstStyle xmlns:a="http://schemas.openxmlformats.org/drawingml/2006/main"/>
           <a:p xmlns:a="http://schemas.openxmlformats.org/drawingml/2006/main">
             <a:pPr>
+              <a:buNone/>
               <a:defRPr sz="1500" b="0">
                 <a:solidFill>
                   <a:srgbClr val="FFFFFF"/>
@@ -7864,6 +7937,7 @@
           <a:lstStyle xmlns:a="http://schemas.openxmlformats.org/drawingml/2006/main"/>
           <a:p xmlns:a="http://schemas.openxmlformats.org/drawingml/2006/main">
             <a:pPr>
+              <a:buNone/>
               <a:defRPr sz="1500" b="0">
                 <a:solidFill>
                   <a:srgbClr val="FFFFFF"/>
@@ -7921,6 +7995,7 @@
           <a:lstStyle xmlns:a="http://schemas.openxmlformats.org/drawingml/2006/main"/>
           <a:p xmlns:a="http://schemas.openxmlformats.org/drawingml/2006/main">
             <a:pPr>
+              <a:buNone/>
               <a:defRPr sz="1500" b="0">
                 <a:solidFill>
                   <a:srgbClr val="FFFFFF"/>
@@ -7978,6 +8053,7 @@
           <a:lstStyle xmlns:a="http://schemas.openxmlformats.org/drawingml/2006/main"/>
           <a:p xmlns:a="http://schemas.openxmlformats.org/drawingml/2006/main">
             <a:pPr>
+              <a:buNone/>
               <a:defRPr sz="1350" b="1">
                 <a:solidFill>
                   <a:srgbClr val="FFB2AD"/>
@@ -8937,7 +9013,7 @@
       </p:sp>
       <p:cxnSp>
         <p:nvCxnSpPr>
-          <p:cNvPr id="77" name=""/>
+          <p:cNvPr id="105" name=""/>
           <p:cNvCxnSpPr>
             <a:stCxn xmlns:a="http://schemas.openxmlformats.org/drawingml/2006/main" id="5" idx="3"/>
             <a:endCxn xmlns:a="http://schemas.openxmlformats.org/drawingml/2006/main" id="8" idx="1"/>
@@ -8963,7 +9039,7 @@
       </p:cxnSp>
       <p:cxnSp>
         <p:nvCxnSpPr>
-          <p:cNvPr id="78" name=""/>
+          <p:cNvPr id="106" name=""/>
           <p:cNvCxnSpPr>
             <a:stCxn xmlns:a="http://schemas.openxmlformats.org/drawingml/2006/main" id="8" idx="3"/>
             <a:endCxn xmlns:a="http://schemas.openxmlformats.org/drawingml/2006/main" id="11" idx="1"/>
@@ -9291,7 +9367,7 @@
       </p:sp>
       <p:cxnSp>
         <p:nvCxnSpPr>
-          <p:cNvPr id="85" name=""/>
+          <p:cNvPr id="113" name=""/>
           <p:cNvCxnSpPr>
             <a:stCxn xmlns:a="http://schemas.openxmlformats.org/drawingml/2006/main" id="11" idx="3"/>
             <a:endCxn xmlns:a="http://schemas.openxmlformats.org/drawingml/2006/main" id="19" idx="1"/>
@@ -9319,7 +9395,7 @@
       </p:cxnSp>
       <p:cxnSp>
         <p:nvCxnSpPr>
-          <p:cNvPr id="86" name=""/>
+          <p:cNvPr id="114" name=""/>
           <p:cNvCxnSpPr>
             <a:stCxn xmlns:a="http://schemas.openxmlformats.org/drawingml/2006/main" id="11" idx="3"/>
             <a:endCxn xmlns:a="http://schemas.openxmlformats.org/drawingml/2006/main" id="22" idx="1"/>
@@ -9347,7 +9423,7 @@
       </p:cxnSp>
       <p:cxnSp>
         <p:nvCxnSpPr>
-          <p:cNvPr id="87" name=""/>
+          <p:cNvPr id="115" name=""/>
           <p:cNvCxnSpPr>
             <a:stCxn xmlns:a="http://schemas.openxmlformats.org/drawingml/2006/main" id="19" idx="3"/>
             <a:endCxn xmlns:a="http://schemas.openxmlformats.org/drawingml/2006/main" id="14" idx="1"/>
@@ -9375,7 +9451,7 @@
       </p:cxnSp>
       <p:cxnSp>
         <p:nvCxnSpPr>
-          <p:cNvPr id="88" name=""/>
+          <p:cNvPr id="116" name=""/>
           <p:cNvCxnSpPr>
             <a:stCxn xmlns:a="http://schemas.openxmlformats.org/drawingml/2006/main" id="22" idx="3"/>
             <a:endCxn xmlns:a="http://schemas.openxmlformats.org/drawingml/2006/main" id="14" idx="1"/>
@@ -13097,7 +13173,7 @@
         </p:xfrm>
         <a:graphic xmlns:a="http://schemas.openxmlformats.org/drawingml/2006/main">
           <a:graphicData uri="http://schemas.openxmlformats.org/drawingml/2006/chart">
-            <c:chart xmlns:r="http://schemas.openxmlformats.org/officeDocument/2006/relationships" xmlns:c="http://schemas.openxmlformats.org/drawingml/2006/chart" r:id="R2cbf2435e81a47e8"/>
+            <c:chart xmlns:r="http://schemas.openxmlformats.org/officeDocument/2006/relationships" xmlns:c="http://schemas.openxmlformats.org/drawingml/2006/chart" r:id="R6509374e6cf8403e"/>
           </a:graphicData>
         </a:graphic>
       </p:graphicFrame>
@@ -13636,7 +13712,7 @@
         </p:xfrm>
         <a:graphic xmlns:a="http://schemas.openxmlformats.org/drawingml/2006/main">
           <a:graphicData uri="http://schemas.openxmlformats.org/drawingml/2006/chart">
-            <c:chart xmlns:r="http://schemas.openxmlformats.org/officeDocument/2006/relationships" xmlns:c="http://schemas.openxmlformats.org/drawingml/2006/chart" r:id="Rb68741c477624411"/>
+            <c:chart xmlns:r="http://schemas.openxmlformats.org/officeDocument/2006/relationships" xmlns:c="http://schemas.openxmlformats.org/drawingml/2006/chart" r:id="Rc5ff4da18d6e459e"/>
           </a:graphicData>
         </a:graphic>
       </p:graphicFrame>
@@ -14685,7 +14761,7 @@
           <p:nvPr/>
         </p:nvPicPr>
         <p:blipFill>
-          <a:blip xmlns:r="http://schemas.openxmlformats.org/officeDocument/2006/relationships" xmlns:a="http://schemas.openxmlformats.org/drawingml/2006/main" r:embed="Rdcb4f52218984020"/>
+          <a:blip xmlns:r="http://schemas.openxmlformats.org/officeDocument/2006/relationships" xmlns:a="http://schemas.openxmlformats.org/drawingml/2006/main" r:embed="R4a4c39dbe5d84d6e"/>
           <a:stretch xmlns:a="http://schemas.openxmlformats.org/drawingml/2006/main"/>
         </p:blipFill>
         <p:spPr>
@@ -14707,7 +14783,7 @@
           <p:nvPr/>
         </p:nvPicPr>
         <p:blipFill>
-          <a:blip xmlns:r="http://schemas.openxmlformats.org/officeDocument/2006/relationships" xmlns:a="http://schemas.openxmlformats.org/drawingml/2006/main" r:embed="Rc6cf28c9ff6e4132"/>
+          <a:blip xmlns:r="http://schemas.openxmlformats.org/officeDocument/2006/relationships" xmlns:a="http://schemas.openxmlformats.org/drawingml/2006/main" r:embed="R06668653d4bb4bcf"/>
           <a:stretch xmlns:a="http://schemas.openxmlformats.org/drawingml/2006/main"/>
         </p:blipFill>
         <p:spPr>
@@ -16701,6 +16777,7 @@
           <a:lstStyle xmlns:a="http://schemas.openxmlformats.org/drawingml/2006/main"/>
           <a:p xmlns:a="http://schemas.openxmlformats.org/drawingml/2006/main">
             <a:pPr>
+              <a:buNone/>
               <a:defRPr sz="1125" b="1">
                 <a:solidFill>
                   <a:srgbClr val="2FA6A4"/>
@@ -16758,6 +16835,7 @@
           <a:lstStyle xmlns:a="http://schemas.openxmlformats.org/drawingml/2006/main"/>
           <a:p xmlns:a="http://schemas.openxmlformats.org/drawingml/2006/main">
             <a:pPr>
+              <a:buNone/>
               <a:defRPr sz="2700" b="1">
                 <a:solidFill>
                   <a:srgbClr val="193650"/>
@@ -16845,6 +16923,7 @@
           <a:lstStyle xmlns:a="http://schemas.openxmlformats.org/drawingml/2006/main"/>
           <a:p xmlns:a="http://schemas.openxmlformats.org/drawingml/2006/main">
             <a:pPr>
+              <a:buNone/>
               <a:defRPr sz="1350" b="1">
                 <a:solidFill>
                   <a:srgbClr val="2FA6A4"/>
@@ -16902,6 +16981,7 @@
           <a:lstStyle xmlns:a="http://schemas.openxmlformats.org/drawingml/2006/main"/>
           <a:p xmlns:a="http://schemas.openxmlformats.org/drawingml/2006/main">
             <a:pPr>
+              <a:buNone/>
               <a:defRPr sz="1725" b="1">
                 <a:solidFill>
                   <a:srgbClr val="287896"/>
@@ -16961,6 +17041,7 @@
           <a:lstStyle xmlns:a="http://schemas.openxmlformats.org/drawingml/2006/main"/>
           <a:p xmlns:a="http://schemas.openxmlformats.org/drawingml/2006/main">
             <a:pPr>
+              <a:buNone/>
               <a:defRPr sz="1575" b="0">
                 <a:solidFill>
                   <a:srgbClr val="FFFFFF"/>
@@ -16984,6 +17065,7 @@
           </a:p>
           <a:p xmlns:a="http://schemas.openxmlformats.org/drawingml/2006/main">
             <a:pPr>
+              <a:buNone/>
               <a:defRPr sz="1575" b="0">
                 <a:solidFill>
                   <a:srgbClr val="FFFFFF"/>
@@ -17007,6 +17089,7 @@
           </a:p>
           <a:p xmlns:a="http://schemas.openxmlformats.org/drawingml/2006/main">
             <a:pPr>
+              <a:buNone/>
               <a:defRPr sz="1575" b="0">
                 <a:solidFill>
                   <a:srgbClr val="FFFFFF"/>
@@ -17068,6 +17151,7 @@
           <a:lstStyle xmlns:a="http://schemas.openxmlformats.org/drawingml/2006/main"/>
           <a:p xmlns:a="http://schemas.openxmlformats.org/drawingml/2006/main">
             <a:pPr>
+              <a:buNone/>
               <a:defRPr sz="1350" b="0">
                 <a:solidFill>
                   <a:srgbClr val="667784"/>
@@ -17127,6 +17211,7 @@
           <a:lstStyle xmlns:a="http://schemas.openxmlformats.org/drawingml/2006/main"/>
           <a:p xmlns:a="http://schemas.openxmlformats.org/drawingml/2006/main">
             <a:pPr>
+              <a:buNone/>
               <a:defRPr sz="1500" b="1">
                 <a:solidFill>
                   <a:srgbClr val="FFFFFF"/>
@@ -17184,6 +17269,7 @@
           <a:lstStyle xmlns:a="http://schemas.openxmlformats.org/drawingml/2006/main"/>
           <a:p xmlns:a="http://schemas.openxmlformats.org/drawingml/2006/main">
             <a:pPr>
+              <a:buNone/>
               <a:defRPr sz="1575" b="1">
                 <a:solidFill>
                   <a:srgbClr val="193650"/>
@@ -17241,6 +17327,7 @@
           <a:lstStyle xmlns:a="http://schemas.openxmlformats.org/drawingml/2006/main"/>
           <a:p xmlns:a="http://schemas.openxmlformats.org/drawingml/2006/main">
             <a:pPr>
+              <a:buNone/>
               <a:defRPr sz="1200" b="0">
                 <a:solidFill>
                   <a:srgbClr val="667784"/>
@@ -17300,6 +17387,7 @@
           <a:lstStyle xmlns:a="http://schemas.openxmlformats.org/drawingml/2006/main"/>
           <a:p xmlns:a="http://schemas.openxmlformats.org/drawingml/2006/main">
             <a:pPr>
+              <a:buNone/>
               <a:defRPr sz="1500" b="1">
                 <a:solidFill>
                   <a:srgbClr val="FFFFFF"/>
@@ -17357,6 +17445,7 @@
           <a:lstStyle xmlns:a="http://schemas.openxmlformats.org/drawingml/2006/main"/>
           <a:p xmlns:a="http://schemas.openxmlformats.org/drawingml/2006/main">
             <a:pPr>
+              <a:buNone/>
               <a:defRPr sz="1575" b="1">
                 <a:solidFill>
                   <a:srgbClr val="193650"/>
@@ -17414,6 +17503,7 @@
           <a:lstStyle xmlns:a="http://schemas.openxmlformats.org/drawingml/2006/main"/>
           <a:p xmlns:a="http://schemas.openxmlformats.org/drawingml/2006/main">
             <a:pPr>
+              <a:buNone/>
               <a:defRPr sz="1200" b="0">
                 <a:solidFill>
                   <a:srgbClr val="667784"/>
@@ -17473,6 +17563,7 @@
           <a:lstStyle xmlns:a="http://schemas.openxmlformats.org/drawingml/2006/main"/>
           <a:p xmlns:a="http://schemas.openxmlformats.org/drawingml/2006/main">
             <a:pPr>
+              <a:buNone/>
               <a:defRPr sz="1500" b="1">
                 <a:solidFill>
                   <a:srgbClr val="FFFFFF"/>
@@ -17530,6 +17621,7 @@
           <a:lstStyle xmlns:a="http://schemas.openxmlformats.org/drawingml/2006/main"/>
           <a:p xmlns:a="http://schemas.openxmlformats.org/drawingml/2006/main">
             <a:pPr>
+              <a:buNone/>
               <a:defRPr sz="1575" b="1">
                 <a:solidFill>
                   <a:srgbClr val="193650"/>
@@ -17587,6 +17679,7 @@
           <a:lstStyle xmlns:a="http://schemas.openxmlformats.org/drawingml/2006/main"/>
           <a:p xmlns:a="http://schemas.openxmlformats.org/drawingml/2006/main">
             <a:pPr>
+              <a:buNone/>
               <a:defRPr sz="1200" b="0">
                 <a:solidFill>
                   <a:srgbClr val="667784"/>
@@ -17646,6 +17739,7 @@
           <a:lstStyle xmlns:a="http://schemas.openxmlformats.org/drawingml/2006/main"/>
           <a:p xmlns:a="http://schemas.openxmlformats.org/drawingml/2006/main">
             <a:pPr>
+              <a:buNone/>
               <a:defRPr sz="1500" b="1">
                 <a:solidFill>
                   <a:srgbClr val="FFFFFF"/>
@@ -17703,6 +17797,7 @@
           <a:lstStyle xmlns:a="http://schemas.openxmlformats.org/drawingml/2006/main"/>
           <a:p xmlns:a="http://schemas.openxmlformats.org/drawingml/2006/main">
             <a:pPr>
+              <a:buNone/>
               <a:defRPr sz="1575" b="1">
                 <a:solidFill>
                   <a:srgbClr val="193650"/>
@@ -17760,6 +17855,7 @@
           <a:lstStyle xmlns:a="http://schemas.openxmlformats.org/drawingml/2006/main"/>
           <a:p xmlns:a="http://schemas.openxmlformats.org/drawingml/2006/main">
             <a:pPr>
+              <a:buNone/>
               <a:defRPr sz="1200" b="0">
                 <a:solidFill>
                   <a:srgbClr val="667784"/>
@@ -17819,6 +17915,7 @@
           <a:lstStyle xmlns:a="http://schemas.openxmlformats.org/drawingml/2006/main"/>
           <a:p xmlns:a="http://schemas.openxmlformats.org/drawingml/2006/main">
             <a:pPr>
+              <a:buNone/>
               <a:defRPr sz="1500" b="1">
                 <a:solidFill>
                   <a:srgbClr val="FFFFFF"/>
@@ -17876,6 +17973,7 @@
           <a:lstStyle xmlns:a="http://schemas.openxmlformats.org/drawingml/2006/main"/>
           <a:p xmlns:a="http://schemas.openxmlformats.org/drawingml/2006/main">
             <a:pPr>
+              <a:buNone/>
               <a:defRPr sz="1575" b="1">
                 <a:solidFill>
                   <a:srgbClr val="193650"/>
@@ -17933,6 +18031,7 @@
           <a:lstStyle xmlns:a="http://schemas.openxmlformats.org/drawingml/2006/main"/>
           <a:p xmlns:a="http://schemas.openxmlformats.org/drawingml/2006/main">
             <a:pPr>
+              <a:buNone/>
               <a:defRPr sz="1200" b="0">
                 <a:solidFill>
                   <a:srgbClr val="667784"/>
@@ -17990,6 +18089,7 @@
           <a:lstStyle xmlns:a="http://schemas.openxmlformats.org/drawingml/2006/main"/>
           <a:p xmlns:a="http://schemas.openxmlformats.org/drawingml/2006/main">
             <a:pPr>
+              <a:buNone/>
               <a:defRPr sz="825" b="0">
                 <a:solidFill>
                   <a:srgbClr val="667784"/>
